--- a/Introduccion a la Ingenieria/Clases/Clase 7 - Ciclo de vida de los proyectos de ingenieria/Presentacion.pptx
+++ b/Introduccion a la Ingenieria/Clases/Clase 7 - Ciclo de vida de los proyectos de ingenieria/Presentacion.pptx
@@ -18,6 +18,16 @@
     <p:sldId id="266" r:id="rId17"/>
     <p:sldId id="267" r:id="rId18"/>
     <p:sldId id="268" r:id="rId19"/>
+    <p:sldId id="269" r:id="rId20"/>
+    <p:sldId id="270" r:id="rId21"/>
+    <p:sldId id="271" r:id="rId22"/>
+    <p:sldId id="272" r:id="rId23"/>
+    <p:sldId id="273" r:id="rId24"/>
+    <p:sldId id="274" r:id="rId25"/>
+    <p:sldId id="275" r:id="rId26"/>
+    <p:sldId id="276" r:id="rId27"/>
+    <p:sldId id="277" r:id="rId28"/>
+    <p:sldId id="278" r:id="rId29"/>
   </p:sldIdLst>
   <p:sldSz cx="12191695" cy="6858000" type="screen4x3"/>
   <p:notesSz cx="6858000" cy="9144000"/>
@@ -3512,7 +3522,7 @@
         <p:spPr>
           <a:xfrm>
             <a:off x="0" y="0"/>
-            <a:ext cx="12191695" cy="1170432"/>
+            <a:ext cx="12191695" cy="960120"/>
           </a:xfrm>
           <a:prstGeom prst="rect">
             <a:avLst/>
@@ -3554,7 +3564,7 @@
         </p:nvSpPr>
         <p:spPr>
           <a:xfrm>
-            <a:off x="0" y="1170432"/>
+            <a:off x="0" y="960120"/>
             <a:ext cx="12191695" cy="41148"/>
           </a:xfrm>
           <a:prstGeom prst="rect">
@@ -3598,7 +3608,7 @@
         <p:spPr>
           <a:xfrm>
             <a:off x="457200" y="164592"/>
-            <a:ext cx="11277295" cy="384048"/>
+            <a:ext cx="11277295" cy="502920"/>
           </a:xfrm>
           <a:prstGeom prst="rect">
             <a:avLst/>
@@ -3618,7 +3628,7 @@
                 </a:solidFill>
                 <a:latin typeface="Calibri"/>
               </a:rPr>
-              <a:t>Taller de hoy: Ciclo de vida del proyecto</a:t>
+              <a:t>La pregunta de entrada: la curva del costo del cambio</a:t>
             </a:r>
           </a:p>
         </p:txBody>
@@ -3631,8 +3641,8 @@
         </p:nvSpPr>
         <p:spPr>
           <a:xfrm>
-            <a:off x="457200" y="566928"/>
-            <a:ext cx="11277295" cy="411480"/>
+            <a:off x="457200" y="1170432"/>
+            <a:ext cx="11277295" cy="5230368"/>
           </a:xfrm>
           <a:prstGeom prst="rect">
             <a:avLst/>
@@ -3645,963 +3655,156 @@
           </a:bodyPr>
           <a:lstStyle/>
           <a:p>
-            <a:r>
-              <a:rPr sz="1400" b="0" i="0">
-                <a:solidFill>
-                  <a:srgbClr val="B8D8EE"/>
-                </a:solidFill>
-                <a:latin typeface="Calibri"/>
-              </a:rPr>
-              <a:t>17 min en equipos · cada equipo, su propio proyecto · mapa del ciclo de vida + tabla de requisitos + plan de hitos</a:t>
-            </a:r>
-          </a:p>
-        </p:txBody>
-      </p:sp>
-      <p:sp>
-        <p:nvSpPr>
-          <p:cNvPr id="6" name="Rounded Rectangle 5"/>
-          <p:cNvSpPr/>
-          <p:nvPr/>
-        </p:nvSpPr>
-        <p:spPr>
-          <a:xfrm>
-            <a:off x="457200" y="1472184"/>
-            <a:ext cx="11277295" cy="566928"/>
-          </a:xfrm>
-          <a:prstGeom prst="roundRect">
-            <a:avLst>
-              <a:gd name="adj" fmla="val 12000"/>
-            </a:avLst>
-          </a:prstGeom>
-          <a:solidFill>
-            <a:srgbClr val="F2F2F2"/>
-          </a:solidFill>
-          <a:ln>
-            <a:noFill/>
-          </a:ln>
-        </p:spPr>
-        <p:style>
-          <a:lnRef idx="1">
-            <a:schemeClr val="accent1"/>
-          </a:lnRef>
-          <a:fillRef idx="3">
-            <a:schemeClr val="accent1"/>
-          </a:fillRef>
-          <a:effectRef idx="2">
-            <a:schemeClr val="accent1"/>
-          </a:effectRef>
-          <a:fontRef idx="minor">
-            <a:schemeClr val="lt1"/>
-          </a:fontRef>
-        </p:style>
-        <p:txBody>
-          <a:bodyPr rtlCol="0" anchor="ctr"/>
-          <a:lstStyle/>
-          <a:p>
-            <a:pPr algn="ctr"/>
-          </a:p>
-        </p:txBody>
-      </p:sp>
-      <p:sp>
-        <p:nvSpPr>
-          <p:cNvPr id="7" name="Rectangle 6"/>
-          <p:cNvSpPr/>
-          <p:nvPr/>
-        </p:nvSpPr>
-        <p:spPr>
-          <a:xfrm>
-            <a:off x="640080" y="1618487"/>
-            <a:ext cx="274320" cy="274320"/>
-          </a:xfrm>
-          <a:prstGeom prst="rect">
-            <a:avLst/>
-          </a:prstGeom>
-          <a:solidFill>
-            <a:srgbClr val="FFFFFF"/>
-          </a:solidFill>
-          <a:ln>
-            <a:solidFill>
-              <a:srgbClr val="333333"/>
-            </a:solidFill>
-          </a:ln>
-        </p:spPr>
-        <p:style>
-          <a:lnRef idx="1">
-            <a:schemeClr val="accent1"/>
-          </a:lnRef>
-          <a:fillRef idx="3">
-            <a:schemeClr val="accent1"/>
-          </a:fillRef>
-          <a:effectRef idx="2">
-            <a:schemeClr val="accent1"/>
-          </a:effectRef>
-          <a:fontRef idx="minor">
-            <a:schemeClr val="lt1"/>
-          </a:fontRef>
-        </p:style>
-        <p:txBody>
-          <a:bodyPr rtlCol="0" anchor="ctr"/>
-          <a:lstStyle/>
-          <a:p>
-            <a:pPr algn="ctr"/>
-          </a:p>
-        </p:txBody>
-      </p:sp>
-      <p:sp>
-        <p:nvSpPr>
-          <p:cNvPr id="8" name="Rectangle 7"/>
-          <p:cNvSpPr/>
-          <p:nvPr/>
-        </p:nvSpPr>
-        <p:spPr>
-          <a:xfrm>
-            <a:off x="640080" y="1618487"/>
-            <a:ext cx="73152" cy="274320"/>
-          </a:xfrm>
-          <a:prstGeom prst="rect">
-            <a:avLst/>
-          </a:prstGeom>
-          <a:solidFill>
-            <a:srgbClr val="269CCB"/>
-          </a:solidFill>
-          <a:ln>
-            <a:noFill/>
-          </a:ln>
-        </p:spPr>
-        <p:style>
-          <a:lnRef idx="1">
-            <a:schemeClr val="accent1"/>
-          </a:lnRef>
-          <a:fillRef idx="3">
-            <a:schemeClr val="accent1"/>
-          </a:fillRef>
-          <a:effectRef idx="2">
-            <a:schemeClr val="accent1"/>
-          </a:effectRef>
-          <a:fontRef idx="minor">
-            <a:schemeClr val="lt1"/>
-          </a:fontRef>
-        </p:style>
-        <p:txBody>
-          <a:bodyPr rtlCol="0" anchor="ctr"/>
-          <a:lstStyle/>
-          <a:p>
-            <a:pPr algn="ctr"/>
-          </a:p>
-        </p:txBody>
-      </p:sp>
-      <p:sp>
-        <p:nvSpPr>
-          <p:cNvPr id="9" name="TextBox 8"/>
-          <p:cNvSpPr txBox="1"/>
-          <p:nvPr/>
-        </p:nvSpPr>
-        <p:spPr>
-          <a:xfrm>
-            <a:off x="1097280" y="1563624"/>
-            <a:ext cx="10362895" cy="402336"/>
-          </a:xfrm>
-          <a:prstGeom prst="rect">
-            <a:avLst/>
-          </a:prstGeom>
-          <a:noFill/>
-        </p:spPr>
-        <p:txBody>
-          <a:bodyPr wrap="square" anchor="ctr"/>
-          <a:lstStyle/>
-          <a:p>
-            <a:r>
-              <a:rPr sz="1500" b="1" i="0">
-                <a:solidFill>
-                  <a:srgbClr val="333333"/>
-                </a:solidFill>
-                <a:latin typeface="Calibri"/>
-              </a:rPr>
-              <a:t>EN QUÉ FASE ESTAMOS</a:t>
-            </a:r>
-            <a:r>
-              <a:rPr sz="1500" b="0" i="0">
-                <a:solidFill>
-                  <a:srgbClr val="333333"/>
-                </a:solidFill>
-                <a:latin typeface="Calibri"/>
-              </a:rPr>
-              <a:t> — La fase donde está el proyecto hoy, y </a:t>
-            </a:r>
-            <a:r>
-              <a:rPr sz="1500" b="1" i="0">
-                <a:solidFill>
-                  <a:srgbClr val="333333"/>
-                </a:solidFill>
-                <a:latin typeface="Calibri"/>
-              </a:rPr>
-              <a:t>qué falta exactamente para cerrarla</a:t>
-            </a:r>
-            <a:r>
-              <a:rPr sz="1500" b="0" i="0">
-                <a:solidFill>
-                  <a:srgbClr val="333333"/>
-                </a:solidFill>
-                <a:latin typeface="Calibri"/>
-              </a:rPr>
-              <a:t>. Una fase se cierra con un entregable, no con una sensación.</a:t>
-            </a:r>
-          </a:p>
-        </p:txBody>
-      </p:sp>
-      <p:sp>
-        <p:nvSpPr>
-          <p:cNvPr id="10" name="Rounded Rectangle 9"/>
-          <p:cNvSpPr/>
-          <p:nvPr/>
-        </p:nvSpPr>
-        <p:spPr>
-          <a:xfrm>
-            <a:off x="457200" y="2148839"/>
-            <a:ext cx="11277295" cy="566928"/>
-          </a:xfrm>
-          <a:prstGeom prst="roundRect">
-            <a:avLst>
-              <a:gd name="adj" fmla="val 12000"/>
-            </a:avLst>
-          </a:prstGeom>
-          <a:solidFill>
-            <a:srgbClr val="F2F2F2"/>
-          </a:solidFill>
-          <a:ln>
-            <a:noFill/>
-          </a:ln>
-        </p:spPr>
-        <p:style>
-          <a:lnRef idx="1">
-            <a:schemeClr val="accent1"/>
-          </a:lnRef>
-          <a:fillRef idx="3">
-            <a:schemeClr val="accent1"/>
-          </a:fillRef>
-          <a:effectRef idx="2">
-            <a:schemeClr val="accent1"/>
-          </a:effectRef>
-          <a:fontRef idx="minor">
-            <a:schemeClr val="lt1"/>
-          </a:fontRef>
-        </p:style>
-        <p:txBody>
-          <a:bodyPr rtlCol="0" anchor="ctr"/>
-          <a:lstStyle/>
-          <a:p>
-            <a:pPr algn="ctr"/>
-          </a:p>
-        </p:txBody>
-      </p:sp>
-      <p:sp>
-        <p:nvSpPr>
-          <p:cNvPr id="11" name="Rectangle 10"/>
-          <p:cNvSpPr/>
-          <p:nvPr/>
-        </p:nvSpPr>
-        <p:spPr>
-          <a:xfrm>
-            <a:off x="640080" y="2295144"/>
-            <a:ext cx="274320" cy="274320"/>
-          </a:xfrm>
-          <a:prstGeom prst="rect">
-            <a:avLst/>
-          </a:prstGeom>
-          <a:solidFill>
-            <a:srgbClr val="FFFFFF"/>
-          </a:solidFill>
-          <a:ln>
-            <a:solidFill>
-              <a:srgbClr val="333333"/>
-            </a:solidFill>
-          </a:ln>
-        </p:spPr>
-        <p:style>
-          <a:lnRef idx="1">
-            <a:schemeClr val="accent1"/>
-          </a:lnRef>
-          <a:fillRef idx="3">
-            <a:schemeClr val="accent1"/>
-          </a:fillRef>
-          <a:effectRef idx="2">
-            <a:schemeClr val="accent1"/>
-          </a:effectRef>
-          <a:fontRef idx="minor">
-            <a:schemeClr val="lt1"/>
-          </a:fontRef>
-        </p:style>
-        <p:txBody>
-          <a:bodyPr rtlCol="0" anchor="ctr"/>
-          <a:lstStyle/>
-          <a:p>
-            <a:pPr algn="ctr"/>
-          </a:p>
-        </p:txBody>
-      </p:sp>
-      <p:sp>
-        <p:nvSpPr>
-          <p:cNvPr id="12" name="Rectangle 11"/>
-          <p:cNvSpPr/>
-          <p:nvPr/>
-        </p:nvSpPr>
-        <p:spPr>
-          <a:xfrm>
-            <a:off x="640080" y="2295144"/>
-            <a:ext cx="73152" cy="274320"/>
-          </a:xfrm>
-          <a:prstGeom prst="rect">
-            <a:avLst/>
-          </a:prstGeom>
-          <a:solidFill>
-            <a:srgbClr val="269CCB"/>
-          </a:solidFill>
-          <a:ln>
-            <a:noFill/>
-          </a:ln>
-        </p:spPr>
-        <p:style>
-          <a:lnRef idx="1">
-            <a:schemeClr val="accent1"/>
-          </a:lnRef>
-          <a:fillRef idx="3">
-            <a:schemeClr val="accent1"/>
-          </a:fillRef>
-          <a:effectRef idx="2">
-            <a:schemeClr val="accent1"/>
-          </a:effectRef>
-          <a:fontRef idx="minor">
-            <a:schemeClr val="lt1"/>
-          </a:fontRef>
-        </p:style>
-        <p:txBody>
-          <a:bodyPr rtlCol="0" anchor="ctr"/>
-          <a:lstStyle/>
-          <a:p>
-            <a:pPr algn="ctr"/>
-          </a:p>
-        </p:txBody>
-      </p:sp>
-      <p:sp>
-        <p:nvSpPr>
-          <p:cNvPr id="13" name="TextBox 12"/>
-          <p:cNvSpPr txBox="1"/>
-          <p:nvPr/>
-        </p:nvSpPr>
-        <p:spPr>
-          <a:xfrm>
-            <a:off x="1097280" y="2240279"/>
-            <a:ext cx="10362895" cy="402336"/>
-          </a:xfrm>
-          <a:prstGeom prst="rect">
-            <a:avLst/>
-          </a:prstGeom>
-          <a:noFill/>
-        </p:spPr>
-        <p:txBody>
-          <a:bodyPr wrap="square" anchor="ctr"/>
-          <a:lstStyle/>
-          <a:p>
-            <a:r>
-              <a:rPr sz="1500" b="1" i="0">
-                <a:solidFill>
-                  <a:srgbClr val="333333"/>
-                </a:solidFill>
-                <a:latin typeface="Calibri"/>
-              </a:rPr>
-              <a:t>TRES REQUISITOS FUNCIONALES</a:t>
-            </a:r>
-            <a:r>
-              <a:rPr sz="1500" b="0" i="0">
-                <a:solidFill>
-                  <a:srgbClr val="333333"/>
-                </a:solidFill>
-                <a:latin typeface="Calibri"/>
-              </a:rPr>
-              <a:t> — Tres cosas que la solución </a:t>
-            </a:r>
-            <a:r>
-              <a:rPr sz="1500" b="1" i="0">
-                <a:solidFill>
-                  <a:srgbClr val="333333"/>
-                </a:solidFill>
-                <a:latin typeface="Calibri"/>
-              </a:rPr>
-              <a:t>hace</a:t>
-            </a:r>
-            <a:r>
-              <a:rPr sz="1500" b="0" i="0">
-                <a:solidFill>
-                  <a:srgbClr val="333333"/>
-                </a:solidFill>
-                <a:latin typeface="Calibri"/>
-              </a:rPr>
-              <a:t>, escritas desde el usuario: «el usuario puede…». Sin mencionar tecnología.</a:t>
-            </a:r>
-          </a:p>
-        </p:txBody>
-      </p:sp>
-      <p:sp>
-        <p:nvSpPr>
-          <p:cNvPr id="14" name="Rounded Rectangle 13"/>
-          <p:cNvSpPr/>
-          <p:nvPr/>
-        </p:nvSpPr>
-        <p:spPr>
-          <a:xfrm>
-            <a:off x="457200" y="2825496"/>
-            <a:ext cx="11277295" cy="566928"/>
-          </a:xfrm>
-          <a:prstGeom prst="roundRect">
-            <a:avLst>
-              <a:gd name="adj" fmla="val 12000"/>
-            </a:avLst>
-          </a:prstGeom>
-          <a:solidFill>
-            <a:srgbClr val="F2F2F2"/>
-          </a:solidFill>
-          <a:ln>
-            <a:noFill/>
-          </a:ln>
-        </p:spPr>
-        <p:style>
-          <a:lnRef idx="1">
-            <a:schemeClr val="accent1"/>
-          </a:lnRef>
-          <a:fillRef idx="3">
-            <a:schemeClr val="accent1"/>
-          </a:fillRef>
-          <a:effectRef idx="2">
-            <a:schemeClr val="accent1"/>
-          </a:effectRef>
-          <a:fontRef idx="minor">
-            <a:schemeClr val="lt1"/>
-          </a:fontRef>
-        </p:style>
-        <p:txBody>
-          <a:bodyPr rtlCol="0" anchor="ctr"/>
-          <a:lstStyle/>
-          <a:p>
-            <a:pPr algn="ctr"/>
-          </a:p>
-        </p:txBody>
-      </p:sp>
-      <p:sp>
-        <p:nvSpPr>
-          <p:cNvPr id="15" name="Rectangle 14"/>
-          <p:cNvSpPr/>
-          <p:nvPr/>
-        </p:nvSpPr>
-        <p:spPr>
-          <a:xfrm>
-            <a:off x="640080" y="2971800"/>
-            <a:ext cx="274320" cy="274320"/>
-          </a:xfrm>
-          <a:prstGeom prst="rect">
-            <a:avLst/>
-          </a:prstGeom>
-          <a:solidFill>
-            <a:srgbClr val="FFFFFF"/>
-          </a:solidFill>
-          <a:ln>
-            <a:solidFill>
-              <a:srgbClr val="333333"/>
-            </a:solidFill>
-          </a:ln>
-        </p:spPr>
-        <p:style>
-          <a:lnRef idx="1">
-            <a:schemeClr val="accent1"/>
-          </a:lnRef>
-          <a:fillRef idx="3">
-            <a:schemeClr val="accent1"/>
-          </a:fillRef>
-          <a:effectRef idx="2">
-            <a:schemeClr val="accent1"/>
-          </a:effectRef>
-          <a:fontRef idx="minor">
-            <a:schemeClr val="lt1"/>
-          </a:fontRef>
-        </p:style>
-        <p:txBody>
-          <a:bodyPr rtlCol="0" anchor="ctr"/>
-          <a:lstStyle/>
-          <a:p>
-            <a:pPr algn="ctr"/>
-          </a:p>
-        </p:txBody>
-      </p:sp>
-      <p:sp>
-        <p:nvSpPr>
-          <p:cNvPr id="16" name="Rectangle 15"/>
-          <p:cNvSpPr/>
-          <p:nvPr/>
-        </p:nvSpPr>
-        <p:spPr>
-          <a:xfrm>
-            <a:off x="640080" y="2971800"/>
-            <a:ext cx="73152" cy="274320"/>
-          </a:xfrm>
-          <a:prstGeom prst="rect">
-            <a:avLst/>
-          </a:prstGeom>
-          <a:solidFill>
-            <a:srgbClr val="269CCB"/>
-          </a:solidFill>
-          <a:ln>
-            <a:noFill/>
-          </a:ln>
-        </p:spPr>
-        <p:style>
-          <a:lnRef idx="1">
-            <a:schemeClr val="accent1"/>
-          </a:lnRef>
-          <a:fillRef idx="3">
-            <a:schemeClr val="accent1"/>
-          </a:fillRef>
-          <a:effectRef idx="2">
-            <a:schemeClr val="accent1"/>
-          </a:effectRef>
-          <a:fontRef idx="minor">
-            <a:schemeClr val="lt1"/>
-          </a:fontRef>
-        </p:style>
-        <p:txBody>
-          <a:bodyPr rtlCol="0" anchor="ctr"/>
-          <a:lstStyle/>
-          <a:p>
-            <a:pPr algn="ctr"/>
-          </a:p>
-        </p:txBody>
-      </p:sp>
-      <p:sp>
-        <p:nvSpPr>
-          <p:cNvPr id="17" name="TextBox 16"/>
-          <p:cNvSpPr txBox="1"/>
-          <p:nvPr/>
-        </p:nvSpPr>
-        <p:spPr>
-          <a:xfrm>
-            <a:off x="1097280" y="2916936"/>
-            <a:ext cx="10362895" cy="402336"/>
-          </a:xfrm>
-          <a:prstGeom prst="rect">
-            <a:avLst/>
-          </a:prstGeom>
-          <a:noFill/>
-        </p:spPr>
-        <p:txBody>
-          <a:bodyPr wrap="square" anchor="ctr"/>
-          <a:lstStyle/>
-          <a:p>
-            <a:r>
-              <a:rPr sz="1500" b="1" i="0">
-                <a:solidFill>
-                  <a:srgbClr val="333333"/>
-                </a:solidFill>
-                <a:latin typeface="Calibri"/>
-              </a:rPr>
-              <a:t>DOS REQUISITOS NO FUNCIONALES</a:t>
-            </a:r>
-            <a:r>
-              <a:rPr sz="1500" b="0" i="0">
-                <a:solidFill>
-                  <a:srgbClr val="333333"/>
-                </a:solidFill>
-                <a:latin typeface="Calibri"/>
-              </a:rPr>
-              <a:t> — Dos condiciones que la solución debe cumplir, </a:t>
-            </a:r>
-            <a:r>
-              <a:rPr sz="1500" b="1" i="0">
-                <a:solidFill>
-                  <a:srgbClr val="333333"/>
-                </a:solidFill>
-                <a:latin typeface="Calibri"/>
-              </a:rPr>
-              <a:t>derivadas de las restricciones del árbol de la sesión 6</a:t>
-            </a:r>
-            <a:r>
-              <a:rPr sz="1500" b="0" i="0">
-                <a:solidFill>
-                  <a:srgbClr val="333333"/>
-                </a:solidFill>
-                <a:latin typeface="Calibri"/>
-              </a:rPr>
-              <a:t>. Uno de los dos tiene que ser el indicador ambiental de la sesión 5.</a:t>
-            </a:r>
-          </a:p>
-        </p:txBody>
-      </p:sp>
-      <p:sp>
-        <p:nvSpPr>
-          <p:cNvPr id="18" name="Rounded Rectangle 17"/>
-          <p:cNvSpPr/>
-          <p:nvPr/>
-        </p:nvSpPr>
-        <p:spPr>
-          <a:xfrm>
-            <a:off x="457200" y="3502152"/>
-            <a:ext cx="11277295" cy="566928"/>
-          </a:xfrm>
-          <a:prstGeom prst="roundRect">
-            <a:avLst>
-              <a:gd name="adj" fmla="val 12000"/>
-            </a:avLst>
-          </a:prstGeom>
-          <a:solidFill>
-            <a:srgbClr val="F2F2F2"/>
-          </a:solidFill>
-          <a:ln>
-            <a:noFill/>
-          </a:ln>
-        </p:spPr>
-        <p:style>
-          <a:lnRef idx="1">
-            <a:schemeClr val="accent1"/>
-          </a:lnRef>
-          <a:fillRef idx="3">
-            <a:schemeClr val="accent1"/>
-          </a:fillRef>
-          <a:effectRef idx="2">
-            <a:schemeClr val="accent1"/>
-          </a:effectRef>
-          <a:fontRef idx="minor">
-            <a:schemeClr val="lt1"/>
-          </a:fontRef>
-        </p:style>
-        <p:txBody>
-          <a:bodyPr rtlCol="0" anchor="ctr"/>
-          <a:lstStyle/>
-          <a:p>
-            <a:pPr algn="ctr"/>
-          </a:p>
-        </p:txBody>
-      </p:sp>
-      <p:sp>
-        <p:nvSpPr>
-          <p:cNvPr id="19" name="Rectangle 18"/>
-          <p:cNvSpPr/>
-          <p:nvPr/>
-        </p:nvSpPr>
-        <p:spPr>
-          <a:xfrm>
-            <a:off x="640080" y="3648456"/>
-            <a:ext cx="274320" cy="274320"/>
-          </a:xfrm>
-          <a:prstGeom prst="rect">
-            <a:avLst/>
-          </a:prstGeom>
-          <a:solidFill>
-            <a:srgbClr val="FFFFFF"/>
-          </a:solidFill>
-          <a:ln>
-            <a:solidFill>
-              <a:srgbClr val="333333"/>
-            </a:solidFill>
-          </a:ln>
-        </p:spPr>
-        <p:style>
-          <a:lnRef idx="1">
-            <a:schemeClr val="accent1"/>
-          </a:lnRef>
-          <a:fillRef idx="3">
-            <a:schemeClr val="accent1"/>
-          </a:fillRef>
-          <a:effectRef idx="2">
-            <a:schemeClr val="accent1"/>
-          </a:effectRef>
-          <a:fontRef idx="minor">
-            <a:schemeClr val="lt1"/>
-          </a:fontRef>
-        </p:style>
-        <p:txBody>
-          <a:bodyPr rtlCol="0" anchor="ctr"/>
-          <a:lstStyle/>
-          <a:p>
-            <a:pPr algn="ctr"/>
-          </a:p>
-        </p:txBody>
-      </p:sp>
-      <p:sp>
-        <p:nvSpPr>
-          <p:cNvPr id="20" name="Rectangle 19"/>
-          <p:cNvSpPr/>
-          <p:nvPr/>
-        </p:nvSpPr>
-        <p:spPr>
-          <a:xfrm>
-            <a:off x="640080" y="3648456"/>
-            <a:ext cx="73152" cy="274320"/>
-          </a:xfrm>
-          <a:prstGeom prst="rect">
-            <a:avLst/>
-          </a:prstGeom>
-          <a:solidFill>
-            <a:srgbClr val="269CCB"/>
-          </a:solidFill>
-          <a:ln>
-            <a:noFill/>
-          </a:ln>
-        </p:spPr>
-        <p:style>
-          <a:lnRef idx="1">
-            <a:schemeClr val="accent1"/>
-          </a:lnRef>
-          <a:fillRef idx="3">
-            <a:schemeClr val="accent1"/>
-          </a:fillRef>
-          <a:effectRef idx="2">
-            <a:schemeClr val="accent1"/>
-          </a:effectRef>
-          <a:fontRef idx="minor">
-            <a:schemeClr val="lt1"/>
-          </a:fontRef>
-        </p:style>
-        <p:txBody>
-          <a:bodyPr rtlCol="0" anchor="ctr"/>
-          <a:lstStyle/>
-          <a:p>
-            <a:pPr algn="ctr"/>
-          </a:p>
-        </p:txBody>
-      </p:sp>
-      <p:sp>
-        <p:nvSpPr>
-          <p:cNvPr id="21" name="TextBox 20"/>
-          <p:cNvSpPr txBox="1"/>
-          <p:nvPr/>
-        </p:nvSpPr>
-        <p:spPr>
-          <a:xfrm>
-            <a:off x="1097280" y="3593592"/>
-            <a:ext cx="10362895" cy="402336"/>
-          </a:xfrm>
-          <a:prstGeom prst="rect">
-            <a:avLst/>
-          </a:prstGeom>
-          <a:noFill/>
-        </p:spPr>
-        <p:txBody>
-          <a:bodyPr wrap="square" anchor="ctr"/>
-          <a:lstStyle/>
-          <a:p>
-            <a:r>
-              <a:rPr sz="1500" b="1" i="0">
-                <a:solidFill>
-                  <a:srgbClr val="333333"/>
-                </a:solidFill>
-                <a:latin typeface="Calibri"/>
-              </a:rPr>
-              <a:t>LOS CRITERIOS DE ACEPTACIÓN</a:t>
-            </a:r>
-            <a:r>
-              <a:rPr sz="1500" b="0" i="0">
-                <a:solidFill>
-                  <a:srgbClr val="333333"/>
-                </a:solidFill>
-                <a:latin typeface="Calibri"/>
-              </a:rPr>
-              <a:t> — Para cada uno de los cinco requisitos: cómo se comprueba, con un caso concreto y un umbral. Tiene que poder ejecutarlo otra persona.</a:t>
-            </a:r>
-          </a:p>
-        </p:txBody>
-      </p:sp>
-      <p:sp>
-        <p:nvSpPr>
-          <p:cNvPr id="22" name="Rounded Rectangle 21"/>
-          <p:cNvSpPr/>
-          <p:nvPr/>
-        </p:nvSpPr>
-        <p:spPr>
-          <a:xfrm>
-            <a:off x="457200" y="4178808"/>
-            <a:ext cx="11277295" cy="566928"/>
-          </a:xfrm>
-          <a:prstGeom prst="roundRect">
-            <a:avLst>
-              <a:gd name="adj" fmla="val 12000"/>
-            </a:avLst>
-          </a:prstGeom>
-          <a:solidFill>
-            <a:srgbClr val="F2F2F2"/>
-          </a:solidFill>
-          <a:ln>
-            <a:noFill/>
-          </a:ln>
-        </p:spPr>
-        <p:style>
-          <a:lnRef idx="1">
-            <a:schemeClr val="accent1"/>
-          </a:lnRef>
-          <a:fillRef idx="3">
-            <a:schemeClr val="accent1"/>
-          </a:fillRef>
-          <a:effectRef idx="2">
-            <a:schemeClr val="accent1"/>
-          </a:effectRef>
-          <a:fontRef idx="minor">
-            <a:schemeClr val="lt1"/>
-          </a:fontRef>
-        </p:style>
-        <p:txBody>
-          <a:bodyPr rtlCol="0" anchor="ctr"/>
-          <a:lstStyle/>
-          <a:p>
-            <a:pPr algn="ctr"/>
-          </a:p>
-        </p:txBody>
-      </p:sp>
-      <p:sp>
-        <p:nvSpPr>
-          <p:cNvPr id="23" name="Rectangle 22"/>
-          <p:cNvSpPr/>
-          <p:nvPr/>
-        </p:nvSpPr>
-        <p:spPr>
-          <a:xfrm>
-            <a:off x="640080" y="4325112"/>
-            <a:ext cx="274320" cy="274320"/>
-          </a:xfrm>
-          <a:prstGeom prst="rect">
-            <a:avLst/>
-          </a:prstGeom>
-          <a:solidFill>
-            <a:srgbClr val="FFFFFF"/>
-          </a:solidFill>
-          <a:ln>
-            <a:solidFill>
-              <a:srgbClr val="333333"/>
-            </a:solidFill>
-          </a:ln>
-        </p:spPr>
-        <p:style>
-          <a:lnRef idx="1">
-            <a:schemeClr val="accent1"/>
-          </a:lnRef>
-          <a:fillRef idx="3">
-            <a:schemeClr val="accent1"/>
-          </a:fillRef>
-          <a:effectRef idx="2">
-            <a:schemeClr val="accent1"/>
-          </a:effectRef>
-          <a:fontRef idx="minor">
-            <a:schemeClr val="lt1"/>
-          </a:fontRef>
-        </p:style>
-        <p:txBody>
-          <a:bodyPr rtlCol="0" anchor="ctr"/>
-          <a:lstStyle/>
-          <a:p>
-            <a:pPr algn="ctr"/>
-          </a:p>
-        </p:txBody>
-      </p:sp>
-      <p:sp>
-        <p:nvSpPr>
-          <p:cNvPr id="24" name="Rectangle 23"/>
-          <p:cNvSpPr/>
-          <p:nvPr/>
-        </p:nvSpPr>
-        <p:spPr>
-          <a:xfrm>
-            <a:off x="640080" y="4325112"/>
-            <a:ext cx="73152" cy="274320"/>
-          </a:xfrm>
-          <a:prstGeom prst="rect">
-            <a:avLst/>
-          </a:prstGeom>
-          <a:solidFill>
-            <a:srgbClr val="269CCB"/>
-          </a:solidFill>
-          <a:ln>
-            <a:noFill/>
-          </a:ln>
-        </p:spPr>
-        <p:style>
-          <a:lnRef idx="1">
-            <a:schemeClr val="accent1"/>
-          </a:lnRef>
-          <a:fillRef idx="3">
-            <a:schemeClr val="accent1"/>
-          </a:fillRef>
-          <a:effectRef idx="2">
-            <a:schemeClr val="accent1"/>
-          </a:effectRef>
-          <a:fontRef idx="minor">
-            <a:schemeClr val="lt1"/>
-          </a:fontRef>
-        </p:style>
-        <p:txBody>
-          <a:bodyPr rtlCol="0" anchor="ctr"/>
-          <a:lstStyle/>
-          <a:p>
-            <a:pPr algn="ctr"/>
-          </a:p>
-        </p:txBody>
-      </p:sp>
-      <p:sp>
-        <p:nvSpPr>
-          <p:cNvPr id="25" name="TextBox 24"/>
-          <p:cNvSpPr txBox="1"/>
-          <p:nvPr/>
-        </p:nvSpPr>
-        <p:spPr>
-          <a:xfrm>
-            <a:off x="1097280" y="4270248"/>
-            <a:ext cx="10362895" cy="402336"/>
-          </a:xfrm>
-          <a:prstGeom prst="rect">
-            <a:avLst/>
-          </a:prstGeom>
-          <a:noFill/>
-        </p:spPr>
-        <p:txBody>
-          <a:bodyPr wrap="square" anchor="ctr"/>
-          <a:lstStyle/>
-          <a:p>
-            <a:r>
-              <a:rPr sz="1500" b="1" i="0">
-                <a:solidFill>
-                  <a:srgbClr val="333333"/>
-                </a:solidFill>
-                <a:latin typeface="Calibri"/>
-              </a:rPr>
-              <a:t>EL PLAN DE HITOS</a:t>
-            </a:r>
-            <a:r>
-              <a:rPr sz="1500" b="0" i="0">
-                <a:solidFill>
-                  <a:srgbClr val="333333"/>
-                </a:solidFill>
-                <a:latin typeface="Calibri"/>
-              </a:rPr>
-              <a:t> — Qué queda </a:t>
-            </a:r>
-            <a:r>
-              <a:rPr sz="1500" b="1" i="0">
-                <a:solidFill>
-                  <a:srgbClr val="333333"/>
-                </a:solidFill>
-                <a:latin typeface="Calibri"/>
-              </a:rPr>
-              <a:t>terminado y verificable</a:t>
-            </a:r>
-            <a:r>
-              <a:rPr sz="1500" b="0" i="0">
-                <a:solidFill>
-                  <a:srgbClr val="333333"/>
-                </a:solidFill>
-                <a:latin typeface="Calibri"/>
-              </a:rPr>
-              <a:t> en cada una de las sesiones 8, 9, 10, 11, 12 y 14. Y la decisión de hoy que sería carísima cambiar en la Clase 14.</a:t>
-            </a:r>
-          </a:p>
-        </p:txBody>
-      </p:sp>
-      <p:sp>
-        <p:nvSpPr>
-          <p:cNvPr id="26" name="TextBox 25"/>
+            <a:pPr>
+              <a:spcAft>
+                <a:spcPts val="800"/>
+              </a:spcAft>
+            </a:pPr>
+            <a:r>
+              <a:rPr sz="1900" b="0" i="0">
+                <a:solidFill>
+                  <a:srgbClr val="333333"/>
+                </a:solidFill>
+                <a:latin typeface="Calibri"/>
+              </a:rPr>
+              <a:t>–   La analogía de la pared es la más eficiente que existe para esta clase porque nadie necesita saber de software para responderla.</a:t>
+            </a:r>
+          </a:p>
+          <a:p>
+            <a:pPr>
+              <a:spcAft>
+                <a:spcPts val="800"/>
+              </a:spcAft>
+            </a:pPr>
+            <a:r>
+              <a:rPr sz="1900" b="0" i="0">
+                <a:solidFill>
+                  <a:srgbClr val="333333"/>
+                </a:solidFill>
+                <a:latin typeface="Calibri"/>
+              </a:rPr>
+              <a:t>–   Mover una pared en el plano cuesta un borrador; en el ladrillo cuesta tumbar y volver a levantar; en la casa entregada cuesta la obra, la mudanza y el enojo del dueño.</a:t>
+            </a:r>
+          </a:p>
+          <a:p>
+            <a:pPr>
+              <a:spcAft>
+                <a:spcPts val="800"/>
+              </a:spcAft>
+            </a:pPr>
+            <a:r>
+              <a:rPr sz="1900" b="0" i="0">
+                <a:solidFill>
+                  <a:srgbClr val="333333"/>
+                </a:solidFill>
+                <a:latin typeface="Calibri"/>
+              </a:rPr>
+              <a:t>–   Todo el mundo lo intuye, y esa intuición es exactamente la curva del costo del cambio.</a:t>
+            </a:r>
+          </a:p>
+          <a:p>
+            <a:pPr>
+              <a:spcAft>
+                <a:spcPts val="800"/>
+              </a:spcAft>
+            </a:pPr>
+            <a:r>
+              <a:rPr sz="1900" b="0" i="0">
+                <a:solidFill>
+                  <a:srgbClr val="333333"/>
+                </a:solidFill>
+                <a:latin typeface="Calibri"/>
+              </a:rPr>
+              <a:t>–   Lo que hay que hacer explícito en el minuto 12 es que </a:t>
+            </a:r>
+            <a:r>
+              <a:rPr sz="1900" b="1" i="0">
+                <a:solidFill>
+                  <a:srgbClr val="333333"/>
+                </a:solidFill>
+                <a:latin typeface="Calibri"/>
+              </a:rPr>
+              <a:t>en software la curva es igual pero se ve menos</a:t>
+            </a:r>
+            <a:r>
+              <a:rPr sz="1900" b="0" i="0">
+                <a:solidFill>
+                  <a:srgbClr val="333333"/>
+                </a:solidFill>
+                <a:latin typeface="Calibri"/>
+              </a:rPr>
+              <a:t>, y ahí está el problema.</a:t>
+            </a:r>
+          </a:p>
+          <a:p>
+            <a:pPr>
+              <a:spcAft>
+                <a:spcPts val="800"/>
+              </a:spcAft>
+            </a:pPr>
+            <a:r>
+              <a:rPr sz="1900" b="0" i="0">
+                <a:solidFill>
+                  <a:srgbClr val="333333"/>
+                </a:solidFill>
+                <a:latin typeface="Calibri"/>
+              </a:rPr>
+              <a:t>–   En una casa, una pared mal puesta se ve; en un sistema, un requisito mal entendido no se ve hasta que alguien lo usa.</a:t>
+            </a:r>
+          </a:p>
+          <a:p>
+            <a:pPr>
+              <a:spcAft>
+                <a:spcPts val="800"/>
+              </a:spcAft>
+            </a:pPr>
+            <a:r>
+              <a:rPr sz="1900" b="0" i="0">
+                <a:solidFill>
+                  <a:srgbClr val="333333"/>
+                </a:solidFill>
+                <a:latin typeface="Calibri"/>
+              </a:rPr>
+              <a:t>–   Por eso en ingeniería de software hubo que inventar fases, revisiones y criterios de aceptación: son el equivalente a mirar el plano antes de pedir el cemento.</a:t>
+            </a:r>
+          </a:p>
+          <a:p>
+            <a:pPr>
+              <a:spcAft>
+                <a:spcPts val="800"/>
+              </a:spcAft>
+            </a:pPr>
+            <a:r>
+              <a:rPr sz="1900" b="0" i="0">
+                <a:solidFill>
+                  <a:srgbClr val="333333"/>
+                </a:solidFill>
+                <a:latin typeface="Calibri"/>
+              </a:rPr>
+              <a:t>–   Recoja las respuestas en el muro.</a:t>
+            </a:r>
+          </a:p>
+          <a:p>
+            <a:pPr>
+              <a:spcAft>
+                <a:spcPts val="800"/>
+              </a:spcAft>
+            </a:pPr>
+            <a:r>
+              <a:rPr sz="1900" b="0" i="0">
+                <a:solidFill>
+                  <a:srgbClr val="333333"/>
+                </a:solidFill>
+                <a:latin typeface="Calibri"/>
+              </a:rPr>
+              <a:t>–   Van a salir cifras espontáneas —«mil veces más caro»— y conviene no corregirlas ahí, sino usarlas cuando llegue la tabla: la dirección de la curva es correcta y los múltiplos exactos son discutibles, lo cual es una buena lección sobre cómo se citan los datos.</a:t>
+            </a:r>
+          </a:p>
+        </p:txBody>
+      </p:sp>
+      <p:sp>
+        <p:nvSpPr>
+          <p:cNvPr id="6" name="TextBox 5"/>
           <p:cNvSpPr txBox="1"/>
           <p:nvPr/>
         </p:nvSpPr>
@@ -4669,7 +3872,7 @@
         <p:spPr>
           <a:xfrm>
             <a:off x="0" y="0"/>
-            <a:ext cx="12191695" cy="1170432"/>
+            <a:ext cx="12191695" cy="960120"/>
           </a:xfrm>
           <a:prstGeom prst="rect">
             <a:avLst/>
@@ -4711,7 +3914,7 @@
         </p:nvSpPr>
         <p:spPr>
           <a:xfrm>
-            <a:off x="0" y="1170432"/>
+            <a:off x="0" y="960120"/>
             <a:ext cx="12191695" cy="41148"/>
           </a:xfrm>
           <a:prstGeom prst="rect">
@@ -4755,7 +3958,7 @@
         <p:spPr>
           <a:xfrm>
             <a:off x="457200" y="164592"/>
-            <a:ext cx="11277295" cy="384048"/>
+            <a:ext cx="11277295" cy="502920"/>
           </a:xfrm>
           <a:prstGeom prst="rect">
             <a:avLst/>
@@ -4775,7 +3978,7 @@
                 </a:solidFill>
                 <a:latin typeface="Calibri"/>
               </a:rPr>
-              <a:t>Cómo se expone en 3 minutos</a:t>
+              <a:t>Las seis fases, y por qué el orden importa (1/2)</a:t>
             </a:r>
           </a:p>
         </p:txBody>
@@ -4788,8 +3991,8 @@
         </p:nvSpPr>
         <p:spPr>
           <a:xfrm>
-            <a:off x="457200" y="566928"/>
-            <a:ext cx="11277295" cy="411480"/>
+            <a:off x="457200" y="1170432"/>
+            <a:ext cx="11277295" cy="5230368"/>
           </a:xfrm>
           <a:prstGeom prst="rect">
             <a:avLst/>
@@ -4802,876 +4005,198 @@
           </a:bodyPr>
           <a:lstStyle/>
           <a:p>
-            <a:r>
-              <a:rPr sz="1400" b="0" i="0">
-                <a:solidFill>
-                  <a:srgbClr val="B8D8EE"/>
-                </a:solidFill>
-                <a:latin typeface="Calibri"/>
-              </a:rPr>
-              <a:t>Habla el vocero con la pantalla ya compartida · cronómetro en pantalla · se corta al llegar a cero</a:t>
-            </a:r>
-          </a:p>
-        </p:txBody>
-      </p:sp>
-      <p:sp>
-        <p:nvSpPr>
-          <p:cNvPr id="6" name="Rounded Rectangle 5"/>
-          <p:cNvSpPr/>
-          <p:nvPr/>
-        </p:nvSpPr>
-        <p:spPr>
-          <a:xfrm>
-            <a:off x="457200" y="1444752"/>
-            <a:ext cx="11277295" cy="908913"/>
-          </a:xfrm>
-          <a:prstGeom prst="roundRect">
-            <a:avLst>
-              <a:gd name="adj" fmla="val 12000"/>
-            </a:avLst>
-          </a:prstGeom>
-          <a:solidFill>
-            <a:srgbClr val="F2F2F2"/>
-          </a:solidFill>
-          <a:ln>
-            <a:noFill/>
-          </a:ln>
-        </p:spPr>
-        <p:style>
-          <a:lnRef idx="1">
-            <a:schemeClr val="accent1"/>
-          </a:lnRef>
-          <a:fillRef idx="3">
-            <a:schemeClr val="accent1"/>
-          </a:fillRef>
-          <a:effectRef idx="2">
-            <a:schemeClr val="accent1"/>
-          </a:effectRef>
-          <a:fontRef idx="minor">
-            <a:schemeClr val="lt1"/>
-          </a:fontRef>
-        </p:style>
-        <p:txBody>
-          <a:bodyPr rtlCol="0" anchor="ctr"/>
-          <a:lstStyle/>
-          <a:p>
-            <a:pPr algn="ctr"/>
-          </a:p>
-        </p:txBody>
-      </p:sp>
-      <p:sp>
-        <p:nvSpPr>
-          <p:cNvPr id="7" name="Rounded Rectangle 6"/>
-          <p:cNvSpPr/>
-          <p:nvPr/>
-        </p:nvSpPr>
-        <p:spPr>
-          <a:xfrm>
-            <a:off x="594360" y="1679752"/>
-            <a:ext cx="438912" cy="438912"/>
-          </a:xfrm>
-          <a:prstGeom prst="roundRect">
-            <a:avLst>
-              <a:gd name="adj" fmla="val 12000"/>
-            </a:avLst>
-          </a:prstGeom>
-          <a:solidFill>
-            <a:srgbClr val="095292"/>
-          </a:solidFill>
-          <a:ln>
-            <a:noFill/>
-          </a:ln>
-        </p:spPr>
-        <p:style>
-          <a:lnRef idx="1">
-            <a:schemeClr val="accent1"/>
-          </a:lnRef>
-          <a:fillRef idx="3">
-            <a:schemeClr val="accent1"/>
-          </a:fillRef>
-          <a:effectRef idx="2">
-            <a:schemeClr val="accent1"/>
-          </a:effectRef>
-          <a:fontRef idx="minor">
-            <a:schemeClr val="lt1"/>
-          </a:fontRef>
-        </p:style>
-        <p:txBody>
-          <a:bodyPr rtlCol="0" anchor="ctr"/>
-          <a:lstStyle/>
-          <a:p>
-            <a:pPr algn="ctr"/>
-          </a:p>
-        </p:txBody>
-      </p:sp>
-      <p:sp>
-        <p:nvSpPr>
-          <p:cNvPr id="8" name="TextBox 7"/>
-          <p:cNvSpPr txBox="1"/>
-          <p:nvPr/>
-        </p:nvSpPr>
-        <p:spPr>
-          <a:xfrm>
-            <a:off x="594360" y="1679752"/>
-            <a:ext cx="438912" cy="438912"/>
-          </a:xfrm>
-          <a:prstGeom prst="rect">
-            <a:avLst/>
-          </a:prstGeom>
-          <a:noFill/>
-        </p:spPr>
-        <p:txBody>
-          <a:bodyPr wrap="square" anchor="ctr"/>
-          <a:lstStyle/>
-          <a:p>
-            <a:pPr algn="ctr"/>
-            <a:r>
-              <a:rPr sz="1600" b="1" i="0">
-                <a:solidFill>
-                  <a:srgbClr val="FFFFFF"/>
-                </a:solidFill>
-                <a:latin typeface="Calibri"/>
-              </a:rPr>
-              <a:t>1</a:t>
-            </a:r>
-          </a:p>
-        </p:txBody>
-      </p:sp>
-      <p:sp>
-        <p:nvSpPr>
-          <p:cNvPr id="9" name="TextBox 8"/>
-          <p:cNvSpPr txBox="1"/>
-          <p:nvPr/>
-        </p:nvSpPr>
-        <p:spPr>
-          <a:xfrm>
-            <a:off x="1188720" y="1536192"/>
-            <a:ext cx="10271455" cy="744321"/>
-          </a:xfrm>
-          <a:prstGeom prst="rect">
-            <a:avLst/>
-          </a:prstGeom>
-          <a:noFill/>
-        </p:spPr>
-        <p:txBody>
-          <a:bodyPr wrap="square" anchor="ctr"/>
-          <a:lstStyle/>
-          <a:p>
-            <a:r>
-              <a:rPr sz="1500" b="1" i="0">
-                <a:solidFill>
-                  <a:srgbClr val="095292"/>
-                </a:solidFill>
-                <a:latin typeface="Calibri"/>
-              </a:rPr>
-              <a:t>30 s · La fase</a:t>
-            </a:r>
-          </a:p>
-          <a:p>
             <a:pPr>
-              <a:spcBef>
-                <a:spcPts val="200"/>
-              </a:spcBef>
+              <a:spcAft>
+                <a:spcPts val="800"/>
+              </a:spcAft>
             </a:pPr>
             <a:r>
-              <a:rPr sz="1300" b="0" i="0">
-                <a:solidFill>
-                  <a:srgbClr val="333333"/>
-                </a:solidFill>
-                <a:latin typeface="Calibri"/>
-              </a:rPr>
-              <a:t>En qué fase están y qué falta para cerrarla. Es el minuto obligatorio.</a:t>
-            </a:r>
-          </a:p>
-        </p:txBody>
-      </p:sp>
-      <p:sp>
-        <p:nvSpPr>
-          <p:cNvPr id="10" name="Rounded Rectangle 9"/>
-          <p:cNvSpPr/>
-          <p:nvPr/>
-        </p:nvSpPr>
-        <p:spPr>
-          <a:xfrm>
-            <a:off x="457200" y="2445105"/>
-            <a:ext cx="11277295" cy="908913"/>
-          </a:xfrm>
-          <a:prstGeom prst="roundRect">
-            <a:avLst>
-              <a:gd name="adj" fmla="val 12000"/>
-            </a:avLst>
-          </a:prstGeom>
-          <a:solidFill>
-            <a:srgbClr val="E8F4FA"/>
-          </a:solidFill>
-          <a:ln>
-            <a:noFill/>
-          </a:ln>
-        </p:spPr>
-        <p:style>
-          <a:lnRef idx="1">
-            <a:schemeClr val="accent1"/>
-          </a:lnRef>
-          <a:fillRef idx="3">
-            <a:schemeClr val="accent1"/>
-          </a:fillRef>
-          <a:effectRef idx="2">
-            <a:schemeClr val="accent1"/>
-          </a:effectRef>
-          <a:fontRef idx="minor">
-            <a:schemeClr val="lt1"/>
-          </a:fontRef>
-        </p:style>
-        <p:txBody>
-          <a:bodyPr rtlCol="0" anchor="ctr"/>
-          <a:lstStyle/>
-          <a:p>
-            <a:pPr algn="ctr"/>
-          </a:p>
-        </p:txBody>
-      </p:sp>
-      <p:sp>
-        <p:nvSpPr>
-          <p:cNvPr id="11" name="Rounded Rectangle 10"/>
-          <p:cNvSpPr/>
-          <p:nvPr/>
-        </p:nvSpPr>
-        <p:spPr>
-          <a:xfrm>
-            <a:off x="594360" y="2680106"/>
-            <a:ext cx="438912" cy="438912"/>
-          </a:xfrm>
-          <a:prstGeom prst="roundRect">
-            <a:avLst>
-              <a:gd name="adj" fmla="val 12000"/>
-            </a:avLst>
-          </a:prstGeom>
-          <a:solidFill>
-            <a:srgbClr val="095292"/>
-          </a:solidFill>
-          <a:ln>
-            <a:noFill/>
-          </a:ln>
-        </p:spPr>
-        <p:style>
-          <a:lnRef idx="1">
-            <a:schemeClr val="accent1"/>
-          </a:lnRef>
-          <a:fillRef idx="3">
-            <a:schemeClr val="accent1"/>
-          </a:fillRef>
-          <a:effectRef idx="2">
-            <a:schemeClr val="accent1"/>
-          </a:effectRef>
-          <a:fontRef idx="minor">
-            <a:schemeClr val="lt1"/>
-          </a:fontRef>
-        </p:style>
-        <p:txBody>
-          <a:bodyPr rtlCol="0" anchor="ctr"/>
-          <a:lstStyle/>
-          <a:p>
-            <a:pPr algn="ctr"/>
-          </a:p>
-        </p:txBody>
-      </p:sp>
-      <p:sp>
-        <p:nvSpPr>
-          <p:cNvPr id="12" name="TextBox 11"/>
-          <p:cNvSpPr txBox="1"/>
-          <p:nvPr/>
-        </p:nvSpPr>
-        <p:spPr>
-          <a:xfrm>
-            <a:off x="594360" y="2680106"/>
-            <a:ext cx="438912" cy="438912"/>
-          </a:xfrm>
-          <a:prstGeom prst="rect">
-            <a:avLst/>
-          </a:prstGeom>
-          <a:noFill/>
-        </p:spPr>
-        <p:txBody>
-          <a:bodyPr wrap="square" anchor="ctr"/>
-          <a:lstStyle/>
-          <a:p>
-            <a:pPr algn="ctr"/>
-            <a:r>
-              <a:rPr sz="1600" b="1" i="0">
-                <a:solidFill>
-                  <a:srgbClr val="FFFFFF"/>
-                </a:solidFill>
-                <a:latin typeface="Calibri"/>
-              </a:rPr>
-              <a:t>2</a:t>
-            </a:r>
-          </a:p>
-        </p:txBody>
-      </p:sp>
-      <p:sp>
-        <p:nvSpPr>
-          <p:cNvPr id="13" name="TextBox 12"/>
-          <p:cNvSpPr txBox="1"/>
-          <p:nvPr/>
-        </p:nvSpPr>
-        <p:spPr>
-          <a:xfrm>
-            <a:off x="1188720" y="2536545"/>
-            <a:ext cx="10271455" cy="744321"/>
-          </a:xfrm>
-          <a:prstGeom prst="rect">
-            <a:avLst/>
-          </a:prstGeom>
-          <a:noFill/>
-        </p:spPr>
-        <p:txBody>
-          <a:bodyPr wrap="square" anchor="ctr"/>
-          <a:lstStyle/>
-          <a:p>
-            <a:r>
-              <a:rPr sz="1500" b="1" i="0">
-                <a:solidFill>
-                  <a:srgbClr val="095292"/>
-                </a:solidFill>
-                <a:latin typeface="Calibri"/>
-              </a:rPr>
-              <a:t>50 s · Los requisitos</a:t>
+              <a:rPr sz="2000" b="0" i="0">
+                <a:solidFill>
+                  <a:srgbClr val="333333"/>
+                </a:solidFill>
+                <a:latin typeface="Calibri"/>
+              </a:rPr>
+              <a:t>–   Cada fase responde una pregunta y produce lo que la siguiente necesita para no adivinar. </a:t>
+            </a:r>
+            <a:r>
+              <a:rPr sz="2000" b="1" i="0">
+                <a:solidFill>
+                  <a:srgbClr val="333333"/>
+                </a:solidFill>
+                <a:latin typeface="Calibri"/>
+              </a:rPr>
+              <a:t>Definición del problema</a:t>
+            </a:r>
+            <a:r>
+              <a:rPr sz="2000" b="0" i="0">
+                <a:solidFill>
+                  <a:srgbClr val="333333"/>
+                </a:solidFill>
+                <a:latin typeface="Calibri"/>
+              </a:rPr>
+              <a:t> responde *qué se va a resolver y para quién*</a:t>
             </a:r>
           </a:p>
           <a:p>
             <a:pPr>
-              <a:spcBef>
-                <a:spcPts val="200"/>
-              </a:spcBef>
+              <a:spcAft>
+                <a:spcPts val="800"/>
+              </a:spcAft>
             </a:pPr>
             <a:r>
-              <a:rPr sz="1300" b="0" i="0">
-                <a:solidFill>
-                  <a:srgbClr val="333333"/>
-                </a:solidFill>
-                <a:latin typeface="Calibri"/>
-              </a:rPr>
-              <a:t>Uno funcional y uno no funcional, leídos tal cual.</a:t>
-            </a:r>
-          </a:p>
-        </p:txBody>
-      </p:sp>
-      <p:sp>
-        <p:nvSpPr>
-          <p:cNvPr id="14" name="Rounded Rectangle 13"/>
-          <p:cNvSpPr/>
-          <p:nvPr/>
-        </p:nvSpPr>
-        <p:spPr>
-          <a:xfrm>
-            <a:off x="457200" y="3445459"/>
-            <a:ext cx="11277295" cy="908913"/>
-          </a:xfrm>
-          <a:prstGeom prst="roundRect">
-            <a:avLst>
-              <a:gd name="adj" fmla="val 12000"/>
-            </a:avLst>
-          </a:prstGeom>
-          <a:solidFill>
-            <a:srgbClr val="F2F2F2"/>
-          </a:solidFill>
-          <a:ln>
-            <a:noFill/>
-          </a:ln>
-        </p:spPr>
-        <p:style>
-          <a:lnRef idx="1">
-            <a:schemeClr val="accent1"/>
-          </a:lnRef>
-          <a:fillRef idx="3">
-            <a:schemeClr val="accent1"/>
-          </a:fillRef>
-          <a:effectRef idx="2">
-            <a:schemeClr val="accent1"/>
-          </a:effectRef>
-          <a:fontRef idx="minor">
-            <a:schemeClr val="lt1"/>
-          </a:fontRef>
-        </p:style>
-        <p:txBody>
-          <a:bodyPr rtlCol="0" anchor="ctr"/>
-          <a:lstStyle/>
-          <a:p>
-            <a:pPr algn="ctr"/>
-          </a:p>
-        </p:txBody>
-      </p:sp>
-      <p:sp>
-        <p:nvSpPr>
-          <p:cNvPr id="15" name="Rounded Rectangle 14"/>
-          <p:cNvSpPr/>
-          <p:nvPr/>
-        </p:nvSpPr>
-        <p:spPr>
-          <a:xfrm>
-            <a:off x="594360" y="3680460"/>
-            <a:ext cx="438912" cy="438912"/>
-          </a:xfrm>
-          <a:prstGeom prst="roundRect">
-            <a:avLst>
-              <a:gd name="adj" fmla="val 12000"/>
-            </a:avLst>
-          </a:prstGeom>
-          <a:solidFill>
-            <a:srgbClr val="095292"/>
-          </a:solidFill>
-          <a:ln>
-            <a:noFill/>
-          </a:ln>
-        </p:spPr>
-        <p:style>
-          <a:lnRef idx="1">
-            <a:schemeClr val="accent1"/>
-          </a:lnRef>
-          <a:fillRef idx="3">
-            <a:schemeClr val="accent1"/>
-          </a:fillRef>
-          <a:effectRef idx="2">
-            <a:schemeClr val="accent1"/>
-          </a:effectRef>
-          <a:fontRef idx="minor">
-            <a:schemeClr val="lt1"/>
-          </a:fontRef>
-        </p:style>
-        <p:txBody>
-          <a:bodyPr rtlCol="0" anchor="ctr"/>
-          <a:lstStyle/>
-          <a:p>
-            <a:pPr algn="ctr"/>
-          </a:p>
-        </p:txBody>
-      </p:sp>
-      <p:sp>
-        <p:nvSpPr>
-          <p:cNvPr id="16" name="TextBox 15"/>
-          <p:cNvSpPr txBox="1"/>
-          <p:nvPr/>
-        </p:nvSpPr>
-        <p:spPr>
-          <a:xfrm>
-            <a:off x="594360" y="3680460"/>
-            <a:ext cx="438912" cy="438912"/>
-          </a:xfrm>
-          <a:prstGeom prst="rect">
-            <a:avLst/>
-          </a:prstGeom>
-          <a:noFill/>
-        </p:spPr>
-        <p:txBody>
-          <a:bodyPr wrap="square" anchor="ctr"/>
-          <a:lstStyle/>
-          <a:p>
-            <a:pPr algn="ctr"/>
-            <a:r>
-              <a:rPr sz="1600" b="1" i="0">
-                <a:solidFill>
-                  <a:srgbClr val="FFFFFF"/>
-                </a:solidFill>
-                <a:latin typeface="Calibri"/>
-              </a:rPr>
-              <a:t>3</a:t>
-            </a:r>
-          </a:p>
-        </p:txBody>
-      </p:sp>
-      <p:sp>
-        <p:nvSpPr>
-          <p:cNvPr id="17" name="TextBox 16"/>
-          <p:cNvSpPr txBox="1"/>
-          <p:nvPr/>
-        </p:nvSpPr>
-        <p:spPr>
-          <a:xfrm>
-            <a:off x="1188720" y="3536899"/>
-            <a:ext cx="10271455" cy="744321"/>
-          </a:xfrm>
-          <a:prstGeom prst="rect">
-            <a:avLst/>
-          </a:prstGeom>
-          <a:noFill/>
-        </p:spPr>
-        <p:txBody>
-          <a:bodyPr wrap="square" anchor="ctr"/>
-          <a:lstStyle/>
-          <a:p>
-            <a:r>
-              <a:rPr sz="1500" b="1" i="0">
-                <a:solidFill>
-                  <a:srgbClr val="095292"/>
-                </a:solidFill>
-                <a:latin typeface="Calibri"/>
-              </a:rPr>
-              <a:t>50 s · El criterio de aceptación</a:t>
+              <a:rPr sz="2000" b="0" i="0">
+                <a:solidFill>
+                  <a:srgbClr val="333333"/>
+                </a:solidFill>
+                <a:latin typeface="Calibri"/>
+              </a:rPr>
+              <a:t>–   Y hay que decir en voz alta que </a:t>
+            </a:r>
+            <a:r>
+              <a:rPr sz="2000" b="1" i="0">
+                <a:solidFill>
+                  <a:srgbClr val="333333"/>
+                </a:solidFill>
+                <a:latin typeface="Calibri"/>
+              </a:rPr>
+              <a:t>esa fase ya la hicieron en la sesión 6</a:t>
+            </a:r>
+            <a:r>
+              <a:rPr sz="2000" b="0" i="0">
+                <a:solidFill>
+                  <a:srgbClr val="333333"/>
+                </a:solidFill>
+                <a:latin typeface="Calibri"/>
+              </a:rPr>
+              <a:t>: la ficha del problema es el entregable de la primera fase del ciclo de vida de su propio proyecto.</a:t>
             </a:r>
           </a:p>
           <a:p>
             <a:pPr>
-              <a:spcBef>
-                <a:spcPts val="200"/>
-              </a:spcBef>
+              <a:spcAft>
+                <a:spcPts val="800"/>
+              </a:spcAft>
             </a:pPr>
             <a:r>
-              <a:rPr sz="1300" b="0" i="0">
-                <a:solidFill>
-                  <a:srgbClr val="333333"/>
-                </a:solidFill>
-                <a:latin typeface="Calibri"/>
-              </a:rPr>
-              <a:t>De ese requisito: cómo se comprueba y con qué umbral.</a:t>
-            </a:r>
-          </a:p>
-        </p:txBody>
-      </p:sp>
-      <p:sp>
-        <p:nvSpPr>
-          <p:cNvPr id="18" name="Rounded Rectangle 17"/>
-          <p:cNvSpPr/>
-          <p:nvPr/>
-        </p:nvSpPr>
-        <p:spPr>
-          <a:xfrm>
-            <a:off x="457200" y="4445812"/>
-            <a:ext cx="11277295" cy="908913"/>
-          </a:xfrm>
-          <a:prstGeom prst="roundRect">
-            <a:avLst>
-              <a:gd name="adj" fmla="val 12000"/>
-            </a:avLst>
-          </a:prstGeom>
-          <a:solidFill>
-            <a:srgbClr val="E8F4FA"/>
-          </a:solidFill>
-          <a:ln>
-            <a:noFill/>
-          </a:ln>
-        </p:spPr>
-        <p:style>
-          <a:lnRef idx="1">
-            <a:schemeClr val="accent1"/>
-          </a:lnRef>
-          <a:fillRef idx="3">
-            <a:schemeClr val="accent1"/>
-          </a:fillRef>
-          <a:effectRef idx="2">
-            <a:schemeClr val="accent1"/>
-          </a:effectRef>
-          <a:fontRef idx="minor">
-            <a:schemeClr val="lt1"/>
-          </a:fontRef>
-        </p:style>
-        <p:txBody>
-          <a:bodyPr rtlCol="0" anchor="ctr"/>
-          <a:lstStyle/>
-          <a:p>
-            <a:pPr algn="ctr"/>
-          </a:p>
-        </p:txBody>
-      </p:sp>
-      <p:sp>
-        <p:nvSpPr>
-          <p:cNvPr id="19" name="Rounded Rectangle 18"/>
-          <p:cNvSpPr/>
-          <p:nvPr/>
-        </p:nvSpPr>
-        <p:spPr>
-          <a:xfrm>
-            <a:off x="594360" y="4680813"/>
-            <a:ext cx="438912" cy="438912"/>
-          </a:xfrm>
-          <a:prstGeom prst="roundRect">
-            <a:avLst>
-              <a:gd name="adj" fmla="val 12000"/>
-            </a:avLst>
-          </a:prstGeom>
-          <a:solidFill>
-            <a:srgbClr val="095292"/>
-          </a:solidFill>
-          <a:ln>
-            <a:noFill/>
-          </a:ln>
-        </p:spPr>
-        <p:style>
-          <a:lnRef idx="1">
-            <a:schemeClr val="accent1"/>
-          </a:lnRef>
-          <a:fillRef idx="3">
-            <a:schemeClr val="accent1"/>
-          </a:fillRef>
-          <a:effectRef idx="2">
-            <a:schemeClr val="accent1"/>
-          </a:effectRef>
-          <a:fontRef idx="minor">
-            <a:schemeClr val="lt1"/>
-          </a:fontRef>
-        </p:style>
-        <p:txBody>
-          <a:bodyPr rtlCol="0" anchor="ctr"/>
-          <a:lstStyle/>
-          <a:p>
-            <a:pPr algn="ctr"/>
-          </a:p>
-        </p:txBody>
-      </p:sp>
-      <p:sp>
-        <p:nvSpPr>
-          <p:cNvPr id="20" name="TextBox 19"/>
-          <p:cNvSpPr txBox="1"/>
-          <p:nvPr/>
-        </p:nvSpPr>
-        <p:spPr>
-          <a:xfrm>
-            <a:off x="594360" y="4680813"/>
-            <a:ext cx="438912" cy="438912"/>
-          </a:xfrm>
-          <a:prstGeom prst="rect">
-            <a:avLst/>
-          </a:prstGeom>
-          <a:noFill/>
-        </p:spPr>
-        <p:txBody>
-          <a:bodyPr wrap="square" anchor="ctr"/>
-          <a:lstStyle/>
-          <a:p>
-            <a:pPr algn="ctr"/>
-            <a:r>
-              <a:rPr sz="1600" b="1" i="0">
-                <a:solidFill>
-                  <a:srgbClr val="FFFFFF"/>
-                </a:solidFill>
-                <a:latin typeface="Calibri"/>
-              </a:rPr>
-              <a:t>4</a:t>
-            </a:r>
-          </a:p>
-        </p:txBody>
-      </p:sp>
-      <p:sp>
-        <p:nvSpPr>
-          <p:cNvPr id="21" name="TextBox 20"/>
-          <p:cNvSpPr txBox="1"/>
-          <p:nvPr/>
-        </p:nvSpPr>
-        <p:spPr>
-          <a:xfrm>
-            <a:off x="1188720" y="4537252"/>
-            <a:ext cx="10271455" cy="744321"/>
-          </a:xfrm>
-          <a:prstGeom prst="rect">
-            <a:avLst/>
-          </a:prstGeom>
-          <a:noFill/>
-        </p:spPr>
-        <p:txBody>
-          <a:bodyPr wrap="square" anchor="ctr"/>
-          <a:lstStyle/>
-          <a:p>
-            <a:r>
-              <a:rPr sz="1500" b="1" i="0">
-                <a:solidFill>
-                  <a:srgbClr val="095292"/>
-                </a:solidFill>
-                <a:latin typeface="Calibri"/>
-              </a:rPr>
-              <a:t>40 s · El plan de hitos</a:t>
+              <a:rPr sz="2000" b="0" i="0">
+                <a:solidFill>
+                  <a:srgbClr val="333333"/>
+                </a:solidFill>
+                <a:latin typeface="Calibri"/>
+              </a:rPr>
+              <a:t>–   Eso reordena la percepción del curso: no estaban haciendo un ejercicio, estaban cerrando una fase. </a:t>
+            </a:r>
+            <a:r>
+              <a:rPr sz="2000" b="1" i="0">
+                <a:solidFill>
+                  <a:srgbClr val="333333"/>
+                </a:solidFill>
+                <a:latin typeface="Calibri"/>
+              </a:rPr>
+              <a:t>Requisitos</a:t>
+            </a:r>
+            <a:r>
+              <a:rPr sz="2000" b="0" i="0">
+                <a:solidFill>
+                  <a:srgbClr val="333333"/>
+                </a:solidFill>
+                <a:latin typeface="Calibri"/>
+              </a:rPr>
+              <a:t> responde *qué tiene que hacer la solución para resolver eso, y cómo sabremos que lo hace*.</a:t>
             </a:r>
           </a:p>
           <a:p>
             <a:pPr>
-              <a:spcBef>
-                <a:spcPts val="200"/>
-              </a:spcBef>
+              <a:spcAft>
+                <a:spcPts val="800"/>
+              </a:spcAft>
             </a:pPr>
             <a:r>
-              <a:rPr sz="1300" b="0" i="0">
-                <a:solidFill>
-                  <a:srgbClr val="333333"/>
-                </a:solidFill>
-                <a:latin typeface="Calibri"/>
-              </a:rPr>
-              <a:t>Qué queda listo en la Clase 10 y en la 12.</a:t>
-            </a:r>
-          </a:p>
-        </p:txBody>
-      </p:sp>
-      <p:sp>
-        <p:nvSpPr>
-          <p:cNvPr id="22" name="Rounded Rectangle 21"/>
-          <p:cNvSpPr/>
-          <p:nvPr/>
-        </p:nvSpPr>
-        <p:spPr>
-          <a:xfrm>
-            <a:off x="457200" y="5446166"/>
-            <a:ext cx="11277295" cy="908913"/>
-          </a:xfrm>
-          <a:prstGeom prst="roundRect">
-            <a:avLst>
-              <a:gd name="adj" fmla="val 12000"/>
-            </a:avLst>
-          </a:prstGeom>
-          <a:solidFill>
-            <a:srgbClr val="F2F2F2"/>
-          </a:solidFill>
-          <a:ln>
-            <a:noFill/>
-          </a:ln>
-        </p:spPr>
-        <p:style>
-          <a:lnRef idx="1">
-            <a:schemeClr val="accent1"/>
-          </a:lnRef>
-          <a:fillRef idx="3">
-            <a:schemeClr val="accent1"/>
-          </a:fillRef>
-          <a:effectRef idx="2">
-            <a:schemeClr val="accent1"/>
-          </a:effectRef>
-          <a:fontRef idx="minor">
-            <a:schemeClr val="lt1"/>
-          </a:fontRef>
-        </p:style>
-        <p:txBody>
-          <a:bodyPr rtlCol="0" anchor="ctr"/>
-          <a:lstStyle/>
-          <a:p>
-            <a:pPr algn="ctr"/>
-          </a:p>
-        </p:txBody>
-      </p:sp>
-      <p:sp>
-        <p:nvSpPr>
-          <p:cNvPr id="23" name="Rounded Rectangle 22"/>
-          <p:cNvSpPr/>
-          <p:nvPr/>
-        </p:nvSpPr>
-        <p:spPr>
-          <a:xfrm>
-            <a:off x="594360" y="5681167"/>
-            <a:ext cx="438912" cy="438912"/>
-          </a:xfrm>
-          <a:prstGeom prst="roundRect">
-            <a:avLst>
-              <a:gd name="adj" fmla="val 12000"/>
-            </a:avLst>
-          </a:prstGeom>
-          <a:solidFill>
-            <a:srgbClr val="095292"/>
-          </a:solidFill>
-          <a:ln>
-            <a:noFill/>
-          </a:ln>
-        </p:spPr>
-        <p:style>
-          <a:lnRef idx="1">
-            <a:schemeClr val="accent1"/>
-          </a:lnRef>
-          <a:fillRef idx="3">
-            <a:schemeClr val="accent1"/>
-          </a:fillRef>
-          <a:effectRef idx="2">
-            <a:schemeClr val="accent1"/>
-          </a:effectRef>
-          <a:fontRef idx="minor">
-            <a:schemeClr val="lt1"/>
-          </a:fontRef>
-        </p:style>
-        <p:txBody>
-          <a:bodyPr rtlCol="0" anchor="ctr"/>
-          <a:lstStyle/>
-          <a:p>
-            <a:pPr algn="ctr"/>
-          </a:p>
-        </p:txBody>
-      </p:sp>
-      <p:sp>
-        <p:nvSpPr>
-          <p:cNvPr id="24" name="TextBox 23"/>
-          <p:cNvSpPr txBox="1"/>
-          <p:nvPr/>
-        </p:nvSpPr>
-        <p:spPr>
-          <a:xfrm>
-            <a:off x="594360" y="5681167"/>
-            <a:ext cx="438912" cy="438912"/>
-          </a:xfrm>
-          <a:prstGeom prst="rect">
-            <a:avLst/>
-          </a:prstGeom>
-          <a:noFill/>
-        </p:spPr>
-        <p:txBody>
-          <a:bodyPr wrap="square" anchor="ctr"/>
-          <a:lstStyle/>
-          <a:p>
-            <a:pPr algn="ctr"/>
-            <a:r>
-              <a:rPr sz="1600" b="1" i="0">
-                <a:solidFill>
-                  <a:srgbClr val="FFFFFF"/>
-                </a:solidFill>
-                <a:latin typeface="Calibri"/>
-              </a:rPr>
-              <a:t>5</a:t>
-            </a:r>
-          </a:p>
-        </p:txBody>
-      </p:sp>
-      <p:sp>
-        <p:nvSpPr>
-          <p:cNvPr id="25" name="TextBox 24"/>
-          <p:cNvSpPr txBox="1"/>
-          <p:nvPr/>
-        </p:nvSpPr>
-        <p:spPr>
-          <a:xfrm>
-            <a:off x="1188720" y="5537606"/>
-            <a:ext cx="10271455" cy="744321"/>
-          </a:xfrm>
-          <a:prstGeom prst="rect">
-            <a:avLst/>
-          </a:prstGeom>
-          <a:noFill/>
-        </p:spPr>
-        <p:txBody>
-          <a:bodyPr wrap="square" anchor="ctr"/>
-          <a:lstStyle/>
-          <a:p>
-            <a:r>
-              <a:rPr sz="1500" b="1" i="0">
-                <a:solidFill>
-                  <a:srgbClr val="095292"/>
-                </a:solidFill>
-                <a:latin typeface="Calibri"/>
-              </a:rPr>
-              <a:t>10 s · La decisión costosa</a:t>
+              <a:rPr sz="2000" b="0" i="0">
+                <a:solidFill>
+                  <a:srgbClr val="333333"/>
+                </a:solidFill>
+                <a:latin typeface="Calibri"/>
+              </a:rPr>
+              <a:t>–   Es la fase de hoy y la que más se salta la gente. </a:t>
+            </a:r>
+            <a:r>
+              <a:rPr sz="2000" b="1" i="0">
+                <a:solidFill>
+                  <a:srgbClr val="333333"/>
+                </a:solidFill>
+                <a:latin typeface="Calibri"/>
+              </a:rPr>
+              <a:t>Diseño</a:t>
+            </a:r>
+            <a:r>
+              <a:rPr sz="2000" b="0" i="0">
+                <a:solidFill>
+                  <a:srgbClr val="333333"/>
+                </a:solidFill>
+                <a:latin typeface="Calibri"/>
+              </a:rPr>
+              <a:t> responde *cómo va a estar construido*: las partes, el flujo, las pantallas o los pasos. </a:t>
+            </a:r>
+            <a:r>
+              <a:rPr sz="2000" b="1" i="0">
+                <a:solidFill>
+                  <a:srgbClr val="333333"/>
+                </a:solidFill>
+                <a:latin typeface="Calibri"/>
+              </a:rPr>
+              <a:t>Construcción</a:t>
+            </a:r>
+            <a:r>
+              <a:rPr sz="2000" b="0" i="0">
+                <a:solidFill>
+                  <a:srgbClr val="333333"/>
+                </a:solidFill>
+                <a:latin typeface="Calibri"/>
+              </a:rPr>
+              <a:t> es la única fase que el estudiante reconoce como «el proyecto»</a:t>
             </a:r>
           </a:p>
           <a:p>
             <a:pPr>
-              <a:spcBef>
-                <a:spcPts val="200"/>
-              </a:spcBef>
+              <a:spcAft>
+                <a:spcPts val="800"/>
+              </a:spcAft>
             </a:pPr>
             <a:r>
-              <a:rPr sz="1300" b="0" i="0">
-                <a:solidFill>
-                  <a:srgbClr val="333333"/>
-                </a:solidFill>
-                <a:latin typeface="Calibri"/>
-              </a:rPr>
-              <a:t>Qué sería carísimo cambiar después.</a:t>
-            </a:r>
-          </a:p>
-        </p:txBody>
-      </p:sp>
-      <p:sp>
-        <p:nvSpPr>
-          <p:cNvPr id="26" name="TextBox 25"/>
+              <a:rPr sz="2000" b="0" i="0">
+                <a:solidFill>
+                  <a:srgbClr val="333333"/>
+                </a:solidFill>
+                <a:latin typeface="Calibri"/>
+              </a:rPr>
+              <a:t>–   Y vale la pena decirle que es una de seis, y no la más determinante. </a:t>
+            </a:r>
+            <a:r>
+              <a:rPr sz="2000" b="1" i="0">
+                <a:solidFill>
+                  <a:srgbClr val="333333"/>
+                </a:solidFill>
+                <a:latin typeface="Calibri"/>
+              </a:rPr>
+              <a:t>Validación</a:t>
+            </a:r>
+            <a:r>
+              <a:rPr sz="2000" b="0" i="0">
+                <a:solidFill>
+                  <a:srgbClr val="333333"/>
+                </a:solidFill>
+                <a:latin typeface="Calibri"/>
+              </a:rPr>
+              <a:t> responde *funciona contra los criterios y con el usuario real*; la trampa clásica es probar con el propio equipo, que ya sabe cómo se usa.</a:t>
+            </a:r>
+          </a:p>
+        </p:txBody>
+      </p:sp>
+      <p:sp>
+        <p:nvSpPr>
+          <p:cNvPr id="6" name="TextBox 5"/>
           <p:cNvSpPr txBox="1"/>
           <p:nvPr/>
         </p:nvSpPr>
@@ -5845,7 +4370,7 @@
                 </a:solidFill>
                 <a:latin typeface="Calibri"/>
               </a:rPr>
-              <a:t>Para la Clase 8</a:t>
+              <a:t>Las seis fases, y por qué el orden importa (2/2)</a:t>
             </a:r>
           </a:p>
         </p:txBody>
@@ -5884,7 +4409,7 @@
                 </a:solidFill>
                 <a:latin typeface="Calibri"/>
               </a:rPr>
-              <a:t>–   </a:t>
+              <a:t>–   Y </a:t>
             </a:r>
             <a:r>
               <a:rPr sz="2000" b="1" i="0">
@@ -5893,7 +4418,7 @@
                 </a:solidFill>
                 <a:latin typeface="Calibri"/>
               </a:rPr>
-              <a:t>Trabajo dirigido:</a:t>
+              <a:t>operación y retiro</a:t>
             </a:r>
             <a:r>
               <a:rPr sz="2000" b="0" i="0">
@@ -5902,25 +4427,7 @@
                 </a:solidFill>
                 <a:latin typeface="Calibri"/>
               </a:rPr>
-              <a:t> Estudio de fases del ciclo de vida — leer el material de las seis fases y traer </a:t>
-            </a:r>
-            <a:r>
-              <a:rPr sz="2000" b="1" i="0">
-                <a:solidFill>
-                  <a:srgbClr val="333333"/>
-                </a:solidFill>
-                <a:latin typeface="Calibri"/>
-              </a:rPr>
-              <a:t>un ejemplo propio</a:t>
-            </a:r>
-            <a:r>
-              <a:rPr sz="2000" b="0" i="0">
-                <a:solidFill>
-                  <a:srgbClr val="333333"/>
-                </a:solidFill>
-                <a:latin typeface="Calibri"/>
-              </a:rPr>
-              <a:t> de un proyecto conocido que se saltó una fase.</a:t>
+              <a:t> es la fase que nadie enseña en primer semestre y que conviene nombrar por dos razones: la mayor parte de la vida de un sistema ocurre ahí</a:t>
             </a:r>
           </a:p>
           <a:p>
@@ -5936,43 +4443,7 @@
                 </a:solidFill>
                 <a:latin typeface="Calibri"/>
               </a:rPr>
-              <a:t>–   </a:t>
-            </a:r>
-            <a:r>
-              <a:rPr sz="2000" b="1" i="0">
-                <a:solidFill>
-                  <a:srgbClr val="333333"/>
-                </a:solidFill>
-                <a:latin typeface="Calibri"/>
-              </a:rPr>
-              <a:t>Trabajo independiente:</a:t>
-            </a:r>
-            <a:r>
-              <a:rPr sz="2000" b="0" i="0">
-                <a:solidFill>
-                  <a:srgbClr val="333333"/>
-                </a:solidFill>
-                <a:latin typeface="Calibri"/>
-              </a:rPr>
-              <a:t> Infografía explicativa del ciclo de vida </a:t>
-            </a:r>
-            <a:r>
-              <a:rPr sz="2000" b="1" i="0">
-                <a:solidFill>
-                  <a:srgbClr val="333333"/>
-                </a:solidFill>
-                <a:latin typeface="Calibri"/>
-              </a:rPr>
-              <a:t>de su propio proyecto</a:t>
-            </a:r>
-            <a:r>
-              <a:rPr sz="2000" b="0" i="0">
-                <a:solidFill>
-                  <a:srgbClr val="333333"/>
-                </a:solidFill>
-                <a:latin typeface="Calibri"/>
-              </a:rPr>
-              <a:t>, en Canva o draw.io: las seis fases, en cuál están y qué entregan en cada una.</a:t>
+              <a:t>–   Y el retiro —qué pasa con los datos cuando el sistema se apaga— es un asunto ético y legal que ya vieron en la sesión 4 con la Ley 1581.</a:t>
             </a:r>
           </a:p>
           <a:p>
@@ -5988,7 +4459,7 @@
                 </a:solidFill>
                 <a:latin typeface="Calibri"/>
               </a:rPr>
-              <a:t>–   </a:t>
+              <a:t>–   El punto que amarra todo: </a:t>
             </a:r>
             <a:r>
               <a:rPr sz="2000" b="1" i="0">
@@ -5997,7 +4468,7 @@
                 </a:solidFill>
                 <a:latin typeface="Calibri"/>
               </a:rPr>
-              <a:t>Clase 8 · Taller de aplicación del ciclo de vida</a:t>
+              <a:t>el orden no es burocracia, es economía</a:t>
             </a:r>
             <a:r>
               <a:rPr sz="2000" b="0" i="0">
@@ -6006,7 +4477,7 @@
                 </a:solidFill>
                 <a:latin typeface="Calibri"/>
               </a:rPr>
-              <a:t> — casos reales de proyectos que se saltaron una fase, y la decisión entre sus dos alternativas de solución con una matriz de criterios.</a:t>
+              <a:t>.</a:t>
             </a:r>
           </a:p>
           <a:p>
@@ -6022,43 +4493,7 @@
                 </a:solidFill>
                 <a:latin typeface="Calibri"/>
               </a:rPr>
-              <a:t>–   </a:t>
-            </a:r>
-            <a:r>
-              <a:rPr sz="2000" b="1" i="0">
-                <a:solidFill>
-                  <a:srgbClr val="333333"/>
-                </a:solidFill>
-                <a:latin typeface="Calibri"/>
-              </a:rPr>
-              <a:t>Aviso:</a:t>
-            </a:r>
-            <a:r>
-              <a:rPr sz="2000" b="0" i="0">
-                <a:solidFill>
-                  <a:srgbClr val="333333"/>
-                </a:solidFill>
-                <a:latin typeface="Calibri"/>
-              </a:rPr>
-              <a:t> Traigan la tabla de requisitos con los criterios de aceptación </a:t>
-            </a:r>
-            <a:r>
-              <a:rPr sz="2000" b="1" i="0">
-                <a:solidFill>
-                  <a:srgbClr val="333333"/>
-                </a:solidFill>
-                <a:latin typeface="Calibri"/>
-              </a:rPr>
-              <a:t>confirmados con la persona que vive el problema</a:t>
-            </a:r>
-            <a:r>
-              <a:rPr sz="2000" b="0" i="0">
-                <a:solidFill>
-                  <a:srgbClr val="333333"/>
-                </a:solidFill>
-                <a:latin typeface="Calibri"/>
-              </a:rPr>
-              <a:t>, y las dos alternativas de solución del trabajo independiente de la sesión 6. En la sesión 8 se decide una.</a:t>
+              <a:t>–   Cada fase existe porque descubrir un error en ella cuesta menos que descubrirlo en la siguiente.</a:t>
             </a:r>
           </a:p>
           <a:p>
@@ -6074,25 +4509,7 @@
                 </a:solidFill>
                 <a:latin typeface="Calibri"/>
               </a:rPr>
-              <a:t>–   </a:t>
-            </a:r>
-            <a:r>
-              <a:rPr sz="2000" b="1" i="0">
-                <a:solidFill>
-                  <a:srgbClr val="333333"/>
-                </a:solidFill>
-                <a:latin typeface="Calibri"/>
-              </a:rPr>
-              <a:t>Antes de salir:</a:t>
-            </a:r>
-            <a:r>
-              <a:rPr sz="2000" b="0" i="0">
-                <a:solidFill>
-                  <a:srgbClr val="333333"/>
-                </a:solidFill>
-                <a:latin typeface="Calibri"/>
-              </a:rPr>
-              <a:t> el enlace del documento del equipo en el chat, con permiso de lectura para el docente, y el nombre del vocero de hoy.</a:t>
+              <a:t>–   Quien se salta requisitos no ahorra tiempo: mueve el costo hacia adelante y lo multiplica.</a:t>
             </a:r>
           </a:p>
         </p:txBody>
@@ -6167,13 +4584,13 @@
         <p:spPr>
           <a:xfrm>
             <a:off x="0" y="0"/>
-            <a:ext cx="12191695" cy="164592"/>
+            <a:ext cx="12191695" cy="960120"/>
           </a:xfrm>
           <a:prstGeom prst="rect">
             <a:avLst/>
           </a:prstGeom>
           <a:solidFill>
-            <a:srgbClr val="269CCB"/>
+            <a:srgbClr val="095292"/>
           </a:solidFill>
           <a:ln>
             <a:noFill/>
@@ -6201,30 +4618,49 @@
           </a:p>
         </p:txBody>
       </p:sp>
-      <p:pic>
-        <p:nvPicPr>
-          <p:cNvPr id="3" name="Picture 2" descr="logo_uniajc_color.png"/>
-          <p:cNvPicPr>
-            <a:picLocks noChangeAspect="1"/>
-          </p:cNvPicPr>
-          <p:nvPr/>
-        </p:nvPicPr>
-        <p:blipFill>
-          <a:blip r:embed="rId2"/>
-          <a:stretch>
-            <a:fillRect/>
-          </a:stretch>
-        </p:blipFill>
-        <p:spPr>
-          <a:xfrm>
-            <a:off x="10271455" y="5998464"/>
-            <a:ext cx="1463040" cy="643233"/>
-          </a:xfrm>
-          <a:prstGeom prst="rect">
-            <a:avLst/>
-          </a:prstGeom>
-        </p:spPr>
-      </p:pic>
+      <p:sp>
+        <p:nvSpPr>
+          <p:cNvPr id="3" name="Rectangle 2"/>
+          <p:cNvSpPr/>
+          <p:nvPr/>
+        </p:nvSpPr>
+        <p:spPr>
+          <a:xfrm>
+            <a:off x="0" y="960120"/>
+            <a:ext cx="12191695" cy="41148"/>
+          </a:xfrm>
+          <a:prstGeom prst="rect">
+            <a:avLst/>
+          </a:prstGeom>
+          <a:solidFill>
+            <a:srgbClr val="FFD000"/>
+          </a:solidFill>
+          <a:ln>
+            <a:noFill/>
+          </a:ln>
+        </p:spPr>
+        <p:style>
+          <a:lnRef idx="1">
+            <a:schemeClr val="accent1"/>
+          </a:lnRef>
+          <a:fillRef idx="3">
+            <a:schemeClr val="accent1"/>
+          </a:fillRef>
+          <a:effectRef idx="2">
+            <a:schemeClr val="accent1"/>
+          </a:effectRef>
+          <a:fontRef idx="minor">
+            <a:schemeClr val="lt1"/>
+          </a:fontRef>
+        </p:style>
+        <p:txBody>
+          <a:bodyPr rtlCol="0" anchor="ctr"/>
+          <a:lstStyle/>
+          <a:p>
+            <a:pPr algn="ctr"/>
+          </a:p>
+        </p:txBody>
+      </p:sp>
       <p:sp>
         <p:nvSpPr>
           <p:cNvPr id="4" name="TextBox 3"/>
@@ -6233,41 +4669,8 @@
         </p:nvSpPr>
         <p:spPr>
           <a:xfrm>
-            <a:off x="457200" y="1737360"/>
-            <a:ext cx="11277295" cy="1097280"/>
-          </a:xfrm>
-          <a:prstGeom prst="rect">
-            <a:avLst/>
-          </a:prstGeom>
-          <a:noFill/>
-        </p:spPr>
-        <p:txBody>
-          <a:bodyPr wrap="square" anchor="ctr"/>
-          <a:lstStyle/>
-          <a:p>
-            <a:pPr algn="ctr"/>
-            <a:r>
-              <a:rPr sz="3400" b="1" i="0">
-                <a:solidFill>
-                  <a:srgbClr val="095292"/>
-                </a:solidFill>
-                <a:latin typeface="Calibri"/>
-              </a:rPr>
-              <a:t>Nos vemos en la sesión 8</a:t>
-            </a:r>
-          </a:p>
-        </p:txBody>
-      </p:sp>
-      <p:sp>
-        <p:nvSpPr>
-          <p:cNvPr id="5" name="TextBox 4"/>
-          <p:cNvSpPr txBox="1"/>
-          <p:nvPr/>
-        </p:nvSpPr>
-        <p:spPr>
-          <a:xfrm>
-            <a:off x="457200" y="3017520"/>
-            <a:ext cx="11277295" cy="1645920"/>
+            <a:off x="457200" y="164592"/>
+            <a:ext cx="11277295" cy="502920"/>
           </a:xfrm>
           <a:prstGeom prst="rect">
             <a:avLst/>
@@ -6280,49 +4683,28 @@
           </a:bodyPr>
           <a:lstStyle/>
           <a:p>
-            <a:pPr algn="ctr">
-              <a:spcAft>
-                <a:spcPts val="600"/>
-              </a:spcAft>
-            </a:pPr>
-            <a:r>
-              <a:rPr sz="1600" b="0" i="0">
-                <a:solidFill>
-                  <a:srgbClr val="333333"/>
-                </a:solidFill>
-                <a:latin typeface="Calibri"/>
-              </a:rPr>
-              <a:t>Ciclo de vida de los proyectos de ingeniería · Clase 7</a:t>
-            </a:r>
-          </a:p>
-          <a:p>
-            <a:pPr algn="ctr">
-              <a:spcAft>
-                <a:spcPts val="600"/>
-              </a:spcAft>
-            </a:pPr>
-            <a:r>
-              <a:rPr sz="1600" b="0" i="0">
-                <a:solidFill>
-                  <a:srgbClr val="333333"/>
-                </a:solidFill>
-                <a:latin typeface="Calibri"/>
-              </a:rPr>
-              <a:t>FI300101 · UNIAJC · Ingeniería de Sistemas</a:t>
-            </a:r>
-          </a:p>
-        </p:txBody>
-      </p:sp>
-      <p:sp>
-        <p:nvSpPr>
-          <p:cNvPr id="6" name="TextBox 5"/>
+            <a:r>
+              <a:rPr sz="2600" b="1" i="0">
+                <a:solidFill>
+                  <a:srgbClr val="FFFFFF"/>
+                </a:solidFill>
+                <a:latin typeface="Calibri"/>
+              </a:rPr>
+              <a:t>La curva del costo del cambio: qué se puede afirmar y qué no (1/2)</a:t>
+            </a:r>
+          </a:p>
+        </p:txBody>
+      </p:sp>
+      <p:sp>
+        <p:nvSpPr>
+          <p:cNvPr id="5" name="TextBox 4"/>
           <p:cNvSpPr txBox="1"/>
           <p:nvPr/>
         </p:nvSpPr>
         <p:spPr>
           <a:xfrm>
-            <a:off x="457200" y="4754880"/>
-            <a:ext cx="11277295" cy="640080"/>
+            <a:off x="457200" y="1170432"/>
+            <a:ext cx="11277295" cy="5230368"/>
           </a:xfrm>
           <a:prstGeom prst="rect">
             <a:avLst/>
@@ -6335,15 +4717,2066 @@
           </a:bodyPr>
           <a:lstStyle/>
           <a:p>
+            <a:pPr>
+              <a:spcAft>
+                <a:spcPts val="800"/>
+              </a:spcAft>
+            </a:pPr>
+            <a:r>
+              <a:rPr sz="2000" b="0" i="0">
+                <a:solidFill>
+                  <a:srgbClr val="333333"/>
+                </a:solidFill>
+                <a:latin typeface="Calibri"/>
+              </a:rPr>
+              <a:t>–   Esta tabla es el corazón cuantitativo de la sesión y hay que manejarla con el mismo rigor que se les exigió en la sesión 5 con las cifras ambientales. **Lo que se puede afirmar con seguridad: el costo de corregir un error crece con la fase en que se descubre</a:t>
+            </a:r>
+          </a:p>
+          <a:p>
+            <a:pPr>
+              <a:spcAft>
+                <a:spcPts val="800"/>
+              </a:spcAft>
+            </a:pPr>
+            <a:r>
+              <a:rPr sz="2000" b="0" i="0">
+                <a:solidFill>
+                  <a:srgbClr val="333333"/>
+                </a:solidFill>
+                <a:latin typeface="Calibri"/>
+              </a:rPr>
+              <a:t>–   Y crece por órdenes de magnitud entre los extremos.** La forma de esa curva la documentó Barry Boehm en los años setenta a partir de datos de proyectos reales</a:t>
+            </a:r>
+          </a:p>
+          <a:p>
+            <a:pPr>
+              <a:spcAft>
+                <a:spcPts val="800"/>
+              </a:spcAft>
+            </a:pPr>
+            <a:r>
+              <a:rPr sz="2000" b="0" i="0">
+                <a:solidFill>
+                  <a:srgbClr val="333333"/>
+                </a:solidFill>
+                <a:latin typeface="Calibri"/>
+              </a:rPr>
+              <a:t>–   Y se ha vuelto a medir muchas veces desde entonces. </a:t>
+            </a:r>
+            <a:r>
+              <a:rPr sz="2000" b="1" i="0">
+                <a:solidFill>
+                  <a:srgbClr val="333333"/>
+                </a:solidFill>
+                <a:latin typeface="Calibri"/>
+              </a:rPr>
+              <a:t>Lo que no conviene afirmar: los múltiplos exactos.</a:t>
+            </a:r>
+            <a:r>
+              <a:rPr sz="2000" b="0" i="0">
+                <a:solidFill>
+                  <a:srgbClr val="333333"/>
+                </a:solidFill>
+                <a:latin typeface="Calibri"/>
+              </a:rPr>
+              <a:t> Circulan tablas con «1× / 5× / 10× / 100×» presentadas como leyes de la naturaleza</a:t>
+            </a:r>
+          </a:p>
+          <a:p>
+            <a:pPr>
+              <a:spcAft>
+                <a:spcPts val="800"/>
+              </a:spcAft>
+            </a:pPr>
+            <a:r>
+              <a:rPr sz="2000" b="0" i="0">
+                <a:solidFill>
+                  <a:srgbClr val="333333"/>
+                </a:solidFill>
+                <a:latin typeface="Calibri"/>
+              </a:rPr>
+              <a:t>–   Y hay literatura que discute si en desarrollo iterativo la curva es tan pronunciada.</a:t>
+            </a:r>
+          </a:p>
+          <a:p>
+            <a:pPr>
+              <a:spcAft>
+                <a:spcPts val="800"/>
+              </a:spcAft>
+            </a:pPr>
+            <a:r>
+              <a:rPr sz="2000" b="0" i="0">
+                <a:solidFill>
+                  <a:srgbClr val="333333"/>
+                </a:solidFill>
+                <a:latin typeface="Calibri"/>
+              </a:rPr>
+              <a:t>–   Diga eso explícitamente en clase: es una oportunidad de oro para mostrar que un ingeniero puede usar un resultado clásico sin exagerarlo.</a:t>
+            </a:r>
+          </a:p>
+        </p:txBody>
+      </p:sp>
+      <p:sp>
+        <p:nvSpPr>
+          <p:cNvPr id="6" name="TextBox 5"/>
+          <p:cNvSpPr txBox="1"/>
+          <p:nvPr/>
+        </p:nvSpPr>
+        <p:spPr>
+          <a:xfrm>
+            <a:off x="11185855" y="6473952"/>
+            <a:ext cx="640080" cy="274320"/>
+          </a:xfrm>
+          <a:prstGeom prst="rect">
+            <a:avLst/>
+          </a:prstGeom>
+          <a:noFill/>
+        </p:spPr>
+        <p:txBody>
+          <a:bodyPr wrap="square">
+            <a:spAutoFit/>
+          </a:bodyPr>
+          <a:lstStyle/>
+          <a:p>
+            <a:pPr algn="r"/>
+            <a:r>
+              <a:rPr sz="1100" b="0" i="0">
+                <a:solidFill>
+                  <a:srgbClr val="666666"/>
+                </a:solidFill>
+                <a:latin typeface="Calibri"/>
+              </a:rPr>
+              <a:t>13</a:t>
+            </a:r>
+          </a:p>
+        </p:txBody>
+      </p:sp>
+    </p:spTree>
+  </p:cSld>
+  <p:clrMapOvr>
+    <a:masterClrMapping/>
+  </p:clrMapOvr>
+</p:sld>
+</file>
+
+<file path=ppt/slides/slide14.xml><?xml version="1.0" encoding="utf-8"?>
+<p:sld xmlns:a="http://schemas.openxmlformats.org/drawingml/2006/main" xmlns:p="http://schemas.openxmlformats.org/presentationml/2006/main" xmlns:r="http://schemas.openxmlformats.org/officeDocument/2006/relationships">
+  <p:cSld>
+    <p:bg>
+      <p:bgPr>
+        <a:solidFill>
+          <a:srgbClr val="FFFFFF"/>
+        </a:solidFill>
+        <a:effectLst/>
+      </p:bgPr>
+    </p:bg>
+    <p:spTree>
+      <p:nvGrpSpPr>
+        <p:cNvPr id="1" name=""/>
+        <p:cNvGrpSpPr/>
+        <p:nvPr/>
+      </p:nvGrpSpPr>
+      <p:grpSpPr/>
+      <p:sp>
+        <p:nvSpPr>
+          <p:cNvPr id="2" name="Rectangle 1"/>
+          <p:cNvSpPr/>
+          <p:nvPr/>
+        </p:nvSpPr>
+        <p:spPr>
+          <a:xfrm>
+            <a:off x="0" y="0"/>
+            <a:ext cx="12191695" cy="960120"/>
+          </a:xfrm>
+          <a:prstGeom prst="rect">
+            <a:avLst/>
+          </a:prstGeom>
+          <a:solidFill>
+            <a:srgbClr val="095292"/>
+          </a:solidFill>
+          <a:ln>
+            <a:noFill/>
+          </a:ln>
+        </p:spPr>
+        <p:style>
+          <a:lnRef idx="1">
+            <a:schemeClr val="accent1"/>
+          </a:lnRef>
+          <a:fillRef idx="3">
+            <a:schemeClr val="accent1"/>
+          </a:fillRef>
+          <a:effectRef idx="2">
+            <a:schemeClr val="accent1"/>
+          </a:effectRef>
+          <a:fontRef idx="minor">
+            <a:schemeClr val="lt1"/>
+          </a:fontRef>
+        </p:style>
+        <p:txBody>
+          <a:bodyPr rtlCol="0" anchor="ctr"/>
+          <a:lstStyle/>
+          <a:p>
             <a:pPr algn="ctr"/>
+          </a:p>
+        </p:txBody>
+      </p:sp>
+      <p:sp>
+        <p:nvSpPr>
+          <p:cNvPr id="3" name="Rectangle 2"/>
+          <p:cNvSpPr/>
+          <p:nvPr/>
+        </p:nvSpPr>
+        <p:spPr>
+          <a:xfrm>
+            <a:off x="0" y="960120"/>
+            <a:ext cx="12191695" cy="41148"/>
+          </a:xfrm>
+          <a:prstGeom prst="rect">
+            <a:avLst/>
+          </a:prstGeom>
+          <a:solidFill>
+            <a:srgbClr val="FFD000"/>
+          </a:solidFill>
+          <a:ln>
+            <a:noFill/>
+          </a:ln>
+        </p:spPr>
+        <p:style>
+          <a:lnRef idx="1">
+            <a:schemeClr val="accent1"/>
+          </a:lnRef>
+          <a:fillRef idx="3">
+            <a:schemeClr val="accent1"/>
+          </a:fillRef>
+          <a:effectRef idx="2">
+            <a:schemeClr val="accent1"/>
+          </a:effectRef>
+          <a:fontRef idx="minor">
+            <a:schemeClr val="lt1"/>
+          </a:fontRef>
+        </p:style>
+        <p:txBody>
+          <a:bodyPr rtlCol="0" anchor="ctr"/>
+          <a:lstStyle/>
+          <a:p>
+            <a:pPr algn="ctr"/>
+          </a:p>
+        </p:txBody>
+      </p:sp>
+      <p:sp>
+        <p:nvSpPr>
+          <p:cNvPr id="4" name="TextBox 3"/>
+          <p:cNvSpPr txBox="1"/>
+          <p:nvPr/>
+        </p:nvSpPr>
+        <p:spPr>
+          <a:xfrm>
+            <a:off x="457200" y="164592"/>
+            <a:ext cx="11277295" cy="502920"/>
+          </a:xfrm>
+          <a:prstGeom prst="rect">
+            <a:avLst/>
+          </a:prstGeom>
+          <a:noFill/>
+        </p:spPr>
+        <p:txBody>
+          <a:bodyPr wrap="square">
+            <a:spAutoFit/>
+          </a:bodyPr>
+          <a:lstStyle/>
+          <a:p>
+            <a:r>
+              <a:rPr sz="2600" b="1" i="0">
+                <a:solidFill>
+                  <a:srgbClr val="FFFFFF"/>
+                </a:solidFill>
+                <a:latin typeface="Calibri"/>
+              </a:rPr>
+              <a:t>La curva del costo del cambio: qué se puede afirmar y qué no (2/2)</a:t>
+            </a:r>
+          </a:p>
+        </p:txBody>
+      </p:sp>
+      <p:sp>
+        <p:nvSpPr>
+          <p:cNvPr id="5" name="TextBox 4"/>
+          <p:cNvSpPr txBox="1"/>
+          <p:nvPr/>
+        </p:nvSpPr>
+        <p:spPr>
+          <a:xfrm>
+            <a:off x="457200" y="1170432"/>
+            <a:ext cx="11277295" cy="5230368"/>
+          </a:xfrm>
+          <a:prstGeom prst="rect">
+            <a:avLst/>
+          </a:prstGeom>
+          <a:noFill/>
+        </p:spPr>
+        <p:txBody>
+          <a:bodyPr wrap="square">
+            <a:spAutoFit/>
+          </a:bodyPr>
+          <a:lstStyle/>
+          <a:p>
+            <a:pPr>
+              <a:spcAft>
+                <a:spcPts val="800"/>
+              </a:spcAft>
+            </a:pPr>
+            <a:r>
+              <a:rPr sz="2000" b="0" i="0">
+                <a:solidFill>
+                  <a:srgbClr val="333333"/>
+                </a:solidFill>
+                <a:latin typeface="Calibri"/>
+              </a:rPr>
+              <a:t>–   La dirección de la curva no está en discusión; la pendiente sí.</a:t>
+            </a:r>
+          </a:p>
+          <a:p>
+            <a:pPr>
+              <a:spcAft>
+                <a:spcPts val="800"/>
+              </a:spcAft>
+            </a:pPr>
+            <a:r>
+              <a:rPr sz="2000" b="0" i="0">
+                <a:solidFill>
+                  <a:srgbClr val="333333"/>
+                </a:solidFill>
+                <a:latin typeface="Calibri"/>
+              </a:rPr>
+              <a:t>–   El uso práctico de la tabla es una pregunta que los equipos van a responder en el taller: *¿qué decisión que estamos tomando hoy sería carísima cambiar en la Clase 14?* Casi siempre la respuesta es un requisito mal entendido o una restricción ignorada, y hacer la pregunta hoy es lo que la vuelve barata.</a:t>
+            </a:r>
+          </a:p>
+          <a:p>
+            <a:pPr>
+              <a:spcAft>
+                <a:spcPts val="800"/>
+              </a:spcAft>
+            </a:pPr>
+            <a:r>
+              <a:rPr sz="2000" b="0" i="0">
+                <a:solidFill>
+                  <a:srgbClr val="333333"/>
+                </a:solidFill>
+                <a:latin typeface="Calibri"/>
+              </a:rPr>
+              <a:t>–   Hay un segundo uso, más sutil, que vale la pena señalar si el grupo responde bien: la curva explica por qué las revisiones tempranas —que se sienten como pérdida de tiempo porque todavía no hay nada construido— son la actividad más rentable del proyecto.</a:t>
+            </a:r>
+          </a:p>
+          <a:p>
+            <a:pPr>
+              <a:spcAft>
+                <a:spcPts val="800"/>
+              </a:spcAft>
+            </a:pPr>
+            <a:r>
+              <a:rPr sz="2000" b="0" i="0">
+                <a:solidFill>
+                  <a:srgbClr val="333333"/>
+                </a:solidFill>
+                <a:latin typeface="Calibri"/>
+              </a:rPr>
+              <a:t>–   En el Therac-25 de la sesión 4, la revisión independiente del software que nunca se hizo era justamente eso.</a:t>
+            </a:r>
+          </a:p>
+        </p:txBody>
+      </p:sp>
+      <p:sp>
+        <p:nvSpPr>
+          <p:cNvPr id="6" name="TextBox 5"/>
+          <p:cNvSpPr txBox="1"/>
+          <p:nvPr/>
+        </p:nvSpPr>
+        <p:spPr>
+          <a:xfrm>
+            <a:off x="11185855" y="6473952"/>
+            <a:ext cx="640080" cy="274320"/>
+          </a:xfrm>
+          <a:prstGeom prst="rect">
+            <a:avLst/>
+          </a:prstGeom>
+          <a:noFill/>
+        </p:spPr>
+        <p:txBody>
+          <a:bodyPr wrap="square">
+            <a:spAutoFit/>
+          </a:bodyPr>
+          <a:lstStyle/>
+          <a:p>
+            <a:pPr algn="r"/>
+            <a:r>
+              <a:rPr sz="1100" b="0" i="0">
+                <a:solidFill>
+                  <a:srgbClr val="666666"/>
+                </a:solidFill>
+                <a:latin typeface="Calibri"/>
+              </a:rPr>
+              <a:t>14</a:t>
+            </a:r>
+          </a:p>
+        </p:txBody>
+      </p:sp>
+    </p:spTree>
+  </p:cSld>
+  <p:clrMapOvr>
+    <a:masterClrMapping/>
+  </p:clrMapOvr>
+</p:sld>
+</file>
+
+<file path=ppt/slides/slide15.xml><?xml version="1.0" encoding="utf-8"?>
+<p:sld xmlns:a="http://schemas.openxmlformats.org/drawingml/2006/main" xmlns:p="http://schemas.openxmlformats.org/presentationml/2006/main" xmlns:r="http://schemas.openxmlformats.org/officeDocument/2006/relationships">
+  <p:cSld>
+    <p:bg>
+      <p:bgPr>
+        <a:solidFill>
+          <a:srgbClr val="FFFFFF"/>
+        </a:solidFill>
+        <a:effectLst/>
+      </p:bgPr>
+    </p:bg>
+    <p:spTree>
+      <p:nvGrpSpPr>
+        <p:cNvPr id="1" name=""/>
+        <p:cNvGrpSpPr/>
+        <p:nvPr/>
+      </p:nvGrpSpPr>
+      <p:grpSpPr/>
+      <p:sp>
+        <p:nvSpPr>
+          <p:cNvPr id="2" name="Rectangle 1"/>
+          <p:cNvSpPr/>
+          <p:nvPr/>
+        </p:nvSpPr>
+        <p:spPr>
+          <a:xfrm>
+            <a:off x="0" y="0"/>
+            <a:ext cx="12191695" cy="960120"/>
+          </a:xfrm>
+          <a:prstGeom prst="rect">
+            <a:avLst/>
+          </a:prstGeom>
+          <a:solidFill>
+            <a:srgbClr val="095292"/>
+          </a:solidFill>
+          <a:ln>
+            <a:noFill/>
+          </a:ln>
+        </p:spPr>
+        <p:style>
+          <a:lnRef idx="1">
+            <a:schemeClr val="accent1"/>
+          </a:lnRef>
+          <a:fillRef idx="3">
+            <a:schemeClr val="accent1"/>
+          </a:fillRef>
+          <a:effectRef idx="2">
+            <a:schemeClr val="accent1"/>
+          </a:effectRef>
+          <a:fontRef idx="minor">
+            <a:schemeClr val="lt1"/>
+          </a:fontRef>
+        </p:style>
+        <p:txBody>
+          <a:bodyPr rtlCol="0" anchor="ctr"/>
+          <a:lstStyle/>
+          <a:p>
+            <a:pPr algn="ctr"/>
+          </a:p>
+        </p:txBody>
+      </p:sp>
+      <p:sp>
+        <p:nvSpPr>
+          <p:cNvPr id="3" name="Rectangle 2"/>
+          <p:cNvSpPr/>
+          <p:nvPr/>
+        </p:nvSpPr>
+        <p:spPr>
+          <a:xfrm>
+            <a:off x="0" y="960120"/>
+            <a:ext cx="12191695" cy="41148"/>
+          </a:xfrm>
+          <a:prstGeom prst="rect">
+            <a:avLst/>
+          </a:prstGeom>
+          <a:solidFill>
+            <a:srgbClr val="FFD000"/>
+          </a:solidFill>
+          <a:ln>
+            <a:noFill/>
+          </a:ln>
+        </p:spPr>
+        <p:style>
+          <a:lnRef idx="1">
+            <a:schemeClr val="accent1"/>
+          </a:lnRef>
+          <a:fillRef idx="3">
+            <a:schemeClr val="accent1"/>
+          </a:fillRef>
+          <a:effectRef idx="2">
+            <a:schemeClr val="accent1"/>
+          </a:effectRef>
+          <a:fontRef idx="minor">
+            <a:schemeClr val="lt1"/>
+          </a:fontRef>
+        </p:style>
+        <p:txBody>
+          <a:bodyPr rtlCol="0" anchor="ctr"/>
+          <a:lstStyle/>
+          <a:p>
+            <a:pPr algn="ctr"/>
+          </a:p>
+        </p:txBody>
+      </p:sp>
+      <p:sp>
+        <p:nvSpPr>
+          <p:cNvPr id="4" name="TextBox 3"/>
+          <p:cNvSpPr txBox="1"/>
+          <p:nvPr/>
+        </p:nvSpPr>
+        <p:spPr>
+          <a:xfrm>
+            <a:off x="457200" y="164592"/>
+            <a:ext cx="11277295" cy="502920"/>
+          </a:xfrm>
+          <a:prstGeom prst="rect">
+            <a:avLst/>
+          </a:prstGeom>
+          <a:noFill/>
+        </p:spPr>
+        <p:txBody>
+          <a:bodyPr wrap="square">
+            <a:spAutoFit/>
+          </a:bodyPr>
+          <a:lstStyle/>
+          <a:p>
+            <a:r>
+              <a:rPr sz="2600" b="1" i="0">
+                <a:solidFill>
+                  <a:srgbClr val="FFFFFF"/>
+                </a:solidFill>
+                <a:latin typeface="Calibri"/>
+              </a:rPr>
+              <a:t>Cascada, iterativo, y lo que Royce dijo de verdad (1/2)</a:t>
+            </a:r>
+          </a:p>
+        </p:txBody>
+      </p:sp>
+      <p:sp>
+        <p:nvSpPr>
+          <p:cNvPr id="5" name="TextBox 4"/>
+          <p:cNvSpPr txBox="1"/>
+          <p:nvPr/>
+        </p:nvSpPr>
+        <p:spPr>
+          <a:xfrm>
+            <a:off x="457200" y="1170432"/>
+            <a:ext cx="11277295" cy="5230368"/>
+          </a:xfrm>
+          <a:prstGeom prst="rect">
+            <a:avLst/>
+          </a:prstGeom>
+          <a:noFill/>
+        </p:spPr>
+        <p:txBody>
+          <a:bodyPr wrap="square">
+            <a:spAutoFit/>
+          </a:bodyPr>
+          <a:lstStyle/>
+          <a:p>
+            <a:pPr>
+              <a:spcAft>
+                <a:spcPts val="800"/>
+              </a:spcAft>
+            </a:pPr>
+            <a:r>
+              <a:rPr sz="2000" b="0" i="0">
+                <a:solidFill>
+                  <a:srgbClr val="333333"/>
+                </a:solidFill>
+                <a:latin typeface="Calibri"/>
+              </a:rPr>
+              <a:t>–   En la sesión 2 apareció Royce y su artículo de 1970.</a:t>
+            </a:r>
+          </a:p>
+          <a:p>
+            <a:pPr>
+              <a:spcAft>
+                <a:spcPts val="800"/>
+              </a:spcAft>
+            </a:pPr>
+            <a:r>
+              <a:rPr sz="2000" b="0" i="0">
+                <a:solidFill>
+                  <a:srgbClr val="333333"/>
+                </a:solidFill>
+                <a:latin typeface="Calibri"/>
+              </a:rPr>
+              <a:t>–   Hoy se cierra el punto, porque es una de las confusiones más extendidas de la profesión: **el diagrama de cascada de una sola pasada suele atribuirse a Royce como su propuesta</a:t>
+            </a:r>
+          </a:p>
+          <a:p>
+            <a:pPr>
+              <a:spcAft>
+                <a:spcPts val="800"/>
+              </a:spcAft>
+            </a:pPr>
+            <a:r>
+              <a:rPr sz="2000" b="0" i="0">
+                <a:solidFill>
+                  <a:srgbClr val="333333"/>
+                </a:solidFill>
+                <a:latin typeface="Calibri"/>
+              </a:rPr>
+              <a:t>–   Y en el mismo texto él lo presentó como el modo riesgoso y advirtió que hacerlo así invita al fracaso**.</a:t>
+            </a:r>
+          </a:p>
+          <a:p>
+            <a:pPr>
+              <a:spcAft>
+                <a:spcPts val="800"/>
+              </a:spcAft>
+            </a:pPr>
+            <a:r>
+              <a:rPr sz="2000" b="0" i="0">
+                <a:solidFill>
+                  <a:srgbClr val="333333"/>
+                </a:solidFill>
+                <a:latin typeface="Calibri"/>
+              </a:rPr>
+              <a:t>–   Su propuesta incluía volver atrás, prototipar y hacer el trabajo dos veces.</a:t>
+            </a:r>
+          </a:p>
+          <a:p>
+            <a:pPr>
+              <a:spcAft>
+                <a:spcPts val="800"/>
+              </a:spcAft>
+            </a:pPr>
+            <a:r>
+              <a:rPr sz="2000" b="0" i="0">
+                <a:solidFill>
+                  <a:srgbClr val="333333"/>
+                </a:solidFill>
+                <a:latin typeface="Calibri"/>
+              </a:rPr>
+              <a:t>–   La profesión se quedó con el dibujo y perdió la advertencia.</a:t>
+            </a:r>
+          </a:p>
+          <a:p>
+            <a:pPr>
+              <a:spcAft>
+                <a:spcPts val="800"/>
+              </a:spcAft>
+            </a:pPr>
+            <a:r>
+              <a:rPr sz="2000" b="0" i="0">
+                <a:solidFill>
+                  <a:srgbClr val="333333"/>
+                </a:solidFill>
+                <a:latin typeface="Calibri"/>
+              </a:rPr>
+              <a:t>–   La comparación que importa para el curso no es «cascada mala, ágil bueno» —esa es una caricatura y hay que evitarla—.</a:t>
+            </a:r>
+          </a:p>
+          <a:p>
+            <a:pPr>
+              <a:spcAft>
+                <a:spcPts val="800"/>
+              </a:spcAft>
+            </a:pPr>
+            <a:r>
+              <a:rPr sz="2000" b="0" i="0">
+                <a:solidFill>
+                  <a:srgbClr val="333333"/>
+                </a:solidFill>
+                <a:latin typeface="Calibri"/>
+              </a:rPr>
+              <a:t>–   Es esta: </a:t>
+            </a:r>
             <a:r>
               <a:rPr sz="2000" b="1" i="0">
                 <a:solidFill>
-                  <a:srgbClr val="269CCB"/>
-                </a:solidFill>
-                <a:latin typeface="Calibri"/>
-              </a:rPr>
-              <a:t>El error barato es el que se encuentra temprano</a:t>
+                  <a:srgbClr val="333333"/>
+                </a:solidFill>
+                <a:latin typeface="Calibri"/>
+              </a:rPr>
+              <a:t>las fases son las mismas en los dos; lo que cambia es cuántas veces se recorren y cuándo aparece el usuario</a:t>
+            </a:r>
+            <a:r>
+              <a:rPr sz="2000" b="0" i="0">
+                <a:solidFill>
+                  <a:srgbClr val="333333"/>
+                </a:solidFill>
+                <a:latin typeface="Calibri"/>
+              </a:rPr>
+              <a:t>.</a:t>
+            </a:r>
+          </a:p>
+          <a:p>
+            <a:pPr>
+              <a:spcAft>
+                <a:spcPts val="800"/>
+              </a:spcAft>
+            </a:pPr>
+            <a:r>
+              <a:rPr sz="2000" b="0" i="0">
+                <a:solidFill>
+                  <a:srgbClr val="333333"/>
+                </a:solidFill>
+                <a:latin typeface="Calibri"/>
+              </a:rPr>
+              <a:t>–   La cascada de una pasada es razonable cuando el problema es conocido, estable y el costo de equivocarse al final es asumible.</a:t>
+            </a:r>
+          </a:p>
+        </p:txBody>
+      </p:sp>
+      <p:sp>
+        <p:nvSpPr>
+          <p:cNvPr id="6" name="TextBox 5"/>
+          <p:cNvSpPr txBox="1"/>
+          <p:nvPr/>
+        </p:nvSpPr>
+        <p:spPr>
+          <a:xfrm>
+            <a:off x="11185855" y="6473952"/>
+            <a:ext cx="640080" cy="274320"/>
+          </a:xfrm>
+          <a:prstGeom prst="rect">
+            <a:avLst/>
+          </a:prstGeom>
+          <a:noFill/>
+        </p:spPr>
+        <p:txBody>
+          <a:bodyPr wrap="square">
+            <a:spAutoFit/>
+          </a:bodyPr>
+          <a:lstStyle/>
+          <a:p>
+            <a:pPr algn="r"/>
+            <a:r>
+              <a:rPr sz="1100" b="0" i="0">
+                <a:solidFill>
+                  <a:srgbClr val="666666"/>
+                </a:solidFill>
+                <a:latin typeface="Calibri"/>
+              </a:rPr>
+              <a:t>15</a:t>
+            </a:r>
+          </a:p>
+        </p:txBody>
+      </p:sp>
+    </p:spTree>
+  </p:cSld>
+  <p:clrMapOvr>
+    <a:masterClrMapping/>
+  </p:clrMapOvr>
+</p:sld>
+</file>
+
+<file path=ppt/slides/slide16.xml><?xml version="1.0" encoding="utf-8"?>
+<p:sld xmlns:a="http://schemas.openxmlformats.org/drawingml/2006/main" xmlns:p="http://schemas.openxmlformats.org/presentationml/2006/main" xmlns:r="http://schemas.openxmlformats.org/officeDocument/2006/relationships">
+  <p:cSld>
+    <p:bg>
+      <p:bgPr>
+        <a:solidFill>
+          <a:srgbClr val="FFFFFF"/>
+        </a:solidFill>
+        <a:effectLst/>
+      </p:bgPr>
+    </p:bg>
+    <p:spTree>
+      <p:nvGrpSpPr>
+        <p:cNvPr id="1" name=""/>
+        <p:cNvGrpSpPr/>
+        <p:nvPr/>
+      </p:nvGrpSpPr>
+      <p:grpSpPr/>
+      <p:sp>
+        <p:nvSpPr>
+          <p:cNvPr id="2" name="Rectangle 1"/>
+          <p:cNvSpPr/>
+          <p:nvPr/>
+        </p:nvSpPr>
+        <p:spPr>
+          <a:xfrm>
+            <a:off x="0" y="0"/>
+            <a:ext cx="12191695" cy="960120"/>
+          </a:xfrm>
+          <a:prstGeom prst="rect">
+            <a:avLst/>
+          </a:prstGeom>
+          <a:solidFill>
+            <a:srgbClr val="095292"/>
+          </a:solidFill>
+          <a:ln>
+            <a:noFill/>
+          </a:ln>
+        </p:spPr>
+        <p:style>
+          <a:lnRef idx="1">
+            <a:schemeClr val="accent1"/>
+          </a:lnRef>
+          <a:fillRef idx="3">
+            <a:schemeClr val="accent1"/>
+          </a:fillRef>
+          <a:effectRef idx="2">
+            <a:schemeClr val="accent1"/>
+          </a:effectRef>
+          <a:fontRef idx="minor">
+            <a:schemeClr val="lt1"/>
+          </a:fontRef>
+        </p:style>
+        <p:txBody>
+          <a:bodyPr rtlCol="0" anchor="ctr"/>
+          <a:lstStyle/>
+          <a:p>
+            <a:pPr algn="ctr"/>
+          </a:p>
+        </p:txBody>
+      </p:sp>
+      <p:sp>
+        <p:nvSpPr>
+          <p:cNvPr id="3" name="Rectangle 2"/>
+          <p:cNvSpPr/>
+          <p:nvPr/>
+        </p:nvSpPr>
+        <p:spPr>
+          <a:xfrm>
+            <a:off x="0" y="960120"/>
+            <a:ext cx="12191695" cy="41148"/>
+          </a:xfrm>
+          <a:prstGeom prst="rect">
+            <a:avLst/>
+          </a:prstGeom>
+          <a:solidFill>
+            <a:srgbClr val="FFD000"/>
+          </a:solidFill>
+          <a:ln>
+            <a:noFill/>
+          </a:ln>
+        </p:spPr>
+        <p:style>
+          <a:lnRef idx="1">
+            <a:schemeClr val="accent1"/>
+          </a:lnRef>
+          <a:fillRef idx="3">
+            <a:schemeClr val="accent1"/>
+          </a:fillRef>
+          <a:effectRef idx="2">
+            <a:schemeClr val="accent1"/>
+          </a:effectRef>
+          <a:fontRef idx="minor">
+            <a:schemeClr val="lt1"/>
+          </a:fontRef>
+        </p:style>
+        <p:txBody>
+          <a:bodyPr rtlCol="0" anchor="ctr"/>
+          <a:lstStyle/>
+          <a:p>
+            <a:pPr algn="ctr"/>
+          </a:p>
+        </p:txBody>
+      </p:sp>
+      <p:sp>
+        <p:nvSpPr>
+          <p:cNvPr id="4" name="TextBox 3"/>
+          <p:cNvSpPr txBox="1"/>
+          <p:nvPr/>
+        </p:nvSpPr>
+        <p:spPr>
+          <a:xfrm>
+            <a:off x="457200" y="164592"/>
+            <a:ext cx="11277295" cy="502920"/>
+          </a:xfrm>
+          <a:prstGeom prst="rect">
+            <a:avLst/>
+          </a:prstGeom>
+          <a:noFill/>
+        </p:spPr>
+        <p:txBody>
+          <a:bodyPr wrap="square">
+            <a:spAutoFit/>
+          </a:bodyPr>
+          <a:lstStyle/>
+          <a:p>
+            <a:r>
+              <a:rPr sz="2600" b="1" i="0">
+                <a:solidFill>
+                  <a:srgbClr val="FFFFFF"/>
+                </a:solidFill>
+                <a:latin typeface="Calibri"/>
+              </a:rPr>
+              <a:t>Cascada, iterativo, y lo que Royce dijo de verdad (2/2)</a:t>
+            </a:r>
+          </a:p>
+        </p:txBody>
+      </p:sp>
+      <p:sp>
+        <p:nvSpPr>
+          <p:cNvPr id="5" name="TextBox 4"/>
+          <p:cNvSpPr txBox="1"/>
+          <p:nvPr/>
+        </p:nvSpPr>
+        <p:spPr>
+          <a:xfrm>
+            <a:off x="457200" y="1170432"/>
+            <a:ext cx="11277295" cy="5230368"/>
+          </a:xfrm>
+          <a:prstGeom prst="rect">
+            <a:avLst/>
+          </a:prstGeom>
+          <a:noFill/>
+        </p:spPr>
+        <p:txBody>
+          <a:bodyPr wrap="square">
+            <a:spAutoFit/>
+          </a:bodyPr>
+          <a:lstStyle/>
+          <a:p>
+            <a:pPr>
+              <a:spcAft>
+                <a:spcPts val="800"/>
+              </a:spcAft>
+            </a:pPr>
+            <a:r>
+              <a:rPr sz="2000" b="0" i="0">
+                <a:solidFill>
+                  <a:srgbClr val="333333"/>
+                </a:solidFill>
+                <a:latin typeface="Calibri"/>
+              </a:rPr>
+              <a:t>–   El enfoque iterativo es mejor cuando hay incertidumbre sobre qué necesita el usuario, que es la situación normal y en particular la de todos los proyectos de este curso.</a:t>
+            </a:r>
+          </a:p>
+          <a:p>
+            <a:pPr>
+              <a:spcAft>
+                <a:spcPts val="800"/>
+              </a:spcAft>
+            </a:pPr>
+            <a:r>
+              <a:rPr sz="2000" b="0" i="0">
+                <a:solidFill>
+                  <a:srgbClr val="333333"/>
+                </a:solidFill>
+                <a:latin typeface="Calibri"/>
+              </a:rPr>
+              <a:t>–   Aterrícelo en el calendario, porque eso les hace sentir la diferencia: </a:t>
+            </a:r>
+            <a:r>
+              <a:rPr sz="2000" b="1" i="0">
+                <a:solidFill>
+                  <a:srgbClr val="333333"/>
+                </a:solidFill>
+                <a:latin typeface="Calibri"/>
+              </a:rPr>
+              <a:t>este curso va a hacer dos vueltas completas</a:t>
+            </a:r>
+            <a:r>
+              <a:rPr sz="2000" b="0" i="0">
+                <a:solidFill>
+                  <a:srgbClr val="333333"/>
+                </a:solidFill>
+                <a:latin typeface="Calibri"/>
+              </a:rPr>
+              <a:t>.</a:t>
+            </a:r>
+          </a:p>
+          <a:p>
+            <a:pPr>
+              <a:spcAft>
+                <a:spcPts val="800"/>
+              </a:spcAft>
+            </a:pPr>
+            <a:r>
+              <a:rPr sz="2000" b="0" i="0">
+                <a:solidFill>
+                  <a:srgbClr val="333333"/>
+                </a:solidFill>
+                <a:latin typeface="Calibri"/>
+              </a:rPr>
+              <a:t>–   Una corta en las sesiones 10 y 11 —prototipo de baja fidelidad, prueba, corrección— y otra en las Clases 12 a 14, con la retroalimentación de la presentación de avances.</a:t>
+            </a:r>
+          </a:p>
+          <a:p>
+            <a:pPr>
+              <a:spcAft>
+                <a:spcPts val="800"/>
+              </a:spcAft>
+            </a:pPr>
+            <a:r>
+              <a:rPr sz="2000" b="0" i="0">
+                <a:solidFill>
+                  <a:srgbClr val="333333"/>
+                </a:solidFill>
+                <a:latin typeface="Calibri"/>
+              </a:rPr>
+              <a:t>–   No es una decisión estética del docente: es la manera de que el error de requisitos aparezca en la sesión 10 y no en la 15, cuando ya no hay tiempo.</a:t>
+            </a:r>
+          </a:p>
+          <a:p>
+            <a:pPr>
+              <a:spcAft>
+                <a:spcPts val="800"/>
+              </a:spcAft>
+            </a:pPr>
+            <a:r>
+              <a:rPr sz="2000" b="0" i="0">
+                <a:solidFill>
+                  <a:srgbClr val="333333"/>
+                </a:solidFill>
+                <a:latin typeface="Calibri"/>
+              </a:rPr>
+              <a:t>–   Si alguien pregunta por el Manifiesto Ágil de 2001, que salió en la sesión 2: la respuesta honesta es que reordenó prioridades —software funcionando sobre documentación, colaboración sobre contrato— y que no eliminó las fases.</a:t>
+            </a:r>
+          </a:p>
+          <a:p>
+            <a:pPr>
+              <a:spcAft>
+                <a:spcPts val="800"/>
+              </a:spcAft>
+            </a:pPr>
+            <a:r>
+              <a:rPr sz="2000" b="0" i="0">
+                <a:solidFill>
+                  <a:srgbClr val="333333"/>
+                </a:solidFill>
+                <a:latin typeface="Calibri"/>
+              </a:rPr>
+              <a:t>–   Un equipo ágil sigue definiendo el problema, escribiendo requisitos, diseñando, construyendo y validando; lo hace en ciclos cortos y con menos ceremonia.</a:t>
+            </a:r>
+          </a:p>
+        </p:txBody>
+      </p:sp>
+      <p:sp>
+        <p:nvSpPr>
+          <p:cNvPr id="6" name="TextBox 5"/>
+          <p:cNvSpPr txBox="1"/>
+          <p:nvPr/>
+        </p:nvSpPr>
+        <p:spPr>
+          <a:xfrm>
+            <a:off x="11185855" y="6473952"/>
+            <a:ext cx="640080" cy="274320"/>
+          </a:xfrm>
+          <a:prstGeom prst="rect">
+            <a:avLst/>
+          </a:prstGeom>
+          <a:noFill/>
+        </p:spPr>
+        <p:txBody>
+          <a:bodyPr wrap="square">
+            <a:spAutoFit/>
+          </a:bodyPr>
+          <a:lstStyle/>
+          <a:p>
+            <a:pPr algn="r"/>
+            <a:r>
+              <a:rPr sz="1100" b="0" i="0">
+                <a:solidFill>
+                  <a:srgbClr val="666666"/>
+                </a:solidFill>
+                <a:latin typeface="Calibri"/>
+              </a:rPr>
+              <a:t>16</a:t>
+            </a:r>
+          </a:p>
+        </p:txBody>
+      </p:sp>
+    </p:spTree>
+  </p:cSld>
+  <p:clrMapOvr>
+    <a:masterClrMapping/>
+  </p:clrMapOvr>
+</p:sld>
+</file>
+
+<file path=ppt/slides/slide17.xml><?xml version="1.0" encoding="utf-8"?>
+<p:sld xmlns:a="http://schemas.openxmlformats.org/drawingml/2006/main" xmlns:p="http://schemas.openxmlformats.org/presentationml/2006/main" xmlns:r="http://schemas.openxmlformats.org/officeDocument/2006/relationships">
+  <p:cSld>
+    <p:bg>
+      <p:bgPr>
+        <a:solidFill>
+          <a:srgbClr val="FFFFFF"/>
+        </a:solidFill>
+        <a:effectLst/>
+      </p:bgPr>
+    </p:bg>
+    <p:spTree>
+      <p:nvGrpSpPr>
+        <p:cNvPr id="1" name=""/>
+        <p:cNvGrpSpPr/>
+        <p:nvPr/>
+      </p:nvGrpSpPr>
+      <p:grpSpPr/>
+      <p:sp>
+        <p:nvSpPr>
+          <p:cNvPr id="2" name="Rectangle 1"/>
+          <p:cNvSpPr/>
+          <p:nvPr/>
+        </p:nvSpPr>
+        <p:spPr>
+          <a:xfrm>
+            <a:off x="0" y="0"/>
+            <a:ext cx="12191695" cy="960120"/>
+          </a:xfrm>
+          <a:prstGeom prst="rect">
+            <a:avLst/>
+          </a:prstGeom>
+          <a:solidFill>
+            <a:srgbClr val="095292"/>
+          </a:solidFill>
+          <a:ln>
+            <a:noFill/>
+          </a:ln>
+        </p:spPr>
+        <p:style>
+          <a:lnRef idx="1">
+            <a:schemeClr val="accent1"/>
+          </a:lnRef>
+          <a:fillRef idx="3">
+            <a:schemeClr val="accent1"/>
+          </a:fillRef>
+          <a:effectRef idx="2">
+            <a:schemeClr val="accent1"/>
+          </a:effectRef>
+          <a:fontRef idx="minor">
+            <a:schemeClr val="lt1"/>
+          </a:fontRef>
+        </p:style>
+        <p:txBody>
+          <a:bodyPr rtlCol="0" anchor="ctr"/>
+          <a:lstStyle/>
+          <a:p>
+            <a:pPr algn="ctr"/>
+          </a:p>
+        </p:txBody>
+      </p:sp>
+      <p:sp>
+        <p:nvSpPr>
+          <p:cNvPr id="3" name="Rectangle 2"/>
+          <p:cNvSpPr/>
+          <p:nvPr/>
+        </p:nvSpPr>
+        <p:spPr>
+          <a:xfrm>
+            <a:off x="0" y="960120"/>
+            <a:ext cx="12191695" cy="41148"/>
+          </a:xfrm>
+          <a:prstGeom prst="rect">
+            <a:avLst/>
+          </a:prstGeom>
+          <a:solidFill>
+            <a:srgbClr val="FFD000"/>
+          </a:solidFill>
+          <a:ln>
+            <a:noFill/>
+          </a:ln>
+        </p:spPr>
+        <p:style>
+          <a:lnRef idx="1">
+            <a:schemeClr val="accent1"/>
+          </a:lnRef>
+          <a:fillRef idx="3">
+            <a:schemeClr val="accent1"/>
+          </a:fillRef>
+          <a:effectRef idx="2">
+            <a:schemeClr val="accent1"/>
+          </a:effectRef>
+          <a:fontRef idx="minor">
+            <a:schemeClr val="lt1"/>
+          </a:fontRef>
+        </p:style>
+        <p:txBody>
+          <a:bodyPr rtlCol="0" anchor="ctr"/>
+          <a:lstStyle/>
+          <a:p>
+            <a:pPr algn="ctr"/>
+          </a:p>
+        </p:txBody>
+      </p:sp>
+      <p:sp>
+        <p:nvSpPr>
+          <p:cNvPr id="4" name="TextBox 3"/>
+          <p:cNvSpPr txBox="1"/>
+          <p:nvPr/>
+        </p:nvSpPr>
+        <p:spPr>
+          <a:xfrm>
+            <a:off x="457200" y="164592"/>
+            <a:ext cx="11277295" cy="502920"/>
+          </a:xfrm>
+          <a:prstGeom prst="rect">
+            <a:avLst/>
+          </a:prstGeom>
+          <a:noFill/>
+        </p:spPr>
+        <p:txBody>
+          <a:bodyPr wrap="square">
+            <a:spAutoFit/>
+          </a:bodyPr>
+          <a:lstStyle/>
+          <a:p>
+            <a:r>
+              <a:rPr sz="2600" b="1" i="0">
+                <a:solidFill>
+                  <a:srgbClr val="FFFFFF"/>
+                </a:solidFill>
+                <a:latin typeface="Calibri"/>
+              </a:rPr>
+              <a:t>Requisitos, criterios de aceptación y hitos: lo que se entrega hoy (1/3)</a:t>
+            </a:r>
+          </a:p>
+        </p:txBody>
+      </p:sp>
+      <p:sp>
+        <p:nvSpPr>
+          <p:cNvPr id="5" name="TextBox 4"/>
+          <p:cNvSpPr txBox="1"/>
+          <p:nvPr/>
+        </p:nvSpPr>
+        <p:spPr>
+          <a:xfrm>
+            <a:off x="457200" y="1170432"/>
+            <a:ext cx="11277295" cy="5230368"/>
+          </a:xfrm>
+          <a:prstGeom prst="rect">
+            <a:avLst/>
+          </a:prstGeom>
+          <a:noFill/>
+        </p:spPr>
+        <p:txBody>
+          <a:bodyPr wrap="square">
+            <a:spAutoFit/>
+          </a:bodyPr>
+          <a:lstStyle/>
+          <a:p>
+            <a:pPr>
+              <a:spcAft>
+                <a:spcPts val="800"/>
+              </a:spcAft>
+            </a:pPr>
+            <a:r>
+              <a:rPr sz="2000" b="0" i="0">
+                <a:solidFill>
+                  <a:srgbClr val="333333"/>
+                </a:solidFill>
+                <a:latin typeface="Calibri"/>
+              </a:rPr>
+              <a:t>–   </a:t>
+            </a:r>
+            <a:r>
+              <a:rPr sz="2000" b="1" i="0">
+                <a:solidFill>
+                  <a:srgbClr val="333333"/>
+                </a:solidFill>
+                <a:latin typeface="Calibri"/>
+              </a:rPr>
+              <a:t>Requisito funcional</a:t>
+            </a:r>
+            <a:r>
+              <a:rPr sz="2000" b="0" i="0">
+                <a:solidFill>
+                  <a:srgbClr val="333333"/>
+                </a:solidFill>
+                <a:latin typeface="Calibri"/>
+              </a:rPr>
+              <a:t> es algo que la solución hace, escrito desde el usuario: «el usuario puede consultar si un libro está disponible sin ir a la biblioteca».</a:t>
+            </a:r>
+          </a:p>
+          <a:p>
+            <a:pPr>
+              <a:spcAft>
+                <a:spcPts val="800"/>
+              </a:spcAft>
+            </a:pPr>
+            <a:r>
+              <a:rPr sz="2000" b="0" i="0">
+                <a:solidFill>
+                  <a:srgbClr val="333333"/>
+                </a:solidFill>
+                <a:latin typeface="Calibri"/>
+              </a:rPr>
+              <a:t>–   El error típico de primer semestre es escribirlo desde la tecnología —«el sistema tendrá una base de datos MySQL»—, que no es un requisito sino una decisión de diseño disfrazada</a:t>
+            </a:r>
+          </a:p>
+          <a:p>
+            <a:pPr>
+              <a:spcAft>
+                <a:spcPts val="800"/>
+              </a:spcAft>
+            </a:pPr>
+            <a:r>
+              <a:rPr sz="2000" b="0" i="0">
+                <a:solidFill>
+                  <a:srgbClr val="333333"/>
+                </a:solidFill>
+                <a:latin typeface="Calibri"/>
+              </a:rPr>
+              <a:t>–   Y encima toma la decisión en la fase equivocada. </a:t>
+            </a:r>
+            <a:r>
+              <a:rPr sz="2000" b="1" i="0">
+                <a:solidFill>
+                  <a:srgbClr val="333333"/>
+                </a:solidFill>
+                <a:latin typeface="Calibri"/>
+              </a:rPr>
+              <a:t>Requisito no funcional</a:t>
+            </a:r>
+            <a:r>
+              <a:rPr sz="2000" b="0" i="0">
+                <a:solidFill>
+                  <a:srgbClr val="333333"/>
+                </a:solidFill>
+                <a:latin typeface="Calibri"/>
+              </a:rPr>
+              <a:t> es una condición que la solución debe cumplir: funcionar en un computador viejo, abrir sin crear cuenta, responder en menos de tanto, no guardar datos personales.</a:t>
+            </a:r>
+          </a:p>
+          <a:p>
+            <a:pPr>
+              <a:spcAft>
+                <a:spcPts val="800"/>
+              </a:spcAft>
+            </a:pPr>
+            <a:r>
+              <a:rPr sz="2000" b="0" i="0">
+                <a:solidFill>
+                  <a:srgbClr val="333333"/>
+                </a:solidFill>
+                <a:latin typeface="Calibri"/>
+              </a:rPr>
+              <a:t>–   Aquí hay una conexión que hay que hacer explícita y que le da sentido a dos sesiones anteriores: </a:t>
+            </a:r>
+            <a:r>
+              <a:rPr sz="2000" b="1" i="0">
+                <a:solidFill>
+                  <a:srgbClr val="333333"/>
+                </a:solidFill>
+                <a:latin typeface="Calibri"/>
+              </a:rPr>
+              <a:t>los requisitos no funcionales de sus proyectos salen de las restricciones que marcaron en el árbol de la sesión 6 y del indicador ambiental de la sesión 5</a:t>
+            </a:r>
+            <a:r>
+              <a:rPr sz="2000" b="0" i="0">
+                <a:solidFill>
+                  <a:srgbClr val="333333"/>
+                </a:solidFill>
+                <a:latin typeface="Calibri"/>
+              </a:rPr>
+              <a:t>.</a:t>
+            </a:r>
+          </a:p>
+        </p:txBody>
+      </p:sp>
+      <p:sp>
+        <p:nvSpPr>
+          <p:cNvPr id="6" name="TextBox 5"/>
+          <p:cNvSpPr txBox="1"/>
+          <p:nvPr/>
+        </p:nvSpPr>
+        <p:spPr>
+          <a:xfrm>
+            <a:off x="11185855" y="6473952"/>
+            <a:ext cx="640080" cy="274320"/>
+          </a:xfrm>
+          <a:prstGeom prst="rect">
+            <a:avLst/>
+          </a:prstGeom>
+          <a:noFill/>
+        </p:spPr>
+        <p:txBody>
+          <a:bodyPr wrap="square">
+            <a:spAutoFit/>
+          </a:bodyPr>
+          <a:lstStyle/>
+          <a:p>
+            <a:pPr algn="r"/>
+            <a:r>
+              <a:rPr sz="1100" b="0" i="0">
+                <a:solidFill>
+                  <a:srgbClr val="666666"/>
+                </a:solidFill>
+                <a:latin typeface="Calibri"/>
+              </a:rPr>
+              <a:t>17</a:t>
+            </a:r>
+          </a:p>
+        </p:txBody>
+      </p:sp>
+    </p:spTree>
+  </p:cSld>
+  <p:clrMapOvr>
+    <a:masterClrMapping/>
+  </p:clrMapOvr>
+</p:sld>
+</file>
+
+<file path=ppt/slides/slide18.xml><?xml version="1.0" encoding="utf-8"?>
+<p:sld xmlns:a="http://schemas.openxmlformats.org/drawingml/2006/main" xmlns:p="http://schemas.openxmlformats.org/presentationml/2006/main" xmlns:r="http://schemas.openxmlformats.org/officeDocument/2006/relationships">
+  <p:cSld>
+    <p:bg>
+      <p:bgPr>
+        <a:solidFill>
+          <a:srgbClr val="FFFFFF"/>
+        </a:solidFill>
+        <a:effectLst/>
+      </p:bgPr>
+    </p:bg>
+    <p:spTree>
+      <p:nvGrpSpPr>
+        <p:cNvPr id="1" name=""/>
+        <p:cNvGrpSpPr/>
+        <p:nvPr/>
+      </p:nvGrpSpPr>
+      <p:grpSpPr/>
+      <p:sp>
+        <p:nvSpPr>
+          <p:cNvPr id="2" name="Rectangle 1"/>
+          <p:cNvSpPr/>
+          <p:nvPr/>
+        </p:nvSpPr>
+        <p:spPr>
+          <a:xfrm>
+            <a:off x="0" y="0"/>
+            <a:ext cx="12191695" cy="960120"/>
+          </a:xfrm>
+          <a:prstGeom prst="rect">
+            <a:avLst/>
+          </a:prstGeom>
+          <a:solidFill>
+            <a:srgbClr val="095292"/>
+          </a:solidFill>
+          <a:ln>
+            <a:noFill/>
+          </a:ln>
+        </p:spPr>
+        <p:style>
+          <a:lnRef idx="1">
+            <a:schemeClr val="accent1"/>
+          </a:lnRef>
+          <a:fillRef idx="3">
+            <a:schemeClr val="accent1"/>
+          </a:fillRef>
+          <a:effectRef idx="2">
+            <a:schemeClr val="accent1"/>
+          </a:effectRef>
+          <a:fontRef idx="minor">
+            <a:schemeClr val="lt1"/>
+          </a:fontRef>
+        </p:style>
+        <p:txBody>
+          <a:bodyPr rtlCol="0" anchor="ctr"/>
+          <a:lstStyle/>
+          <a:p>
+            <a:pPr algn="ctr"/>
+          </a:p>
+        </p:txBody>
+      </p:sp>
+      <p:sp>
+        <p:nvSpPr>
+          <p:cNvPr id="3" name="Rectangle 2"/>
+          <p:cNvSpPr/>
+          <p:nvPr/>
+        </p:nvSpPr>
+        <p:spPr>
+          <a:xfrm>
+            <a:off x="0" y="960120"/>
+            <a:ext cx="12191695" cy="41148"/>
+          </a:xfrm>
+          <a:prstGeom prst="rect">
+            <a:avLst/>
+          </a:prstGeom>
+          <a:solidFill>
+            <a:srgbClr val="FFD000"/>
+          </a:solidFill>
+          <a:ln>
+            <a:noFill/>
+          </a:ln>
+        </p:spPr>
+        <p:style>
+          <a:lnRef idx="1">
+            <a:schemeClr val="accent1"/>
+          </a:lnRef>
+          <a:fillRef idx="3">
+            <a:schemeClr val="accent1"/>
+          </a:fillRef>
+          <a:effectRef idx="2">
+            <a:schemeClr val="accent1"/>
+          </a:effectRef>
+          <a:fontRef idx="minor">
+            <a:schemeClr val="lt1"/>
+          </a:fontRef>
+        </p:style>
+        <p:txBody>
+          <a:bodyPr rtlCol="0" anchor="ctr"/>
+          <a:lstStyle/>
+          <a:p>
+            <a:pPr algn="ctr"/>
+          </a:p>
+        </p:txBody>
+      </p:sp>
+      <p:sp>
+        <p:nvSpPr>
+          <p:cNvPr id="4" name="TextBox 3"/>
+          <p:cNvSpPr txBox="1"/>
+          <p:nvPr/>
+        </p:nvSpPr>
+        <p:spPr>
+          <a:xfrm>
+            <a:off x="457200" y="164592"/>
+            <a:ext cx="11277295" cy="502920"/>
+          </a:xfrm>
+          <a:prstGeom prst="rect">
+            <a:avLst/>
+          </a:prstGeom>
+          <a:noFill/>
+        </p:spPr>
+        <p:txBody>
+          <a:bodyPr wrap="square">
+            <a:spAutoFit/>
+          </a:bodyPr>
+          <a:lstStyle/>
+          <a:p>
+            <a:r>
+              <a:rPr sz="2600" b="1" i="0">
+                <a:solidFill>
+                  <a:srgbClr val="FFFFFF"/>
+                </a:solidFill>
+                <a:latin typeface="Calibri"/>
+              </a:rPr>
+              <a:t>Requisitos, criterios de aceptación y hitos: lo que se entrega hoy (2/3)</a:t>
+            </a:r>
+          </a:p>
+        </p:txBody>
+      </p:sp>
+      <p:sp>
+        <p:nvSpPr>
+          <p:cNvPr id="5" name="TextBox 4"/>
+          <p:cNvSpPr txBox="1"/>
+          <p:nvPr/>
+        </p:nvSpPr>
+        <p:spPr>
+          <a:xfrm>
+            <a:off x="457200" y="1170432"/>
+            <a:ext cx="11277295" cy="5230368"/>
+          </a:xfrm>
+          <a:prstGeom prst="rect">
+            <a:avLst/>
+          </a:prstGeom>
+          <a:noFill/>
+        </p:spPr>
+        <p:txBody>
+          <a:bodyPr wrap="square">
+            <a:spAutoFit/>
+          </a:bodyPr>
+          <a:lstStyle/>
+          <a:p>
+            <a:pPr>
+              <a:spcAft>
+                <a:spcPts val="800"/>
+              </a:spcAft>
+            </a:pPr>
+            <a:r>
+              <a:rPr sz="2000" b="0" i="0">
+                <a:solidFill>
+                  <a:srgbClr val="333333"/>
+                </a:solidFill>
+                <a:latin typeface="Calibri"/>
+              </a:rPr>
+              <a:t>–   Si la biblioteca no tiene computador en el mostrador, «funciona desde el celular de la voluntaria» es un requisito no funcional</a:t>
+            </a:r>
+          </a:p>
+          <a:p>
+            <a:pPr>
+              <a:spcAft>
+                <a:spcPts val="800"/>
+              </a:spcAft>
+            </a:pPr>
+            <a:r>
+              <a:rPr sz="2000" b="0" i="0">
+                <a:solidFill>
+                  <a:srgbClr val="333333"/>
+                </a:solidFill>
+                <a:latin typeface="Calibri"/>
+              </a:rPr>
+              <a:t>–   No un detalle. </a:t>
+            </a:r>
+            <a:r>
+              <a:rPr sz="2000" b="1" i="0">
+                <a:solidFill>
+                  <a:srgbClr val="333333"/>
+                </a:solidFill>
+                <a:latin typeface="Calibri"/>
+              </a:rPr>
+              <a:t>Criterio de aceptación</a:t>
+            </a:r>
+            <a:r>
+              <a:rPr sz="2000" b="0" i="0">
+                <a:solidFill>
+                  <a:srgbClr val="333333"/>
+                </a:solidFill>
+                <a:latin typeface="Calibri"/>
+              </a:rPr>
+              <a:t> es la parte que casi nadie escribe y la que vuelve verificable el proyecto: cómo se comprueba que el requisito se cumple, con un caso concreto y un umbral.</a:t>
+            </a:r>
+          </a:p>
+          <a:p>
+            <a:pPr>
+              <a:spcAft>
+                <a:spcPts val="800"/>
+              </a:spcAft>
+            </a:pPr>
+            <a:r>
+              <a:rPr sz="2000" b="0" i="0">
+                <a:solidFill>
+                  <a:srgbClr val="333333"/>
+                </a:solidFill>
+                <a:latin typeface="Calibri"/>
+              </a:rPr>
+              <a:t>–   «Un usuario que no conoce el sistema encuentra la disponibilidad de un libro en menos de un minuto, sin ayuda» se puede ejecutar delante de alguien.</a:t>
+            </a:r>
+          </a:p>
+          <a:p>
+            <a:pPr>
+              <a:spcAft>
+                <a:spcPts val="800"/>
+              </a:spcAft>
+            </a:pPr>
+            <a:r>
+              <a:rPr sz="2000" b="0" i="0">
+                <a:solidFill>
+                  <a:srgbClr val="333333"/>
+                </a:solidFill>
+                <a:latin typeface="Calibri"/>
+              </a:rPr>
+              <a:t>–   «El sistema debe ser fácil de usar» no se puede ejecutar, y por lo tanto no sirve.</a:t>
+            </a:r>
+          </a:p>
+          <a:p>
+            <a:pPr>
+              <a:spcAft>
+                <a:spcPts val="800"/>
+              </a:spcAft>
+            </a:pPr>
+            <a:r>
+              <a:rPr sz="2000" b="0" i="0">
+                <a:solidFill>
+                  <a:srgbClr val="333333"/>
+                </a:solidFill>
+                <a:latin typeface="Calibri"/>
+              </a:rPr>
+              <a:t>–   La regla que conviene dictar: </a:t>
+            </a:r>
+            <a:r>
+              <a:rPr sz="2000" b="1" i="0">
+                <a:solidFill>
+                  <a:srgbClr val="333333"/>
+                </a:solidFill>
+                <a:latin typeface="Calibri"/>
+              </a:rPr>
+              <a:t>si no se puede convertir en una prueba que alguien haga, no es un criterio</a:t>
+            </a:r>
+            <a:r>
+              <a:rPr sz="2000" b="0" i="0">
+                <a:solidFill>
+                  <a:srgbClr val="333333"/>
+                </a:solidFill>
+                <a:latin typeface="Calibri"/>
+              </a:rPr>
+              <a:t>. </a:t>
+            </a:r>
+            <a:r>
+              <a:rPr sz="2000" b="1" i="0">
+                <a:solidFill>
+                  <a:srgbClr val="333333"/>
+                </a:solidFill>
+                <a:latin typeface="Calibri"/>
+              </a:rPr>
+              <a:t>Hito</a:t>
+            </a:r>
+            <a:r>
+              <a:rPr sz="2000" b="0" i="0">
+                <a:solidFill>
+                  <a:srgbClr val="333333"/>
+                </a:solidFill>
+                <a:latin typeface="Calibri"/>
+              </a:rPr>
+              <a:t> es un punto del calendario donde algo queda terminado y verificable.</a:t>
+            </a:r>
+          </a:p>
+          <a:p>
+            <a:pPr>
+              <a:spcAft>
+                <a:spcPts val="800"/>
+              </a:spcAft>
+            </a:pPr>
+            <a:r>
+              <a:rPr sz="2000" b="0" i="0">
+                <a:solidFill>
+                  <a:srgbClr val="333333"/>
+                </a:solidFill>
+                <a:latin typeface="Calibri"/>
+              </a:rPr>
+              <a:t>–   Es el concepto que salva el proyecto de la última semana: «vamos avanzando» no es un hito</a:t>
+            </a:r>
+          </a:p>
+        </p:txBody>
+      </p:sp>
+      <p:sp>
+        <p:nvSpPr>
+          <p:cNvPr id="6" name="TextBox 5"/>
+          <p:cNvSpPr txBox="1"/>
+          <p:nvPr/>
+        </p:nvSpPr>
+        <p:spPr>
+          <a:xfrm>
+            <a:off x="11185855" y="6473952"/>
+            <a:ext cx="640080" cy="274320"/>
+          </a:xfrm>
+          <a:prstGeom prst="rect">
+            <a:avLst/>
+          </a:prstGeom>
+          <a:noFill/>
+        </p:spPr>
+        <p:txBody>
+          <a:bodyPr wrap="square">
+            <a:spAutoFit/>
+          </a:bodyPr>
+          <a:lstStyle/>
+          <a:p>
+            <a:pPr algn="r"/>
+            <a:r>
+              <a:rPr sz="1100" b="0" i="0">
+                <a:solidFill>
+                  <a:srgbClr val="666666"/>
+                </a:solidFill>
+                <a:latin typeface="Calibri"/>
+              </a:rPr>
+              <a:t>18</a:t>
+            </a:r>
+          </a:p>
+        </p:txBody>
+      </p:sp>
+    </p:spTree>
+  </p:cSld>
+  <p:clrMapOvr>
+    <a:masterClrMapping/>
+  </p:clrMapOvr>
+</p:sld>
+</file>
+
+<file path=ppt/slides/slide19.xml><?xml version="1.0" encoding="utf-8"?>
+<p:sld xmlns:a="http://schemas.openxmlformats.org/drawingml/2006/main" xmlns:p="http://schemas.openxmlformats.org/presentationml/2006/main" xmlns:r="http://schemas.openxmlformats.org/officeDocument/2006/relationships">
+  <p:cSld>
+    <p:bg>
+      <p:bgPr>
+        <a:solidFill>
+          <a:srgbClr val="FFFFFF"/>
+        </a:solidFill>
+        <a:effectLst/>
+      </p:bgPr>
+    </p:bg>
+    <p:spTree>
+      <p:nvGrpSpPr>
+        <p:cNvPr id="1" name=""/>
+        <p:cNvGrpSpPr/>
+        <p:nvPr/>
+      </p:nvGrpSpPr>
+      <p:grpSpPr/>
+      <p:sp>
+        <p:nvSpPr>
+          <p:cNvPr id="2" name="Rectangle 1"/>
+          <p:cNvSpPr/>
+          <p:nvPr/>
+        </p:nvSpPr>
+        <p:spPr>
+          <a:xfrm>
+            <a:off x="0" y="0"/>
+            <a:ext cx="12191695" cy="960120"/>
+          </a:xfrm>
+          <a:prstGeom prst="rect">
+            <a:avLst/>
+          </a:prstGeom>
+          <a:solidFill>
+            <a:srgbClr val="095292"/>
+          </a:solidFill>
+          <a:ln>
+            <a:noFill/>
+          </a:ln>
+        </p:spPr>
+        <p:style>
+          <a:lnRef idx="1">
+            <a:schemeClr val="accent1"/>
+          </a:lnRef>
+          <a:fillRef idx="3">
+            <a:schemeClr val="accent1"/>
+          </a:fillRef>
+          <a:effectRef idx="2">
+            <a:schemeClr val="accent1"/>
+          </a:effectRef>
+          <a:fontRef idx="minor">
+            <a:schemeClr val="lt1"/>
+          </a:fontRef>
+        </p:style>
+        <p:txBody>
+          <a:bodyPr rtlCol="0" anchor="ctr"/>
+          <a:lstStyle/>
+          <a:p>
+            <a:pPr algn="ctr"/>
+          </a:p>
+        </p:txBody>
+      </p:sp>
+      <p:sp>
+        <p:nvSpPr>
+          <p:cNvPr id="3" name="Rectangle 2"/>
+          <p:cNvSpPr/>
+          <p:nvPr/>
+        </p:nvSpPr>
+        <p:spPr>
+          <a:xfrm>
+            <a:off x="0" y="960120"/>
+            <a:ext cx="12191695" cy="41148"/>
+          </a:xfrm>
+          <a:prstGeom prst="rect">
+            <a:avLst/>
+          </a:prstGeom>
+          <a:solidFill>
+            <a:srgbClr val="FFD000"/>
+          </a:solidFill>
+          <a:ln>
+            <a:noFill/>
+          </a:ln>
+        </p:spPr>
+        <p:style>
+          <a:lnRef idx="1">
+            <a:schemeClr val="accent1"/>
+          </a:lnRef>
+          <a:fillRef idx="3">
+            <a:schemeClr val="accent1"/>
+          </a:fillRef>
+          <a:effectRef idx="2">
+            <a:schemeClr val="accent1"/>
+          </a:effectRef>
+          <a:fontRef idx="minor">
+            <a:schemeClr val="lt1"/>
+          </a:fontRef>
+        </p:style>
+        <p:txBody>
+          <a:bodyPr rtlCol="0" anchor="ctr"/>
+          <a:lstStyle/>
+          <a:p>
+            <a:pPr algn="ctr"/>
+          </a:p>
+        </p:txBody>
+      </p:sp>
+      <p:sp>
+        <p:nvSpPr>
+          <p:cNvPr id="4" name="TextBox 3"/>
+          <p:cNvSpPr txBox="1"/>
+          <p:nvPr/>
+        </p:nvSpPr>
+        <p:spPr>
+          <a:xfrm>
+            <a:off x="457200" y="164592"/>
+            <a:ext cx="11277295" cy="502920"/>
+          </a:xfrm>
+          <a:prstGeom prst="rect">
+            <a:avLst/>
+          </a:prstGeom>
+          <a:noFill/>
+        </p:spPr>
+        <p:txBody>
+          <a:bodyPr wrap="square">
+            <a:spAutoFit/>
+          </a:bodyPr>
+          <a:lstStyle/>
+          <a:p>
+            <a:r>
+              <a:rPr sz="2600" b="1" i="0">
+                <a:solidFill>
+                  <a:srgbClr val="FFFFFF"/>
+                </a:solidFill>
+                <a:latin typeface="Calibri"/>
+              </a:rPr>
+              <a:t>Requisitos, criterios de aceptación y hitos: lo que se entrega hoy (3/3)</a:t>
+            </a:r>
+          </a:p>
+        </p:txBody>
+      </p:sp>
+      <p:sp>
+        <p:nvSpPr>
+          <p:cNvPr id="5" name="TextBox 4"/>
+          <p:cNvSpPr txBox="1"/>
+          <p:nvPr/>
+        </p:nvSpPr>
+        <p:spPr>
+          <a:xfrm>
+            <a:off x="457200" y="1170432"/>
+            <a:ext cx="11277295" cy="5230368"/>
+          </a:xfrm>
+          <a:prstGeom prst="rect">
+            <a:avLst/>
+          </a:prstGeom>
+          <a:noFill/>
+        </p:spPr>
+        <p:txBody>
+          <a:bodyPr wrap="square">
+            <a:spAutoFit/>
+          </a:bodyPr>
+          <a:lstStyle/>
+          <a:p>
+            <a:pPr>
+              <a:spcAft>
+                <a:spcPts val="800"/>
+              </a:spcAft>
+            </a:pPr>
+            <a:r>
+              <a:rPr sz="2000" b="0" i="0">
+                <a:solidFill>
+                  <a:srgbClr val="333333"/>
+                </a:solidFill>
+                <a:latin typeface="Calibri"/>
+              </a:rPr>
+              <a:t>–   «en la sesión 10 hay tres pantallas probadas con un usuario» sí.</a:t>
+            </a:r>
+          </a:p>
+          <a:p>
+            <a:pPr>
+              <a:spcAft>
+                <a:spcPts val="800"/>
+              </a:spcAft>
+            </a:pPr>
+            <a:r>
+              <a:rPr sz="2000" b="0" i="0">
+                <a:solidFill>
+                  <a:srgbClr val="333333"/>
+                </a:solidFill>
+                <a:latin typeface="Calibri"/>
+              </a:rPr>
+              <a:t>–   En el taller de hoy se les pide el plan de hitos hasta la Clase 15, y conviene revisarlo con severidad, porque un plan con todo el trabajo en la Clase 14 es un proyecto que va a fallar y todavía se puede corregir.</a:t>
+            </a:r>
+          </a:p>
+          <a:p>
+            <a:pPr>
+              <a:spcAft>
+                <a:spcPts val="800"/>
+              </a:spcAft>
+            </a:pPr>
+            <a:r>
+              <a:rPr sz="2000" b="0" i="0">
+                <a:solidFill>
+                  <a:srgbClr val="333333"/>
+                </a:solidFill>
+                <a:latin typeface="Calibri"/>
+              </a:rPr>
+              <a:t>–   Los tres malentendidos de la última diapositiva son los que aparecen en las salas.</a:t>
+            </a:r>
+          </a:p>
+          <a:p>
+            <a:pPr>
+              <a:spcAft>
+                <a:spcPts val="800"/>
+              </a:spcAft>
+            </a:pPr>
+            <a:r>
+              <a:rPr sz="2000" b="0" i="0">
+                <a:solidFill>
+                  <a:srgbClr val="333333"/>
+                </a:solidFill>
+                <a:latin typeface="Calibri"/>
+              </a:rPr>
+              <a:t>–   El primero —que las fases son burocracia— se responde con la tabla del costo.</a:t>
+            </a:r>
+          </a:p>
+          <a:p>
+            <a:pPr>
+              <a:spcAft>
+                <a:spcPts val="800"/>
+              </a:spcAft>
+            </a:pPr>
+            <a:r>
+              <a:rPr sz="2000" b="0" i="0">
+                <a:solidFill>
+                  <a:srgbClr val="333333"/>
+                </a:solidFill>
+                <a:latin typeface="Calibri"/>
+              </a:rPr>
+              <a:t>–   El segundo —que iterativo significa no planear— se responde señalando que se planea más seguido, no menos.</a:t>
+            </a:r>
+          </a:p>
+          <a:p>
+            <a:pPr>
+              <a:spcAft>
+                <a:spcPts val="800"/>
+              </a:spcAft>
+            </a:pPr>
+            <a:r>
+              <a:rPr sz="2000" b="0" i="0">
+                <a:solidFill>
+                  <a:srgbClr val="333333"/>
+                </a:solidFill>
+                <a:latin typeface="Calibri"/>
+              </a:rPr>
+              <a:t>–   El tercero conviene decirlo porque tranquiliza: </a:t>
+            </a:r>
+            <a:r>
+              <a:rPr sz="2000" b="1" i="0">
+                <a:solidFill>
+                  <a:srgbClr val="333333"/>
+                </a:solidFill>
+                <a:latin typeface="Calibri"/>
+              </a:rPr>
+              <a:t>las fases no son departamentos ni personas</a:t>
+            </a:r>
+            <a:r>
+              <a:rPr sz="2000" b="0" i="0">
+                <a:solidFill>
+                  <a:srgbClr val="333333"/>
+                </a:solidFill>
+                <a:latin typeface="Calibri"/>
+              </a:rPr>
+              <a:t>; en un equipo de cinco, las seis fases las recorren los mismos cinco, y lo que cambia es la pregunta que están respondiendo.</a:t>
+            </a:r>
+          </a:p>
+        </p:txBody>
+      </p:sp>
+      <p:sp>
+        <p:nvSpPr>
+          <p:cNvPr id="6" name="TextBox 5"/>
+          <p:cNvSpPr txBox="1"/>
+          <p:nvPr/>
+        </p:nvSpPr>
+        <p:spPr>
+          <a:xfrm>
+            <a:off x="11185855" y="6473952"/>
+            <a:ext cx="640080" cy="274320"/>
+          </a:xfrm>
+          <a:prstGeom prst="rect">
+            <a:avLst/>
+          </a:prstGeom>
+          <a:noFill/>
+        </p:spPr>
+        <p:txBody>
+          <a:bodyPr wrap="square">
+            <a:spAutoFit/>
+          </a:bodyPr>
+          <a:lstStyle/>
+          <a:p>
+            <a:pPr algn="r"/>
+            <a:r>
+              <a:rPr sz="1100" b="0" i="0">
+                <a:solidFill>
+                  <a:srgbClr val="666666"/>
+                </a:solidFill>
+                <a:latin typeface="Calibri"/>
+              </a:rPr>
+              <a:t>19</a:t>
             </a:r>
           </a:p>
         </p:txBody>
@@ -7230,6 +7663,2877 @@
                 <a:latin typeface="Calibri"/>
               </a:rPr>
               <a:t>2</a:t>
+            </a:r>
+          </a:p>
+        </p:txBody>
+      </p:sp>
+    </p:spTree>
+  </p:cSld>
+  <p:clrMapOvr>
+    <a:masterClrMapping/>
+  </p:clrMapOvr>
+</p:sld>
+</file>
+
+<file path=ppt/slides/slide20.xml><?xml version="1.0" encoding="utf-8"?>
+<p:sld xmlns:a="http://schemas.openxmlformats.org/drawingml/2006/main" xmlns:p="http://schemas.openxmlformats.org/presentationml/2006/main" xmlns:r="http://schemas.openxmlformats.org/officeDocument/2006/relationships">
+  <p:cSld>
+    <p:bg>
+      <p:bgPr>
+        <a:solidFill>
+          <a:srgbClr val="FFFFFF"/>
+        </a:solidFill>
+        <a:effectLst/>
+      </p:bgPr>
+    </p:bg>
+    <p:spTree>
+      <p:nvGrpSpPr>
+        <p:cNvPr id="1" name=""/>
+        <p:cNvGrpSpPr/>
+        <p:nvPr/>
+      </p:nvGrpSpPr>
+      <p:grpSpPr/>
+      <p:sp>
+        <p:nvSpPr>
+          <p:cNvPr id="2" name="Rectangle 1"/>
+          <p:cNvSpPr/>
+          <p:nvPr/>
+        </p:nvSpPr>
+        <p:spPr>
+          <a:xfrm>
+            <a:off x="0" y="0"/>
+            <a:ext cx="12191695" cy="1170432"/>
+          </a:xfrm>
+          <a:prstGeom prst="rect">
+            <a:avLst/>
+          </a:prstGeom>
+          <a:solidFill>
+            <a:srgbClr val="095292"/>
+          </a:solidFill>
+          <a:ln>
+            <a:noFill/>
+          </a:ln>
+        </p:spPr>
+        <p:style>
+          <a:lnRef idx="1">
+            <a:schemeClr val="accent1"/>
+          </a:lnRef>
+          <a:fillRef idx="3">
+            <a:schemeClr val="accent1"/>
+          </a:fillRef>
+          <a:effectRef idx="2">
+            <a:schemeClr val="accent1"/>
+          </a:effectRef>
+          <a:fontRef idx="minor">
+            <a:schemeClr val="lt1"/>
+          </a:fontRef>
+        </p:style>
+        <p:txBody>
+          <a:bodyPr rtlCol="0" anchor="ctr"/>
+          <a:lstStyle/>
+          <a:p>
+            <a:pPr algn="ctr"/>
+          </a:p>
+        </p:txBody>
+      </p:sp>
+      <p:sp>
+        <p:nvSpPr>
+          <p:cNvPr id="3" name="Rectangle 2"/>
+          <p:cNvSpPr/>
+          <p:nvPr/>
+        </p:nvSpPr>
+        <p:spPr>
+          <a:xfrm>
+            <a:off x="0" y="1170432"/>
+            <a:ext cx="12191695" cy="41148"/>
+          </a:xfrm>
+          <a:prstGeom prst="rect">
+            <a:avLst/>
+          </a:prstGeom>
+          <a:solidFill>
+            <a:srgbClr val="FFD000"/>
+          </a:solidFill>
+          <a:ln>
+            <a:noFill/>
+          </a:ln>
+        </p:spPr>
+        <p:style>
+          <a:lnRef idx="1">
+            <a:schemeClr val="accent1"/>
+          </a:lnRef>
+          <a:fillRef idx="3">
+            <a:schemeClr val="accent1"/>
+          </a:fillRef>
+          <a:effectRef idx="2">
+            <a:schemeClr val="accent1"/>
+          </a:effectRef>
+          <a:fontRef idx="minor">
+            <a:schemeClr val="lt1"/>
+          </a:fontRef>
+        </p:style>
+        <p:txBody>
+          <a:bodyPr rtlCol="0" anchor="ctr"/>
+          <a:lstStyle/>
+          <a:p>
+            <a:pPr algn="ctr"/>
+          </a:p>
+        </p:txBody>
+      </p:sp>
+      <p:sp>
+        <p:nvSpPr>
+          <p:cNvPr id="4" name="TextBox 3"/>
+          <p:cNvSpPr txBox="1"/>
+          <p:nvPr/>
+        </p:nvSpPr>
+        <p:spPr>
+          <a:xfrm>
+            <a:off x="457200" y="164592"/>
+            <a:ext cx="11277295" cy="384048"/>
+          </a:xfrm>
+          <a:prstGeom prst="rect">
+            <a:avLst/>
+          </a:prstGeom>
+          <a:noFill/>
+        </p:spPr>
+        <p:txBody>
+          <a:bodyPr wrap="square">
+            <a:spAutoFit/>
+          </a:bodyPr>
+          <a:lstStyle/>
+          <a:p>
+            <a:r>
+              <a:rPr sz="2600" b="1" i="0">
+                <a:solidFill>
+                  <a:srgbClr val="FFFFFF"/>
+                </a:solidFill>
+                <a:latin typeface="Calibri"/>
+              </a:rPr>
+              <a:t>Taller de hoy: Ciclo de vida del proyecto</a:t>
+            </a:r>
+          </a:p>
+        </p:txBody>
+      </p:sp>
+      <p:sp>
+        <p:nvSpPr>
+          <p:cNvPr id="5" name="TextBox 4"/>
+          <p:cNvSpPr txBox="1"/>
+          <p:nvPr/>
+        </p:nvSpPr>
+        <p:spPr>
+          <a:xfrm>
+            <a:off x="457200" y="566928"/>
+            <a:ext cx="11277295" cy="411480"/>
+          </a:xfrm>
+          <a:prstGeom prst="rect">
+            <a:avLst/>
+          </a:prstGeom>
+          <a:noFill/>
+        </p:spPr>
+        <p:txBody>
+          <a:bodyPr wrap="square">
+            <a:spAutoFit/>
+          </a:bodyPr>
+          <a:lstStyle/>
+          <a:p>
+            <a:r>
+              <a:rPr sz="1400" b="0" i="0">
+                <a:solidFill>
+                  <a:srgbClr val="B8D8EE"/>
+                </a:solidFill>
+                <a:latin typeface="Calibri"/>
+              </a:rPr>
+              <a:t>17 min en equipos · cada equipo, su propio proyecto · mapa del ciclo de vida + tabla de requisitos + plan de hitos</a:t>
+            </a:r>
+          </a:p>
+        </p:txBody>
+      </p:sp>
+      <p:sp>
+        <p:nvSpPr>
+          <p:cNvPr id="6" name="Rounded Rectangle 5"/>
+          <p:cNvSpPr/>
+          <p:nvPr/>
+        </p:nvSpPr>
+        <p:spPr>
+          <a:xfrm>
+            <a:off x="457200" y="1472184"/>
+            <a:ext cx="11277295" cy="566928"/>
+          </a:xfrm>
+          <a:prstGeom prst="roundRect">
+            <a:avLst>
+              <a:gd name="adj" fmla="val 12000"/>
+            </a:avLst>
+          </a:prstGeom>
+          <a:solidFill>
+            <a:srgbClr val="F2F2F2"/>
+          </a:solidFill>
+          <a:ln>
+            <a:noFill/>
+          </a:ln>
+        </p:spPr>
+        <p:style>
+          <a:lnRef idx="1">
+            <a:schemeClr val="accent1"/>
+          </a:lnRef>
+          <a:fillRef idx="3">
+            <a:schemeClr val="accent1"/>
+          </a:fillRef>
+          <a:effectRef idx="2">
+            <a:schemeClr val="accent1"/>
+          </a:effectRef>
+          <a:fontRef idx="minor">
+            <a:schemeClr val="lt1"/>
+          </a:fontRef>
+        </p:style>
+        <p:txBody>
+          <a:bodyPr rtlCol="0" anchor="ctr"/>
+          <a:lstStyle/>
+          <a:p>
+            <a:pPr algn="ctr"/>
+          </a:p>
+        </p:txBody>
+      </p:sp>
+      <p:sp>
+        <p:nvSpPr>
+          <p:cNvPr id="7" name="Rectangle 6"/>
+          <p:cNvSpPr/>
+          <p:nvPr/>
+        </p:nvSpPr>
+        <p:spPr>
+          <a:xfrm>
+            <a:off x="640080" y="1618487"/>
+            <a:ext cx="274320" cy="274320"/>
+          </a:xfrm>
+          <a:prstGeom prst="rect">
+            <a:avLst/>
+          </a:prstGeom>
+          <a:solidFill>
+            <a:srgbClr val="FFFFFF"/>
+          </a:solidFill>
+          <a:ln>
+            <a:solidFill>
+              <a:srgbClr val="333333"/>
+            </a:solidFill>
+          </a:ln>
+        </p:spPr>
+        <p:style>
+          <a:lnRef idx="1">
+            <a:schemeClr val="accent1"/>
+          </a:lnRef>
+          <a:fillRef idx="3">
+            <a:schemeClr val="accent1"/>
+          </a:fillRef>
+          <a:effectRef idx="2">
+            <a:schemeClr val="accent1"/>
+          </a:effectRef>
+          <a:fontRef idx="minor">
+            <a:schemeClr val="lt1"/>
+          </a:fontRef>
+        </p:style>
+        <p:txBody>
+          <a:bodyPr rtlCol="0" anchor="ctr"/>
+          <a:lstStyle/>
+          <a:p>
+            <a:pPr algn="ctr"/>
+          </a:p>
+        </p:txBody>
+      </p:sp>
+      <p:sp>
+        <p:nvSpPr>
+          <p:cNvPr id="8" name="Rectangle 7"/>
+          <p:cNvSpPr/>
+          <p:nvPr/>
+        </p:nvSpPr>
+        <p:spPr>
+          <a:xfrm>
+            <a:off x="640080" y="1618487"/>
+            <a:ext cx="73152" cy="274320"/>
+          </a:xfrm>
+          <a:prstGeom prst="rect">
+            <a:avLst/>
+          </a:prstGeom>
+          <a:solidFill>
+            <a:srgbClr val="269CCB"/>
+          </a:solidFill>
+          <a:ln>
+            <a:noFill/>
+          </a:ln>
+        </p:spPr>
+        <p:style>
+          <a:lnRef idx="1">
+            <a:schemeClr val="accent1"/>
+          </a:lnRef>
+          <a:fillRef idx="3">
+            <a:schemeClr val="accent1"/>
+          </a:fillRef>
+          <a:effectRef idx="2">
+            <a:schemeClr val="accent1"/>
+          </a:effectRef>
+          <a:fontRef idx="minor">
+            <a:schemeClr val="lt1"/>
+          </a:fontRef>
+        </p:style>
+        <p:txBody>
+          <a:bodyPr rtlCol="0" anchor="ctr"/>
+          <a:lstStyle/>
+          <a:p>
+            <a:pPr algn="ctr"/>
+          </a:p>
+        </p:txBody>
+      </p:sp>
+      <p:sp>
+        <p:nvSpPr>
+          <p:cNvPr id="9" name="TextBox 8"/>
+          <p:cNvSpPr txBox="1"/>
+          <p:nvPr/>
+        </p:nvSpPr>
+        <p:spPr>
+          <a:xfrm>
+            <a:off x="1097280" y="1563624"/>
+            <a:ext cx="10362895" cy="402336"/>
+          </a:xfrm>
+          <a:prstGeom prst="rect">
+            <a:avLst/>
+          </a:prstGeom>
+          <a:noFill/>
+        </p:spPr>
+        <p:txBody>
+          <a:bodyPr wrap="square" anchor="ctr"/>
+          <a:lstStyle/>
+          <a:p>
+            <a:r>
+              <a:rPr sz="1500" b="1" i="0">
+                <a:solidFill>
+                  <a:srgbClr val="333333"/>
+                </a:solidFill>
+                <a:latin typeface="Calibri"/>
+              </a:rPr>
+              <a:t>EN QUÉ FASE ESTAMOS</a:t>
+            </a:r>
+            <a:r>
+              <a:rPr sz="1500" b="0" i="0">
+                <a:solidFill>
+                  <a:srgbClr val="333333"/>
+                </a:solidFill>
+                <a:latin typeface="Calibri"/>
+              </a:rPr>
+              <a:t> — La fase donde está el proyecto hoy, y </a:t>
+            </a:r>
+            <a:r>
+              <a:rPr sz="1500" b="1" i="0">
+                <a:solidFill>
+                  <a:srgbClr val="333333"/>
+                </a:solidFill>
+                <a:latin typeface="Calibri"/>
+              </a:rPr>
+              <a:t>qué falta exactamente para cerrarla</a:t>
+            </a:r>
+            <a:r>
+              <a:rPr sz="1500" b="0" i="0">
+                <a:solidFill>
+                  <a:srgbClr val="333333"/>
+                </a:solidFill>
+                <a:latin typeface="Calibri"/>
+              </a:rPr>
+              <a:t>. Una fase se cierra con un entregable, no con una sensación.</a:t>
+            </a:r>
+          </a:p>
+        </p:txBody>
+      </p:sp>
+      <p:sp>
+        <p:nvSpPr>
+          <p:cNvPr id="10" name="Rounded Rectangle 9"/>
+          <p:cNvSpPr/>
+          <p:nvPr/>
+        </p:nvSpPr>
+        <p:spPr>
+          <a:xfrm>
+            <a:off x="457200" y="2148839"/>
+            <a:ext cx="11277295" cy="566928"/>
+          </a:xfrm>
+          <a:prstGeom prst="roundRect">
+            <a:avLst>
+              <a:gd name="adj" fmla="val 12000"/>
+            </a:avLst>
+          </a:prstGeom>
+          <a:solidFill>
+            <a:srgbClr val="F2F2F2"/>
+          </a:solidFill>
+          <a:ln>
+            <a:noFill/>
+          </a:ln>
+        </p:spPr>
+        <p:style>
+          <a:lnRef idx="1">
+            <a:schemeClr val="accent1"/>
+          </a:lnRef>
+          <a:fillRef idx="3">
+            <a:schemeClr val="accent1"/>
+          </a:fillRef>
+          <a:effectRef idx="2">
+            <a:schemeClr val="accent1"/>
+          </a:effectRef>
+          <a:fontRef idx="minor">
+            <a:schemeClr val="lt1"/>
+          </a:fontRef>
+        </p:style>
+        <p:txBody>
+          <a:bodyPr rtlCol="0" anchor="ctr"/>
+          <a:lstStyle/>
+          <a:p>
+            <a:pPr algn="ctr"/>
+          </a:p>
+        </p:txBody>
+      </p:sp>
+      <p:sp>
+        <p:nvSpPr>
+          <p:cNvPr id="11" name="Rectangle 10"/>
+          <p:cNvSpPr/>
+          <p:nvPr/>
+        </p:nvSpPr>
+        <p:spPr>
+          <a:xfrm>
+            <a:off x="640080" y="2295144"/>
+            <a:ext cx="274320" cy="274320"/>
+          </a:xfrm>
+          <a:prstGeom prst="rect">
+            <a:avLst/>
+          </a:prstGeom>
+          <a:solidFill>
+            <a:srgbClr val="FFFFFF"/>
+          </a:solidFill>
+          <a:ln>
+            <a:solidFill>
+              <a:srgbClr val="333333"/>
+            </a:solidFill>
+          </a:ln>
+        </p:spPr>
+        <p:style>
+          <a:lnRef idx="1">
+            <a:schemeClr val="accent1"/>
+          </a:lnRef>
+          <a:fillRef idx="3">
+            <a:schemeClr val="accent1"/>
+          </a:fillRef>
+          <a:effectRef idx="2">
+            <a:schemeClr val="accent1"/>
+          </a:effectRef>
+          <a:fontRef idx="minor">
+            <a:schemeClr val="lt1"/>
+          </a:fontRef>
+        </p:style>
+        <p:txBody>
+          <a:bodyPr rtlCol="0" anchor="ctr"/>
+          <a:lstStyle/>
+          <a:p>
+            <a:pPr algn="ctr"/>
+          </a:p>
+        </p:txBody>
+      </p:sp>
+      <p:sp>
+        <p:nvSpPr>
+          <p:cNvPr id="12" name="Rectangle 11"/>
+          <p:cNvSpPr/>
+          <p:nvPr/>
+        </p:nvSpPr>
+        <p:spPr>
+          <a:xfrm>
+            <a:off x="640080" y="2295144"/>
+            <a:ext cx="73152" cy="274320"/>
+          </a:xfrm>
+          <a:prstGeom prst="rect">
+            <a:avLst/>
+          </a:prstGeom>
+          <a:solidFill>
+            <a:srgbClr val="269CCB"/>
+          </a:solidFill>
+          <a:ln>
+            <a:noFill/>
+          </a:ln>
+        </p:spPr>
+        <p:style>
+          <a:lnRef idx="1">
+            <a:schemeClr val="accent1"/>
+          </a:lnRef>
+          <a:fillRef idx="3">
+            <a:schemeClr val="accent1"/>
+          </a:fillRef>
+          <a:effectRef idx="2">
+            <a:schemeClr val="accent1"/>
+          </a:effectRef>
+          <a:fontRef idx="minor">
+            <a:schemeClr val="lt1"/>
+          </a:fontRef>
+        </p:style>
+        <p:txBody>
+          <a:bodyPr rtlCol="0" anchor="ctr"/>
+          <a:lstStyle/>
+          <a:p>
+            <a:pPr algn="ctr"/>
+          </a:p>
+        </p:txBody>
+      </p:sp>
+      <p:sp>
+        <p:nvSpPr>
+          <p:cNvPr id="13" name="TextBox 12"/>
+          <p:cNvSpPr txBox="1"/>
+          <p:nvPr/>
+        </p:nvSpPr>
+        <p:spPr>
+          <a:xfrm>
+            <a:off x="1097280" y="2240279"/>
+            <a:ext cx="10362895" cy="402336"/>
+          </a:xfrm>
+          <a:prstGeom prst="rect">
+            <a:avLst/>
+          </a:prstGeom>
+          <a:noFill/>
+        </p:spPr>
+        <p:txBody>
+          <a:bodyPr wrap="square" anchor="ctr"/>
+          <a:lstStyle/>
+          <a:p>
+            <a:r>
+              <a:rPr sz="1500" b="1" i="0">
+                <a:solidFill>
+                  <a:srgbClr val="333333"/>
+                </a:solidFill>
+                <a:latin typeface="Calibri"/>
+              </a:rPr>
+              <a:t>TRES REQUISITOS FUNCIONALES</a:t>
+            </a:r>
+            <a:r>
+              <a:rPr sz="1500" b="0" i="0">
+                <a:solidFill>
+                  <a:srgbClr val="333333"/>
+                </a:solidFill>
+                <a:latin typeface="Calibri"/>
+              </a:rPr>
+              <a:t> — Tres cosas que la solución </a:t>
+            </a:r>
+            <a:r>
+              <a:rPr sz="1500" b="1" i="0">
+                <a:solidFill>
+                  <a:srgbClr val="333333"/>
+                </a:solidFill>
+                <a:latin typeface="Calibri"/>
+              </a:rPr>
+              <a:t>hace</a:t>
+            </a:r>
+            <a:r>
+              <a:rPr sz="1500" b="0" i="0">
+                <a:solidFill>
+                  <a:srgbClr val="333333"/>
+                </a:solidFill>
+                <a:latin typeface="Calibri"/>
+              </a:rPr>
+              <a:t>, escritas desde el usuario: «el usuario puede…». Sin mencionar tecnología.</a:t>
+            </a:r>
+          </a:p>
+        </p:txBody>
+      </p:sp>
+      <p:sp>
+        <p:nvSpPr>
+          <p:cNvPr id="14" name="Rounded Rectangle 13"/>
+          <p:cNvSpPr/>
+          <p:nvPr/>
+        </p:nvSpPr>
+        <p:spPr>
+          <a:xfrm>
+            <a:off x="457200" y="2825496"/>
+            <a:ext cx="11277295" cy="566928"/>
+          </a:xfrm>
+          <a:prstGeom prst="roundRect">
+            <a:avLst>
+              <a:gd name="adj" fmla="val 12000"/>
+            </a:avLst>
+          </a:prstGeom>
+          <a:solidFill>
+            <a:srgbClr val="F2F2F2"/>
+          </a:solidFill>
+          <a:ln>
+            <a:noFill/>
+          </a:ln>
+        </p:spPr>
+        <p:style>
+          <a:lnRef idx="1">
+            <a:schemeClr val="accent1"/>
+          </a:lnRef>
+          <a:fillRef idx="3">
+            <a:schemeClr val="accent1"/>
+          </a:fillRef>
+          <a:effectRef idx="2">
+            <a:schemeClr val="accent1"/>
+          </a:effectRef>
+          <a:fontRef idx="minor">
+            <a:schemeClr val="lt1"/>
+          </a:fontRef>
+        </p:style>
+        <p:txBody>
+          <a:bodyPr rtlCol="0" anchor="ctr"/>
+          <a:lstStyle/>
+          <a:p>
+            <a:pPr algn="ctr"/>
+          </a:p>
+        </p:txBody>
+      </p:sp>
+      <p:sp>
+        <p:nvSpPr>
+          <p:cNvPr id="15" name="Rectangle 14"/>
+          <p:cNvSpPr/>
+          <p:nvPr/>
+        </p:nvSpPr>
+        <p:spPr>
+          <a:xfrm>
+            <a:off x="640080" y="2971800"/>
+            <a:ext cx="274320" cy="274320"/>
+          </a:xfrm>
+          <a:prstGeom prst="rect">
+            <a:avLst/>
+          </a:prstGeom>
+          <a:solidFill>
+            <a:srgbClr val="FFFFFF"/>
+          </a:solidFill>
+          <a:ln>
+            <a:solidFill>
+              <a:srgbClr val="333333"/>
+            </a:solidFill>
+          </a:ln>
+        </p:spPr>
+        <p:style>
+          <a:lnRef idx="1">
+            <a:schemeClr val="accent1"/>
+          </a:lnRef>
+          <a:fillRef idx="3">
+            <a:schemeClr val="accent1"/>
+          </a:fillRef>
+          <a:effectRef idx="2">
+            <a:schemeClr val="accent1"/>
+          </a:effectRef>
+          <a:fontRef idx="minor">
+            <a:schemeClr val="lt1"/>
+          </a:fontRef>
+        </p:style>
+        <p:txBody>
+          <a:bodyPr rtlCol="0" anchor="ctr"/>
+          <a:lstStyle/>
+          <a:p>
+            <a:pPr algn="ctr"/>
+          </a:p>
+        </p:txBody>
+      </p:sp>
+      <p:sp>
+        <p:nvSpPr>
+          <p:cNvPr id="16" name="Rectangle 15"/>
+          <p:cNvSpPr/>
+          <p:nvPr/>
+        </p:nvSpPr>
+        <p:spPr>
+          <a:xfrm>
+            <a:off x="640080" y="2971800"/>
+            <a:ext cx="73152" cy="274320"/>
+          </a:xfrm>
+          <a:prstGeom prst="rect">
+            <a:avLst/>
+          </a:prstGeom>
+          <a:solidFill>
+            <a:srgbClr val="269CCB"/>
+          </a:solidFill>
+          <a:ln>
+            <a:noFill/>
+          </a:ln>
+        </p:spPr>
+        <p:style>
+          <a:lnRef idx="1">
+            <a:schemeClr val="accent1"/>
+          </a:lnRef>
+          <a:fillRef idx="3">
+            <a:schemeClr val="accent1"/>
+          </a:fillRef>
+          <a:effectRef idx="2">
+            <a:schemeClr val="accent1"/>
+          </a:effectRef>
+          <a:fontRef idx="minor">
+            <a:schemeClr val="lt1"/>
+          </a:fontRef>
+        </p:style>
+        <p:txBody>
+          <a:bodyPr rtlCol="0" anchor="ctr"/>
+          <a:lstStyle/>
+          <a:p>
+            <a:pPr algn="ctr"/>
+          </a:p>
+        </p:txBody>
+      </p:sp>
+      <p:sp>
+        <p:nvSpPr>
+          <p:cNvPr id="17" name="TextBox 16"/>
+          <p:cNvSpPr txBox="1"/>
+          <p:nvPr/>
+        </p:nvSpPr>
+        <p:spPr>
+          <a:xfrm>
+            <a:off x="1097280" y="2916936"/>
+            <a:ext cx="10362895" cy="402336"/>
+          </a:xfrm>
+          <a:prstGeom prst="rect">
+            <a:avLst/>
+          </a:prstGeom>
+          <a:noFill/>
+        </p:spPr>
+        <p:txBody>
+          <a:bodyPr wrap="square" anchor="ctr"/>
+          <a:lstStyle/>
+          <a:p>
+            <a:r>
+              <a:rPr sz="1500" b="1" i="0">
+                <a:solidFill>
+                  <a:srgbClr val="333333"/>
+                </a:solidFill>
+                <a:latin typeface="Calibri"/>
+              </a:rPr>
+              <a:t>DOS REQUISITOS NO FUNCIONALES</a:t>
+            </a:r>
+            <a:r>
+              <a:rPr sz="1500" b="0" i="0">
+                <a:solidFill>
+                  <a:srgbClr val="333333"/>
+                </a:solidFill>
+                <a:latin typeface="Calibri"/>
+              </a:rPr>
+              <a:t> — Dos condiciones que la solución debe cumplir, </a:t>
+            </a:r>
+            <a:r>
+              <a:rPr sz="1500" b="1" i="0">
+                <a:solidFill>
+                  <a:srgbClr val="333333"/>
+                </a:solidFill>
+                <a:latin typeface="Calibri"/>
+              </a:rPr>
+              <a:t>derivadas de las restricciones del árbol de la sesión 6</a:t>
+            </a:r>
+            <a:r>
+              <a:rPr sz="1500" b="0" i="0">
+                <a:solidFill>
+                  <a:srgbClr val="333333"/>
+                </a:solidFill>
+                <a:latin typeface="Calibri"/>
+              </a:rPr>
+              <a:t>. Uno de los dos tiene que ser el indicador ambiental de la sesión 5.</a:t>
+            </a:r>
+          </a:p>
+        </p:txBody>
+      </p:sp>
+      <p:sp>
+        <p:nvSpPr>
+          <p:cNvPr id="18" name="Rounded Rectangle 17"/>
+          <p:cNvSpPr/>
+          <p:nvPr/>
+        </p:nvSpPr>
+        <p:spPr>
+          <a:xfrm>
+            <a:off x="457200" y="3502152"/>
+            <a:ext cx="11277295" cy="566928"/>
+          </a:xfrm>
+          <a:prstGeom prst="roundRect">
+            <a:avLst>
+              <a:gd name="adj" fmla="val 12000"/>
+            </a:avLst>
+          </a:prstGeom>
+          <a:solidFill>
+            <a:srgbClr val="F2F2F2"/>
+          </a:solidFill>
+          <a:ln>
+            <a:noFill/>
+          </a:ln>
+        </p:spPr>
+        <p:style>
+          <a:lnRef idx="1">
+            <a:schemeClr val="accent1"/>
+          </a:lnRef>
+          <a:fillRef idx="3">
+            <a:schemeClr val="accent1"/>
+          </a:fillRef>
+          <a:effectRef idx="2">
+            <a:schemeClr val="accent1"/>
+          </a:effectRef>
+          <a:fontRef idx="minor">
+            <a:schemeClr val="lt1"/>
+          </a:fontRef>
+        </p:style>
+        <p:txBody>
+          <a:bodyPr rtlCol="0" anchor="ctr"/>
+          <a:lstStyle/>
+          <a:p>
+            <a:pPr algn="ctr"/>
+          </a:p>
+        </p:txBody>
+      </p:sp>
+      <p:sp>
+        <p:nvSpPr>
+          <p:cNvPr id="19" name="Rectangle 18"/>
+          <p:cNvSpPr/>
+          <p:nvPr/>
+        </p:nvSpPr>
+        <p:spPr>
+          <a:xfrm>
+            <a:off x="640080" y="3648456"/>
+            <a:ext cx="274320" cy="274320"/>
+          </a:xfrm>
+          <a:prstGeom prst="rect">
+            <a:avLst/>
+          </a:prstGeom>
+          <a:solidFill>
+            <a:srgbClr val="FFFFFF"/>
+          </a:solidFill>
+          <a:ln>
+            <a:solidFill>
+              <a:srgbClr val="333333"/>
+            </a:solidFill>
+          </a:ln>
+        </p:spPr>
+        <p:style>
+          <a:lnRef idx="1">
+            <a:schemeClr val="accent1"/>
+          </a:lnRef>
+          <a:fillRef idx="3">
+            <a:schemeClr val="accent1"/>
+          </a:fillRef>
+          <a:effectRef idx="2">
+            <a:schemeClr val="accent1"/>
+          </a:effectRef>
+          <a:fontRef idx="minor">
+            <a:schemeClr val="lt1"/>
+          </a:fontRef>
+        </p:style>
+        <p:txBody>
+          <a:bodyPr rtlCol="0" anchor="ctr"/>
+          <a:lstStyle/>
+          <a:p>
+            <a:pPr algn="ctr"/>
+          </a:p>
+        </p:txBody>
+      </p:sp>
+      <p:sp>
+        <p:nvSpPr>
+          <p:cNvPr id="20" name="Rectangle 19"/>
+          <p:cNvSpPr/>
+          <p:nvPr/>
+        </p:nvSpPr>
+        <p:spPr>
+          <a:xfrm>
+            <a:off x="640080" y="3648456"/>
+            <a:ext cx="73152" cy="274320"/>
+          </a:xfrm>
+          <a:prstGeom prst="rect">
+            <a:avLst/>
+          </a:prstGeom>
+          <a:solidFill>
+            <a:srgbClr val="269CCB"/>
+          </a:solidFill>
+          <a:ln>
+            <a:noFill/>
+          </a:ln>
+        </p:spPr>
+        <p:style>
+          <a:lnRef idx="1">
+            <a:schemeClr val="accent1"/>
+          </a:lnRef>
+          <a:fillRef idx="3">
+            <a:schemeClr val="accent1"/>
+          </a:fillRef>
+          <a:effectRef idx="2">
+            <a:schemeClr val="accent1"/>
+          </a:effectRef>
+          <a:fontRef idx="minor">
+            <a:schemeClr val="lt1"/>
+          </a:fontRef>
+        </p:style>
+        <p:txBody>
+          <a:bodyPr rtlCol="0" anchor="ctr"/>
+          <a:lstStyle/>
+          <a:p>
+            <a:pPr algn="ctr"/>
+          </a:p>
+        </p:txBody>
+      </p:sp>
+      <p:sp>
+        <p:nvSpPr>
+          <p:cNvPr id="21" name="TextBox 20"/>
+          <p:cNvSpPr txBox="1"/>
+          <p:nvPr/>
+        </p:nvSpPr>
+        <p:spPr>
+          <a:xfrm>
+            <a:off x="1097280" y="3593592"/>
+            <a:ext cx="10362895" cy="402336"/>
+          </a:xfrm>
+          <a:prstGeom prst="rect">
+            <a:avLst/>
+          </a:prstGeom>
+          <a:noFill/>
+        </p:spPr>
+        <p:txBody>
+          <a:bodyPr wrap="square" anchor="ctr"/>
+          <a:lstStyle/>
+          <a:p>
+            <a:r>
+              <a:rPr sz="1500" b="1" i="0">
+                <a:solidFill>
+                  <a:srgbClr val="333333"/>
+                </a:solidFill>
+                <a:latin typeface="Calibri"/>
+              </a:rPr>
+              <a:t>LOS CRITERIOS DE ACEPTACIÓN</a:t>
+            </a:r>
+            <a:r>
+              <a:rPr sz="1500" b="0" i="0">
+                <a:solidFill>
+                  <a:srgbClr val="333333"/>
+                </a:solidFill>
+                <a:latin typeface="Calibri"/>
+              </a:rPr>
+              <a:t> — Para cada uno de los cinco requisitos: cómo se comprueba, con un caso concreto y un umbral. Tiene que poder ejecutarlo otra persona.</a:t>
+            </a:r>
+          </a:p>
+        </p:txBody>
+      </p:sp>
+      <p:sp>
+        <p:nvSpPr>
+          <p:cNvPr id="22" name="Rounded Rectangle 21"/>
+          <p:cNvSpPr/>
+          <p:nvPr/>
+        </p:nvSpPr>
+        <p:spPr>
+          <a:xfrm>
+            <a:off x="457200" y="4178808"/>
+            <a:ext cx="11277295" cy="566928"/>
+          </a:xfrm>
+          <a:prstGeom prst="roundRect">
+            <a:avLst>
+              <a:gd name="adj" fmla="val 12000"/>
+            </a:avLst>
+          </a:prstGeom>
+          <a:solidFill>
+            <a:srgbClr val="F2F2F2"/>
+          </a:solidFill>
+          <a:ln>
+            <a:noFill/>
+          </a:ln>
+        </p:spPr>
+        <p:style>
+          <a:lnRef idx="1">
+            <a:schemeClr val="accent1"/>
+          </a:lnRef>
+          <a:fillRef idx="3">
+            <a:schemeClr val="accent1"/>
+          </a:fillRef>
+          <a:effectRef idx="2">
+            <a:schemeClr val="accent1"/>
+          </a:effectRef>
+          <a:fontRef idx="minor">
+            <a:schemeClr val="lt1"/>
+          </a:fontRef>
+        </p:style>
+        <p:txBody>
+          <a:bodyPr rtlCol="0" anchor="ctr"/>
+          <a:lstStyle/>
+          <a:p>
+            <a:pPr algn="ctr"/>
+          </a:p>
+        </p:txBody>
+      </p:sp>
+      <p:sp>
+        <p:nvSpPr>
+          <p:cNvPr id="23" name="Rectangle 22"/>
+          <p:cNvSpPr/>
+          <p:nvPr/>
+        </p:nvSpPr>
+        <p:spPr>
+          <a:xfrm>
+            <a:off x="640080" y="4325112"/>
+            <a:ext cx="274320" cy="274320"/>
+          </a:xfrm>
+          <a:prstGeom prst="rect">
+            <a:avLst/>
+          </a:prstGeom>
+          <a:solidFill>
+            <a:srgbClr val="FFFFFF"/>
+          </a:solidFill>
+          <a:ln>
+            <a:solidFill>
+              <a:srgbClr val="333333"/>
+            </a:solidFill>
+          </a:ln>
+        </p:spPr>
+        <p:style>
+          <a:lnRef idx="1">
+            <a:schemeClr val="accent1"/>
+          </a:lnRef>
+          <a:fillRef idx="3">
+            <a:schemeClr val="accent1"/>
+          </a:fillRef>
+          <a:effectRef idx="2">
+            <a:schemeClr val="accent1"/>
+          </a:effectRef>
+          <a:fontRef idx="minor">
+            <a:schemeClr val="lt1"/>
+          </a:fontRef>
+        </p:style>
+        <p:txBody>
+          <a:bodyPr rtlCol="0" anchor="ctr"/>
+          <a:lstStyle/>
+          <a:p>
+            <a:pPr algn="ctr"/>
+          </a:p>
+        </p:txBody>
+      </p:sp>
+      <p:sp>
+        <p:nvSpPr>
+          <p:cNvPr id="24" name="Rectangle 23"/>
+          <p:cNvSpPr/>
+          <p:nvPr/>
+        </p:nvSpPr>
+        <p:spPr>
+          <a:xfrm>
+            <a:off x="640080" y="4325112"/>
+            <a:ext cx="73152" cy="274320"/>
+          </a:xfrm>
+          <a:prstGeom prst="rect">
+            <a:avLst/>
+          </a:prstGeom>
+          <a:solidFill>
+            <a:srgbClr val="269CCB"/>
+          </a:solidFill>
+          <a:ln>
+            <a:noFill/>
+          </a:ln>
+        </p:spPr>
+        <p:style>
+          <a:lnRef idx="1">
+            <a:schemeClr val="accent1"/>
+          </a:lnRef>
+          <a:fillRef idx="3">
+            <a:schemeClr val="accent1"/>
+          </a:fillRef>
+          <a:effectRef idx="2">
+            <a:schemeClr val="accent1"/>
+          </a:effectRef>
+          <a:fontRef idx="minor">
+            <a:schemeClr val="lt1"/>
+          </a:fontRef>
+        </p:style>
+        <p:txBody>
+          <a:bodyPr rtlCol="0" anchor="ctr"/>
+          <a:lstStyle/>
+          <a:p>
+            <a:pPr algn="ctr"/>
+          </a:p>
+        </p:txBody>
+      </p:sp>
+      <p:sp>
+        <p:nvSpPr>
+          <p:cNvPr id="25" name="TextBox 24"/>
+          <p:cNvSpPr txBox="1"/>
+          <p:nvPr/>
+        </p:nvSpPr>
+        <p:spPr>
+          <a:xfrm>
+            <a:off x="1097280" y="4270248"/>
+            <a:ext cx="10362895" cy="402336"/>
+          </a:xfrm>
+          <a:prstGeom prst="rect">
+            <a:avLst/>
+          </a:prstGeom>
+          <a:noFill/>
+        </p:spPr>
+        <p:txBody>
+          <a:bodyPr wrap="square" anchor="ctr"/>
+          <a:lstStyle/>
+          <a:p>
+            <a:r>
+              <a:rPr sz="1500" b="1" i="0">
+                <a:solidFill>
+                  <a:srgbClr val="333333"/>
+                </a:solidFill>
+                <a:latin typeface="Calibri"/>
+              </a:rPr>
+              <a:t>EL PLAN DE HITOS</a:t>
+            </a:r>
+            <a:r>
+              <a:rPr sz="1500" b="0" i="0">
+                <a:solidFill>
+                  <a:srgbClr val="333333"/>
+                </a:solidFill>
+                <a:latin typeface="Calibri"/>
+              </a:rPr>
+              <a:t> — Qué queda </a:t>
+            </a:r>
+            <a:r>
+              <a:rPr sz="1500" b="1" i="0">
+                <a:solidFill>
+                  <a:srgbClr val="333333"/>
+                </a:solidFill>
+                <a:latin typeface="Calibri"/>
+              </a:rPr>
+              <a:t>terminado y verificable</a:t>
+            </a:r>
+            <a:r>
+              <a:rPr sz="1500" b="0" i="0">
+                <a:solidFill>
+                  <a:srgbClr val="333333"/>
+                </a:solidFill>
+                <a:latin typeface="Calibri"/>
+              </a:rPr>
+              <a:t> en cada una de las sesiones 8, 9, 10, 11, 12 y 14. Y la decisión de hoy que sería carísima cambiar en la Clase 14.</a:t>
+            </a:r>
+          </a:p>
+        </p:txBody>
+      </p:sp>
+      <p:sp>
+        <p:nvSpPr>
+          <p:cNvPr id="26" name="TextBox 25"/>
+          <p:cNvSpPr txBox="1"/>
+          <p:nvPr/>
+        </p:nvSpPr>
+        <p:spPr>
+          <a:xfrm>
+            <a:off x="11185855" y="6473952"/>
+            <a:ext cx="640080" cy="274320"/>
+          </a:xfrm>
+          <a:prstGeom prst="rect">
+            <a:avLst/>
+          </a:prstGeom>
+          <a:noFill/>
+        </p:spPr>
+        <p:txBody>
+          <a:bodyPr wrap="square">
+            <a:spAutoFit/>
+          </a:bodyPr>
+          <a:lstStyle/>
+          <a:p>
+            <a:pPr algn="r"/>
+            <a:r>
+              <a:rPr sz="1100" b="0" i="0">
+                <a:solidFill>
+                  <a:srgbClr val="666666"/>
+                </a:solidFill>
+                <a:latin typeface="Calibri"/>
+              </a:rPr>
+              <a:t>20</a:t>
+            </a:r>
+          </a:p>
+        </p:txBody>
+      </p:sp>
+    </p:spTree>
+  </p:cSld>
+  <p:clrMapOvr>
+    <a:masterClrMapping/>
+  </p:clrMapOvr>
+</p:sld>
+</file>
+
+<file path=ppt/slides/slide21.xml><?xml version="1.0" encoding="utf-8"?>
+<p:sld xmlns:a="http://schemas.openxmlformats.org/drawingml/2006/main" xmlns:p="http://schemas.openxmlformats.org/presentationml/2006/main" xmlns:r="http://schemas.openxmlformats.org/officeDocument/2006/relationships">
+  <p:cSld>
+    <p:bg>
+      <p:bgPr>
+        <a:solidFill>
+          <a:srgbClr val="FFFFFF"/>
+        </a:solidFill>
+        <a:effectLst/>
+      </p:bgPr>
+    </p:bg>
+    <p:spTree>
+      <p:nvGrpSpPr>
+        <p:cNvPr id="1" name=""/>
+        <p:cNvGrpSpPr/>
+        <p:nvPr/>
+      </p:nvGrpSpPr>
+      <p:grpSpPr/>
+      <p:sp>
+        <p:nvSpPr>
+          <p:cNvPr id="2" name="Rectangle 1"/>
+          <p:cNvSpPr/>
+          <p:nvPr/>
+        </p:nvSpPr>
+        <p:spPr>
+          <a:xfrm>
+            <a:off x="0" y="0"/>
+            <a:ext cx="12191695" cy="1170432"/>
+          </a:xfrm>
+          <a:prstGeom prst="rect">
+            <a:avLst/>
+          </a:prstGeom>
+          <a:solidFill>
+            <a:srgbClr val="095292"/>
+          </a:solidFill>
+          <a:ln>
+            <a:noFill/>
+          </a:ln>
+        </p:spPr>
+        <p:style>
+          <a:lnRef idx="1">
+            <a:schemeClr val="accent1"/>
+          </a:lnRef>
+          <a:fillRef idx="3">
+            <a:schemeClr val="accent1"/>
+          </a:fillRef>
+          <a:effectRef idx="2">
+            <a:schemeClr val="accent1"/>
+          </a:effectRef>
+          <a:fontRef idx="minor">
+            <a:schemeClr val="lt1"/>
+          </a:fontRef>
+        </p:style>
+        <p:txBody>
+          <a:bodyPr rtlCol="0" anchor="ctr"/>
+          <a:lstStyle/>
+          <a:p>
+            <a:pPr algn="ctr"/>
+          </a:p>
+        </p:txBody>
+      </p:sp>
+      <p:sp>
+        <p:nvSpPr>
+          <p:cNvPr id="3" name="Rectangle 2"/>
+          <p:cNvSpPr/>
+          <p:nvPr/>
+        </p:nvSpPr>
+        <p:spPr>
+          <a:xfrm>
+            <a:off x="0" y="1170432"/>
+            <a:ext cx="12191695" cy="41148"/>
+          </a:xfrm>
+          <a:prstGeom prst="rect">
+            <a:avLst/>
+          </a:prstGeom>
+          <a:solidFill>
+            <a:srgbClr val="FFD000"/>
+          </a:solidFill>
+          <a:ln>
+            <a:noFill/>
+          </a:ln>
+        </p:spPr>
+        <p:style>
+          <a:lnRef idx="1">
+            <a:schemeClr val="accent1"/>
+          </a:lnRef>
+          <a:fillRef idx="3">
+            <a:schemeClr val="accent1"/>
+          </a:fillRef>
+          <a:effectRef idx="2">
+            <a:schemeClr val="accent1"/>
+          </a:effectRef>
+          <a:fontRef idx="minor">
+            <a:schemeClr val="lt1"/>
+          </a:fontRef>
+        </p:style>
+        <p:txBody>
+          <a:bodyPr rtlCol="0" anchor="ctr"/>
+          <a:lstStyle/>
+          <a:p>
+            <a:pPr algn="ctr"/>
+          </a:p>
+        </p:txBody>
+      </p:sp>
+      <p:sp>
+        <p:nvSpPr>
+          <p:cNvPr id="4" name="TextBox 3"/>
+          <p:cNvSpPr txBox="1"/>
+          <p:nvPr/>
+        </p:nvSpPr>
+        <p:spPr>
+          <a:xfrm>
+            <a:off x="457200" y="164592"/>
+            <a:ext cx="11277295" cy="384048"/>
+          </a:xfrm>
+          <a:prstGeom prst="rect">
+            <a:avLst/>
+          </a:prstGeom>
+          <a:noFill/>
+        </p:spPr>
+        <p:txBody>
+          <a:bodyPr wrap="square">
+            <a:spAutoFit/>
+          </a:bodyPr>
+          <a:lstStyle/>
+          <a:p>
+            <a:r>
+              <a:rPr sz="2600" b="1" i="0">
+                <a:solidFill>
+                  <a:srgbClr val="FFFFFF"/>
+                </a:solidFill>
+                <a:latin typeface="Calibri"/>
+              </a:rPr>
+              <a:t>Cómo se expone en 3 minutos</a:t>
+            </a:r>
+          </a:p>
+        </p:txBody>
+      </p:sp>
+      <p:sp>
+        <p:nvSpPr>
+          <p:cNvPr id="5" name="TextBox 4"/>
+          <p:cNvSpPr txBox="1"/>
+          <p:nvPr/>
+        </p:nvSpPr>
+        <p:spPr>
+          <a:xfrm>
+            <a:off x="457200" y="566928"/>
+            <a:ext cx="11277295" cy="411480"/>
+          </a:xfrm>
+          <a:prstGeom prst="rect">
+            <a:avLst/>
+          </a:prstGeom>
+          <a:noFill/>
+        </p:spPr>
+        <p:txBody>
+          <a:bodyPr wrap="square">
+            <a:spAutoFit/>
+          </a:bodyPr>
+          <a:lstStyle/>
+          <a:p>
+            <a:r>
+              <a:rPr sz="1400" b="0" i="0">
+                <a:solidFill>
+                  <a:srgbClr val="B8D8EE"/>
+                </a:solidFill>
+                <a:latin typeface="Calibri"/>
+              </a:rPr>
+              <a:t>Habla el vocero con la pantalla ya compartida · cronómetro en pantalla · se corta al llegar a cero</a:t>
+            </a:r>
+          </a:p>
+        </p:txBody>
+      </p:sp>
+      <p:sp>
+        <p:nvSpPr>
+          <p:cNvPr id="6" name="Rounded Rectangle 5"/>
+          <p:cNvSpPr/>
+          <p:nvPr/>
+        </p:nvSpPr>
+        <p:spPr>
+          <a:xfrm>
+            <a:off x="457200" y="1444752"/>
+            <a:ext cx="11277295" cy="908913"/>
+          </a:xfrm>
+          <a:prstGeom prst="roundRect">
+            <a:avLst>
+              <a:gd name="adj" fmla="val 12000"/>
+            </a:avLst>
+          </a:prstGeom>
+          <a:solidFill>
+            <a:srgbClr val="F2F2F2"/>
+          </a:solidFill>
+          <a:ln>
+            <a:noFill/>
+          </a:ln>
+        </p:spPr>
+        <p:style>
+          <a:lnRef idx="1">
+            <a:schemeClr val="accent1"/>
+          </a:lnRef>
+          <a:fillRef idx="3">
+            <a:schemeClr val="accent1"/>
+          </a:fillRef>
+          <a:effectRef idx="2">
+            <a:schemeClr val="accent1"/>
+          </a:effectRef>
+          <a:fontRef idx="minor">
+            <a:schemeClr val="lt1"/>
+          </a:fontRef>
+        </p:style>
+        <p:txBody>
+          <a:bodyPr rtlCol="0" anchor="ctr"/>
+          <a:lstStyle/>
+          <a:p>
+            <a:pPr algn="ctr"/>
+          </a:p>
+        </p:txBody>
+      </p:sp>
+      <p:sp>
+        <p:nvSpPr>
+          <p:cNvPr id="7" name="Rounded Rectangle 6"/>
+          <p:cNvSpPr/>
+          <p:nvPr/>
+        </p:nvSpPr>
+        <p:spPr>
+          <a:xfrm>
+            <a:off x="594360" y="1679752"/>
+            <a:ext cx="438912" cy="438912"/>
+          </a:xfrm>
+          <a:prstGeom prst="roundRect">
+            <a:avLst>
+              <a:gd name="adj" fmla="val 12000"/>
+            </a:avLst>
+          </a:prstGeom>
+          <a:solidFill>
+            <a:srgbClr val="095292"/>
+          </a:solidFill>
+          <a:ln>
+            <a:noFill/>
+          </a:ln>
+        </p:spPr>
+        <p:style>
+          <a:lnRef idx="1">
+            <a:schemeClr val="accent1"/>
+          </a:lnRef>
+          <a:fillRef idx="3">
+            <a:schemeClr val="accent1"/>
+          </a:fillRef>
+          <a:effectRef idx="2">
+            <a:schemeClr val="accent1"/>
+          </a:effectRef>
+          <a:fontRef idx="minor">
+            <a:schemeClr val="lt1"/>
+          </a:fontRef>
+        </p:style>
+        <p:txBody>
+          <a:bodyPr rtlCol="0" anchor="ctr"/>
+          <a:lstStyle/>
+          <a:p>
+            <a:pPr algn="ctr"/>
+          </a:p>
+        </p:txBody>
+      </p:sp>
+      <p:sp>
+        <p:nvSpPr>
+          <p:cNvPr id="8" name="TextBox 7"/>
+          <p:cNvSpPr txBox="1"/>
+          <p:nvPr/>
+        </p:nvSpPr>
+        <p:spPr>
+          <a:xfrm>
+            <a:off x="594360" y="1679752"/>
+            <a:ext cx="438912" cy="438912"/>
+          </a:xfrm>
+          <a:prstGeom prst="rect">
+            <a:avLst/>
+          </a:prstGeom>
+          <a:noFill/>
+        </p:spPr>
+        <p:txBody>
+          <a:bodyPr wrap="square" anchor="ctr"/>
+          <a:lstStyle/>
+          <a:p>
+            <a:pPr algn="ctr"/>
+            <a:r>
+              <a:rPr sz="1600" b="1" i="0">
+                <a:solidFill>
+                  <a:srgbClr val="FFFFFF"/>
+                </a:solidFill>
+                <a:latin typeface="Calibri"/>
+              </a:rPr>
+              <a:t>1</a:t>
+            </a:r>
+          </a:p>
+        </p:txBody>
+      </p:sp>
+      <p:sp>
+        <p:nvSpPr>
+          <p:cNvPr id="9" name="TextBox 8"/>
+          <p:cNvSpPr txBox="1"/>
+          <p:nvPr/>
+        </p:nvSpPr>
+        <p:spPr>
+          <a:xfrm>
+            <a:off x="1188720" y="1536192"/>
+            <a:ext cx="10271455" cy="744321"/>
+          </a:xfrm>
+          <a:prstGeom prst="rect">
+            <a:avLst/>
+          </a:prstGeom>
+          <a:noFill/>
+        </p:spPr>
+        <p:txBody>
+          <a:bodyPr wrap="square" anchor="ctr"/>
+          <a:lstStyle/>
+          <a:p>
+            <a:r>
+              <a:rPr sz="1500" b="1" i="0">
+                <a:solidFill>
+                  <a:srgbClr val="095292"/>
+                </a:solidFill>
+                <a:latin typeface="Calibri"/>
+              </a:rPr>
+              <a:t>30 s · La fase</a:t>
+            </a:r>
+          </a:p>
+          <a:p>
+            <a:pPr>
+              <a:spcBef>
+                <a:spcPts val="200"/>
+              </a:spcBef>
+            </a:pPr>
+            <a:r>
+              <a:rPr sz="1300" b="0" i="0">
+                <a:solidFill>
+                  <a:srgbClr val="333333"/>
+                </a:solidFill>
+                <a:latin typeface="Calibri"/>
+              </a:rPr>
+              <a:t>En qué fase están y qué falta para cerrarla. Es el minuto obligatorio.</a:t>
+            </a:r>
+          </a:p>
+        </p:txBody>
+      </p:sp>
+      <p:sp>
+        <p:nvSpPr>
+          <p:cNvPr id="10" name="Rounded Rectangle 9"/>
+          <p:cNvSpPr/>
+          <p:nvPr/>
+        </p:nvSpPr>
+        <p:spPr>
+          <a:xfrm>
+            <a:off x="457200" y="2445105"/>
+            <a:ext cx="11277295" cy="908913"/>
+          </a:xfrm>
+          <a:prstGeom prst="roundRect">
+            <a:avLst>
+              <a:gd name="adj" fmla="val 12000"/>
+            </a:avLst>
+          </a:prstGeom>
+          <a:solidFill>
+            <a:srgbClr val="E8F4FA"/>
+          </a:solidFill>
+          <a:ln>
+            <a:noFill/>
+          </a:ln>
+        </p:spPr>
+        <p:style>
+          <a:lnRef idx="1">
+            <a:schemeClr val="accent1"/>
+          </a:lnRef>
+          <a:fillRef idx="3">
+            <a:schemeClr val="accent1"/>
+          </a:fillRef>
+          <a:effectRef idx="2">
+            <a:schemeClr val="accent1"/>
+          </a:effectRef>
+          <a:fontRef idx="minor">
+            <a:schemeClr val="lt1"/>
+          </a:fontRef>
+        </p:style>
+        <p:txBody>
+          <a:bodyPr rtlCol="0" anchor="ctr"/>
+          <a:lstStyle/>
+          <a:p>
+            <a:pPr algn="ctr"/>
+          </a:p>
+        </p:txBody>
+      </p:sp>
+      <p:sp>
+        <p:nvSpPr>
+          <p:cNvPr id="11" name="Rounded Rectangle 10"/>
+          <p:cNvSpPr/>
+          <p:nvPr/>
+        </p:nvSpPr>
+        <p:spPr>
+          <a:xfrm>
+            <a:off x="594360" y="2680106"/>
+            <a:ext cx="438912" cy="438912"/>
+          </a:xfrm>
+          <a:prstGeom prst="roundRect">
+            <a:avLst>
+              <a:gd name="adj" fmla="val 12000"/>
+            </a:avLst>
+          </a:prstGeom>
+          <a:solidFill>
+            <a:srgbClr val="095292"/>
+          </a:solidFill>
+          <a:ln>
+            <a:noFill/>
+          </a:ln>
+        </p:spPr>
+        <p:style>
+          <a:lnRef idx="1">
+            <a:schemeClr val="accent1"/>
+          </a:lnRef>
+          <a:fillRef idx="3">
+            <a:schemeClr val="accent1"/>
+          </a:fillRef>
+          <a:effectRef idx="2">
+            <a:schemeClr val="accent1"/>
+          </a:effectRef>
+          <a:fontRef idx="minor">
+            <a:schemeClr val="lt1"/>
+          </a:fontRef>
+        </p:style>
+        <p:txBody>
+          <a:bodyPr rtlCol="0" anchor="ctr"/>
+          <a:lstStyle/>
+          <a:p>
+            <a:pPr algn="ctr"/>
+          </a:p>
+        </p:txBody>
+      </p:sp>
+      <p:sp>
+        <p:nvSpPr>
+          <p:cNvPr id="12" name="TextBox 11"/>
+          <p:cNvSpPr txBox="1"/>
+          <p:nvPr/>
+        </p:nvSpPr>
+        <p:spPr>
+          <a:xfrm>
+            <a:off x="594360" y="2680106"/>
+            <a:ext cx="438912" cy="438912"/>
+          </a:xfrm>
+          <a:prstGeom prst="rect">
+            <a:avLst/>
+          </a:prstGeom>
+          <a:noFill/>
+        </p:spPr>
+        <p:txBody>
+          <a:bodyPr wrap="square" anchor="ctr"/>
+          <a:lstStyle/>
+          <a:p>
+            <a:pPr algn="ctr"/>
+            <a:r>
+              <a:rPr sz="1600" b="1" i="0">
+                <a:solidFill>
+                  <a:srgbClr val="FFFFFF"/>
+                </a:solidFill>
+                <a:latin typeface="Calibri"/>
+              </a:rPr>
+              <a:t>2</a:t>
+            </a:r>
+          </a:p>
+        </p:txBody>
+      </p:sp>
+      <p:sp>
+        <p:nvSpPr>
+          <p:cNvPr id="13" name="TextBox 12"/>
+          <p:cNvSpPr txBox="1"/>
+          <p:nvPr/>
+        </p:nvSpPr>
+        <p:spPr>
+          <a:xfrm>
+            <a:off x="1188720" y="2536545"/>
+            <a:ext cx="10271455" cy="744321"/>
+          </a:xfrm>
+          <a:prstGeom prst="rect">
+            <a:avLst/>
+          </a:prstGeom>
+          <a:noFill/>
+        </p:spPr>
+        <p:txBody>
+          <a:bodyPr wrap="square" anchor="ctr"/>
+          <a:lstStyle/>
+          <a:p>
+            <a:r>
+              <a:rPr sz="1500" b="1" i="0">
+                <a:solidFill>
+                  <a:srgbClr val="095292"/>
+                </a:solidFill>
+                <a:latin typeface="Calibri"/>
+              </a:rPr>
+              <a:t>50 s · Los requisitos</a:t>
+            </a:r>
+          </a:p>
+          <a:p>
+            <a:pPr>
+              <a:spcBef>
+                <a:spcPts val="200"/>
+              </a:spcBef>
+            </a:pPr>
+            <a:r>
+              <a:rPr sz="1300" b="0" i="0">
+                <a:solidFill>
+                  <a:srgbClr val="333333"/>
+                </a:solidFill>
+                <a:latin typeface="Calibri"/>
+              </a:rPr>
+              <a:t>Uno funcional y uno no funcional, leídos tal cual.</a:t>
+            </a:r>
+          </a:p>
+        </p:txBody>
+      </p:sp>
+      <p:sp>
+        <p:nvSpPr>
+          <p:cNvPr id="14" name="Rounded Rectangle 13"/>
+          <p:cNvSpPr/>
+          <p:nvPr/>
+        </p:nvSpPr>
+        <p:spPr>
+          <a:xfrm>
+            <a:off x="457200" y="3445459"/>
+            <a:ext cx="11277295" cy="908913"/>
+          </a:xfrm>
+          <a:prstGeom prst="roundRect">
+            <a:avLst>
+              <a:gd name="adj" fmla="val 12000"/>
+            </a:avLst>
+          </a:prstGeom>
+          <a:solidFill>
+            <a:srgbClr val="F2F2F2"/>
+          </a:solidFill>
+          <a:ln>
+            <a:noFill/>
+          </a:ln>
+        </p:spPr>
+        <p:style>
+          <a:lnRef idx="1">
+            <a:schemeClr val="accent1"/>
+          </a:lnRef>
+          <a:fillRef idx="3">
+            <a:schemeClr val="accent1"/>
+          </a:fillRef>
+          <a:effectRef idx="2">
+            <a:schemeClr val="accent1"/>
+          </a:effectRef>
+          <a:fontRef idx="minor">
+            <a:schemeClr val="lt1"/>
+          </a:fontRef>
+        </p:style>
+        <p:txBody>
+          <a:bodyPr rtlCol="0" anchor="ctr"/>
+          <a:lstStyle/>
+          <a:p>
+            <a:pPr algn="ctr"/>
+          </a:p>
+        </p:txBody>
+      </p:sp>
+      <p:sp>
+        <p:nvSpPr>
+          <p:cNvPr id="15" name="Rounded Rectangle 14"/>
+          <p:cNvSpPr/>
+          <p:nvPr/>
+        </p:nvSpPr>
+        <p:spPr>
+          <a:xfrm>
+            <a:off x="594360" y="3680460"/>
+            <a:ext cx="438912" cy="438912"/>
+          </a:xfrm>
+          <a:prstGeom prst="roundRect">
+            <a:avLst>
+              <a:gd name="adj" fmla="val 12000"/>
+            </a:avLst>
+          </a:prstGeom>
+          <a:solidFill>
+            <a:srgbClr val="095292"/>
+          </a:solidFill>
+          <a:ln>
+            <a:noFill/>
+          </a:ln>
+        </p:spPr>
+        <p:style>
+          <a:lnRef idx="1">
+            <a:schemeClr val="accent1"/>
+          </a:lnRef>
+          <a:fillRef idx="3">
+            <a:schemeClr val="accent1"/>
+          </a:fillRef>
+          <a:effectRef idx="2">
+            <a:schemeClr val="accent1"/>
+          </a:effectRef>
+          <a:fontRef idx="minor">
+            <a:schemeClr val="lt1"/>
+          </a:fontRef>
+        </p:style>
+        <p:txBody>
+          <a:bodyPr rtlCol="0" anchor="ctr"/>
+          <a:lstStyle/>
+          <a:p>
+            <a:pPr algn="ctr"/>
+          </a:p>
+        </p:txBody>
+      </p:sp>
+      <p:sp>
+        <p:nvSpPr>
+          <p:cNvPr id="16" name="TextBox 15"/>
+          <p:cNvSpPr txBox="1"/>
+          <p:nvPr/>
+        </p:nvSpPr>
+        <p:spPr>
+          <a:xfrm>
+            <a:off x="594360" y="3680460"/>
+            <a:ext cx="438912" cy="438912"/>
+          </a:xfrm>
+          <a:prstGeom prst="rect">
+            <a:avLst/>
+          </a:prstGeom>
+          <a:noFill/>
+        </p:spPr>
+        <p:txBody>
+          <a:bodyPr wrap="square" anchor="ctr"/>
+          <a:lstStyle/>
+          <a:p>
+            <a:pPr algn="ctr"/>
+            <a:r>
+              <a:rPr sz="1600" b="1" i="0">
+                <a:solidFill>
+                  <a:srgbClr val="FFFFFF"/>
+                </a:solidFill>
+                <a:latin typeface="Calibri"/>
+              </a:rPr>
+              <a:t>3</a:t>
+            </a:r>
+          </a:p>
+        </p:txBody>
+      </p:sp>
+      <p:sp>
+        <p:nvSpPr>
+          <p:cNvPr id="17" name="TextBox 16"/>
+          <p:cNvSpPr txBox="1"/>
+          <p:nvPr/>
+        </p:nvSpPr>
+        <p:spPr>
+          <a:xfrm>
+            <a:off x="1188720" y="3536899"/>
+            <a:ext cx="10271455" cy="744321"/>
+          </a:xfrm>
+          <a:prstGeom prst="rect">
+            <a:avLst/>
+          </a:prstGeom>
+          <a:noFill/>
+        </p:spPr>
+        <p:txBody>
+          <a:bodyPr wrap="square" anchor="ctr"/>
+          <a:lstStyle/>
+          <a:p>
+            <a:r>
+              <a:rPr sz="1500" b="1" i="0">
+                <a:solidFill>
+                  <a:srgbClr val="095292"/>
+                </a:solidFill>
+                <a:latin typeface="Calibri"/>
+              </a:rPr>
+              <a:t>50 s · El criterio de aceptación</a:t>
+            </a:r>
+          </a:p>
+          <a:p>
+            <a:pPr>
+              <a:spcBef>
+                <a:spcPts val="200"/>
+              </a:spcBef>
+            </a:pPr>
+            <a:r>
+              <a:rPr sz="1300" b="0" i="0">
+                <a:solidFill>
+                  <a:srgbClr val="333333"/>
+                </a:solidFill>
+                <a:latin typeface="Calibri"/>
+              </a:rPr>
+              <a:t>De ese requisito: cómo se comprueba y con qué umbral.</a:t>
+            </a:r>
+          </a:p>
+        </p:txBody>
+      </p:sp>
+      <p:sp>
+        <p:nvSpPr>
+          <p:cNvPr id="18" name="Rounded Rectangle 17"/>
+          <p:cNvSpPr/>
+          <p:nvPr/>
+        </p:nvSpPr>
+        <p:spPr>
+          <a:xfrm>
+            <a:off x="457200" y="4445812"/>
+            <a:ext cx="11277295" cy="908913"/>
+          </a:xfrm>
+          <a:prstGeom prst="roundRect">
+            <a:avLst>
+              <a:gd name="adj" fmla="val 12000"/>
+            </a:avLst>
+          </a:prstGeom>
+          <a:solidFill>
+            <a:srgbClr val="E8F4FA"/>
+          </a:solidFill>
+          <a:ln>
+            <a:noFill/>
+          </a:ln>
+        </p:spPr>
+        <p:style>
+          <a:lnRef idx="1">
+            <a:schemeClr val="accent1"/>
+          </a:lnRef>
+          <a:fillRef idx="3">
+            <a:schemeClr val="accent1"/>
+          </a:fillRef>
+          <a:effectRef idx="2">
+            <a:schemeClr val="accent1"/>
+          </a:effectRef>
+          <a:fontRef idx="minor">
+            <a:schemeClr val="lt1"/>
+          </a:fontRef>
+        </p:style>
+        <p:txBody>
+          <a:bodyPr rtlCol="0" anchor="ctr"/>
+          <a:lstStyle/>
+          <a:p>
+            <a:pPr algn="ctr"/>
+          </a:p>
+        </p:txBody>
+      </p:sp>
+      <p:sp>
+        <p:nvSpPr>
+          <p:cNvPr id="19" name="Rounded Rectangle 18"/>
+          <p:cNvSpPr/>
+          <p:nvPr/>
+        </p:nvSpPr>
+        <p:spPr>
+          <a:xfrm>
+            <a:off x="594360" y="4680813"/>
+            <a:ext cx="438912" cy="438912"/>
+          </a:xfrm>
+          <a:prstGeom prst="roundRect">
+            <a:avLst>
+              <a:gd name="adj" fmla="val 12000"/>
+            </a:avLst>
+          </a:prstGeom>
+          <a:solidFill>
+            <a:srgbClr val="095292"/>
+          </a:solidFill>
+          <a:ln>
+            <a:noFill/>
+          </a:ln>
+        </p:spPr>
+        <p:style>
+          <a:lnRef idx="1">
+            <a:schemeClr val="accent1"/>
+          </a:lnRef>
+          <a:fillRef idx="3">
+            <a:schemeClr val="accent1"/>
+          </a:fillRef>
+          <a:effectRef idx="2">
+            <a:schemeClr val="accent1"/>
+          </a:effectRef>
+          <a:fontRef idx="minor">
+            <a:schemeClr val="lt1"/>
+          </a:fontRef>
+        </p:style>
+        <p:txBody>
+          <a:bodyPr rtlCol="0" anchor="ctr"/>
+          <a:lstStyle/>
+          <a:p>
+            <a:pPr algn="ctr"/>
+          </a:p>
+        </p:txBody>
+      </p:sp>
+      <p:sp>
+        <p:nvSpPr>
+          <p:cNvPr id="20" name="TextBox 19"/>
+          <p:cNvSpPr txBox="1"/>
+          <p:nvPr/>
+        </p:nvSpPr>
+        <p:spPr>
+          <a:xfrm>
+            <a:off x="594360" y="4680813"/>
+            <a:ext cx="438912" cy="438912"/>
+          </a:xfrm>
+          <a:prstGeom prst="rect">
+            <a:avLst/>
+          </a:prstGeom>
+          <a:noFill/>
+        </p:spPr>
+        <p:txBody>
+          <a:bodyPr wrap="square" anchor="ctr"/>
+          <a:lstStyle/>
+          <a:p>
+            <a:pPr algn="ctr"/>
+            <a:r>
+              <a:rPr sz="1600" b="1" i="0">
+                <a:solidFill>
+                  <a:srgbClr val="FFFFFF"/>
+                </a:solidFill>
+                <a:latin typeface="Calibri"/>
+              </a:rPr>
+              <a:t>4</a:t>
+            </a:r>
+          </a:p>
+        </p:txBody>
+      </p:sp>
+      <p:sp>
+        <p:nvSpPr>
+          <p:cNvPr id="21" name="TextBox 20"/>
+          <p:cNvSpPr txBox="1"/>
+          <p:nvPr/>
+        </p:nvSpPr>
+        <p:spPr>
+          <a:xfrm>
+            <a:off x="1188720" y="4537252"/>
+            <a:ext cx="10271455" cy="744321"/>
+          </a:xfrm>
+          <a:prstGeom prst="rect">
+            <a:avLst/>
+          </a:prstGeom>
+          <a:noFill/>
+        </p:spPr>
+        <p:txBody>
+          <a:bodyPr wrap="square" anchor="ctr"/>
+          <a:lstStyle/>
+          <a:p>
+            <a:r>
+              <a:rPr sz="1500" b="1" i="0">
+                <a:solidFill>
+                  <a:srgbClr val="095292"/>
+                </a:solidFill>
+                <a:latin typeface="Calibri"/>
+              </a:rPr>
+              <a:t>40 s · El plan de hitos</a:t>
+            </a:r>
+          </a:p>
+          <a:p>
+            <a:pPr>
+              <a:spcBef>
+                <a:spcPts val="200"/>
+              </a:spcBef>
+            </a:pPr>
+            <a:r>
+              <a:rPr sz="1300" b="0" i="0">
+                <a:solidFill>
+                  <a:srgbClr val="333333"/>
+                </a:solidFill>
+                <a:latin typeface="Calibri"/>
+              </a:rPr>
+              <a:t>Qué queda listo en la Clase 10 y en la 12.</a:t>
+            </a:r>
+          </a:p>
+        </p:txBody>
+      </p:sp>
+      <p:sp>
+        <p:nvSpPr>
+          <p:cNvPr id="22" name="Rounded Rectangle 21"/>
+          <p:cNvSpPr/>
+          <p:nvPr/>
+        </p:nvSpPr>
+        <p:spPr>
+          <a:xfrm>
+            <a:off x="457200" y="5446166"/>
+            <a:ext cx="11277295" cy="908913"/>
+          </a:xfrm>
+          <a:prstGeom prst="roundRect">
+            <a:avLst>
+              <a:gd name="adj" fmla="val 12000"/>
+            </a:avLst>
+          </a:prstGeom>
+          <a:solidFill>
+            <a:srgbClr val="F2F2F2"/>
+          </a:solidFill>
+          <a:ln>
+            <a:noFill/>
+          </a:ln>
+        </p:spPr>
+        <p:style>
+          <a:lnRef idx="1">
+            <a:schemeClr val="accent1"/>
+          </a:lnRef>
+          <a:fillRef idx="3">
+            <a:schemeClr val="accent1"/>
+          </a:fillRef>
+          <a:effectRef idx="2">
+            <a:schemeClr val="accent1"/>
+          </a:effectRef>
+          <a:fontRef idx="minor">
+            <a:schemeClr val="lt1"/>
+          </a:fontRef>
+        </p:style>
+        <p:txBody>
+          <a:bodyPr rtlCol="0" anchor="ctr"/>
+          <a:lstStyle/>
+          <a:p>
+            <a:pPr algn="ctr"/>
+          </a:p>
+        </p:txBody>
+      </p:sp>
+      <p:sp>
+        <p:nvSpPr>
+          <p:cNvPr id="23" name="Rounded Rectangle 22"/>
+          <p:cNvSpPr/>
+          <p:nvPr/>
+        </p:nvSpPr>
+        <p:spPr>
+          <a:xfrm>
+            <a:off x="594360" y="5681167"/>
+            <a:ext cx="438912" cy="438912"/>
+          </a:xfrm>
+          <a:prstGeom prst="roundRect">
+            <a:avLst>
+              <a:gd name="adj" fmla="val 12000"/>
+            </a:avLst>
+          </a:prstGeom>
+          <a:solidFill>
+            <a:srgbClr val="095292"/>
+          </a:solidFill>
+          <a:ln>
+            <a:noFill/>
+          </a:ln>
+        </p:spPr>
+        <p:style>
+          <a:lnRef idx="1">
+            <a:schemeClr val="accent1"/>
+          </a:lnRef>
+          <a:fillRef idx="3">
+            <a:schemeClr val="accent1"/>
+          </a:fillRef>
+          <a:effectRef idx="2">
+            <a:schemeClr val="accent1"/>
+          </a:effectRef>
+          <a:fontRef idx="minor">
+            <a:schemeClr val="lt1"/>
+          </a:fontRef>
+        </p:style>
+        <p:txBody>
+          <a:bodyPr rtlCol="0" anchor="ctr"/>
+          <a:lstStyle/>
+          <a:p>
+            <a:pPr algn="ctr"/>
+          </a:p>
+        </p:txBody>
+      </p:sp>
+      <p:sp>
+        <p:nvSpPr>
+          <p:cNvPr id="24" name="TextBox 23"/>
+          <p:cNvSpPr txBox="1"/>
+          <p:nvPr/>
+        </p:nvSpPr>
+        <p:spPr>
+          <a:xfrm>
+            <a:off x="594360" y="5681167"/>
+            <a:ext cx="438912" cy="438912"/>
+          </a:xfrm>
+          <a:prstGeom prst="rect">
+            <a:avLst/>
+          </a:prstGeom>
+          <a:noFill/>
+        </p:spPr>
+        <p:txBody>
+          <a:bodyPr wrap="square" anchor="ctr"/>
+          <a:lstStyle/>
+          <a:p>
+            <a:pPr algn="ctr"/>
+            <a:r>
+              <a:rPr sz="1600" b="1" i="0">
+                <a:solidFill>
+                  <a:srgbClr val="FFFFFF"/>
+                </a:solidFill>
+                <a:latin typeface="Calibri"/>
+              </a:rPr>
+              <a:t>5</a:t>
+            </a:r>
+          </a:p>
+        </p:txBody>
+      </p:sp>
+      <p:sp>
+        <p:nvSpPr>
+          <p:cNvPr id="25" name="TextBox 24"/>
+          <p:cNvSpPr txBox="1"/>
+          <p:nvPr/>
+        </p:nvSpPr>
+        <p:spPr>
+          <a:xfrm>
+            <a:off x="1188720" y="5537606"/>
+            <a:ext cx="10271455" cy="744321"/>
+          </a:xfrm>
+          <a:prstGeom prst="rect">
+            <a:avLst/>
+          </a:prstGeom>
+          <a:noFill/>
+        </p:spPr>
+        <p:txBody>
+          <a:bodyPr wrap="square" anchor="ctr"/>
+          <a:lstStyle/>
+          <a:p>
+            <a:r>
+              <a:rPr sz="1500" b="1" i="0">
+                <a:solidFill>
+                  <a:srgbClr val="095292"/>
+                </a:solidFill>
+                <a:latin typeface="Calibri"/>
+              </a:rPr>
+              <a:t>10 s · La decisión costosa</a:t>
+            </a:r>
+          </a:p>
+          <a:p>
+            <a:pPr>
+              <a:spcBef>
+                <a:spcPts val="200"/>
+              </a:spcBef>
+            </a:pPr>
+            <a:r>
+              <a:rPr sz="1300" b="0" i="0">
+                <a:solidFill>
+                  <a:srgbClr val="333333"/>
+                </a:solidFill>
+                <a:latin typeface="Calibri"/>
+              </a:rPr>
+              <a:t>Qué sería carísimo cambiar después.</a:t>
+            </a:r>
+          </a:p>
+        </p:txBody>
+      </p:sp>
+      <p:sp>
+        <p:nvSpPr>
+          <p:cNvPr id="26" name="TextBox 25"/>
+          <p:cNvSpPr txBox="1"/>
+          <p:nvPr/>
+        </p:nvSpPr>
+        <p:spPr>
+          <a:xfrm>
+            <a:off x="11185855" y="6473952"/>
+            <a:ext cx="640080" cy="274320"/>
+          </a:xfrm>
+          <a:prstGeom prst="rect">
+            <a:avLst/>
+          </a:prstGeom>
+          <a:noFill/>
+        </p:spPr>
+        <p:txBody>
+          <a:bodyPr wrap="square">
+            <a:spAutoFit/>
+          </a:bodyPr>
+          <a:lstStyle/>
+          <a:p>
+            <a:pPr algn="r"/>
+            <a:r>
+              <a:rPr sz="1100" b="0" i="0">
+                <a:solidFill>
+                  <a:srgbClr val="666666"/>
+                </a:solidFill>
+                <a:latin typeface="Calibri"/>
+              </a:rPr>
+              <a:t>21</a:t>
+            </a:r>
+          </a:p>
+        </p:txBody>
+      </p:sp>
+    </p:spTree>
+  </p:cSld>
+  <p:clrMapOvr>
+    <a:masterClrMapping/>
+  </p:clrMapOvr>
+</p:sld>
+</file>
+
+<file path=ppt/slides/slide22.xml><?xml version="1.0" encoding="utf-8"?>
+<p:sld xmlns:a="http://schemas.openxmlformats.org/drawingml/2006/main" xmlns:p="http://schemas.openxmlformats.org/presentationml/2006/main" xmlns:r="http://schemas.openxmlformats.org/officeDocument/2006/relationships">
+  <p:cSld>
+    <p:bg>
+      <p:bgPr>
+        <a:solidFill>
+          <a:srgbClr val="FFFFFF"/>
+        </a:solidFill>
+        <a:effectLst/>
+      </p:bgPr>
+    </p:bg>
+    <p:spTree>
+      <p:nvGrpSpPr>
+        <p:cNvPr id="1" name=""/>
+        <p:cNvGrpSpPr/>
+        <p:nvPr/>
+      </p:nvGrpSpPr>
+      <p:grpSpPr/>
+      <p:sp>
+        <p:nvSpPr>
+          <p:cNvPr id="2" name="Rectangle 1"/>
+          <p:cNvSpPr/>
+          <p:nvPr/>
+        </p:nvSpPr>
+        <p:spPr>
+          <a:xfrm>
+            <a:off x="0" y="0"/>
+            <a:ext cx="12191695" cy="960120"/>
+          </a:xfrm>
+          <a:prstGeom prst="rect">
+            <a:avLst/>
+          </a:prstGeom>
+          <a:solidFill>
+            <a:srgbClr val="095292"/>
+          </a:solidFill>
+          <a:ln>
+            <a:noFill/>
+          </a:ln>
+        </p:spPr>
+        <p:style>
+          <a:lnRef idx="1">
+            <a:schemeClr val="accent1"/>
+          </a:lnRef>
+          <a:fillRef idx="3">
+            <a:schemeClr val="accent1"/>
+          </a:fillRef>
+          <a:effectRef idx="2">
+            <a:schemeClr val="accent1"/>
+          </a:effectRef>
+          <a:fontRef idx="minor">
+            <a:schemeClr val="lt1"/>
+          </a:fontRef>
+        </p:style>
+        <p:txBody>
+          <a:bodyPr rtlCol="0" anchor="ctr"/>
+          <a:lstStyle/>
+          <a:p>
+            <a:pPr algn="ctr"/>
+          </a:p>
+        </p:txBody>
+      </p:sp>
+      <p:sp>
+        <p:nvSpPr>
+          <p:cNvPr id="3" name="Rectangle 2"/>
+          <p:cNvSpPr/>
+          <p:nvPr/>
+        </p:nvSpPr>
+        <p:spPr>
+          <a:xfrm>
+            <a:off x="0" y="960120"/>
+            <a:ext cx="12191695" cy="41148"/>
+          </a:xfrm>
+          <a:prstGeom prst="rect">
+            <a:avLst/>
+          </a:prstGeom>
+          <a:solidFill>
+            <a:srgbClr val="FFD000"/>
+          </a:solidFill>
+          <a:ln>
+            <a:noFill/>
+          </a:ln>
+        </p:spPr>
+        <p:style>
+          <a:lnRef idx="1">
+            <a:schemeClr val="accent1"/>
+          </a:lnRef>
+          <a:fillRef idx="3">
+            <a:schemeClr val="accent1"/>
+          </a:fillRef>
+          <a:effectRef idx="2">
+            <a:schemeClr val="accent1"/>
+          </a:effectRef>
+          <a:fontRef idx="minor">
+            <a:schemeClr val="lt1"/>
+          </a:fontRef>
+        </p:style>
+        <p:txBody>
+          <a:bodyPr rtlCol="0" anchor="ctr"/>
+          <a:lstStyle/>
+          <a:p>
+            <a:pPr algn="ctr"/>
+          </a:p>
+        </p:txBody>
+      </p:sp>
+      <p:sp>
+        <p:nvSpPr>
+          <p:cNvPr id="4" name="TextBox 3"/>
+          <p:cNvSpPr txBox="1"/>
+          <p:nvPr/>
+        </p:nvSpPr>
+        <p:spPr>
+          <a:xfrm>
+            <a:off x="457200" y="164592"/>
+            <a:ext cx="11277295" cy="502920"/>
+          </a:xfrm>
+          <a:prstGeom prst="rect">
+            <a:avLst/>
+          </a:prstGeom>
+          <a:noFill/>
+        </p:spPr>
+        <p:txBody>
+          <a:bodyPr wrap="square">
+            <a:spAutoFit/>
+          </a:bodyPr>
+          <a:lstStyle/>
+          <a:p>
+            <a:r>
+              <a:rPr sz="2600" b="1" i="0">
+                <a:solidFill>
+                  <a:srgbClr val="FFFFFF"/>
+                </a:solidFill>
+                <a:latin typeface="Calibri"/>
+              </a:rPr>
+              <a:t>Para la Clase 8</a:t>
+            </a:r>
+          </a:p>
+        </p:txBody>
+      </p:sp>
+      <p:sp>
+        <p:nvSpPr>
+          <p:cNvPr id="5" name="TextBox 4"/>
+          <p:cNvSpPr txBox="1"/>
+          <p:nvPr/>
+        </p:nvSpPr>
+        <p:spPr>
+          <a:xfrm>
+            <a:off x="457200" y="1170432"/>
+            <a:ext cx="11277295" cy="5230368"/>
+          </a:xfrm>
+          <a:prstGeom prst="rect">
+            <a:avLst/>
+          </a:prstGeom>
+          <a:noFill/>
+        </p:spPr>
+        <p:txBody>
+          <a:bodyPr wrap="square">
+            <a:spAutoFit/>
+          </a:bodyPr>
+          <a:lstStyle/>
+          <a:p>
+            <a:pPr>
+              <a:spcAft>
+                <a:spcPts val="800"/>
+              </a:spcAft>
+            </a:pPr>
+            <a:r>
+              <a:rPr sz="2000" b="0" i="0">
+                <a:solidFill>
+                  <a:srgbClr val="333333"/>
+                </a:solidFill>
+                <a:latin typeface="Calibri"/>
+              </a:rPr>
+              <a:t>–   </a:t>
+            </a:r>
+            <a:r>
+              <a:rPr sz="2000" b="1" i="0">
+                <a:solidFill>
+                  <a:srgbClr val="333333"/>
+                </a:solidFill>
+                <a:latin typeface="Calibri"/>
+              </a:rPr>
+              <a:t>Trabajo dirigido:</a:t>
+            </a:r>
+            <a:r>
+              <a:rPr sz="2000" b="0" i="0">
+                <a:solidFill>
+                  <a:srgbClr val="333333"/>
+                </a:solidFill>
+                <a:latin typeface="Calibri"/>
+              </a:rPr>
+              <a:t> Estudio de fases del ciclo de vida — leer el material de las seis fases y traer </a:t>
+            </a:r>
+            <a:r>
+              <a:rPr sz="2000" b="1" i="0">
+                <a:solidFill>
+                  <a:srgbClr val="333333"/>
+                </a:solidFill>
+                <a:latin typeface="Calibri"/>
+              </a:rPr>
+              <a:t>un ejemplo propio</a:t>
+            </a:r>
+            <a:r>
+              <a:rPr sz="2000" b="0" i="0">
+                <a:solidFill>
+                  <a:srgbClr val="333333"/>
+                </a:solidFill>
+                <a:latin typeface="Calibri"/>
+              </a:rPr>
+              <a:t> de un proyecto conocido que se saltó una fase.</a:t>
+            </a:r>
+          </a:p>
+          <a:p>
+            <a:pPr>
+              <a:spcAft>
+                <a:spcPts val="800"/>
+              </a:spcAft>
+            </a:pPr>
+            <a:r>
+              <a:rPr sz="2000" b="0" i="0">
+                <a:solidFill>
+                  <a:srgbClr val="333333"/>
+                </a:solidFill>
+                <a:latin typeface="Calibri"/>
+              </a:rPr>
+              <a:t>–   </a:t>
+            </a:r>
+            <a:r>
+              <a:rPr sz="2000" b="1" i="0">
+                <a:solidFill>
+                  <a:srgbClr val="333333"/>
+                </a:solidFill>
+                <a:latin typeface="Calibri"/>
+              </a:rPr>
+              <a:t>Trabajo independiente:</a:t>
+            </a:r>
+            <a:r>
+              <a:rPr sz="2000" b="0" i="0">
+                <a:solidFill>
+                  <a:srgbClr val="333333"/>
+                </a:solidFill>
+                <a:latin typeface="Calibri"/>
+              </a:rPr>
+              <a:t> Infografía explicativa del ciclo de vida </a:t>
+            </a:r>
+            <a:r>
+              <a:rPr sz="2000" b="1" i="0">
+                <a:solidFill>
+                  <a:srgbClr val="333333"/>
+                </a:solidFill>
+                <a:latin typeface="Calibri"/>
+              </a:rPr>
+              <a:t>de su propio proyecto</a:t>
+            </a:r>
+            <a:r>
+              <a:rPr sz="2000" b="0" i="0">
+                <a:solidFill>
+                  <a:srgbClr val="333333"/>
+                </a:solidFill>
+                <a:latin typeface="Calibri"/>
+              </a:rPr>
+              <a:t>, en Canva o draw.io: las seis fases, en cuál están y qué entregan en cada una.</a:t>
+            </a:r>
+          </a:p>
+          <a:p>
+            <a:pPr>
+              <a:spcAft>
+                <a:spcPts val="800"/>
+              </a:spcAft>
+            </a:pPr>
+            <a:r>
+              <a:rPr sz="2000" b="0" i="0">
+                <a:solidFill>
+                  <a:srgbClr val="333333"/>
+                </a:solidFill>
+                <a:latin typeface="Calibri"/>
+              </a:rPr>
+              <a:t>–   </a:t>
+            </a:r>
+            <a:r>
+              <a:rPr sz="2000" b="1" i="0">
+                <a:solidFill>
+                  <a:srgbClr val="333333"/>
+                </a:solidFill>
+                <a:latin typeface="Calibri"/>
+              </a:rPr>
+              <a:t>Clase 8 · Taller de aplicación del ciclo de vida</a:t>
+            </a:r>
+            <a:r>
+              <a:rPr sz="2000" b="0" i="0">
+                <a:solidFill>
+                  <a:srgbClr val="333333"/>
+                </a:solidFill>
+                <a:latin typeface="Calibri"/>
+              </a:rPr>
+              <a:t> — casos reales de proyectos que se saltaron una fase, y la decisión entre sus dos alternativas de solución con una matriz de criterios.</a:t>
+            </a:r>
+          </a:p>
+          <a:p>
+            <a:pPr>
+              <a:spcAft>
+                <a:spcPts val="800"/>
+              </a:spcAft>
+            </a:pPr>
+            <a:r>
+              <a:rPr sz="2000" b="0" i="0">
+                <a:solidFill>
+                  <a:srgbClr val="333333"/>
+                </a:solidFill>
+                <a:latin typeface="Calibri"/>
+              </a:rPr>
+              <a:t>–   </a:t>
+            </a:r>
+            <a:r>
+              <a:rPr sz="2000" b="1" i="0">
+                <a:solidFill>
+                  <a:srgbClr val="333333"/>
+                </a:solidFill>
+                <a:latin typeface="Calibri"/>
+              </a:rPr>
+              <a:t>Aviso:</a:t>
+            </a:r>
+            <a:r>
+              <a:rPr sz="2000" b="0" i="0">
+                <a:solidFill>
+                  <a:srgbClr val="333333"/>
+                </a:solidFill>
+                <a:latin typeface="Calibri"/>
+              </a:rPr>
+              <a:t> Traigan la tabla de requisitos con los criterios de aceptación </a:t>
+            </a:r>
+            <a:r>
+              <a:rPr sz="2000" b="1" i="0">
+                <a:solidFill>
+                  <a:srgbClr val="333333"/>
+                </a:solidFill>
+                <a:latin typeface="Calibri"/>
+              </a:rPr>
+              <a:t>confirmados con la persona que vive el problema</a:t>
+            </a:r>
+            <a:r>
+              <a:rPr sz="2000" b="0" i="0">
+                <a:solidFill>
+                  <a:srgbClr val="333333"/>
+                </a:solidFill>
+                <a:latin typeface="Calibri"/>
+              </a:rPr>
+              <a:t>, y las dos alternativas de solución del trabajo independiente de la sesión 6. En la sesión 8 se decide una.</a:t>
+            </a:r>
+          </a:p>
+          <a:p>
+            <a:pPr>
+              <a:spcAft>
+                <a:spcPts val="800"/>
+              </a:spcAft>
+            </a:pPr>
+            <a:r>
+              <a:rPr sz="2000" b="0" i="0">
+                <a:solidFill>
+                  <a:srgbClr val="333333"/>
+                </a:solidFill>
+                <a:latin typeface="Calibri"/>
+              </a:rPr>
+              <a:t>–   </a:t>
+            </a:r>
+            <a:r>
+              <a:rPr sz="2000" b="1" i="0">
+                <a:solidFill>
+                  <a:srgbClr val="333333"/>
+                </a:solidFill>
+                <a:latin typeface="Calibri"/>
+              </a:rPr>
+              <a:t>Antes de salir:</a:t>
+            </a:r>
+            <a:r>
+              <a:rPr sz="2000" b="0" i="0">
+                <a:solidFill>
+                  <a:srgbClr val="333333"/>
+                </a:solidFill>
+                <a:latin typeface="Calibri"/>
+              </a:rPr>
+              <a:t> el enlace del documento del equipo en el chat, con permiso de lectura para el docente, y el nombre del vocero de hoy.</a:t>
+            </a:r>
+          </a:p>
+        </p:txBody>
+      </p:sp>
+      <p:sp>
+        <p:nvSpPr>
+          <p:cNvPr id="6" name="TextBox 5"/>
+          <p:cNvSpPr txBox="1"/>
+          <p:nvPr/>
+        </p:nvSpPr>
+        <p:spPr>
+          <a:xfrm>
+            <a:off x="11185855" y="6473952"/>
+            <a:ext cx="640080" cy="274320"/>
+          </a:xfrm>
+          <a:prstGeom prst="rect">
+            <a:avLst/>
+          </a:prstGeom>
+          <a:noFill/>
+        </p:spPr>
+        <p:txBody>
+          <a:bodyPr wrap="square">
+            <a:spAutoFit/>
+          </a:bodyPr>
+          <a:lstStyle/>
+          <a:p>
+            <a:pPr algn="r"/>
+            <a:r>
+              <a:rPr sz="1100" b="0" i="0">
+                <a:solidFill>
+                  <a:srgbClr val="666666"/>
+                </a:solidFill>
+                <a:latin typeface="Calibri"/>
+              </a:rPr>
+              <a:t>22</a:t>
+            </a:r>
+          </a:p>
+        </p:txBody>
+      </p:sp>
+    </p:spTree>
+  </p:cSld>
+  <p:clrMapOvr>
+    <a:masterClrMapping/>
+  </p:clrMapOvr>
+</p:sld>
+</file>
+
+<file path=ppt/slides/slide23.xml><?xml version="1.0" encoding="utf-8"?>
+<p:sld xmlns:a="http://schemas.openxmlformats.org/drawingml/2006/main" xmlns:p="http://schemas.openxmlformats.org/presentationml/2006/main" xmlns:r="http://schemas.openxmlformats.org/officeDocument/2006/relationships">
+  <p:cSld>
+    <p:bg>
+      <p:bgPr>
+        <a:solidFill>
+          <a:srgbClr val="FFFFFF"/>
+        </a:solidFill>
+        <a:effectLst/>
+      </p:bgPr>
+    </p:bg>
+    <p:spTree>
+      <p:nvGrpSpPr>
+        <p:cNvPr id="1" name=""/>
+        <p:cNvGrpSpPr/>
+        <p:nvPr/>
+      </p:nvGrpSpPr>
+      <p:grpSpPr/>
+      <p:sp>
+        <p:nvSpPr>
+          <p:cNvPr id="2" name="Rectangle 1"/>
+          <p:cNvSpPr/>
+          <p:nvPr/>
+        </p:nvSpPr>
+        <p:spPr>
+          <a:xfrm>
+            <a:off x="0" y="0"/>
+            <a:ext cx="12191695" cy="164592"/>
+          </a:xfrm>
+          <a:prstGeom prst="rect">
+            <a:avLst/>
+          </a:prstGeom>
+          <a:solidFill>
+            <a:srgbClr val="269CCB"/>
+          </a:solidFill>
+          <a:ln>
+            <a:noFill/>
+          </a:ln>
+        </p:spPr>
+        <p:style>
+          <a:lnRef idx="1">
+            <a:schemeClr val="accent1"/>
+          </a:lnRef>
+          <a:fillRef idx="3">
+            <a:schemeClr val="accent1"/>
+          </a:fillRef>
+          <a:effectRef idx="2">
+            <a:schemeClr val="accent1"/>
+          </a:effectRef>
+          <a:fontRef idx="minor">
+            <a:schemeClr val="lt1"/>
+          </a:fontRef>
+        </p:style>
+        <p:txBody>
+          <a:bodyPr rtlCol="0" anchor="ctr"/>
+          <a:lstStyle/>
+          <a:p>
+            <a:pPr algn="ctr"/>
+          </a:p>
+        </p:txBody>
+      </p:sp>
+      <p:pic>
+        <p:nvPicPr>
+          <p:cNvPr id="3" name="Picture 2" descr="logo_uniajc_color.png"/>
+          <p:cNvPicPr>
+            <a:picLocks noChangeAspect="1"/>
+          </p:cNvPicPr>
+          <p:nvPr/>
+        </p:nvPicPr>
+        <p:blipFill>
+          <a:blip r:embed="rId2"/>
+          <a:stretch>
+            <a:fillRect/>
+          </a:stretch>
+        </p:blipFill>
+        <p:spPr>
+          <a:xfrm>
+            <a:off x="10271455" y="5998464"/>
+            <a:ext cx="1463040" cy="643233"/>
+          </a:xfrm>
+          <a:prstGeom prst="rect">
+            <a:avLst/>
+          </a:prstGeom>
+        </p:spPr>
+      </p:pic>
+      <p:sp>
+        <p:nvSpPr>
+          <p:cNvPr id="4" name="TextBox 3"/>
+          <p:cNvSpPr txBox="1"/>
+          <p:nvPr/>
+        </p:nvSpPr>
+        <p:spPr>
+          <a:xfrm>
+            <a:off x="457200" y="1737360"/>
+            <a:ext cx="11277295" cy="1097280"/>
+          </a:xfrm>
+          <a:prstGeom prst="rect">
+            <a:avLst/>
+          </a:prstGeom>
+          <a:noFill/>
+        </p:spPr>
+        <p:txBody>
+          <a:bodyPr wrap="square" anchor="ctr"/>
+          <a:lstStyle/>
+          <a:p>
+            <a:pPr algn="ctr"/>
+            <a:r>
+              <a:rPr sz="3400" b="1" i="0">
+                <a:solidFill>
+                  <a:srgbClr val="095292"/>
+                </a:solidFill>
+                <a:latin typeface="Calibri"/>
+              </a:rPr>
+              <a:t>Nos vemos en la sesión 8</a:t>
+            </a:r>
+          </a:p>
+        </p:txBody>
+      </p:sp>
+      <p:sp>
+        <p:nvSpPr>
+          <p:cNvPr id="5" name="TextBox 4"/>
+          <p:cNvSpPr txBox="1"/>
+          <p:nvPr/>
+        </p:nvSpPr>
+        <p:spPr>
+          <a:xfrm>
+            <a:off x="457200" y="3017520"/>
+            <a:ext cx="11277295" cy="1645920"/>
+          </a:xfrm>
+          <a:prstGeom prst="rect">
+            <a:avLst/>
+          </a:prstGeom>
+          <a:noFill/>
+        </p:spPr>
+        <p:txBody>
+          <a:bodyPr wrap="square">
+            <a:spAutoFit/>
+          </a:bodyPr>
+          <a:lstStyle/>
+          <a:p>
+            <a:pPr algn="ctr">
+              <a:spcAft>
+                <a:spcPts val="600"/>
+              </a:spcAft>
+            </a:pPr>
+            <a:r>
+              <a:rPr sz="1600" b="0" i="0">
+                <a:solidFill>
+                  <a:srgbClr val="333333"/>
+                </a:solidFill>
+                <a:latin typeface="Calibri"/>
+              </a:rPr>
+              <a:t>Ciclo de vida de los proyectos de ingeniería · Clase 7</a:t>
+            </a:r>
+          </a:p>
+          <a:p>
+            <a:pPr algn="ctr">
+              <a:spcAft>
+                <a:spcPts val="600"/>
+              </a:spcAft>
+            </a:pPr>
+            <a:r>
+              <a:rPr sz="1600" b="0" i="0">
+                <a:solidFill>
+                  <a:srgbClr val="333333"/>
+                </a:solidFill>
+                <a:latin typeface="Calibri"/>
+              </a:rPr>
+              <a:t>FI300101 · UNIAJC · Ingeniería de Sistemas</a:t>
+            </a:r>
+          </a:p>
+        </p:txBody>
+      </p:sp>
+      <p:sp>
+        <p:nvSpPr>
+          <p:cNvPr id="6" name="TextBox 5"/>
+          <p:cNvSpPr txBox="1"/>
+          <p:nvPr/>
+        </p:nvSpPr>
+        <p:spPr>
+          <a:xfrm>
+            <a:off x="457200" y="4754880"/>
+            <a:ext cx="11277295" cy="640080"/>
+          </a:xfrm>
+          <a:prstGeom prst="rect">
+            <a:avLst/>
+          </a:prstGeom>
+          <a:noFill/>
+        </p:spPr>
+        <p:txBody>
+          <a:bodyPr wrap="square">
+            <a:spAutoFit/>
+          </a:bodyPr>
+          <a:lstStyle/>
+          <a:p>
+            <a:pPr algn="ctr"/>
+            <a:r>
+              <a:rPr sz="2000" b="1" i="0">
+                <a:solidFill>
+                  <a:srgbClr val="269CCB"/>
+                </a:solidFill>
+                <a:latin typeface="Calibri"/>
+              </a:rPr>
+              <a:t>El error barato es el que se encuentra temprano</a:t>
             </a:r>
           </a:p>
         </p:txBody>

--- a/Introduccion a la Ingenieria/Clases/Clase 7 - Ciclo de vida de los proyectos de ingenieria/Presentacion.pptx
+++ b/Introduccion a la Ingenieria/Clases/Clase 7 - Ciclo de vida de los proyectos de ingenieria/Presentacion.pptx
@@ -3661,7 +3661,7 @@
               </a:spcAft>
             </a:pPr>
             <a:r>
-              <a:rPr sz="1900" b="0" i="0">
+              <a:rPr sz="2000" b="0" i="0">
                 <a:solidFill>
                   <a:srgbClr val="333333"/>
                 </a:solidFill>
@@ -3677,13 +3677,13 @@
               </a:spcAft>
             </a:pPr>
             <a:r>
-              <a:rPr sz="1900" b="0" i="0">
-                <a:solidFill>
-                  <a:srgbClr val="333333"/>
-                </a:solidFill>
-                <a:latin typeface="Calibri"/>
-              </a:rPr>
-              <a:t>–   Mover una pared en el plano cuesta un borrador; en el ladrillo cuesta tumbar y volver a levantar; en la casa entregada cuesta la obra, la mudanza y el enojo del dueño.</a:t>
+              <a:rPr sz="2000" b="0" i="0">
+                <a:solidFill>
+                  <a:srgbClr val="333333"/>
+                </a:solidFill>
+                <a:latin typeface="Calibri"/>
+              </a:rPr>
+              <a:t>–   Todo el mundo lo intuye, y esa intuición es exactamente la curva del costo del cambio.</a:t>
             </a:r>
           </a:p>
           <a:p>
@@ -3693,13 +3693,13 @@
               </a:spcAft>
             </a:pPr>
             <a:r>
-              <a:rPr sz="1900" b="0" i="0">
-                <a:solidFill>
-                  <a:srgbClr val="333333"/>
-                </a:solidFill>
-                <a:latin typeface="Calibri"/>
-              </a:rPr>
-              <a:t>–   Todo el mundo lo intuye, y esa intuición es exactamente la curva del costo del cambio.</a:t>
+              <a:rPr sz="2000" b="0" i="0">
+                <a:solidFill>
+                  <a:srgbClr val="333333"/>
+                </a:solidFill>
+                <a:latin typeface="Calibri"/>
+              </a:rPr>
+              <a:t>–   En una casa, una pared mal puesta se ve; en un sistema, un requisito mal entendido no se ve hasta que alguien lo usa.</a:t>
             </a:r>
           </a:p>
           <a:p>
@@ -3709,89 +3709,7 @@
               </a:spcAft>
             </a:pPr>
             <a:r>
-              <a:rPr sz="1900" b="0" i="0">
-                <a:solidFill>
-                  <a:srgbClr val="333333"/>
-                </a:solidFill>
-                <a:latin typeface="Calibri"/>
-              </a:rPr>
-              <a:t>–   Lo que hay que hacer explícito en el minuto 12 es que </a:t>
-            </a:r>
-            <a:r>
-              <a:rPr sz="1900" b="1" i="0">
-                <a:solidFill>
-                  <a:srgbClr val="333333"/>
-                </a:solidFill>
-                <a:latin typeface="Calibri"/>
-              </a:rPr>
-              <a:t>en software la curva es igual pero se ve menos</a:t>
-            </a:r>
-            <a:r>
-              <a:rPr sz="1900" b="0" i="0">
-                <a:solidFill>
-                  <a:srgbClr val="333333"/>
-                </a:solidFill>
-                <a:latin typeface="Calibri"/>
-              </a:rPr>
-              <a:t>, y ahí está el problema.</a:t>
-            </a:r>
-          </a:p>
-          <a:p>
-            <a:pPr>
-              <a:spcAft>
-                <a:spcPts val="800"/>
-              </a:spcAft>
-            </a:pPr>
-            <a:r>
-              <a:rPr sz="1900" b="0" i="0">
-                <a:solidFill>
-                  <a:srgbClr val="333333"/>
-                </a:solidFill>
-                <a:latin typeface="Calibri"/>
-              </a:rPr>
-              <a:t>–   En una casa, una pared mal puesta se ve; en un sistema, un requisito mal entendido no se ve hasta que alguien lo usa.</a:t>
-            </a:r>
-          </a:p>
-          <a:p>
-            <a:pPr>
-              <a:spcAft>
-                <a:spcPts val="800"/>
-              </a:spcAft>
-            </a:pPr>
-            <a:r>
-              <a:rPr sz="1900" b="0" i="0">
-                <a:solidFill>
-                  <a:srgbClr val="333333"/>
-                </a:solidFill>
-                <a:latin typeface="Calibri"/>
-              </a:rPr>
-              <a:t>–   Por eso en ingeniería de software hubo que inventar fases, revisiones y criterios de aceptación: son el equivalente a mirar el plano antes de pedir el cemento.</a:t>
-            </a:r>
-          </a:p>
-          <a:p>
-            <a:pPr>
-              <a:spcAft>
-                <a:spcPts val="800"/>
-              </a:spcAft>
-            </a:pPr>
-            <a:r>
-              <a:rPr sz="1900" b="0" i="0">
-                <a:solidFill>
-                  <a:srgbClr val="333333"/>
-                </a:solidFill>
-                <a:latin typeface="Calibri"/>
-              </a:rPr>
-              <a:t>–   Recoja las respuestas en el muro.</a:t>
-            </a:r>
-          </a:p>
-          <a:p>
-            <a:pPr>
-              <a:spcAft>
-                <a:spcPts val="800"/>
-              </a:spcAft>
-            </a:pPr>
-            <a:r>
-              <a:rPr sz="1900" b="0" i="0">
+              <a:rPr sz="2000" b="0" i="0">
                 <a:solidFill>
                   <a:srgbClr val="333333"/>
                 </a:solidFill>
@@ -4085,40 +4003,6 @@
                 </a:solidFill>
                 <a:latin typeface="Calibri"/>
               </a:rPr>
-              <a:t>–   Eso reordena la percepción del curso: no estaban haciendo un ejercicio, estaban cerrando una fase. </a:t>
-            </a:r>
-            <a:r>
-              <a:rPr sz="2000" b="1" i="0">
-                <a:solidFill>
-                  <a:srgbClr val="333333"/>
-                </a:solidFill>
-                <a:latin typeface="Calibri"/>
-              </a:rPr>
-              <a:t>Requisitos</a:t>
-            </a:r>
-            <a:r>
-              <a:rPr sz="2000" b="0" i="0">
-                <a:solidFill>
-                  <a:srgbClr val="333333"/>
-                </a:solidFill>
-                <a:latin typeface="Calibri"/>
-              </a:rPr>
-              <a:t> responde *qué tiene que hacer la solución para resolver eso, y cómo sabremos que lo hace*.</a:t>
-            </a:r>
-          </a:p>
-          <a:p>
-            <a:pPr>
-              <a:spcAft>
-                <a:spcPts val="800"/>
-              </a:spcAft>
-            </a:pPr>
-            <a:r>
-              <a:rPr sz="2000" b="0" i="0">
-                <a:solidFill>
-                  <a:srgbClr val="333333"/>
-                </a:solidFill>
-                <a:latin typeface="Calibri"/>
-              </a:rPr>
               <a:t>–   Es la fase de hoy y la que más se salta la gente. </a:t>
             </a:r>
             <a:r>
@@ -4493,22 +4377,6 @@
                 </a:solidFill>
                 <a:latin typeface="Calibri"/>
               </a:rPr>
-              <a:t>–   Cada fase existe porque descubrir un error en ella cuesta menos que descubrirlo en la siguiente.</a:t>
-            </a:r>
-          </a:p>
-          <a:p>
-            <a:pPr>
-              <a:spcAft>
-                <a:spcPts val="800"/>
-              </a:spcAft>
-            </a:pPr>
-            <a:r>
-              <a:rPr sz="2000" b="0" i="0">
-                <a:solidFill>
-                  <a:srgbClr val="333333"/>
-                </a:solidFill>
-                <a:latin typeface="Calibri"/>
-              </a:rPr>
               <a:t>–   Quien se salta requisitos no ahorra tiempo: mueve el costo hacia adelante y lo multiplica.</a:t>
             </a:r>
           </a:p>
@@ -5031,22 +4899,6 @@
                 </a:solidFill>
                 <a:latin typeface="Calibri"/>
               </a:rPr>
-              <a:t>–   La dirección de la curva no está en discusión; la pendiente sí.</a:t>
-            </a:r>
-          </a:p>
-          <a:p>
-            <a:pPr>
-              <a:spcAft>
-                <a:spcPts val="800"/>
-              </a:spcAft>
-            </a:pPr>
-            <a:r>
-              <a:rPr sz="2000" b="0" i="0">
-                <a:solidFill>
-                  <a:srgbClr val="333333"/>
-                </a:solidFill>
-                <a:latin typeface="Calibri"/>
-              </a:rPr>
               <a:t>–   El uso práctico de la tabla es una pregunta que los equipos van a responder en el taller: *¿qué decisión que estamos tomando hoy sería carísima cambiar en la Clase 14?* Casi siempre la respuesta es un requisito mal entendido o una restricción ignorada, y hacer la pregunta hoy es lo que la vuelve barata.</a:t>
             </a:r>
           </a:p>
@@ -5347,38 +5199,6 @@
                 </a:solidFill>
                 <a:latin typeface="Calibri"/>
               </a:rPr>
-              <a:t>–   Su propuesta incluía volver atrás, prototipar y hacer el trabajo dos veces.</a:t>
-            </a:r>
-          </a:p>
-          <a:p>
-            <a:pPr>
-              <a:spcAft>
-                <a:spcPts val="800"/>
-              </a:spcAft>
-            </a:pPr>
-            <a:r>
-              <a:rPr sz="2000" b="0" i="0">
-                <a:solidFill>
-                  <a:srgbClr val="333333"/>
-                </a:solidFill>
-                <a:latin typeface="Calibri"/>
-              </a:rPr>
-              <a:t>–   La profesión se quedó con el dibujo y perdió la advertencia.</a:t>
-            </a:r>
-          </a:p>
-          <a:p>
-            <a:pPr>
-              <a:spcAft>
-                <a:spcPts val="800"/>
-              </a:spcAft>
-            </a:pPr>
-            <a:r>
-              <a:rPr sz="2000" b="0" i="0">
-                <a:solidFill>
-                  <a:srgbClr val="333333"/>
-                </a:solidFill>
-                <a:latin typeface="Calibri"/>
-              </a:rPr>
               <a:t>–   La comparación que importa para el curso no es «cascada mala, ágil bueno» —esa es una caricatura y hay que evitarla—.</a:t>
             </a:r>
           </a:p>
@@ -5734,22 +5554,6 @@
               <a:t>–   Si alguien pregunta por el Manifiesto Ágil de 2001, que salió en la sesión 2: la respuesta honesta es que reordenó prioridades —software funcionando sobre documentación, colaboración sobre contrato— y que no eliminó las fases.</a:t>
             </a:r>
           </a:p>
-          <a:p>
-            <a:pPr>
-              <a:spcAft>
-                <a:spcPts val="800"/>
-              </a:spcAft>
-            </a:pPr>
-            <a:r>
-              <a:rPr sz="2000" b="0" i="0">
-                <a:solidFill>
-                  <a:srgbClr val="333333"/>
-                </a:solidFill>
-                <a:latin typeface="Calibri"/>
-              </a:rPr>
-              <a:t>–   Un equipo ágil sigue definiendo el problema, escribiendo requisitos, diseñando, construyendo y validando; lo hace en ciclos cortos y con menos ceremonia.</a:t>
-            </a:r>
-          </a:p>
         </p:txBody>
       </p:sp>
       <p:sp>
@@ -6339,7 +6143,7 @@
                 </a:solidFill>
                 <a:latin typeface="Calibri"/>
               </a:rPr>
-              <a:t>–   «Un usuario que no conoce el sistema encuentra la disponibilidad de un libro en menos de un minuto, sin ayuda» se puede ejecutar delante de alguien.</a:t>
+              <a:t>–   «El sistema debe ser fácil de usar» no se puede ejecutar, y por lo tanto no sirve.</a:t>
             </a:r>
           </a:p>
           <a:p>
@@ -6355,7 +6159,43 @@
                 </a:solidFill>
                 <a:latin typeface="Calibri"/>
               </a:rPr>
-              <a:t>–   «El sistema debe ser fácil de usar» no se puede ejecutar, y por lo tanto no sirve.</a:t>
+              <a:t>–   La regla que conviene dictar: </a:t>
+            </a:r>
+            <a:r>
+              <a:rPr sz="2000" b="1" i="0">
+                <a:solidFill>
+                  <a:srgbClr val="333333"/>
+                </a:solidFill>
+                <a:latin typeface="Calibri"/>
+              </a:rPr>
+              <a:t>si no se puede convertir en una prueba que alguien haga, no es un criterio</a:t>
+            </a:r>
+            <a:r>
+              <a:rPr sz="2000" b="0" i="0">
+                <a:solidFill>
+                  <a:srgbClr val="333333"/>
+                </a:solidFill>
+                <a:latin typeface="Calibri"/>
+              </a:rPr>
+              <a:t>. </a:t>
+            </a:r>
+            <a:r>
+              <a:rPr sz="2000" b="1" i="0">
+                <a:solidFill>
+                  <a:srgbClr val="333333"/>
+                </a:solidFill>
+                <a:latin typeface="Calibri"/>
+              </a:rPr>
+              <a:t>Hito</a:t>
+            </a:r>
+            <a:r>
+              <a:rPr sz="2000" b="0" i="0">
+                <a:solidFill>
+                  <a:srgbClr val="333333"/>
+                </a:solidFill>
+                <a:latin typeface="Calibri"/>
+              </a:rPr>
+              <a:t> es un punto del calendario donde algo queda terminado y verificable.</a:t>
             </a:r>
           </a:p>
           <a:p>
@@ -6371,43 +6211,7 @@
                 </a:solidFill>
                 <a:latin typeface="Calibri"/>
               </a:rPr>
-              <a:t>–   La regla que conviene dictar: </a:t>
-            </a:r>
-            <a:r>
-              <a:rPr sz="2000" b="1" i="0">
-                <a:solidFill>
-                  <a:srgbClr val="333333"/>
-                </a:solidFill>
-                <a:latin typeface="Calibri"/>
-              </a:rPr>
-              <a:t>si no se puede convertir en una prueba que alguien haga, no es un criterio</a:t>
-            </a:r>
-            <a:r>
-              <a:rPr sz="2000" b="0" i="0">
-                <a:solidFill>
-                  <a:srgbClr val="333333"/>
-                </a:solidFill>
-                <a:latin typeface="Calibri"/>
-              </a:rPr>
-              <a:t>. </a:t>
-            </a:r>
-            <a:r>
-              <a:rPr sz="2000" b="1" i="0">
-                <a:solidFill>
-                  <a:srgbClr val="333333"/>
-                </a:solidFill>
-                <a:latin typeface="Calibri"/>
-              </a:rPr>
-              <a:t>Hito</a:t>
-            </a:r>
-            <a:r>
-              <a:rPr sz="2000" b="0" i="0">
-                <a:solidFill>
-                  <a:srgbClr val="333333"/>
-                </a:solidFill>
-                <a:latin typeface="Calibri"/>
-              </a:rPr>
-              <a:t> es un punto del calendario donde algo queda terminado y verificable.</a:t>
+              <a:t>–   Es el concepto que salva el proyecto de la última semana: «vamos avanzando» no es un hito</a:t>
             </a:r>
           </a:p>
           <a:p>
@@ -6423,7 +6227,7 @@
                 </a:solidFill>
                 <a:latin typeface="Calibri"/>
               </a:rPr>
-              <a:t>–   Es el concepto que salva el proyecto de la última semana: «vamos avanzando» no es un hito</a:t>
+              <a:t>–   «en la sesión 10 hay tres pantallas probadas con un usuario» sí.</a:t>
             </a:r>
           </a:p>
         </p:txBody>
@@ -6643,7 +6447,7 @@
                 </a:solidFill>
                 <a:latin typeface="Calibri"/>
               </a:rPr>
-              <a:t>–   «en la sesión 10 hay tres pantallas probadas con un usuario» sí.</a:t>
+              <a:t>–   En el taller de hoy se les pide el plan de hitos hasta la Clase 15, y conviene revisarlo con severidad, porque un plan con todo el trabajo en la Clase 14 es un proyecto que va a fallar y todavía se puede corregir.</a:t>
             </a:r>
           </a:p>
           <a:p>
@@ -6659,7 +6463,7 @@
                 </a:solidFill>
                 <a:latin typeface="Calibri"/>
               </a:rPr>
-              <a:t>–   En el taller de hoy se les pide el plan de hitos hasta la Clase 15, y conviene revisarlo con severidad, porque un plan con todo el trabajo en la Clase 14 es un proyecto que va a fallar y todavía se puede corregir.</a:t>
+              <a:t>–   Los tres malentendidos de la última diapositiva son los que aparecen en las salas.</a:t>
             </a:r>
           </a:p>
           <a:p>
@@ -6675,39 +6479,7 @@
                 </a:solidFill>
                 <a:latin typeface="Calibri"/>
               </a:rPr>
-              <a:t>–   Los tres malentendidos de la última diapositiva son los que aparecen en las salas.</a:t>
-            </a:r>
-          </a:p>
-          <a:p>
-            <a:pPr>
-              <a:spcAft>
-                <a:spcPts val="800"/>
-              </a:spcAft>
-            </a:pPr>
-            <a:r>
-              <a:rPr sz="2000" b="0" i="0">
-                <a:solidFill>
-                  <a:srgbClr val="333333"/>
-                </a:solidFill>
-                <a:latin typeface="Calibri"/>
-              </a:rPr>
               <a:t>–   El primero —que las fases son burocracia— se responde con la tabla del costo.</a:t>
-            </a:r>
-          </a:p>
-          <a:p>
-            <a:pPr>
-              <a:spcAft>
-                <a:spcPts val="800"/>
-              </a:spcAft>
-            </a:pPr>
-            <a:r>
-              <a:rPr sz="2000" b="0" i="0">
-                <a:solidFill>
-                  <a:srgbClr val="333333"/>
-                </a:solidFill>
-                <a:latin typeface="Calibri"/>
-              </a:rPr>
-              <a:t>–   El segundo —que iterativo significa no planear— se responde señalando que se planea más seguido, no menos.</a:t>
             </a:r>
           </a:p>
           <a:p>

--- a/Introduccion a la Ingenieria/Clases/Clase 7 - Ciclo de vida de los proyectos de ingenieria/Presentacion.pptx
+++ b/Introduccion a la Ingenieria/Clases/Clase 7 - Ciclo de vida de los proyectos de ingenieria/Presentacion.pptx
@@ -28,6 +28,8 @@
     <p:sldId id="276" r:id="rId27"/>
     <p:sldId id="277" r:id="rId28"/>
     <p:sldId id="278" r:id="rId29"/>
+    <p:sldId id="279" r:id="rId30"/>
+    <p:sldId id="280" r:id="rId31"/>
   </p:sldIdLst>
   <p:sldSz cx="12191695" cy="6858000" type="screen4x3"/>
   <p:notesSz cx="6858000" cy="9144000"/>
@@ -7474,7 +7476,7 @@
         <p:spPr>
           <a:xfrm>
             <a:off x="0" y="0"/>
-            <a:ext cx="12191695" cy="1170432"/>
+            <a:ext cx="12191695" cy="960120"/>
           </a:xfrm>
           <a:prstGeom prst="rect">
             <a:avLst/>
@@ -7516,7 +7518,7 @@
         </p:nvSpPr>
         <p:spPr>
           <a:xfrm>
-            <a:off x="0" y="1170432"/>
+            <a:off x="0" y="960120"/>
             <a:ext cx="12191695" cy="41148"/>
           </a:xfrm>
           <a:prstGeom prst="rect">
@@ -7560,7 +7562,7 @@
         <p:spPr>
           <a:xfrm>
             <a:off x="457200" y="164592"/>
-            <a:ext cx="11277295" cy="384048"/>
+            <a:ext cx="11277295" cy="502920"/>
           </a:xfrm>
           <a:prstGeom prst="rect">
             <a:avLst/>
@@ -7580,55 +7582,21 @@
                 </a:solidFill>
                 <a:latin typeface="Calibri"/>
               </a:rPr>
-              <a:t>Taller de hoy: Ciclo de vida del proyecto</a:t>
-            </a:r>
-          </a:p>
-        </p:txBody>
-      </p:sp>
-      <p:sp>
-        <p:nvSpPr>
-          <p:cNvPr id="5" name="TextBox 4"/>
-          <p:cNvSpPr txBox="1"/>
-          <p:nvPr/>
-        </p:nvSpPr>
-        <p:spPr>
-          <a:xfrm>
-            <a:off x="457200" y="566928"/>
-            <a:ext cx="11277295" cy="411480"/>
-          </a:xfrm>
-          <a:prstGeom prst="rect">
-            <a:avLst/>
-          </a:prstGeom>
-          <a:noFill/>
-        </p:spPr>
-        <p:txBody>
-          <a:bodyPr wrap="square">
-            <a:spAutoFit/>
-          </a:bodyPr>
-          <a:lstStyle/>
-          <a:p>
-            <a:r>
-              <a:rPr sz="1400" b="0" i="0">
-                <a:solidFill>
-                  <a:srgbClr val="B8D8EE"/>
-                </a:solidFill>
-                <a:latin typeface="Calibri"/>
-              </a:rPr>
-              <a:t>17 min en equipos · cada equipo, su propio proyecto · mapa del ciclo de vida + tabla de requisitos + plan de hitos</a:t>
-            </a:r>
-          </a:p>
-        </p:txBody>
-      </p:sp>
-      <p:sp>
-        <p:nvSpPr>
-          <p:cNvPr id="6" name="Rounded Rectangle 5"/>
+              <a:t>Plantilla del entregable: los 5 bloques</a:t>
+            </a:r>
+          </a:p>
+        </p:txBody>
+      </p:sp>
+      <p:sp>
+        <p:nvSpPr>
+          <p:cNvPr id="5" name="Rounded Rectangle 4"/>
           <p:cNvSpPr/>
           <p:nvPr/>
         </p:nvSpPr>
         <p:spPr>
           <a:xfrm>
-            <a:off x="457200" y="1472184"/>
-            <a:ext cx="11277295" cy="566928"/>
+            <a:off x="457200" y="1261872"/>
+            <a:ext cx="11277295" cy="5093208"/>
           </a:xfrm>
           <a:prstGeom prst="roundRect">
             <a:avLst>
@@ -7636,7 +7604,7 @@
             </a:avLst>
           </a:prstGeom>
           <a:solidFill>
-            <a:srgbClr val="F2F2F2"/>
+            <a:srgbClr val="1E2A38"/>
           </a:solidFill>
           <a:ln>
             <a:noFill/>
@@ -7666,25 +7634,23 @@
       </p:sp>
       <p:sp>
         <p:nvSpPr>
-          <p:cNvPr id="7" name="Rectangle 6"/>
+          <p:cNvPr id="6" name="Rectangle 5"/>
           <p:cNvSpPr/>
           <p:nvPr/>
         </p:nvSpPr>
         <p:spPr>
           <a:xfrm>
-            <a:off x="640080" y="1618487"/>
-            <a:ext cx="274320" cy="274320"/>
+            <a:off x="457200" y="1261872"/>
+            <a:ext cx="11277295" cy="320040"/>
           </a:xfrm>
           <a:prstGeom prst="rect">
             <a:avLst/>
           </a:prstGeom>
           <a:solidFill>
-            <a:srgbClr val="FFFFFF"/>
+            <a:srgbClr val="095292"/>
           </a:solidFill>
           <a:ln>
-            <a:solidFill>
-              <a:srgbClr val="333333"/>
-            </a:solidFill>
+            <a:noFill/>
           </a:ln>
         </p:spPr>
         <p:style>
@@ -7711,859 +7677,222 @@
       </p:sp>
       <p:sp>
         <p:nvSpPr>
-          <p:cNvPr id="8" name="Rectangle 7"/>
-          <p:cNvSpPr/>
-          <p:nvPr/>
-        </p:nvSpPr>
-        <p:spPr>
-          <a:xfrm>
-            <a:off x="640080" y="1618487"/>
-            <a:ext cx="73152" cy="274320"/>
-          </a:xfrm>
-          <a:prstGeom prst="rect">
-            <a:avLst/>
-          </a:prstGeom>
-          <a:solidFill>
-            <a:srgbClr val="269CCB"/>
-          </a:solidFill>
-          <a:ln>
-            <a:noFill/>
-          </a:ln>
-        </p:spPr>
-        <p:style>
-          <a:lnRef idx="1">
-            <a:schemeClr val="accent1"/>
-          </a:lnRef>
-          <a:fillRef idx="3">
-            <a:schemeClr val="accent1"/>
-          </a:fillRef>
-          <a:effectRef idx="2">
-            <a:schemeClr val="accent1"/>
-          </a:effectRef>
-          <a:fontRef idx="minor">
-            <a:schemeClr val="lt1"/>
-          </a:fontRef>
-        </p:style>
-        <p:txBody>
-          <a:bodyPr rtlCol="0" anchor="ctr"/>
-          <a:lstStyle/>
-          <a:p>
-            <a:pPr algn="ctr"/>
+          <p:cNvPr id="7" name="TextBox 6"/>
+          <p:cNvSpPr txBox="1"/>
+          <p:nvPr/>
+        </p:nvSpPr>
+        <p:spPr>
+          <a:xfrm>
+            <a:off x="685800" y="1307592"/>
+            <a:ext cx="10820095" cy="256032"/>
+          </a:xfrm>
+          <a:prstGeom prst="rect">
+            <a:avLst/>
+          </a:prstGeom>
+          <a:noFill/>
+        </p:spPr>
+        <p:txBody>
+          <a:bodyPr wrap="square" anchor="ctr"/>
+          <a:lstStyle/>
+          <a:p>
+            <a:r>
+              <a:rPr sz="1000" b="1" i="0">
+                <a:solidFill>
+                  <a:srgbClr val="269CCB"/>
+                </a:solidFill>
+                <a:latin typeface="Calibri"/>
+              </a:rPr>
+              <a:t>● ● ●</a:t>
+            </a:r>
+          </a:p>
+        </p:txBody>
+      </p:sp>
+      <p:sp>
+        <p:nvSpPr>
+          <p:cNvPr id="8" name="TextBox 7"/>
+          <p:cNvSpPr txBox="1"/>
+          <p:nvPr/>
+        </p:nvSpPr>
+        <p:spPr>
+          <a:xfrm>
+            <a:off x="777240" y="1719072"/>
+            <a:ext cx="10637215" cy="4453128"/>
+          </a:xfrm>
+          <a:prstGeom prst="rect">
+            <a:avLst/>
+          </a:prstGeom>
+          <a:noFill/>
+        </p:spPr>
+        <p:txBody>
+          <a:bodyPr wrap="square">
+            <a:spAutoFit/>
+          </a:bodyPr>
+          <a:lstStyle/>
+          <a:p>
+            <a:pPr>
+              <a:spcAft>
+                <a:spcPts val="400"/>
+              </a:spcAft>
+            </a:pPr>
+            <a:r>
+              <a:rPr sz="1400" b="0" i="0">
+                <a:solidFill>
+                  <a:srgbClr val="FFFFFF"/>
+                </a:solidFill>
+                <a:latin typeface="Calibri"/>
+              </a:rPr>
+              <a:t># Ciclo de vida del proyecto</a:t>
+            </a:r>
+          </a:p>
+          <a:p>
+            <a:pPr>
+              <a:spcAft>
+                <a:spcPts val="400"/>
+              </a:spcAft>
+            </a:pPr>
+            <a:r>
+              <a:rPr sz="1400" b="0" i="0">
+                <a:solidFill>
+                  <a:srgbClr val="FFFFFF"/>
+                </a:solidFill>
+                <a:latin typeface="Calibri"/>
+              </a:rPr>
+              <a:t># Documento del equipo · un bloque por titulo, sin cambiar los nombres</a:t>
+            </a:r>
+          </a:p>
+          <a:p>
+            <a:pPr>
+              <a:spcAft>
+                <a:spcPts val="400"/>
+              </a:spcAft>
+            </a:pPr>
+            <a:r>
+              <a:rPr sz="1400" b="0" i="0">
+                <a:solidFill>
+                  <a:srgbClr val="FFFFFF"/>
+                </a:solidFill>
+                <a:latin typeface="Calibri"/>
+              </a:rPr>
+              <a:t/>
+            </a:r>
+          </a:p>
+          <a:p>
+            <a:pPr>
+              <a:spcAft>
+                <a:spcPts val="400"/>
+              </a:spcAft>
+            </a:pPr>
+            <a:r>
+              <a:rPr sz="1400" b="0" i="0">
+                <a:solidFill>
+                  <a:srgbClr val="FFFFFF"/>
+                </a:solidFill>
+                <a:latin typeface="Calibri"/>
+              </a:rPr>
+              <a:t>## 1. EN QUÉ FASE ESTAMOS</a:t>
+            </a:r>
+          </a:p>
+          <a:p>
+            <a:pPr>
+              <a:spcAft>
+                <a:spcPts val="400"/>
+              </a:spcAft>
+            </a:pPr>
+            <a:r>
+              <a:rPr sz="1400" b="0" i="0">
+                <a:solidFill>
+                  <a:srgbClr val="FFFFFF"/>
+                </a:solidFill>
+                <a:latin typeface="Calibri"/>
+              </a:rPr>
+              <a:t>## 2. TRES REQUISITOS FUNCIONALES</a:t>
+            </a:r>
+          </a:p>
+          <a:p>
+            <a:pPr>
+              <a:spcAft>
+                <a:spcPts val="400"/>
+              </a:spcAft>
+            </a:pPr>
+            <a:r>
+              <a:rPr sz="1400" b="0" i="0">
+                <a:solidFill>
+                  <a:srgbClr val="FFFFFF"/>
+                </a:solidFill>
+                <a:latin typeface="Calibri"/>
+              </a:rPr>
+              <a:t>## 3. DOS REQUISITOS NO FUNCIONALES</a:t>
+            </a:r>
+          </a:p>
+          <a:p>
+            <a:pPr>
+              <a:spcAft>
+                <a:spcPts val="400"/>
+              </a:spcAft>
+            </a:pPr>
+            <a:r>
+              <a:rPr sz="1400" b="0" i="0">
+                <a:solidFill>
+                  <a:srgbClr val="FFFFFF"/>
+                </a:solidFill>
+                <a:latin typeface="Calibri"/>
+              </a:rPr>
+              <a:t>## 4. LOS CRITERIOS DE ACEPTACIÓN</a:t>
+            </a:r>
+          </a:p>
+          <a:p>
+            <a:pPr>
+              <a:spcAft>
+                <a:spcPts val="400"/>
+              </a:spcAft>
+            </a:pPr>
+            <a:r>
+              <a:rPr sz="1400" b="0" i="0">
+                <a:solidFill>
+                  <a:srgbClr val="FFFFFF"/>
+                </a:solidFill>
+                <a:latin typeface="Calibri"/>
+              </a:rPr>
+              <a:t>## 5. EL PLAN DE HITOS</a:t>
+            </a:r>
+          </a:p>
+          <a:p>
+            <a:pPr>
+              <a:spcAft>
+                <a:spcPts val="400"/>
+              </a:spcAft>
+            </a:pPr>
+            <a:r>
+              <a:rPr sz="1400" b="0" i="0">
+                <a:solidFill>
+                  <a:srgbClr val="FFFFFF"/>
+                </a:solidFill>
+                <a:latin typeface="Calibri"/>
+              </a:rPr>
+              <a:t/>
+            </a:r>
+          </a:p>
+          <a:p>
+            <a:pPr>
+              <a:spcAft>
+                <a:spcPts val="400"/>
+              </a:spcAft>
+            </a:pPr>
+            <a:r>
+              <a:rPr sz="1400" b="0" i="0">
+                <a:solidFill>
+                  <a:srgbClr val="FFFFFF"/>
+                </a:solidFill>
+                <a:latin typeface="Calibri"/>
+              </a:rPr>
+              <a:t># Los titulos van TAL CUAL: son con los que se califica.</a:t>
+            </a:r>
           </a:p>
         </p:txBody>
       </p:sp>
       <p:sp>
         <p:nvSpPr>
           <p:cNvPr id="9" name="TextBox 8"/>
-          <p:cNvSpPr txBox="1"/>
-          <p:nvPr/>
-        </p:nvSpPr>
-        <p:spPr>
-          <a:xfrm>
-            <a:off x="1097280" y="1563624"/>
-            <a:ext cx="10362895" cy="402336"/>
-          </a:xfrm>
-          <a:prstGeom prst="rect">
-            <a:avLst/>
-          </a:prstGeom>
-          <a:noFill/>
-        </p:spPr>
-        <p:txBody>
-          <a:bodyPr wrap="square" anchor="ctr"/>
-          <a:lstStyle/>
-          <a:p>
-            <a:r>
-              <a:rPr sz="1500" b="1" i="0">
-                <a:solidFill>
-                  <a:srgbClr val="333333"/>
-                </a:solidFill>
-                <a:latin typeface="Calibri"/>
-              </a:rPr>
-              <a:t>EN QUÉ FASE ESTAMOS</a:t>
-            </a:r>
-            <a:r>
-              <a:rPr sz="1500" b="0" i="0">
-                <a:solidFill>
-                  <a:srgbClr val="333333"/>
-                </a:solidFill>
-                <a:latin typeface="Calibri"/>
-              </a:rPr>
-              <a:t> — La fase donde está el proyecto hoy, y </a:t>
-            </a:r>
-            <a:r>
-              <a:rPr sz="1500" b="1" i="0">
-                <a:solidFill>
-                  <a:srgbClr val="333333"/>
-                </a:solidFill>
-                <a:latin typeface="Calibri"/>
-              </a:rPr>
-              <a:t>qué falta exactamente para cerrarla</a:t>
-            </a:r>
-            <a:r>
-              <a:rPr sz="1500" b="0" i="0">
-                <a:solidFill>
-                  <a:srgbClr val="333333"/>
-                </a:solidFill>
-                <a:latin typeface="Calibri"/>
-              </a:rPr>
-              <a:t>. Una fase se cierra con un entregable, no con una sensación.</a:t>
-            </a:r>
-          </a:p>
-        </p:txBody>
-      </p:sp>
-      <p:sp>
-        <p:nvSpPr>
-          <p:cNvPr id="10" name="Rounded Rectangle 9"/>
-          <p:cNvSpPr/>
-          <p:nvPr/>
-        </p:nvSpPr>
-        <p:spPr>
-          <a:xfrm>
-            <a:off x="457200" y="2148839"/>
-            <a:ext cx="11277295" cy="566928"/>
-          </a:xfrm>
-          <a:prstGeom prst="roundRect">
-            <a:avLst>
-              <a:gd name="adj" fmla="val 12000"/>
-            </a:avLst>
-          </a:prstGeom>
-          <a:solidFill>
-            <a:srgbClr val="F2F2F2"/>
-          </a:solidFill>
-          <a:ln>
-            <a:noFill/>
-          </a:ln>
-        </p:spPr>
-        <p:style>
-          <a:lnRef idx="1">
-            <a:schemeClr val="accent1"/>
-          </a:lnRef>
-          <a:fillRef idx="3">
-            <a:schemeClr val="accent1"/>
-          </a:fillRef>
-          <a:effectRef idx="2">
-            <a:schemeClr val="accent1"/>
-          </a:effectRef>
-          <a:fontRef idx="minor">
-            <a:schemeClr val="lt1"/>
-          </a:fontRef>
-        </p:style>
-        <p:txBody>
-          <a:bodyPr rtlCol="0" anchor="ctr"/>
-          <a:lstStyle/>
-          <a:p>
-            <a:pPr algn="ctr"/>
-          </a:p>
-        </p:txBody>
-      </p:sp>
-      <p:sp>
-        <p:nvSpPr>
-          <p:cNvPr id="11" name="Rectangle 10"/>
-          <p:cNvSpPr/>
-          <p:nvPr/>
-        </p:nvSpPr>
-        <p:spPr>
-          <a:xfrm>
-            <a:off x="640080" y="2295144"/>
-            <a:ext cx="274320" cy="274320"/>
-          </a:xfrm>
-          <a:prstGeom prst="rect">
-            <a:avLst/>
-          </a:prstGeom>
-          <a:solidFill>
-            <a:srgbClr val="FFFFFF"/>
-          </a:solidFill>
-          <a:ln>
-            <a:solidFill>
-              <a:srgbClr val="333333"/>
-            </a:solidFill>
-          </a:ln>
-        </p:spPr>
-        <p:style>
-          <a:lnRef idx="1">
-            <a:schemeClr val="accent1"/>
-          </a:lnRef>
-          <a:fillRef idx="3">
-            <a:schemeClr val="accent1"/>
-          </a:fillRef>
-          <a:effectRef idx="2">
-            <a:schemeClr val="accent1"/>
-          </a:effectRef>
-          <a:fontRef idx="minor">
-            <a:schemeClr val="lt1"/>
-          </a:fontRef>
-        </p:style>
-        <p:txBody>
-          <a:bodyPr rtlCol="0" anchor="ctr"/>
-          <a:lstStyle/>
-          <a:p>
-            <a:pPr algn="ctr"/>
-          </a:p>
-        </p:txBody>
-      </p:sp>
-      <p:sp>
-        <p:nvSpPr>
-          <p:cNvPr id="12" name="Rectangle 11"/>
-          <p:cNvSpPr/>
-          <p:nvPr/>
-        </p:nvSpPr>
-        <p:spPr>
-          <a:xfrm>
-            <a:off x="640080" y="2295144"/>
-            <a:ext cx="73152" cy="274320"/>
-          </a:xfrm>
-          <a:prstGeom prst="rect">
-            <a:avLst/>
-          </a:prstGeom>
-          <a:solidFill>
-            <a:srgbClr val="269CCB"/>
-          </a:solidFill>
-          <a:ln>
-            <a:noFill/>
-          </a:ln>
-        </p:spPr>
-        <p:style>
-          <a:lnRef idx="1">
-            <a:schemeClr val="accent1"/>
-          </a:lnRef>
-          <a:fillRef idx="3">
-            <a:schemeClr val="accent1"/>
-          </a:fillRef>
-          <a:effectRef idx="2">
-            <a:schemeClr val="accent1"/>
-          </a:effectRef>
-          <a:fontRef idx="minor">
-            <a:schemeClr val="lt1"/>
-          </a:fontRef>
-        </p:style>
-        <p:txBody>
-          <a:bodyPr rtlCol="0" anchor="ctr"/>
-          <a:lstStyle/>
-          <a:p>
-            <a:pPr algn="ctr"/>
-          </a:p>
-        </p:txBody>
-      </p:sp>
-      <p:sp>
-        <p:nvSpPr>
-          <p:cNvPr id="13" name="TextBox 12"/>
-          <p:cNvSpPr txBox="1"/>
-          <p:nvPr/>
-        </p:nvSpPr>
-        <p:spPr>
-          <a:xfrm>
-            <a:off x="1097280" y="2240279"/>
-            <a:ext cx="10362895" cy="402336"/>
-          </a:xfrm>
-          <a:prstGeom prst="rect">
-            <a:avLst/>
-          </a:prstGeom>
-          <a:noFill/>
-        </p:spPr>
-        <p:txBody>
-          <a:bodyPr wrap="square" anchor="ctr"/>
-          <a:lstStyle/>
-          <a:p>
-            <a:r>
-              <a:rPr sz="1500" b="1" i="0">
-                <a:solidFill>
-                  <a:srgbClr val="333333"/>
-                </a:solidFill>
-                <a:latin typeface="Calibri"/>
-              </a:rPr>
-              <a:t>TRES REQUISITOS FUNCIONALES</a:t>
-            </a:r>
-            <a:r>
-              <a:rPr sz="1500" b="0" i="0">
-                <a:solidFill>
-                  <a:srgbClr val="333333"/>
-                </a:solidFill>
-                <a:latin typeface="Calibri"/>
-              </a:rPr>
-              <a:t> — Tres cosas que la solución </a:t>
-            </a:r>
-            <a:r>
-              <a:rPr sz="1500" b="1" i="0">
-                <a:solidFill>
-                  <a:srgbClr val="333333"/>
-                </a:solidFill>
-                <a:latin typeface="Calibri"/>
-              </a:rPr>
-              <a:t>hace</a:t>
-            </a:r>
-            <a:r>
-              <a:rPr sz="1500" b="0" i="0">
-                <a:solidFill>
-                  <a:srgbClr val="333333"/>
-                </a:solidFill>
-                <a:latin typeface="Calibri"/>
-              </a:rPr>
-              <a:t>, escritas desde el usuario: «el usuario puede…». Sin mencionar tecnología.</a:t>
-            </a:r>
-          </a:p>
-        </p:txBody>
-      </p:sp>
-      <p:sp>
-        <p:nvSpPr>
-          <p:cNvPr id="14" name="Rounded Rectangle 13"/>
-          <p:cNvSpPr/>
-          <p:nvPr/>
-        </p:nvSpPr>
-        <p:spPr>
-          <a:xfrm>
-            <a:off x="457200" y="2825496"/>
-            <a:ext cx="11277295" cy="566928"/>
-          </a:xfrm>
-          <a:prstGeom prst="roundRect">
-            <a:avLst>
-              <a:gd name="adj" fmla="val 12000"/>
-            </a:avLst>
-          </a:prstGeom>
-          <a:solidFill>
-            <a:srgbClr val="F2F2F2"/>
-          </a:solidFill>
-          <a:ln>
-            <a:noFill/>
-          </a:ln>
-        </p:spPr>
-        <p:style>
-          <a:lnRef idx="1">
-            <a:schemeClr val="accent1"/>
-          </a:lnRef>
-          <a:fillRef idx="3">
-            <a:schemeClr val="accent1"/>
-          </a:fillRef>
-          <a:effectRef idx="2">
-            <a:schemeClr val="accent1"/>
-          </a:effectRef>
-          <a:fontRef idx="minor">
-            <a:schemeClr val="lt1"/>
-          </a:fontRef>
-        </p:style>
-        <p:txBody>
-          <a:bodyPr rtlCol="0" anchor="ctr"/>
-          <a:lstStyle/>
-          <a:p>
-            <a:pPr algn="ctr"/>
-          </a:p>
-        </p:txBody>
-      </p:sp>
-      <p:sp>
-        <p:nvSpPr>
-          <p:cNvPr id="15" name="Rectangle 14"/>
-          <p:cNvSpPr/>
-          <p:nvPr/>
-        </p:nvSpPr>
-        <p:spPr>
-          <a:xfrm>
-            <a:off x="640080" y="2971800"/>
-            <a:ext cx="274320" cy="274320"/>
-          </a:xfrm>
-          <a:prstGeom prst="rect">
-            <a:avLst/>
-          </a:prstGeom>
-          <a:solidFill>
-            <a:srgbClr val="FFFFFF"/>
-          </a:solidFill>
-          <a:ln>
-            <a:solidFill>
-              <a:srgbClr val="333333"/>
-            </a:solidFill>
-          </a:ln>
-        </p:spPr>
-        <p:style>
-          <a:lnRef idx="1">
-            <a:schemeClr val="accent1"/>
-          </a:lnRef>
-          <a:fillRef idx="3">
-            <a:schemeClr val="accent1"/>
-          </a:fillRef>
-          <a:effectRef idx="2">
-            <a:schemeClr val="accent1"/>
-          </a:effectRef>
-          <a:fontRef idx="minor">
-            <a:schemeClr val="lt1"/>
-          </a:fontRef>
-        </p:style>
-        <p:txBody>
-          <a:bodyPr rtlCol="0" anchor="ctr"/>
-          <a:lstStyle/>
-          <a:p>
-            <a:pPr algn="ctr"/>
-          </a:p>
-        </p:txBody>
-      </p:sp>
-      <p:sp>
-        <p:nvSpPr>
-          <p:cNvPr id="16" name="Rectangle 15"/>
-          <p:cNvSpPr/>
-          <p:nvPr/>
-        </p:nvSpPr>
-        <p:spPr>
-          <a:xfrm>
-            <a:off x="640080" y="2971800"/>
-            <a:ext cx="73152" cy="274320"/>
-          </a:xfrm>
-          <a:prstGeom prst="rect">
-            <a:avLst/>
-          </a:prstGeom>
-          <a:solidFill>
-            <a:srgbClr val="269CCB"/>
-          </a:solidFill>
-          <a:ln>
-            <a:noFill/>
-          </a:ln>
-        </p:spPr>
-        <p:style>
-          <a:lnRef idx="1">
-            <a:schemeClr val="accent1"/>
-          </a:lnRef>
-          <a:fillRef idx="3">
-            <a:schemeClr val="accent1"/>
-          </a:fillRef>
-          <a:effectRef idx="2">
-            <a:schemeClr val="accent1"/>
-          </a:effectRef>
-          <a:fontRef idx="minor">
-            <a:schemeClr val="lt1"/>
-          </a:fontRef>
-        </p:style>
-        <p:txBody>
-          <a:bodyPr rtlCol="0" anchor="ctr"/>
-          <a:lstStyle/>
-          <a:p>
-            <a:pPr algn="ctr"/>
-          </a:p>
-        </p:txBody>
-      </p:sp>
-      <p:sp>
-        <p:nvSpPr>
-          <p:cNvPr id="17" name="TextBox 16"/>
-          <p:cNvSpPr txBox="1"/>
-          <p:nvPr/>
-        </p:nvSpPr>
-        <p:spPr>
-          <a:xfrm>
-            <a:off x="1097280" y="2916936"/>
-            <a:ext cx="10362895" cy="402336"/>
-          </a:xfrm>
-          <a:prstGeom prst="rect">
-            <a:avLst/>
-          </a:prstGeom>
-          <a:noFill/>
-        </p:spPr>
-        <p:txBody>
-          <a:bodyPr wrap="square" anchor="ctr"/>
-          <a:lstStyle/>
-          <a:p>
-            <a:r>
-              <a:rPr sz="1500" b="1" i="0">
-                <a:solidFill>
-                  <a:srgbClr val="333333"/>
-                </a:solidFill>
-                <a:latin typeface="Calibri"/>
-              </a:rPr>
-              <a:t>DOS REQUISITOS NO FUNCIONALES</a:t>
-            </a:r>
-            <a:r>
-              <a:rPr sz="1500" b="0" i="0">
-                <a:solidFill>
-                  <a:srgbClr val="333333"/>
-                </a:solidFill>
-                <a:latin typeface="Calibri"/>
-              </a:rPr>
-              <a:t> — Dos condiciones que la solución debe cumplir, </a:t>
-            </a:r>
-            <a:r>
-              <a:rPr sz="1500" b="1" i="0">
-                <a:solidFill>
-                  <a:srgbClr val="333333"/>
-                </a:solidFill>
-                <a:latin typeface="Calibri"/>
-              </a:rPr>
-              <a:t>derivadas de las restricciones del árbol de la sesión 6</a:t>
-            </a:r>
-            <a:r>
-              <a:rPr sz="1500" b="0" i="0">
-                <a:solidFill>
-                  <a:srgbClr val="333333"/>
-                </a:solidFill>
-                <a:latin typeface="Calibri"/>
-              </a:rPr>
-              <a:t>. Uno de los dos tiene que ser el indicador ambiental de la sesión 5.</a:t>
-            </a:r>
-          </a:p>
-        </p:txBody>
-      </p:sp>
-      <p:sp>
-        <p:nvSpPr>
-          <p:cNvPr id="18" name="Rounded Rectangle 17"/>
-          <p:cNvSpPr/>
-          <p:nvPr/>
-        </p:nvSpPr>
-        <p:spPr>
-          <a:xfrm>
-            <a:off x="457200" y="3502152"/>
-            <a:ext cx="11277295" cy="566928"/>
-          </a:xfrm>
-          <a:prstGeom prst="roundRect">
-            <a:avLst>
-              <a:gd name="adj" fmla="val 12000"/>
-            </a:avLst>
-          </a:prstGeom>
-          <a:solidFill>
-            <a:srgbClr val="F2F2F2"/>
-          </a:solidFill>
-          <a:ln>
-            <a:noFill/>
-          </a:ln>
-        </p:spPr>
-        <p:style>
-          <a:lnRef idx="1">
-            <a:schemeClr val="accent1"/>
-          </a:lnRef>
-          <a:fillRef idx="3">
-            <a:schemeClr val="accent1"/>
-          </a:fillRef>
-          <a:effectRef idx="2">
-            <a:schemeClr val="accent1"/>
-          </a:effectRef>
-          <a:fontRef idx="minor">
-            <a:schemeClr val="lt1"/>
-          </a:fontRef>
-        </p:style>
-        <p:txBody>
-          <a:bodyPr rtlCol="0" anchor="ctr"/>
-          <a:lstStyle/>
-          <a:p>
-            <a:pPr algn="ctr"/>
-          </a:p>
-        </p:txBody>
-      </p:sp>
-      <p:sp>
-        <p:nvSpPr>
-          <p:cNvPr id="19" name="Rectangle 18"/>
-          <p:cNvSpPr/>
-          <p:nvPr/>
-        </p:nvSpPr>
-        <p:spPr>
-          <a:xfrm>
-            <a:off x="640080" y="3648456"/>
-            <a:ext cx="274320" cy="274320"/>
-          </a:xfrm>
-          <a:prstGeom prst="rect">
-            <a:avLst/>
-          </a:prstGeom>
-          <a:solidFill>
-            <a:srgbClr val="FFFFFF"/>
-          </a:solidFill>
-          <a:ln>
-            <a:solidFill>
-              <a:srgbClr val="333333"/>
-            </a:solidFill>
-          </a:ln>
-        </p:spPr>
-        <p:style>
-          <a:lnRef idx="1">
-            <a:schemeClr val="accent1"/>
-          </a:lnRef>
-          <a:fillRef idx="3">
-            <a:schemeClr val="accent1"/>
-          </a:fillRef>
-          <a:effectRef idx="2">
-            <a:schemeClr val="accent1"/>
-          </a:effectRef>
-          <a:fontRef idx="minor">
-            <a:schemeClr val="lt1"/>
-          </a:fontRef>
-        </p:style>
-        <p:txBody>
-          <a:bodyPr rtlCol="0" anchor="ctr"/>
-          <a:lstStyle/>
-          <a:p>
-            <a:pPr algn="ctr"/>
-          </a:p>
-        </p:txBody>
-      </p:sp>
-      <p:sp>
-        <p:nvSpPr>
-          <p:cNvPr id="20" name="Rectangle 19"/>
-          <p:cNvSpPr/>
-          <p:nvPr/>
-        </p:nvSpPr>
-        <p:spPr>
-          <a:xfrm>
-            <a:off x="640080" y="3648456"/>
-            <a:ext cx="73152" cy="274320"/>
-          </a:xfrm>
-          <a:prstGeom prst="rect">
-            <a:avLst/>
-          </a:prstGeom>
-          <a:solidFill>
-            <a:srgbClr val="269CCB"/>
-          </a:solidFill>
-          <a:ln>
-            <a:noFill/>
-          </a:ln>
-        </p:spPr>
-        <p:style>
-          <a:lnRef idx="1">
-            <a:schemeClr val="accent1"/>
-          </a:lnRef>
-          <a:fillRef idx="3">
-            <a:schemeClr val="accent1"/>
-          </a:fillRef>
-          <a:effectRef idx="2">
-            <a:schemeClr val="accent1"/>
-          </a:effectRef>
-          <a:fontRef idx="minor">
-            <a:schemeClr val="lt1"/>
-          </a:fontRef>
-        </p:style>
-        <p:txBody>
-          <a:bodyPr rtlCol="0" anchor="ctr"/>
-          <a:lstStyle/>
-          <a:p>
-            <a:pPr algn="ctr"/>
-          </a:p>
-        </p:txBody>
-      </p:sp>
-      <p:sp>
-        <p:nvSpPr>
-          <p:cNvPr id="21" name="TextBox 20"/>
-          <p:cNvSpPr txBox="1"/>
-          <p:nvPr/>
-        </p:nvSpPr>
-        <p:spPr>
-          <a:xfrm>
-            <a:off x="1097280" y="3593592"/>
-            <a:ext cx="10362895" cy="402336"/>
-          </a:xfrm>
-          <a:prstGeom prst="rect">
-            <a:avLst/>
-          </a:prstGeom>
-          <a:noFill/>
-        </p:spPr>
-        <p:txBody>
-          <a:bodyPr wrap="square" anchor="ctr"/>
-          <a:lstStyle/>
-          <a:p>
-            <a:r>
-              <a:rPr sz="1500" b="1" i="0">
-                <a:solidFill>
-                  <a:srgbClr val="333333"/>
-                </a:solidFill>
-                <a:latin typeface="Calibri"/>
-              </a:rPr>
-              <a:t>LOS CRITERIOS DE ACEPTACIÓN</a:t>
-            </a:r>
-            <a:r>
-              <a:rPr sz="1500" b="0" i="0">
-                <a:solidFill>
-                  <a:srgbClr val="333333"/>
-                </a:solidFill>
-                <a:latin typeface="Calibri"/>
-              </a:rPr>
-              <a:t> — Para cada uno de los cinco requisitos: cómo se comprueba, con un caso concreto y un umbral. Tiene que poder ejecutarlo otra persona.</a:t>
-            </a:r>
-          </a:p>
-        </p:txBody>
-      </p:sp>
-      <p:sp>
-        <p:nvSpPr>
-          <p:cNvPr id="22" name="Rounded Rectangle 21"/>
-          <p:cNvSpPr/>
-          <p:nvPr/>
-        </p:nvSpPr>
-        <p:spPr>
-          <a:xfrm>
-            <a:off x="457200" y="4178808"/>
-            <a:ext cx="11277295" cy="566928"/>
-          </a:xfrm>
-          <a:prstGeom prst="roundRect">
-            <a:avLst>
-              <a:gd name="adj" fmla="val 12000"/>
-            </a:avLst>
-          </a:prstGeom>
-          <a:solidFill>
-            <a:srgbClr val="F2F2F2"/>
-          </a:solidFill>
-          <a:ln>
-            <a:noFill/>
-          </a:ln>
-        </p:spPr>
-        <p:style>
-          <a:lnRef idx="1">
-            <a:schemeClr val="accent1"/>
-          </a:lnRef>
-          <a:fillRef idx="3">
-            <a:schemeClr val="accent1"/>
-          </a:fillRef>
-          <a:effectRef idx="2">
-            <a:schemeClr val="accent1"/>
-          </a:effectRef>
-          <a:fontRef idx="minor">
-            <a:schemeClr val="lt1"/>
-          </a:fontRef>
-        </p:style>
-        <p:txBody>
-          <a:bodyPr rtlCol="0" anchor="ctr"/>
-          <a:lstStyle/>
-          <a:p>
-            <a:pPr algn="ctr"/>
-          </a:p>
-        </p:txBody>
-      </p:sp>
-      <p:sp>
-        <p:nvSpPr>
-          <p:cNvPr id="23" name="Rectangle 22"/>
-          <p:cNvSpPr/>
-          <p:nvPr/>
-        </p:nvSpPr>
-        <p:spPr>
-          <a:xfrm>
-            <a:off x="640080" y="4325112"/>
-            <a:ext cx="274320" cy="274320"/>
-          </a:xfrm>
-          <a:prstGeom prst="rect">
-            <a:avLst/>
-          </a:prstGeom>
-          <a:solidFill>
-            <a:srgbClr val="FFFFFF"/>
-          </a:solidFill>
-          <a:ln>
-            <a:solidFill>
-              <a:srgbClr val="333333"/>
-            </a:solidFill>
-          </a:ln>
-        </p:spPr>
-        <p:style>
-          <a:lnRef idx="1">
-            <a:schemeClr val="accent1"/>
-          </a:lnRef>
-          <a:fillRef idx="3">
-            <a:schemeClr val="accent1"/>
-          </a:fillRef>
-          <a:effectRef idx="2">
-            <a:schemeClr val="accent1"/>
-          </a:effectRef>
-          <a:fontRef idx="minor">
-            <a:schemeClr val="lt1"/>
-          </a:fontRef>
-        </p:style>
-        <p:txBody>
-          <a:bodyPr rtlCol="0" anchor="ctr"/>
-          <a:lstStyle/>
-          <a:p>
-            <a:pPr algn="ctr"/>
-          </a:p>
-        </p:txBody>
-      </p:sp>
-      <p:sp>
-        <p:nvSpPr>
-          <p:cNvPr id="24" name="Rectangle 23"/>
-          <p:cNvSpPr/>
-          <p:nvPr/>
-        </p:nvSpPr>
-        <p:spPr>
-          <a:xfrm>
-            <a:off x="640080" y="4325112"/>
-            <a:ext cx="73152" cy="274320"/>
-          </a:xfrm>
-          <a:prstGeom prst="rect">
-            <a:avLst/>
-          </a:prstGeom>
-          <a:solidFill>
-            <a:srgbClr val="269CCB"/>
-          </a:solidFill>
-          <a:ln>
-            <a:noFill/>
-          </a:ln>
-        </p:spPr>
-        <p:style>
-          <a:lnRef idx="1">
-            <a:schemeClr val="accent1"/>
-          </a:lnRef>
-          <a:fillRef idx="3">
-            <a:schemeClr val="accent1"/>
-          </a:fillRef>
-          <a:effectRef idx="2">
-            <a:schemeClr val="accent1"/>
-          </a:effectRef>
-          <a:fontRef idx="minor">
-            <a:schemeClr val="lt1"/>
-          </a:fontRef>
-        </p:style>
-        <p:txBody>
-          <a:bodyPr rtlCol="0" anchor="ctr"/>
-          <a:lstStyle/>
-          <a:p>
-            <a:pPr algn="ctr"/>
-          </a:p>
-        </p:txBody>
-      </p:sp>
-      <p:sp>
-        <p:nvSpPr>
-          <p:cNvPr id="25" name="TextBox 24"/>
-          <p:cNvSpPr txBox="1"/>
-          <p:nvPr/>
-        </p:nvSpPr>
-        <p:spPr>
-          <a:xfrm>
-            <a:off x="1097280" y="4270248"/>
-            <a:ext cx="10362895" cy="402336"/>
-          </a:xfrm>
-          <a:prstGeom prst="rect">
-            <a:avLst/>
-          </a:prstGeom>
-          <a:noFill/>
-        </p:spPr>
-        <p:txBody>
-          <a:bodyPr wrap="square" anchor="ctr"/>
-          <a:lstStyle/>
-          <a:p>
-            <a:r>
-              <a:rPr sz="1500" b="1" i="0">
-                <a:solidFill>
-                  <a:srgbClr val="333333"/>
-                </a:solidFill>
-                <a:latin typeface="Calibri"/>
-              </a:rPr>
-              <a:t>EL PLAN DE HITOS</a:t>
-            </a:r>
-            <a:r>
-              <a:rPr sz="1500" b="0" i="0">
-                <a:solidFill>
-                  <a:srgbClr val="333333"/>
-                </a:solidFill>
-                <a:latin typeface="Calibri"/>
-              </a:rPr>
-              <a:t> — Qué queda </a:t>
-            </a:r>
-            <a:r>
-              <a:rPr sz="1500" b="1" i="0">
-                <a:solidFill>
-                  <a:srgbClr val="333333"/>
-                </a:solidFill>
-                <a:latin typeface="Calibri"/>
-              </a:rPr>
-              <a:t>terminado y verificable</a:t>
-            </a:r>
-            <a:r>
-              <a:rPr sz="1500" b="0" i="0">
-                <a:solidFill>
-                  <a:srgbClr val="333333"/>
-                </a:solidFill>
-                <a:latin typeface="Calibri"/>
-              </a:rPr>
-              <a:t> en cada una de las sesiones 8, 9, 10, 11, 12 y 14. Y la decisión de hoy que sería carísima cambiar en la Clase 14.</a:t>
-            </a:r>
-          </a:p>
-        </p:txBody>
-      </p:sp>
-      <p:sp>
-        <p:nvSpPr>
-          <p:cNvPr id="26" name="TextBox 25"/>
           <p:cNvSpPr txBox="1"/>
           <p:nvPr/>
         </p:nvSpPr>
@@ -8631,7 +7960,7 @@
         <p:spPr>
           <a:xfrm>
             <a:off x="0" y="0"/>
-            <a:ext cx="12191695" cy="1170432"/>
+            <a:ext cx="12191695" cy="960120"/>
           </a:xfrm>
           <a:prstGeom prst="rect">
             <a:avLst/>
@@ -8673,7 +8002,7 @@
         </p:nvSpPr>
         <p:spPr>
           <a:xfrm>
-            <a:off x="0" y="1170432"/>
+            <a:off x="0" y="960120"/>
             <a:ext cx="12191695" cy="41148"/>
           </a:xfrm>
           <a:prstGeom prst="rect">
@@ -8717,7 +8046,7 @@
         <p:spPr>
           <a:xfrm>
             <a:off x="457200" y="164592"/>
-            <a:ext cx="11277295" cy="384048"/>
+            <a:ext cx="11277295" cy="502920"/>
           </a:xfrm>
           <a:prstGeom prst="rect">
             <a:avLst/>
@@ -8737,55 +8066,21 @@
                 </a:solidFill>
                 <a:latin typeface="Calibri"/>
               </a:rPr>
-              <a:t>Cómo se expone en 3 minutos</a:t>
-            </a:r>
-          </a:p>
-        </p:txBody>
-      </p:sp>
-      <p:sp>
-        <p:nvSpPr>
-          <p:cNvPr id="5" name="TextBox 4"/>
-          <p:cNvSpPr txBox="1"/>
-          <p:nvPr/>
-        </p:nvSpPr>
-        <p:spPr>
-          <a:xfrm>
-            <a:off x="457200" y="566928"/>
-            <a:ext cx="11277295" cy="411480"/>
-          </a:xfrm>
-          <a:prstGeom prst="rect">
-            <a:avLst/>
-          </a:prstGeom>
-          <a:noFill/>
-        </p:spPr>
-        <p:txBody>
-          <a:bodyPr wrap="square">
-            <a:spAutoFit/>
-          </a:bodyPr>
-          <a:lstStyle/>
-          <a:p>
-            <a:r>
-              <a:rPr sz="1400" b="0" i="0">
-                <a:solidFill>
-                  <a:srgbClr val="B8D8EE"/>
-                </a:solidFill>
-                <a:latin typeface="Calibri"/>
-              </a:rPr>
-              <a:t>Habla el vocero con la pantalla ya compartida · cronómetro en pantalla · se corta al llegar a cero</a:t>
-            </a:r>
-          </a:p>
-        </p:txBody>
-      </p:sp>
-      <p:sp>
-        <p:nvSpPr>
-          <p:cNvPr id="6" name="Rounded Rectangle 5"/>
+              <a:t>Guion de la exposicion, con tiempos</a:t>
+            </a:r>
+          </a:p>
+        </p:txBody>
+      </p:sp>
+      <p:sp>
+        <p:nvSpPr>
+          <p:cNvPr id="5" name="Rounded Rectangle 4"/>
           <p:cNvSpPr/>
           <p:nvPr/>
         </p:nvSpPr>
         <p:spPr>
           <a:xfrm>
-            <a:off x="457200" y="1444752"/>
-            <a:ext cx="11277295" cy="908913"/>
+            <a:off x="457200" y="1261872"/>
+            <a:ext cx="11277295" cy="5093208"/>
           </a:xfrm>
           <a:prstGeom prst="roundRect">
             <a:avLst>
@@ -8793,7 +8088,7 @@
             </a:avLst>
           </a:prstGeom>
           <a:solidFill>
-            <a:srgbClr val="F2F2F2"/>
+            <a:srgbClr val="1E2A38"/>
           </a:solidFill>
           <a:ln>
             <a:noFill/>
@@ -8823,19 +8118,17 @@
       </p:sp>
       <p:sp>
         <p:nvSpPr>
-          <p:cNvPr id="7" name="Rounded Rectangle 6"/>
+          <p:cNvPr id="6" name="Rectangle 5"/>
           <p:cNvSpPr/>
           <p:nvPr/>
         </p:nvSpPr>
         <p:spPr>
           <a:xfrm>
-            <a:off x="594360" y="1679752"/>
-            <a:ext cx="438912" cy="438912"/>
-          </a:xfrm>
-          <a:prstGeom prst="roundRect">
-            <a:avLst>
-              <a:gd name="adj" fmla="val 12000"/>
-            </a:avLst>
+            <a:off x="457200" y="1261872"/>
+            <a:ext cx="11277295" cy="320040"/>
+          </a:xfrm>
+          <a:prstGeom prst="rect">
+            <a:avLst/>
           </a:prstGeom>
           <a:solidFill>
             <a:srgbClr val="095292"/>
@@ -8868,14 +8161,46 @@
       </p:sp>
       <p:sp>
         <p:nvSpPr>
+          <p:cNvPr id="7" name="TextBox 6"/>
+          <p:cNvSpPr txBox="1"/>
+          <p:nvPr/>
+        </p:nvSpPr>
+        <p:spPr>
+          <a:xfrm>
+            <a:off x="685800" y="1307592"/>
+            <a:ext cx="10820095" cy="256032"/>
+          </a:xfrm>
+          <a:prstGeom prst="rect">
+            <a:avLst/>
+          </a:prstGeom>
+          <a:noFill/>
+        </p:spPr>
+        <p:txBody>
+          <a:bodyPr wrap="square" anchor="ctr"/>
+          <a:lstStyle/>
+          <a:p>
+            <a:r>
+              <a:rPr sz="1000" b="1" i="0">
+                <a:solidFill>
+                  <a:srgbClr val="269CCB"/>
+                </a:solidFill>
+                <a:latin typeface="Calibri"/>
+              </a:rPr>
+              <a:t>● ● ●</a:t>
+            </a:r>
+          </a:p>
+        </p:txBody>
+      </p:sp>
+      <p:sp>
+        <p:nvSpPr>
           <p:cNvPr id="8" name="TextBox 7"/>
           <p:cNvSpPr txBox="1"/>
           <p:nvPr/>
         </p:nvSpPr>
         <p:spPr>
           <a:xfrm>
-            <a:off x="594360" y="1679752"/>
-            <a:ext cx="438912" cy="438912"/>
+            <a:off x="777240" y="1719072"/>
+            <a:ext cx="10637215" cy="4453128"/>
           </a:xfrm>
           <a:prstGeom prst="rect">
             <a:avLst/>
@@ -8883,18 +8208,168 @@
           <a:noFill/>
         </p:spPr>
         <p:txBody>
-          <a:bodyPr wrap="square" anchor="ctr"/>
-          <a:lstStyle/>
-          <a:p>
-            <a:pPr algn="ctr"/>
-            <a:r>
-              <a:rPr sz="1600" b="1" i="0">
+          <a:bodyPr wrap="square">
+            <a:spAutoFit/>
+          </a:bodyPr>
+          <a:lstStyle/>
+          <a:p>
+            <a:pPr>
+              <a:spcAft>
+                <a:spcPts val="400"/>
+              </a:spcAft>
+            </a:pPr>
+            <a:r>
+              <a:rPr sz="1400" b="0" i="0">
                 <a:solidFill>
                   <a:srgbClr val="FFFFFF"/>
                 </a:solidFill>
                 <a:latin typeface="Calibri"/>
               </a:rPr>
-              <a:t>1</a:t>
+              <a:t># Exposicion de hoy · lo que se califica es el reparto, no el total</a:t>
+            </a:r>
+          </a:p>
+          <a:p>
+            <a:pPr>
+              <a:spcAft>
+                <a:spcPts val="400"/>
+              </a:spcAft>
+            </a:pPr>
+            <a:r>
+              <a:rPr sz="1400" b="0" i="0">
+                <a:solidFill>
+                  <a:srgbClr val="FFFFFF"/>
+                </a:solidFill>
+                <a:latin typeface="Calibri"/>
+              </a:rPr>
+              <a:t/>
+            </a:r>
+          </a:p>
+          <a:p>
+            <a:pPr>
+              <a:spcAft>
+                <a:spcPts val="400"/>
+              </a:spcAft>
+            </a:pPr>
+            <a:r>
+              <a:rPr sz="1400" b="0" i="0">
+                <a:solidFill>
+                  <a:srgbClr val="FFFFFF"/>
+                </a:solidFill>
+                <a:latin typeface="Calibri"/>
+              </a:rPr>
+              <a:t>30 s · La fase                     En qué fase están y qué falta para cerrarla.</a:t>
+            </a:r>
+          </a:p>
+          <a:p>
+            <a:pPr>
+              <a:spcAft>
+                <a:spcPts val="400"/>
+              </a:spcAft>
+            </a:pPr>
+            <a:r>
+              <a:rPr sz="1400" b="0" i="0">
+                <a:solidFill>
+                  <a:srgbClr val="FFFFFF"/>
+                </a:solidFill>
+                <a:latin typeface="Calibri"/>
+              </a:rPr>
+              <a:t>50 s · Los requisitos              Uno funcional y uno no funcional, leídos tal</a:t>
+            </a:r>
+          </a:p>
+          <a:p>
+            <a:pPr>
+              <a:spcAft>
+                <a:spcPts val="400"/>
+              </a:spcAft>
+            </a:pPr>
+            <a:r>
+              <a:rPr sz="1400" b="0" i="0">
+                <a:solidFill>
+                  <a:srgbClr val="FFFFFF"/>
+                </a:solidFill>
+                <a:latin typeface="Calibri"/>
+              </a:rPr>
+              <a:t>50 s · El criterio de aceptación   De ese requisito: cómo se comprueba y con qu</a:t>
+            </a:r>
+          </a:p>
+          <a:p>
+            <a:pPr>
+              <a:spcAft>
+                <a:spcPts val="400"/>
+              </a:spcAft>
+            </a:pPr>
+            <a:r>
+              <a:rPr sz="1400" b="0" i="0">
+                <a:solidFill>
+                  <a:srgbClr val="FFFFFF"/>
+                </a:solidFill>
+                <a:latin typeface="Calibri"/>
+              </a:rPr>
+              <a:t>40 s · El plan de hitos            Qué queda listo en la Clase 10 y en la 12.</a:t>
+            </a:r>
+          </a:p>
+          <a:p>
+            <a:pPr>
+              <a:spcAft>
+                <a:spcPts val="400"/>
+              </a:spcAft>
+            </a:pPr>
+            <a:r>
+              <a:rPr sz="1400" b="0" i="0">
+                <a:solidFill>
+                  <a:srgbClr val="FFFFFF"/>
+                </a:solidFill>
+                <a:latin typeface="Calibri"/>
+              </a:rPr>
+              <a:t>10 s · La decisión costosa         Qué sería carísimo cambiar después.</a:t>
+            </a:r>
+          </a:p>
+          <a:p>
+            <a:pPr>
+              <a:spcAft>
+                <a:spcPts val="400"/>
+              </a:spcAft>
+            </a:pPr>
+            <a:r>
+              <a:rPr sz="1400" b="0" i="0">
+                <a:solidFill>
+                  <a:srgbClr val="FFFFFF"/>
+                </a:solidFill>
+                <a:latin typeface="Calibri"/>
+              </a:rPr>
+              <a:t/>
+            </a:r>
+          </a:p>
+          <a:p>
+            <a:pPr>
+              <a:spcAft>
+                <a:spcPts val="400"/>
+              </a:spcAft>
+            </a:pPr>
+            <a:r>
+              <a:rPr sz="1400" b="0" i="0">
+                <a:solidFill>
+                  <a:srgbClr val="FFFFFF"/>
+                </a:solidFill>
+                <a:latin typeface="Calibri"/>
+              </a:rPr>
+              <a:t># El tramo marcado como obligatorio es el que el jurado califica:</a:t>
+            </a:r>
+          </a:p>
+          <a:p>
+            <a:pPr>
+              <a:spcAft>
+                <a:spcPts val="400"/>
+              </a:spcAft>
+            </a:pPr>
+            <a:r>
+              <a:rPr sz="1400" b="0" i="0">
+                <a:solidFill>
+                  <a:srgbClr val="FFFFFF"/>
+                </a:solidFill>
+                <a:latin typeface="Calibri"/>
+              </a:rPr>
+              <a:t># si el guion no esta cronometrado, es el que se queda sin tiempo.</a:t>
             </a:r>
           </a:p>
         </p:txBody>
@@ -8902,738 +8377,6 @@
       <p:sp>
         <p:nvSpPr>
           <p:cNvPr id="9" name="TextBox 8"/>
-          <p:cNvSpPr txBox="1"/>
-          <p:nvPr/>
-        </p:nvSpPr>
-        <p:spPr>
-          <a:xfrm>
-            <a:off x="1188720" y="1536192"/>
-            <a:ext cx="10271455" cy="744321"/>
-          </a:xfrm>
-          <a:prstGeom prst="rect">
-            <a:avLst/>
-          </a:prstGeom>
-          <a:noFill/>
-        </p:spPr>
-        <p:txBody>
-          <a:bodyPr wrap="square" anchor="ctr"/>
-          <a:lstStyle/>
-          <a:p>
-            <a:r>
-              <a:rPr sz="1500" b="1" i="0">
-                <a:solidFill>
-                  <a:srgbClr val="095292"/>
-                </a:solidFill>
-                <a:latin typeface="Calibri"/>
-              </a:rPr>
-              <a:t>30 s · La fase</a:t>
-            </a:r>
-          </a:p>
-          <a:p>
-            <a:pPr>
-              <a:spcBef>
-                <a:spcPts val="200"/>
-              </a:spcBef>
-            </a:pPr>
-            <a:r>
-              <a:rPr sz="1300" b="0" i="0">
-                <a:solidFill>
-                  <a:srgbClr val="333333"/>
-                </a:solidFill>
-                <a:latin typeface="Calibri"/>
-              </a:rPr>
-              <a:t>En qué fase están y qué falta para cerrarla. Es el minuto obligatorio.</a:t>
-            </a:r>
-          </a:p>
-        </p:txBody>
-      </p:sp>
-      <p:sp>
-        <p:nvSpPr>
-          <p:cNvPr id="10" name="Rounded Rectangle 9"/>
-          <p:cNvSpPr/>
-          <p:nvPr/>
-        </p:nvSpPr>
-        <p:spPr>
-          <a:xfrm>
-            <a:off x="457200" y="2445105"/>
-            <a:ext cx="11277295" cy="908913"/>
-          </a:xfrm>
-          <a:prstGeom prst="roundRect">
-            <a:avLst>
-              <a:gd name="adj" fmla="val 12000"/>
-            </a:avLst>
-          </a:prstGeom>
-          <a:solidFill>
-            <a:srgbClr val="E8F4FA"/>
-          </a:solidFill>
-          <a:ln>
-            <a:noFill/>
-          </a:ln>
-        </p:spPr>
-        <p:style>
-          <a:lnRef idx="1">
-            <a:schemeClr val="accent1"/>
-          </a:lnRef>
-          <a:fillRef idx="3">
-            <a:schemeClr val="accent1"/>
-          </a:fillRef>
-          <a:effectRef idx="2">
-            <a:schemeClr val="accent1"/>
-          </a:effectRef>
-          <a:fontRef idx="minor">
-            <a:schemeClr val="lt1"/>
-          </a:fontRef>
-        </p:style>
-        <p:txBody>
-          <a:bodyPr rtlCol="0" anchor="ctr"/>
-          <a:lstStyle/>
-          <a:p>
-            <a:pPr algn="ctr"/>
-          </a:p>
-        </p:txBody>
-      </p:sp>
-      <p:sp>
-        <p:nvSpPr>
-          <p:cNvPr id="11" name="Rounded Rectangle 10"/>
-          <p:cNvSpPr/>
-          <p:nvPr/>
-        </p:nvSpPr>
-        <p:spPr>
-          <a:xfrm>
-            <a:off x="594360" y="2680106"/>
-            <a:ext cx="438912" cy="438912"/>
-          </a:xfrm>
-          <a:prstGeom prst="roundRect">
-            <a:avLst>
-              <a:gd name="adj" fmla="val 12000"/>
-            </a:avLst>
-          </a:prstGeom>
-          <a:solidFill>
-            <a:srgbClr val="095292"/>
-          </a:solidFill>
-          <a:ln>
-            <a:noFill/>
-          </a:ln>
-        </p:spPr>
-        <p:style>
-          <a:lnRef idx="1">
-            <a:schemeClr val="accent1"/>
-          </a:lnRef>
-          <a:fillRef idx="3">
-            <a:schemeClr val="accent1"/>
-          </a:fillRef>
-          <a:effectRef idx="2">
-            <a:schemeClr val="accent1"/>
-          </a:effectRef>
-          <a:fontRef idx="minor">
-            <a:schemeClr val="lt1"/>
-          </a:fontRef>
-        </p:style>
-        <p:txBody>
-          <a:bodyPr rtlCol="0" anchor="ctr"/>
-          <a:lstStyle/>
-          <a:p>
-            <a:pPr algn="ctr"/>
-          </a:p>
-        </p:txBody>
-      </p:sp>
-      <p:sp>
-        <p:nvSpPr>
-          <p:cNvPr id="12" name="TextBox 11"/>
-          <p:cNvSpPr txBox="1"/>
-          <p:nvPr/>
-        </p:nvSpPr>
-        <p:spPr>
-          <a:xfrm>
-            <a:off x="594360" y="2680106"/>
-            <a:ext cx="438912" cy="438912"/>
-          </a:xfrm>
-          <a:prstGeom prst="rect">
-            <a:avLst/>
-          </a:prstGeom>
-          <a:noFill/>
-        </p:spPr>
-        <p:txBody>
-          <a:bodyPr wrap="square" anchor="ctr"/>
-          <a:lstStyle/>
-          <a:p>
-            <a:pPr algn="ctr"/>
-            <a:r>
-              <a:rPr sz="1600" b="1" i="0">
-                <a:solidFill>
-                  <a:srgbClr val="FFFFFF"/>
-                </a:solidFill>
-                <a:latin typeface="Calibri"/>
-              </a:rPr>
-              <a:t>2</a:t>
-            </a:r>
-          </a:p>
-        </p:txBody>
-      </p:sp>
-      <p:sp>
-        <p:nvSpPr>
-          <p:cNvPr id="13" name="TextBox 12"/>
-          <p:cNvSpPr txBox="1"/>
-          <p:nvPr/>
-        </p:nvSpPr>
-        <p:spPr>
-          <a:xfrm>
-            <a:off x="1188720" y="2536545"/>
-            <a:ext cx="10271455" cy="744321"/>
-          </a:xfrm>
-          <a:prstGeom prst="rect">
-            <a:avLst/>
-          </a:prstGeom>
-          <a:noFill/>
-        </p:spPr>
-        <p:txBody>
-          <a:bodyPr wrap="square" anchor="ctr"/>
-          <a:lstStyle/>
-          <a:p>
-            <a:r>
-              <a:rPr sz="1500" b="1" i="0">
-                <a:solidFill>
-                  <a:srgbClr val="095292"/>
-                </a:solidFill>
-                <a:latin typeface="Calibri"/>
-              </a:rPr>
-              <a:t>50 s · Los requisitos</a:t>
-            </a:r>
-          </a:p>
-          <a:p>
-            <a:pPr>
-              <a:spcBef>
-                <a:spcPts val="200"/>
-              </a:spcBef>
-            </a:pPr>
-            <a:r>
-              <a:rPr sz="1300" b="0" i="0">
-                <a:solidFill>
-                  <a:srgbClr val="333333"/>
-                </a:solidFill>
-                <a:latin typeface="Calibri"/>
-              </a:rPr>
-              <a:t>Uno funcional y uno no funcional, leídos tal cual.</a:t>
-            </a:r>
-          </a:p>
-        </p:txBody>
-      </p:sp>
-      <p:sp>
-        <p:nvSpPr>
-          <p:cNvPr id="14" name="Rounded Rectangle 13"/>
-          <p:cNvSpPr/>
-          <p:nvPr/>
-        </p:nvSpPr>
-        <p:spPr>
-          <a:xfrm>
-            <a:off x="457200" y="3445459"/>
-            <a:ext cx="11277295" cy="908913"/>
-          </a:xfrm>
-          <a:prstGeom prst="roundRect">
-            <a:avLst>
-              <a:gd name="adj" fmla="val 12000"/>
-            </a:avLst>
-          </a:prstGeom>
-          <a:solidFill>
-            <a:srgbClr val="F2F2F2"/>
-          </a:solidFill>
-          <a:ln>
-            <a:noFill/>
-          </a:ln>
-        </p:spPr>
-        <p:style>
-          <a:lnRef idx="1">
-            <a:schemeClr val="accent1"/>
-          </a:lnRef>
-          <a:fillRef idx="3">
-            <a:schemeClr val="accent1"/>
-          </a:fillRef>
-          <a:effectRef idx="2">
-            <a:schemeClr val="accent1"/>
-          </a:effectRef>
-          <a:fontRef idx="minor">
-            <a:schemeClr val="lt1"/>
-          </a:fontRef>
-        </p:style>
-        <p:txBody>
-          <a:bodyPr rtlCol="0" anchor="ctr"/>
-          <a:lstStyle/>
-          <a:p>
-            <a:pPr algn="ctr"/>
-          </a:p>
-        </p:txBody>
-      </p:sp>
-      <p:sp>
-        <p:nvSpPr>
-          <p:cNvPr id="15" name="Rounded Rectangle 14"/>
-          <p:cNvSpPr/>
-          <p:nvPr/>
-        </p:nvSpPr>
-        <p:spPr>
-          <a:xfrm>
-            <a:off x="594360" y="3680460"/>
-            <a:ext cx="438912" cy="438912"/>
-          </a:xfrm>
-          <a:prstGeom prst="roundRect">
-            <a:avLst>
-              <a:gd name="adj" fmla="val 12000"/>
-            </a:avLst>
-          </a:prstGeom>
-          <a:solidFill>
-            <a:srgbClr val="095292"/>
-          </a:solidFill>
-          <a:ln>
-            <a:noFill/>
-          </a:ln>
-        </p:spPr>
-        <p:style>
-          <a:lnRef idx="1">
-            <a:schemeClr val="accent1"/>
-          </a:lnRef>
-          <a:fillRef idx="3">
-            <a:schemeClr val="accent1"/>
-          </a:fillRef>
-          <a:effectRef idx="2">
-            <a:schemeClr val="accent1"/>
-          </a:effectRef>
-          <a:fontRef idx="minor">
-            <a:schemeClr val="lt1"/>
-          </a:fontRef>
-        </p:style>
-        <p:txBody>
-          <a:bodyPr rtlCol="0" anchor="ctr"/>
-          <a:lstStyle/>
-          <a:p>
-            <a:pPr algn="ctr"/>
-          </a:p>
-        </p:txBody>
-      </p:sp>
-      <p:sp>
-        <p:nvSpPr>
-          <p:cNvPr id="16" name="TextBox 15"/>
-          <p:cNvSpPr txBox="1"/>
-          <p:nvPr/>
-        </p:nvSpPr>
-        <p:spPr>
-          <a:xfrm>
-            <a:off x="594360" y="3680460"/>
-            <a:ext cx="438912" cy="438912"/>
-          </a:xfrm>
-          <a:prstGeom prst="rect">
-            <a:avLst/>
-          </a:prstGeom>
-          <a:noFill/>
-        </p:spPr>
-        <p:txBody>
-          <a:bodyPr wrap="square" anchor="ctr"/>
-          <a:lstStyle/>
-          <a:p>
-            <a:pPr algn="ctr"/>
-            <a:r>
-              <a:rPr sz="1600" b="1" i="0">
-                <a:solidFill>
-                  <a:srgbClr val="FFFFFF"/>
-                </a:solidFill>
-                <a:latin typeface="Calibri"/>
-              </a:rPr>
-              <a:t>3</a:t>
-            </a:r>
-          </a:p>
-        </p:txBody>
-      </p:sp>
-      <p:sp>
-        <p:nvSpPr>
-          <p:cNvPr id="17" name="TextBox 16"/>
-          <p:cNvSpPr txBox="1"/>
-          <p:nvPr/>
-        </p:nvSpPr>
-        <p:spPr>
-          <a:xfrm>
-            <a:off x="1188720" y="3536899"/>
-            <a:ext cx="10271455" cy="744321"/>
-          </a:xfrm>
-          <a:prstGeom prst="rect">
-            <a:avLst/>
-          </a:prstGeom>
-          <a:noFill/>
-        </p:spPr>
-        <p:txBody>
-          <a:bodyPr wrap="square" anchor="ctr"/>
-          <a:lstStyle/>
-          <a:p>
-            <a:r>
-              <a:rPr sz="1500" b="1" i="0">
-                <a:solidFill>
-                  <a:srgbClr val="095292"/>
-                </a:solidFill>
-                <a:latin typeface="Calibri"/>
-              </a:rPr>
-              <a:t>50 s · El criterio de aceptación</a:t>
-            </a:r>
-          </a:p>
-          <a:p>
-            <a:pPr>
-              <a:spcBef>
-                <a:spcPts val="200"/>
-              </a:spcBef>
-            </a:pPr>
-            <a:r>
-              <a:rPr sz="1300" b="0" i="0">
-                <a:solidFill>
-                  <a:srgbClr val="333333"/>
-                </a:solidFill>
-                <a:latin typeface="Calibri"/>
-              </a:rPr>
-              <a:t>De ese requisito: cómo se comprueba y con qué umbral.</a:t>
-            </a:r>
-          </a:p>
-        </p:txBody>
-      </p:sp>
-      <p:sp>
-        <p:nvSpPr>
-          <p:cNvPr id="18" name="Rounded Rectangle 17"/>
-          <p:cNvSpPr/>
-          <p:nvPr/>
-        </p:nvSpPr>
-        <p:spPr>
-          <a:xfrm>
-            <a:off x="457200" y="4445812"/>
-            <a:ext cx="11277295" cy="908913"/>
-          </a:xfrm>
-          <a:prstGeom prst="roundRect">
-            <a:avLst>
-              <a:gd name="adj" fmla="val 12000"/>
-            </a:avLst>
-          </a:prstGeom>
-          <a:solidFill>
-            <a:srgbClr val="E8F4FA"/>
-          </a:solidFill>
-          <a:ln>
-            <a:noFill/>
-          </a:ln>
-        </p:spPr>
-        <p:style>
-          <a:lnRef idx="1">
-            <a:schemeClr val="accent1"/>
-          </a:lnRef>
-          <a:fillRef idx="3">
-            <a:schemeClr val="accent1"/>
-          </a:fillRef>
-          <a:effectRef idx="2">
-            <a:schemeClr val="accent1"/>
-          </a:effectRef>
-          <a:fontRef idx="minor">
-            <a:schemeClr val="lt1"/>
-          </a:fontRef>
-        </p:style>
-        <p:txBody>
-          <a:bodyPr rtlCol="0" anchor="ctr"/>
-          <a:lstStyle/>
-          <a:p>
-            <a:pPr algn="ctr"/>
-          </a:p>
-        </p:txBody>
-      </p:sp>
-      <p:sp>
-        <p:nvSpPr>
-          <p:cNvPr id="19" name="Rounded Rectangle 18"/>
-          <p:cNvSpPr/>
-          <p:nvPr/>
-        </p:nvSpPr>
-        <p:spPr>
-          <a:xfrm>
-            <a:off x="594360" y="4680813"/>
-            <a:ext cx="438912" cy="438912"/>
-          </a:xfrm>
-          <a:prstGeom prst="roundRect">
-            <a:avLst>
-              <a:gd name="adj" fmla="val 12000"/>
-            </a:avLst>
-          </a:prstGeom>
-          <a:solidFill>
-            <a:srgbClr val="095292"/>
-          </a:solidFill>
-          <a:ln>
-            <a:noFill/>
-          </a:ln>
-        </p:spPr>
-        <p:style>
-          <a:lnRef idx="1">
-            <a:schemeClr val="accent1"/>
-          </a:lnRef>
-          <a:fillRef idx="3">
-            <a:schemeClr val="accent1"/>
-          </a:fillRef>
-          <a:effectRef idx="2">
-            <a:schemeClr val="accent1"/>
-          </a:effectRef>
-          <a:fontRef idx="minor">
-            <a:schemeClr val="lt1"/>
-          </a:fontRef>
-        </p:style>
-        <p:txBody>
-          <a:bodyPr rtlCol="0" anchor="ctr"/>
-          <a:lstStyle/>
-          <a:p>
-            <a:pPr algn="ctr"/>
-          </a:p>
-        </p:txBody>
-      </p:sp>
-      <p:sp>
-        <p:nvSpPr>
-          <p:cNvPr id="20" name="TextBox 19"/>
-          <p:cNvSpPr txBox="1"/>
-          <p:nvPr/>
-        </p:nvSpPr>
-        <p:spPr>
-          <a:xfrm>
-            <a:off x="594360" y="4680813"/>
-            <a:ext cx="438912" cy="438912"/>
-          </a:xfrm>
-          <a:prstGeom prst="rect">
-            <a:avLst/>
-          </a:prstGeom>
-          <a:noFill/>
-        </p:spPr>
-        <p:txBody>
-          <a:bodyPr wrap="square" anchor="ctr"/>
-          <a:lstStyle/>
-          <a:p>
-            <a:pPr algn="ctr"/>
-            <a:r>
-              <a:rPr sz="1600" b="1" i="0">
-                <a:solidFill>
-                  <a:srgbClr val="FFFFFF"/>
-                </a:solidFill>
-                <a:latin typeface="Calibri"/>
-              </a:rPr>
-              <a:t>4</a:t>
-            </a:r>
-          </a:p>
-        </p:txBody>
-      </p:sp>
-      <p:sp>
-        <p:nvSpPr>
-          <p:cNvPr id="21" name="TextBox 20"/>
-          <p:cNvSpPr txBox="1"/>
-          <p:nvPr/>
-        </p:nvSpPr>
-        <p:spPr>
-          <a:xfrm>
-            <a:off x="1188720" y="4537252"/>
-            <a:ext cx="10271455" cy="744321"/>
-          </a:xfrm>
-          <a:prstGeom prst="rect">
-            <a:avLst/>
-          </a:prstGeom>
-          <a:noFill/>
-        </p:spPr>
-        <p:txBody>
-          <a:bodyPr wrap="square" anchor="ctr"/>
-          <a:lstStyle/>
-          <a:p>
-            <a:r>
-              <a:rPr sz="1500" b="1" i="0">
-                <a:solidFill>
-                  <a:srgbClr val="095292"/>
-                </a:solidFill>
-                <a:latin typeface="Calibri"/>
-              </a:rPr>
-              <a:t>40 s · El plan de hitos</a:t>
-            </a:r>
-          </a:p>
-          <a:p>
-            <a:pPr>
-              <a:spcBef>
-                <a:spcPts val="200"/>
-              </a:spcBef>
-            </a:pPr>
-            <a:r>
-              <a:rPr sz="1300" b="0" i="0">
-                <a:solidFill>
-                  <a:srgbClr val="333333"/>
-                </a:solidFill>
-                <a:latin typeface="Calibri"/>
-              </a:rPr>
-              <a:t>Qué queda listo en la Clase 10 y en la 12.</a:t>
-            </a:r>
-          </a:p>
-        </p:txBody>
-      </p:sp>
-      <p:sp>
-        <p:nvSpPr>
-          <p:cNvPr id="22" name="Rounded Rectangle 21"/>
-          <p:cNvSpPr/>
-          <p:nvPr/>
-        </p:nvSpPr>
-        <p:spPr>
-          <a:xfrm>
-            <a:off x="457200" y="5446166"/>
-            <a:ext cx="11277295" cy="908913"/>
-          </a:xfrm>
-          <a:prstGeom prst="roundRect">
-            <a:avLst>
-              <a:gd name="adj" fmla="val 12000"/>
-            </a:avLst>
-          </a:prstGeom>
-          <a:solidFill>
-            <a:srgbClr val="F2F2F2"/>
-          </a:solidFill>
-          <a:ln>
-            <a:noFill/>
-          </a:ln>
-        </p:spPr>
-        <p:style>
-          <a:lnRef idx="1">
-            <a:schemeClr val="accent1"/>
-          </a:lnRef>
-          <a:fillRef idx="3">
-            <a:schemeClr val="accent1"/>
-          </a:fillRef>
-          <a:effectRef idx="2">
-            <a:schemeClr val="accent1"/>
-          </a:effectRef>
-          <a:fontRef idx="minor">
-            <a:schemeClr val="lt1"/>
-          </a:fontRef>
-        </p:style>
-        <p:txBody>
-          <a:bodyPr rtlCol="0" anchor="ctr"/>
-          <a:lstStyle/>
-          <a:p>
-            <a:pPr algn="ctr"/>
-          </a:p>
-        </p:txBody>
-      </p:sp>
-      <p:sp>
-        <p:nvSpPr>
-          <p:cNvPr id="23" name="Rounded Rectangle 22"/>
-          <p:cNvSpPr/>
-          <p:nvPr/>
-        </p:nvSpPr>
-        <p:spPr>
-          <a:xfrm>
-            <a:off x="594360" y="5681167"/>
-            <a:ext cx="438912" cy="438912"/>
-          </a:xfrm>
-          <a:prstGeom prst="roundRect">
-            <a:avLst>
-              <a:gd name="adj" fmla="val 12000"/>
-            </a:avLst>
-          </a:prstGeom>
-          <a:solidFill>
-            <a:srgbClr val="095292"/>
-          </a:solidFill>
-          <a:ln>
-            <a:noFill/>
-          </a:ln>
-        </p:spPr>
-        <p:style>
-          <a:lnRef idx="1">
-            <a:schemeClr val="accent1"/>
-          </a:lnRef>
-          <a:fillRef idx="3">
-            <a:schemeClr val="accent1"/>
-          </a:fillRef>
-          <a:effectRef idx="2">
-            <a:schemeClr val="accent1"/>
-          </a:effectRef>
-          <a:fontRef idx="minor">
-            <a:schemeClr val="lt1"/>
-          </a:fontRef>
-        </p:style>
-        <p:txBody>
-          <a:bodyPr rtlCol="0" anchor="ctr"/>
-          <a:lstStyle/>
-          <a:p>
-            <a:pPr algn="ctr"/>
-          </a:p>
-        </p:txBody>
-      </p:sp>
-      <p:sp>
-        <p:nvSpPr>
-          <p:cNvPr id="24" name="TextBox 23"/>
-          <p:cNvSpPr txBox="1"/>
-          <p:nvPr/>
-        </p:nvSpPr>
-        <p:spPr>
-          <a:xfrm>
-            <a:off x="594360" y="5681167"/>
-            <a:ext cx="438912" cy="438912"/>
-          </a:xfrm>
-          <a:prstGeom prst="rect">
-            <a:avLst/>
-          </a:prstGeom>
-          <a:noFill/>
-        </p:spPr>
-        <p:txBody>
-          <a:bodyPr wrap="square" anchor="ctr"/>
-          <a:lstStyle/>
-          <a:p>
-            <a:pPr algn="ctr"/>
-            <a:r>
-              <a:rPr sz="1600" b="1" i="0">
-                <a:solidFill>
-                  <a:srgbClr val="FFFFFF"/>
-                </a:solidFill>
-                <a:latin typeface="Calibri"/>
-              </a:rPr>
-              <a:t>5</a:t>
-            </a:r>
-          </a:p>
-        </p:txBody>
-      </p:sp>
-      <p:sp>
-        <p:nvSpPr>
-          <p:cNvPr id="25" name="TextBox 24"/>
-          <p:cNvSpPr txBox="1"/>
-          <p:nvPr/>
-        </p:nvSpPr>
-        <p:spPr>
-          <a:xfrm>
-            <a:off x="1188720" y="5537606"/>
-            <a:ext cx="10271455" cy="744321"/>
-          </a:xfrm>
-          <a:prstGeom prst="rect">
-            <a:avLst/>
-          </a:prstGeom>
-          <a:noFill/>
-        </p:spPr>
-        <p:txBody>
-          <a:bodyPr wrap="square" anchor="ctr"/>
-          <a:lstStyle/>
-          <a:p>
-            <a:r>
-              <a:rPr sz="1500" b="1" i="0">
-                <a:solidFill>
-                  <a:srgbClr val="095292"/>
-                </a:solidFill>
-                <a:latin typeface="Calibri"/>
-              </a:rPr>
-              <a:t>10 s · La decisión costosa</a:t>
-            </a:r>
-          </a:p>
-          <a:p>
-            <a:pPr>
-              <a:spcBef>
-                <a:spcPts val="200"/>
-              </a:spcBef>
-            </a:pPr>
-            <a:r>
-              <a:rPr sz="1300" b="0" i="0">
-                <a:solidFill>
-                  <a:srgbClr val="333333"/>
-                </a:solidFill>
-                <a:latin typeface="Calibri"/>
-              </a:rPr>
-              <a:t>Qué sería carísimo cambiar después.</a:t>
-            </a:r>
-          </a:p>
-        </p:txBody>
-      </p:sp>
-      <p:sp>
-        <p:nvSpPr>
-          <p:cNvPr id="26" name="TextBox 25"/>
           <p:cNvSpPr txBox="1"/>
           <p:nvPr/>
         </p:nvSpPr>
@@ -9701,7 +8444,7 @@
         <p:spPr>
           <a:xfrm>
             <a:off x="0" y="0"/>
-            <a:ext cx="12191695" cy="960120"/>
+            <a:ext cx="12191695" cy="1170432"/>
           </a:xfrm>
           <a:prstGeom prst="rect">
             <a:avLst/>
@@ -9743,7 +8486,7 @@
         </p:nvSpPr>
         <p:spPr>
           <a:xfrm>
-            <a:off x="0" y="960120"/>
+            <a:off x="0" y="1170432"/>
             <a:ext cx="12191695" cy="41148"/>
           </a:xfrm>
           <a:prstGeom prst="rect">
@@ -9787,7 +8530,7 @@
         <p:spPr>
           <a:xfrm>
             <a:off x="457200" y="164592"/>
-            <a:ext cx="11277295" cy="502920"/>
+            <a:ext cx="11277295" cy="384048"/>
           </a:xfrm>
           <a:prstGeom prst="rect">
             <a:avLst/>
@@ -9807,7 +8550,7 @@
                 </a:solidFill>
                 <a:latin typeface="Calibri"/>
               </a:rPr>
-              <a:t>Para la Clase 8</a:t>
+              <a:t>Taller de hoy: Ciclo de vida del proyecto</a:t>
             </a:r>
           </a:p>
         </p:txBody>
@@ -9820,8 +8563,8 @@
         </p:nvSpPr>
         <p:spPr>
           <a:xfrm>
-            <a:off x="457200" y="1170432"/>
-            <a:ext cx="11277295" cy="5230368"/>
+            <a:off x="457200" y="566928"/>
+            <a:ext cx="11277295" cy="411480"/>
           </a:xfrm>
           <a:prstGeom prst="rect">
             <a:avLst/>
@@ -9834,234 +8577,963 @@
           </a:bodyPr>
           <a:lstStyle/>
           <a:p>
-            <a:pPr>
-              <a:spcAft>
-                <a:spcPts val="800"/>
-              </a:spcAft>
-            </a:pPr>
-            <a:r>
-              <a:rPr sz="2000" b="0" i="0">
-                <a:solidFill>
-                  <a:srgbClr val="333333"/>
-                </a:solidFill>
-                <a:latin typeface="Calibri"/>
-              </a:rPr>
-              <a:t>–   </a:t>
-            </a:r>
-            <a:r>
-              <a:rPr sz="2000" b="1" i="0">
-                <a:solidFill>
-                  <a:srgbClr val="333333"/>
-                </a:solidFill>
-                <a:latin typeface="Calibri"/>
-              </a:rPr>
-              <a:t>Trabajo dirigido:</a:t>
-            </a:r>
-            <a:r>
-              <a:rPr sz="2000" b="0" i="0">
-                <a:solidFill>
-                  <a:srgbClr val="333333"/>
-                </a:solidFill>
-                <a:latin typeface="Calibri"/>
-              </a:rPr>
-              <a:t> Estudio de fases del ciclo de vida — leer el material de las seis fases y traer </a:t>
-            </a:r>
-            <a:r>
-              <a:rPr sz="2000" b="1" i="0">
-                <a:solidFill>
-                  <a:srgbClr val="333333"/>
-                </a:solidFill>
-                <a:latin typeface="Calibri"/>
-              </a:rPr>
-              <a:t>un ejemplo propio</a:t>
-            </a:r>
-            <a:r>
-              <a:rPr sz="2000" b="0" i="0">
-                <a:solidFill>
-                  <a:srgbClr val="333333"/>
-                </a:solidFill>
-                <a:latin typeface="Calibri"/>
-              </a:rPr>
-              <a:t> de un proyecto conocido que se saltó una fase.</a:t>
-            </a:r>
-          </a:p>
-          <a:p>
-            <a:pPr>
-              <a:spcAft>
-                <a:spcPts val="800"/>
-              </a:spcAft>
-            </a:pPr>
-            <a:r>
-              <a:rPr sz="2000" b="0" i="0">
-                <a:solidFill>
-                  <a:srgbClr val="333333"/>
-                </a:solidFill>
-                <a:latin typeface="Calibri"/>
-              </a:rPr>
-              <a:t>–   </a:t>
-            </a:r>
-            <a:r>
-              <a:rPr sz="2000" b="1" i="0">
-                <a:solidFill>
-                  <a:srgbClr val="333333"/>
-                </a:solidFill>
-                <a:latin typeface="Calibri"/>
-              </a:rPr>
-              <a:t>Trabajo independiente:</a:t>
-            </a:r>
-            <a:r>
-              <a:rPr sz="2000" b="0" i="0">
-                <a:solidFill>
-                  <a:srgbClr val="333333"/>
-                </a:solidFill>
-                <a:latin typeface="Calibri"/>
-              </a:rPr>
-              <a:t> Infografía explicativa del ciclo de vida </a:t>
-            </a:r>
-            <a:r>
-              <a:rPr sz="2000" b="1" i="0">
-                <a:solidFill>
-                  <a:srgbClr val="333333"/>
-                </a:solidFill>
-                <a:latin typeface="Calibri"/>
-              </a:rPr>
-              <a:t>de su propio proyecto</a:t>
-            </a:r>
-            <a:r>
-              <a:rPr sz="2000" b="0" i="0">
-                <a:solidFill>
-                  <a:srgbClr val="333333"/>
-                </a:solidFill>
-                <a:latin typeface="Calibri"/>
-              </a:rPr>
-              <a:t>, en Canva o draw.io: las seis fases, en cuál están y qué entregan en cada una.</a:t>
-            </a:r>
-          </a:p>
-          <a:p>
-            <a:pPr>
-              <a:spcAft>
-                <a:spcPts val="800"/>
-              </a:spcAft>
-            </a:pPr>
-            <a:r>
-              <a:rPr sz="2000" b="0" i="0">
-                <a:solidFill>
-                  <a:srgbClr val="333333"/>
-                </a:solidFill>
-                <a:latin typeface="Calibri"/>
-              </a:rPr>
-              <a:t>–   </a:t>
-            </a:r>
-            <a:r>
-              <a:rPr sz="2000" b="1" i="0">
-                <a:solidFill>
-                  <a:srgbClr val="333333"/>
-                </a:solidFill>
-                <a:latin typeface="Calibri"/>
-              </a:rPr>
-              <a:t>Clase 8 · Taller de aplicación del ciclo de vida</a:t>
-            </a:r>
-            <a:r>
-              <a:rPr sz="2000" b="0" i="0">
-                <a:solidFill>
-                  <a:srgbClr val="333333"/>
-                </a:solidFill>
-                <a:latin typeface="Calibri"/>
-              </a:rPr>
-              <a:t> — casos reales de proyectos que se saltaron una fase, y la decisión entre sus dos alternativas de solución con una matriz de criterios.</a:t>
-            </a:r>
-          </a:p>
-          <a:p>
-            <a:pPr>
-              <a:spcAft>
-                <a:spcPts val="800"/>
-              </a:spcAft>
-            </a:pPr>
-            <a:r>
-              <a:rPr sz="2000" b="0" i="0">
-                <a:solidFill>
-                  <a:srgbClr val="333333"/>
-                </a:solidFill>
-                <a:latin typeface="Calibri"/>
-              </a:rPr>
-              <a:t>–   </a:t>
-            </a:r>
-            <a:r>
-              <a:rPr sz="2000" b="1" i="0">
-                <a:solidFill>
-                  <a:srgbClr val="333333"/>
-                </a:solidFill>
-                <a:latin typeface="Calibri"/>
-              </a:rPr>
-              <a:t>Aviso:</a:t>
-            </a:r>
-            <a:r>
-              <a:rPr sz="2000" b="0" i="0">
-                <a:solidFill>
-                  <a:srgbClr val="333333"/>
-                </a:solidFill>
-                <a:latin typeface="Calibri"/>
-              </a:rPr>
-              <a:t> Traigan la tabla de requisitos con los criterios de aceptación </a:t>
-            </a:r>
-            <a:r>
-              <a:rPr sz="2000" b="1" i="0">
-                <a:solidFill>
-                  <a:srgbClr val="333333"/>
-                </a:solidFill>
-                <a:latin typeface="Calibri"/>
-              </a:rPr>
-              <a:t>confirmados con la persona que vive el problema</a:t>
-            </a:r>
-            <a:r>
-              <a:rPr sz="2000" b="0" i="0">
-                <a:solidFill>
-                  <a:srgbClr val="333333"/>
-                </a:solidFill>
-                <a:latin typeface="Calibri"/>
-              </a:rPr>
-              <a:t>, y las dos alternativas de solución del trabajo independiente de la sesión 6. En la sesión 8 se decide una.</a:t>
-            </a:r>
-          </a:p>
-          <a:p>
-            <a:pPr>
-              <a:spcAft>
-                <a:spcPts val="800"/>
-              </a:spcAft>
-            </a:pPr>
-            <a:r>
-              <a:rPr sz="2000" b="0" i="0">
-                <a:solidFill>
-                  <a:srgbClr val="333333"/>
-                </a:solidFill>
-                <a:latin typeface="Calibri"/>
-              </a:rPr>
-              <a:t>–   </a:t>
-            </a:r>
-            <a:r>
-              <a:rPr sz="2000" b="1" i="0">
-                <a:solidFill>
-                  <a:srgbClr val="333333"/>
-                </a:solidFill>
-                <a:latin typeface="Calibri"/>
-              </a:rPr>
-              <a:t>Antes de salir:</a:t>
-            </a:r>
-            <a:r>
-              <a:rPr sz="2000" b="0" i="0">
-                <a:solidFill>
-                  <a:srgbClr val="333333"/>
-                </a:solidFill>
-                <a:latin typeface="Calibri"/>
-              </a:rPr>
-              <a:t> el enlace del documento del equipo en el chat, con permiso de lectura para el docente, y el nombre del vocero de hoy.</a:t>
-            </a:r>
-          </a:p>
-        </p:txBody>
-      </p:sp>
-      <p:sp>
-        <p:nvSpPr>
-          <p:cNvPr id="6" name="TextBox 5"/>
+            <a:r>
+              <a:rPr sz="1400" b="0" i="0">
+                <a:solidFill>
+                  <a:srgbClr val="B8D8EE"/>
+                </a:solidFill>
+                <a:latin typeface="Calibri"/>
+              </a:rPr>
+              <a:t>17 min en equipos · cada equipo, su propio proyecto · mapa del ciclo de vida + tabla de requisitos + plan de hitos</a:t>
+            </a:r>
+          </a:p>
+        </p:txBody>
+      </p:sp>
+      <p:sp>
+        <p:nvSpPr>
+          <p:cNvPr id="6" name="Rounded Rectangle 5"/>
+          <p:cNvSpPr/>
+          <p:nvPr/>
+        </p:nvSpPr>
+        <p:spPr>
+          <a:xfrm>
+            <a:off x="457200" y="1472184"/>
+            <a:ext cx="11277295" cy="566928"/>
+          </a:xfrm>
+          <a:prstGeom prst="roundRect">
+            <a:avLst>
+              <a:gd name="adj" fmla="val 12000"/>
+            </a:avLst>
+          </a:prstGeom>
+          <a:solidFill>
+            <a:srgbClr val="F2F2F2"/>
+          </a:solidFill>
+          <a:ln>
+            <a:noFill/>
+          </a:ln>
+        </p:spPr>
+        <p:style>
+          <a:lnRef idx="1">
+            <a:schemeClr val="accent1"/>
+          </a:lnRef>
+          <a:fillRef idx="3">
+            <a:schemeClr val="accent1"/>
+          </a:fillRef>
+          <a:effectRef idx="2">
+            <a:schemeClr val="accent1"/>
+          </a:effectRef>
+          <a:fontRef idx="minor">
+            <a:schemeClr val="lt1"/>
+          </a:fontRef>
+        </p:style>
+        <p:txBody>
+          <a:bodyPr rtlCol="0" anchor="ctr"/>
+          <a:lstStyle/>
+          <a:p>
+            <a:pPr algn="ctr"/>
+          </a:p>
+        </p:txBody>
+      </p:sp>
+      <p:sp>
+        <p:nvSpPr>
+          <p:cNvPr id="7" name="Rectangle 6"/>
+          <p:cNvSpPr/>
+          <p:nvPr/>
+        </p:nvSpPr>
+        <p:spPr>
+          <a:xfrm>
+            <a:off x="640080" y="1618487"/>
+            <a:ext cx="274320" cy="274320"/>
+          </a:xfrm>
+          <a:prstGeom prst="rect">
+            <a:avLst/>
+          </a:prstGeom>
+          <a:solidFill>
+            <a:srgbClr val="FFFFFF"/>
+          </a:solidFill>
+          <a:ln>
+            <a:solidFill>
+              <a:srgbClr val="333333"/>
+            </a:solidFill>
+          </a:ln>
+        </p:spPr>
+        <p:style>
+          <a:lnRef idx="1">
+            <a:schemeClr val="accent1"/>
+          </a:lnRef>
+          <a:fillRef idx="3">
+            <a:schemeClr val="accent1"/>
+          </a:fillRef>
+          <a:effectRef idx="2">
+            <a:schemeClr val="accent1"/>
+          </a:effectRef>
+          <a:fontRef idx="minor">
+            <a:schemeClr val="lt1"/>
+          </a:fontRef>
+        </p:style>
+        <p:txBody>
+          <a:bodyPr rtlCol="0" anchor="ctr"/>
+          <a:lstStyle/>
+          <a:p>
+            <a:pPr algn="ctr"/>
+          </a:p>
+        </p:txBody>
+      </p:sp>
+      <p:sp>
+        <p:nvSpPr>
+          <p:cNvPr id="8" name="Rectangle 7"/>
+          <p:cNvSpPr/>
+          <p:nvPr/>
+        </p:nvSpPr>
+        <p:spPr>
+          <a:xfrm>
+            <a:off x="640080" y="1618487"/>
+            <a:ext cx="73152" cy="274320"/>
+          </a:xfrm>
+          <a:prstGeom prst="rect">
+            <a:avLst/>
+          </a:prstGeom>
+          <a:solidFill>
+            <a:srgbClr val="269CCB"/>
+          </a:solidFill>
+          <a:ln>
+            <a:noFill/>
+          </a:ln>
+        </p:spPr>
+        <p:style>
+          <a:lnRef idx="1">
+            <a:schemeClr val="accent1"/>
+          </a:lnRef>
+          <a:fillRef idx="3">
+            <a:schemeClr val="accent1"/>
+          </a:fillRef>
+          <a:effectRef idx="2">
+            <a:schemeClr val="accent1"/>
+          </a:effectRef>
+          <a:fontRef idx="minor">
+            <a:schemeClr val="lt1"/>
+          </a:fontRef>
+        </p:style>
+        <p:txBody>
+          <a:bodyPr rtlCol="0" anchor="ctr"/>
+          <a:lstStyle/>
+          <a:p>
+            <a:pPr algn="ctr"/>
+          </a:p>
+        </p:txBody>
+      </p:sp>
+      <p:sp>
+        <p:nvSpPr>
+          <p:cNvPr id="9" name="TextBox 8"/>
+          <p:cNvSpPr txBox="1"/>
+          <p:nvPr/>
+        </p:nvSpPr>
+        <p:spPr>
+          <a:xfrm>
+            <a:off x="1097280" y="1563624"/>
+            <a:ext cx="10362895" cy="402336"/>
+          </a:xfrm>
+          <a:prstGeom prst="rect">
+            <a:avLst/>
+          </a:prstGeom>
+          <a:noFill/>
+        </p:spPr>
+        <p:txBody>
+          <a:bodyPr wrap="square" anchor="ctr"/>
+          <a:lstStyle/>
+          <a:p>
+            <a:r>
+              <a:rPr sz="1500" b="1" i="0">
+                <a:solidFill>
+                  <a:srgbClr val="333333"/>
+                </a:solidFill>
+                <a:latin typeface="Calibri"/>
+              </a:rPr>
+              <a:t>EN QUÉ FASE ESTAMOS</a:t>
+            </a:r>
+            <a:r>
+              <a:rPr sz="1500" b="0" i="0">
+                <a:solidFill>
+                  <a:srgbClr val="333333"/>
+                </a:solidFill>
+                <a:latin typeface="Calibri"/>
+              </a:rPr>
+              <a:t> — La fase donde está el proyecto hoy, y </a:t>
+            </a:r>
+            <a:r>
+              <a:rPr sz="1500" b="1" i="0">
+                <a:solidFill>
+                  <a:srgbClr val="333333"/>
+                </a:solidFill>
+                <a:latin typeface="Calibri"/>
+              </a:rPr>
+              <a:t>qué falta exactamente para cerrarla</a:t>
+            </a:r>
+            <a:r>
+              <a:rPr sz="1500" b="0" i="0">
+                <a:solidFill>
+                  <a:srgbClr val="333333"/>
+                </a:solidFill>
+                <a:latin typeface="Calibri"/>
+              </a:rPr>
+              <a:t>. Una fase se cierra con un entregable, no con una sensación.</a:t>
+            </a:r>
+          </a:p>
+        </p:txBody>
+      </p:sp>
+      <p:sp>
+        <p:nvSpPr>
+          <p:cNvPr id="10" name="Rounded Rectangle 9"/>
+          <p:cNvSpPr/>
+          <p:nvPr/>
+        </p:nvSpPr>
+        <p:spPr>
+          <a:xfrm>
+            <a:off x="457200" y="2148839"/>
+            <a:ext cx="11277295" cy="566928"/>
+          </a:xfrm>
+          <a:prstGeom prst="roundRect">
+            <a:avLst>
+              <a:gd name="adj" fmla="val 12000"/>
+            </a:avLst>
+          </a:prstGeom>
+          <a:solidFill>
+            <a:srgbClr val="F2F2F2"/>
+          </a:solidFill>
+          <a:ln>
+            <a:noFill/>
+          </a:ln>
+        </p:spPr>
+        <p:style>
+          <a:lnRef idx="1">
+            <a:schemeClr val="accent1"/>
+          </a:lnRef>
+          <a:fillRef idx="3">
+            <a:schemeClr val="accent1"/>
+          </a:fillRef>
+          <a:effectRef idx="2">
+            <a:schemeClr val="accent1"/>
+          </a:effectRef>
+          <a:fontRef idx="minor">
+            <a:schemeClr val="lt1"/>
+          </a:fontRef>
+        </p:style>
+        <p:txBody>
+          <a:bodyPr rtlCol="0" anchor="ctr"/>
+          <a:lstStyle/>
+          <a:p>
+            <a:pPr algn="ctr"/>
+          </a:p>
+        </p:txBody>
+      </p:sp>
+      <p:sp>
+        <p:nvSpPr>
+          <p:cNvPr id="11" name="Rectangle 10"/>
+          <p:cNvSpPr/>
+          <p:nvPr/>
+        </p:nvSpPr>
+        <p:spPr>
+          <a:xfrm>
+            <a:off x="640080" y="2295144"/>
+            <a:ext cx="274320" cy="274320"/>
+          </a:xfrm>
+          <a:prstGeom prst="rect">
+            <a:avLst/>
+          </a:prstGeom>
+          <a:solidFill>
+            <a:srgbClr val="FFFFFF"/>
+          </a:solidFill>
+          <a:ln>
+            <a:solidFill>
+              <a:srgbClr val="333333"/>
+            </a:solidFill>
+          </a:ln>
+        </p:spPr>
+        <p:style>
+          <a:lnRef idx="1">
+            <a:schemeClr val="accent1"/>
+          </a:lnRef>
+          <a:fillRef idx="3">
+            <a:schemeClr val="accent1"/>
+          </a:fillRef>
+          <a:effectRef idx="2">
+            <a:schemeClr val="accent1"/>
+          </a:effectRef>
+          <a:fontRef idx="minor">
+            <a:schemeClr val="lt1"/>
+          </a:fontRef>
+        </p:style>
+        <p:txBody>
+          <a:bodyPr rtlCol="0" anchor="ctr"/>
+          <a:lstStyle/>
+          <a:p>
+            <a:pPr algn="ctr"/>
+          </a:p>
+        </p:txBody>
+      </p:sp>
+      <p:sp>
+        <p:nvSpPr>
+          <p:cNvPr id="12" name="Rectangle 11"/>
+          <p:cNvSpPr/>
+          <p:nvPr/>
+        </p:nvSpPr>
+        <p:spPr>
+          <a:xfrm>
+            <a:off x="640080" y="2295144"/>
+            <a:ext cx="73152" cy="274320"/>
+          </a:xfrm>
+          <a:prstGeom prst="rect">
+            <a:avLst/>
+          </a:prstGeom>
+          <a:solidFill>
+            <a:srgbClr val="269CCB"/>
+          </a:solidFill>
+          <a:ln>
+            <a:noFill/>
+          </a:ln>
+        </p:spPr>
+        <p:style>
+          <a:lnRef idx="1">
+            <a:schemeClr val="accent1"/>
+          </a:lnRef>
+          <a:fillRef idx="3">
+            <a:schemeClr val="accent1"/>
+          </a:fillRef>
+          <a:effectRef idx="2">
+            <a:schemeClr val="accent1"/>
+          </a:effectRef>
+          <a:fontRef idx="minor">
+            <a:schemeClr val="lt1"/>
+          </a:fontRef>
+        </p:style>
+        <p:txBody>
+          <a:bodyPr rtlCol="0" anchor="ctr"/>
+          <a:lstStyle/>
+          <a:p>
+            <a:pPr algn="ctr"/>
+          </a:p>
+        </p:txBody>
+      </p:sp>
+      <p:sp>
+        <p:nvSpPr>
+          <p:cNvPr id="13" name="TextBox 12"/>
+          <p:cNvSpPr txBox="1"/>
+          <p:nvPr/>
+        </p:nvSpPr>
+        <p:spPr>
+          <a:xfrm>
+            <a:off x="1097280" y="2240279"/>
+            <a:ext cx="10362895" cy="402336"/>
+          </a:xfrm>
+          <a:prstGeom prst="rect">
+            <a:avLst/>
+          </a:prstGeom>
+          <a:noFill/>
+        </p:spPr>
+        <p:txBody>
+          <a:bodyPr wrap="square" anchor="ctr"/>
+          <a:lstStyle/>
+          <a:p>
+            <a:r>
+              <a:rPr sz="1500" b="1" i="0">
+                <a:solidFill>
+                  <a:srgbClr val="333333"/>
+                </a:solidFill>
+                <a:latin typeface="Calibri"/>
+              </a:rPr>
+              <a:t>TRES REQUISITOS FUNCIONALES</a:t>
+            </a:r>
+            <a:r>
+              <a:rPr sz="1500" b="0" i="0">
+                <a:solidFill>
+                  <a:srgbClr val="333333"/>
+                </a:solidFill>
+                <a:latin typeface="Calibri"/>
+              </a:rPr>
+              <a:t> — Tres cosas que la solución </a:t>
+            </a:r>
+            <a:r>
+              <a:rPr sz="1500" b="1" i="0">
+                <a:solidFill>
+                  <a:srgbClr val="333333"/>
+                </a:solidFill>
+                <a:latin typeface="Calibri"/>
+              </a:rPr>
+              <a:t>hace</a:t>
+            </a:r>
+            <a:r>
+              <a:rPr sz="1500" b="0" i="0">
+                <a:solidFill>
+                  <a:srgbClr val="333333"/>
+                </a:solidFill>
+                <a:latin typeface="Calibri"/>
+              </a:rPr>
+              <a:t>, escritas desde el usuario: «el usuario puede…». Sin mencionar tecnología.</a:t>
+            </a:r>
+          </a:p>
+        </p:txBody>
+      </p:sp>
+      <p:sp>
+        <p:nvSpPr>
+          <p:cNvPr id="14" name="Rounded Rectangle 13"/>
+          <p:cNvSpPr/>
+          <p:nvPr/>
+        </p:nvSpPr>
+        <p:spPr>
+          <a:xfrm>
+            <a:off x="457200" y="2825496"/>
+            <a:ext cx="11277295" cy="566928"/>
+          </a:xfrm>
+          <a:prstGeom prst="roundRect">
+            <a:avLst>
+              <a:gd name="adj" fmla="val 12000"/>
+            </a:avLst>
+          </a:prstGeom>
+          <a:solidFill>
+            <a:srgbClr val="F2F2F2"/>
+          </a:solidFill>
+          <a:ln>
+            <a:noFill/>
+          </a:ln>
+        </p:spPr>
+        <p:style>
+          <a:lnRef idx="1">
+            <a:schemeClr val="accent1"/>
+          </a:lnRef>
+          <a:fillRef idx="3">
+            <a:schemeClr val="accent1"/>
+          </a:fillRef>
+          <a:effectRef idx="2">
+            <a:schemeClr val="accent1"/>
+          </a:effectRef>
+          <a:fontRef idx="minor">
+            <a:schemeClr val="lt1"/>
+          </a:fontRef>
+        </p:style>
+        <p:txBody>
+          <a:bodyPr rtlCol="0" anchor="ctr"/>
+          <a:lstStyle/>
+          <a:p>
+            <a:pPr algn="ctr"/>
+          </a:p>
+        </p:txBody>
+      </p:sp>
+      <p:sp>
+        <p:nvSpPr>
+          <p:cNvPr id="15" name="Rectangle 14"/>
+          <p:cNvSpPr/>
+          <p:nvPr/>
+        </p:nvSpPr>
+        <p:spPr>
+          <a:xfrm>
+            <a:off x="640080" y="2971800"/>
+            <a:ext cx="274320" cy="274320"/>
+          </a:xfrm>
+          <a:prstGeom prst="rect">
+            <a:avLst/>
+          </a:prstGeom>
+          <a:solidFill>
+            <a:srgbClr val="FFFFFF"/>
+          </a:solidFill>
+          <a:ln>
+            <a:solidFill>
+              <a:srgbClr val="333333"/>
+            </a:solidFill>
+          </a:ln>
+        </p:spPr>
+        <p:style>
+          <a:lnRef idx="1">
+            <a:schemeClr val="accent1"/>
+          </a:lnRef>
+          <a:fillRef idx="3">
+            <a:schemeClr val="accent1"/>
+          </a:fillRef>
+          <a:effectRef idx="2">
+            <a:schemeClr val="accent1"/>
+          </a:effectRef>
+          <a:fontRef idx="minor">
+            <a:schemeClr val="lt1"/>
+          </a:fontRef>
+        </p:style>
+        <p:txBody>
+          <a:bodyPr rtlCol="0" anchor="ctr"/>
+          <a:lstStyle/>
+          <a:p>
+            <a:pPr algn="ctr"/>
+          </a:p>
+        </p:txBody>
+      </p:sp>
+      <p:sp>
+        <p:nvSpPr>
+          <p:cNvPr id="16" name="Rectangle 15"/>
+          <p:cNvSpPr/>
+          <p:nvPr/>
+        </p:nvSpPr>
+        <p:spPr>
+          <a:xfrm>
+            <a:off x="640080" y="2971800"/>
+            <a:ext cx="73152" cy="274320"/>
+          </a:xfrm>
+          <a:prstGeom prst="rect">
+            <a:avLst/>
+          </a:prstGeom>
+          <a:solidFill>
+            <a:srgbClr val="269CCB"/>
+          </a:solidFill>
+          <a:ln>
+            <a:noFill/>
+          </a:ln>
+        </p:spPr>
+        <p:style>
+          <a:lnRef idx="1">
+            <a:schemeClr val="accent1"/>
+          </a:lnRef>
+          <a:fillRef idx="3">
+            <a:schemeClr val="accent1"/>
+          </a:fillRef>
+          <a:effectRef idx="2">
+            <a:schemeClr val="accent1"/>
+          </a:effectRef>
+          <a:fontRef idx="minor">
+            <a:schemeClr val="lt1"/>
+          </a:fontRef>
+        </p:style>
+        <p:txBody>
+          <a:bodyPr rtlCol="0" anchor="ctr"/>
+          <a:lstStyle/>
+          <a:p>
+            <a:pPr algn="ctr"/>
+          </a:p>
+        </p:txBody>
+      </p:sp>
+      <p:sp>
+        <p:nvSpPr>
+          <p:cNvPr id="17" name="TextBox 16"/>
+          <p:cNvSpPr txBox="1"/>
+          <p:nvPr/>
+        </p:nvSpPr>
+        <p:spPr>
+          <a:xfrm>
+            <a:off x="1097280" y="2916936"/>
+            <a:ext cx="10362895" cy="402336"/>
+          </a:xfrm>
+          <a:prstGeom prst="rect">
+            <a:avLst/>
+          </a:prstGeom>
+          <a:noFill/>
+        </p:spPr>
+        <p:txBody>
+          <a:bodyPr wrap="square" anchor="ctr"/>
+          <a:lstStyle/>
+          <a:p>
+            <a:r>
+              <a:rPr sz="1500" b="1" i="0">
+                <a:solidFill>
+                  <a:srgbClr val="333333"/>
+                </a:solidFill>
+                <a:latin typeface="Calibri"/>
+              </a:rPr>
+              <a:t>DOS REQUISITOS NO FUNCIONALES</a:t>
+            </a:r>
+            <a:r>
+              <a:rPr sz="1500" b="0" i="0">
+                <a:solidFill>
+                  <a:srgbClr val="333333"/>
+                </a:solidFill>
+                <a:latin typeface="Calibri"/>
+              </a:rPr>
+              <a:t> — Dos condiciones que la solución debe cumplir, </a:t>
+            </a:r>
+            <a:r>
+              <a:rPr sz="1500" b="1" i="0">
+                <a:solidFill>
+                  <a:srgbClr val="333333"/>
+                </a:solidFill>
+                <a:latin typeface="Calibri"/>
+              </a:rPr>
+              <a:t>derivadas de las restricciones del árbol de la sesión 6</a:t>
+            </a:r>
+            <a:r>
+              <a:rPr sz="1500" b="0" i="0">
+                <a:solidFill>
+                  <a:srgbClr val="333333"/>
+                </a:solidFill>
+                <a:latin typeface="Calibri"/>
+              </a:rPr>
+              <a:t>. Uno de los dos tiene que ser el indicador ambiental de la sesión 5.</a:t>
+            </a:r>
+          </a:p>
+        </p:txBody>
+      </p:sp>
+      <p:sp>
+        <p:nvSpPr>
+          <p:cNvPr id="18" name="Rounded Rectangle 17"/>
+          <p:cNvSpPr/>
+          <p:nvPr/>
+        </p:nvSpPr>
+        <p:spPr>
+          <a:xfrm>
+            <a:off x="457200" y="3502152"/>
+            <a:ext cx="11277295" cy="566928"/>
+          </a:xfrm>
+          <a:prstGeom prst="roundRect">
+            <a:avLst>
+              <a:gd name="adj" fmla="val 12000"/>
+            </a:avLst>
+          </a:prstGeom>
+          <a:solidFill>
+            <a:srgbClr val="F2F2F2"/>
+          </a:solidFill>
+          <a:ln>
+            <a:noFill/>
+          </a:ln>
+        </p:spPr>
+        <p:style>
+          <a:lnRef idx="1">
+            <a:schemeClr val="accent1"/>
+          </a:lnRef>
+          <a:fillRef idx="3">
+            <a:schemeClr val="accent1"/>
+          </a:fillRef>
+          <a:effectRef idx="2">
+            <a:schemeClr val="accent1"/>
+          </a:effectRef>
+          <a:fontRef idx="minor">
+            <a:schemeClr val="lt1"/>
+          </a:fontRef>
+        </p:style>
+        <p:txBody>
+          <a:bodyPr rtlCol="0" anchor="ctr"/>
+          <a:lstStyle/>
+          <a:p>
+            <a:pPr algn="ctr"/>
+          </a:p>
+        </p:txBody>
+      </p:sp>
+      <p:sp>
+        <p:nvSpPr>
+          <p:cNvPr id="19" name="Rectangle 18"/>
+          <p:cNvSpPr/>
+          <p:nvPr/>
+        </p:nvSpPr>
+        <p:spPr>
+          <a:xfrm>
+            <a:off x="640080" y="3648456"/>
+            <a:ext cx="274320" cy="274320"/>
+          </a:xfrm>
+          <a:prstGeom prst="rect">
+            <a:avLst/>
+          </a:prstGeom>
+          <a:solidFill>
+            <a:srgbClr val="FFFFFF"/>
+          </a:solidFill>
+          <a:ln>
+            <a:solidFill>
+              <a:srgbClr val="333333"/>
+            </a:solidFill>
+          </a:ln>
+        </p:spPr>
+        <p:style>
+          <a:lnRef idx="1">
+            <a:schemeClr val="accent1"/>
+          </a:lnRef>
+          <a:fillRef idx="3">
+            <a:schemeClr val="accent1"/>
+          </a:fillRef>
+          <a:effectRef idx="2">
+            <a:schemeClr val="accent1"/>
+          </a:effectRef>
+          <a:fontRef idx="minor">
+            <a:schemeClr val="lt1"/>
+          </a:fontRef>
+        </p:style>
+        <p:txBody>
+          <a:bodyPr rtlCol="0" anchor="ctr"/>
+          <a:lstStyle/>
+          <a:p>
+            <a:pPr algn="ctr"/>
+          </a:p>
+        </p:txBody>
+      </p:sp>
+      <p:sp>
+        <p:nvSpPr>
+          <p:cNvPr id="20" name="Rectangle 19"/>
+          <p:cNvSpPr/>
+          <p:nvPr/>
+        </p:nvSpPr>
+        <p:spPr>
+          <a:xfrm>
+            <a:off x="640080" y="3648456"/>
+            <a:ext cx="73152" cy="274320"/>
+          </a:xfrm>
+          <a:prstGeom prst="rect">
+            <a:avLst/>
+          </a:prstGeom>
+          <a:solidFill>
+            <a:srgbClr val="269CCB"/>
+          </a:solidFill>
+          <a:ln>
+            <a:noFill/>
+          </a:ln>
+        </p:spPr>
+        <p:style>
+          <a:lnRef idx="1">
+            <a:schemeClr val="accent1"/>
+          </a:lnRef>
+          <a:fillRef idx="3">
+            <a:schemeClr val="accent1"/>
+          </a:fillRef>
+          <a:effectRef idx="2">
+            <a:schemeClr val="accent1"/>
+          </a:effectRef>
+          <a:fontRef idx="minor">
+            <a:schemeClr val="lt1"/>
+          </a:fontRef>
+        </p:style>
+        <p:txBody>
+          <a:bodyPr rtlCol="0" anchor="ctr"/>
+          <a:lstStyle/>
+          <a:p>
+            <a:pPr algn="ctr"/>
+          </a:p>
+        </p:txBody>
+      </p:sp>
+      <p:sp>
+        <p:nvSpPr>
+          <p:cNvPr id="21" name="TextBox 20"/>
+          <p:cNvSpPr txBox="1"/>
+          <p:nvPr/>
+        </p:nvSpPr>
+        <p:spPr>
+          <a:xfrm>
+            <a:off x="1097280" y="3593592"/>
+            <a:ext cx="10362895" cy="402336"/>
+          </a:xfrm>
+          <a:prstGeom prst="rect">
+            <a:avLst/>
+          </a:prstGeom>
+          <a:noFill/>
+        </p:spPr>
+        <p:txBody>
+          <a:bodyPr wrap="square" anchor="ctr"/>
+          <a:lstStyle/>
+          <a:p>
+            <a:r>
+              <a:rPr sz="1500" b="1" i="0">
+                <a:solidFill>
+                  <a:srgbClr val="333333"/>
+                </a:solidFill>
+                <a:latin typeface="Calibri"/>
+              </a:rPr>
+              <a:t>LOS CRITERIOS DE ACEPTACIÓN</a:t>
+            </a:r>
+            <a:r>
+              <a:rPr sz="1500" b="0" i="0">
+                <a:solidFill>
+                  <a:srgbClr val="333333"/>
+                </a:solidFill>
+                <a:latin typeface="Calibri"/>
+              </a:rPr>
+              <a:t> — Para cada uno de los cinco requisitos: cómo se comprueba, con un caso concreto y un umbral. Tiene que poder ejecutarlo otra persona.</a:t>
+            </a:r>
+          </a:p>
+        </p:txBody>
+      </p:sp>
+      <p:sp>
+        <p:nvSpPr>
+          <p:cNvPr id="22" name="Rounded Rectangle 21"/>
+          <p:cNvSpPr/>
+          <p:nvPr/>
+        </p:nvSpPr>
+        <p:spPr>
+          <a:xfrm>
+            <a:off x="457200" y="4178808"/>
+            <a:ext cx="11277295" cy="566928"/>
+          </a:xfrm>
+          <a:prstGeom prst="roundRect">
+            <a:avLst>
+              <a:gd name="adj" fmla="val 12000"/>
+            </a:avLst>
+          </a:prstGeom>
+          <a:solidFill>
+            <a:srgbClr val="F2F2F2"/>
+          </a:solidFill>
+          <a:ln>
+            <a:noFill/>
+          </a:ln>
+        </p:spPr>
+        <p:style>
+          <a:lnRef idx="1">
+            <a:schemeClr val="accent1"/>
+          </a:lnRef>
+          <a:fillRef idx="3">
+            <a:schemeClr val="accent1"/>
+          </a:fillRef>
+          <a:effectRef idx="2">
+            <a:schemeClr val="accent1"/>
+          </a:effectRef>
+          <a:fontRef idx="minor">
+            <a:schemeClr val="lt1"/>
+          </a:fontRef>
+        </p:style>
+        <p:txBody>
+          <a:bodyPr rtlCol="0" anchor="ctr"/>
+          <a:lstStyle/>
+          <a:p>
+            <a:pPr algn="ctr"/>
+          </a:p>
+        </p:txBody>
+      </p:sp>
+      <p:sp>
+        <p:nvSpPr>
+          <p:cNvPr id="23" name="Rectangle 22"/>
+          <p:cNvSpPr/>
+          <p:nvPr/>
+        </p:nvSpPr>
+        <p:spPr>
+          <a:xfrm>
+            <a:off x="640080" y="4325112"/>
+            <a:ext cx="274320" cy="274320"/>
+          </a:xfrm>
+          <a:prstGeom prst="rect">
+            <a:avLst/>
+          </a:prstGeom>
+          <a:solidFill>
+            <a:srgbClr val="FFFFFF"/>
+          </a:solidFill>
+          <a:ln>
+            <a:solidFill>
+              <a:srgbClr val="333333"/>
+            </a:solidFill>
+          </a:ln>
+        </p:spPr>
+        <p:style>
+          <a:lnRef idx="1">
+            <a:schemeClr val="accent1"/>
+          </a:lnRef>
+          <a:fillRef idx="3">
+            <a:schemeClr val="accent1"/>
+          </a:fillRef>
+          <a:effectRef idx="2">
+            <a:schemeClr val="accent1"/>
+          </a:effectRef>
+          <a:fontRef idx="minor">
+            <a:schemeClr val="lt1"/>
+          </a:fontRef>
+        </p:style>
+        <p:txBody>
+          <a:bodyPr rtlCol="0" anchor="ctr"/>
+          <a:lstStyle/>
+          <a:p>
+            <a:pPr algn="ctr"/>
+          </a:p>
+        </p:txBody>
+      </p:sp>
+      <p:sp>
+        <p:nvSpPr>
+          <p:cNvPr id="24" name="Rectangle 23"/>
+          <p:cNvSpPr/>
+          <p:nvPr/>
+        </p:nvSpPr>
+        <p:spPr>
+          <a:xfrm>
+            <a:off x="640080" y="4325112"/>
+            <a:ext cx="73152" cy="274320"/>
+          </a:xfrm>
+          <a:prstGeom prst="rect">
+            <a:avLst/>
+          </a:prstGeom>
+          <a:solidFill>
+            <a:srgbClr val="269CCB"/>
+          </a:solidFill>
+          <a:ln>
+            <a:noFill/>
+          </a:ln>
+        </p:spPr>
+        <p:style>
+          <a:lnRef idx="1">
+            <a:schemeClr val="accent1"/>
+          </a:lnRef>
+          <a:fillRef idx="3">
+            <a:schemeClr val="accent1"/>
+          </a:fillRef>
+          <a:effectRef idx="2">
+            <a:schemeClr val="accent1"/>
+          </a:effectRef>
+          <a:fontRef idx="minor">
+            <a:schemeClr val="lt1"/>
+          </a:fontRef>
+        </p:style>
+        <p:txBody>
+          <a:bodyPr rtlCol="0" anchor="ctr"/>
+          <a:lstStyle/>
+          <a:p>
+            <a:pPr algn="ctr"/>
+          </a:p>
+        </p:txBody>
+      </p:sp>
+      <p:sp>
+        <p:nvSpPr>
+          <p:cNvPr id="25" name="TextBox 24"/>
+          <p:cNvSpPr txBox="1"/>
+          <p:nvPr/>
+        </p:nvSpPr>
+        <p:spPr>
+          <a:xfrm>
+            <a:off x="1097280" y="4270248"/>
+            <a:ext cx="10362895" cy="402336"/>
+          </a:xfrm>
+          <a:prstGeom prst="rect">
+            <a:avLst/>
+          </a:prstGeom>
+          <a:noFill/>
+        </p:spPr>
+        <p:txBody>
+          <a:bodyPr wrap="square" anchor="ctr"/>
+          <a:lstStyle/>
+          <a:p>
+            <a:r>
+              <a:rPr sz="1500" b="1" i="0">
+                <a:solidFill>
+                  <a:srgbClr val="333333"/>
+                </a:solidFill>
+                <a:latin typeface="Calibri"/>
+              </a:rPr>
+              <a:t>EL PLAN DE HITOS</a:t>
+            </a:r>
+            <a:r>
+              <a:rPr sz="1500" b="0" i="0">
+                <a:solidFill>
+                  <a:srgbClr val="333333"/>
+                </a:solidFill>
+                <a:latin typeface="Calibri"/>
+              </a:rPr>
+              <a:t> — Qué queda </a:t>
+            </a:r>
+            <a:r>
+              <a:rPr sz="1500" b="1" i="0">
+                <a:solidFill>
+                  <a:srgbClr val="333333"/>
+                </a:solidFill>
+                <a:latin typeface="Calibri"/>
+              </a:rPr>
+              <a:t>terminado y verificable</a:t>
+            </a:r>
+            <a:r>
+              <a:rPr sz="1500" b="0" i="0">
+                <a:solidFill>
+                  <a:srgbClr val="333333"/>
+                </a:solidFill>
+                <a:latin typeface="Calibri"/>
+              </a:rPr>
+              <a:t> en cada una de las sesiones 8, 9, 10, 11, 12 y 14. Y la decisión de hoy que sería carísima cambiar en la Clase 14.</a:t>
+            </a:r>
+          </a:p>
+        </p:txBody>
+      </p:sp>
+      <p:sp>
+        <p:nvSpPr>
+          <p:cNvPr id="26" name="TextBox 25"/>
           <p:cNvSpPr txBox="1"/>
           <p:nvPr/>
         </p:nvSpPr>
@@ -10103,6 +9575,1504 @@
 </file>
 
 <file path=ppt/slides/slide23.xml><?xml version="1.0" encoding="utf-8"?>
+<p:sld xmlns:a="http://schemas.openxmlformats.org/drawingml/2006/main" xmlns:p="http://schemas.openxmlformats.org/presentationml/2006/main" xmlns:r="http://schemas.openxmlformats.org/officeDocument/2006/relationships">
+  <p:cSld>
+    <p:bg>
+      <p:bgPr>
+        <a:solidFill>
+          <a:srgbClr val="FFFFFF"/>
+        </a:solidFill>
+        <a:effectLst/>
+      </p:bgPr>
+    </p:bg>
+    <p:spTree>
+      <p:nvGrpSpPr>
+        <p:cNvPr id="1" name=""/>
+        <p:cNvGrpSpPr/>
+        <p:nvPr/>
+      </p:nvGrpSpPr>
+      <p:grpSpPr/>
+      <p:sp>
+        <p:nvSpPr>
+          <p:cNvPr id="2" name="Rectangle 1"/>
+          <p:cNvSpPr/>
+          <p:nvPr/>
+        </p:nvSpPr>
+        <p:spPr>
+          <a:xfrm>
+            <a:off x="0" y="0"/>
+            <a:ext cx="12191695" cy="1170432"/>
+          </a:xfrm>
+          <a:prstGeom prst="rect">
+            <a:avLst/>
+          </a:prstGeom>
+          <a:solidFill>
+            <a:srgbClr val="095292"/>
+          </a:solidFill>
+          <a:ln>
+            <a:noFill/>
+          </a:ln>
+        </p:spPr>
+        <p:style>
+          <a:lnRef idx="1">
+            <a:schemeClr val="accent1"/>
+          </a:lnRef>
+          <a:fillRef idx="3">
+            <a:schemeClr val="accent1"/>
+          </a:fillRef>
+          <a:effectRef idx="2">
+            <a:schemeClr val="accent1"/>
+          </a:effectRef>
+          <a:fontRef idx="minor">
+            <a:schemeClr val="lt1"/>
+          </a:fontRef>
+        </p:style>
+        <p:txBody>
+          <a:bodyPr rtlCol="0" anchor="ctr"/>
+          <a:lstStyle/>
+          <a:p>
+            <a:pPr algn="ctr"/>
+          </a:p>
+        </p:txBody>
+      </p:sp>
+      <p:sp>
+        <p:nvSpPr>
+          <p:cNvPr id="3" name="Rectangle 2"/>
+          <p:cNvSpPr/>
+          <p:nvPr/>
+        </p:nvSpPr>
+        <p:spPr>
+          <a:xfrm>
+            <a:off x="0" y="1170432"/>
+            <a:ext cx="12191695" cy="41148"/>
+          </a:xfrm>
+          <a:prstGeom prst="rect">
+            <a:avLst/>
+          </a:prstGeom>
+          <a:solidFill>
+            <a:srgbClr val="FFD000"/>
+          </a:solidFill>
+          <a:ln>
+            <a:noFill/>
+          </a:ln>
+        </p:spPr>
+        <p:style>
+          <a:lnRef idx="1">
+            <a:schemeClr val="accent1"/>
+          </a:lnRef>
+          <a:fillRef idx="3">
+            <a:schemeClr val="accent1"/>
+          </a:fillRef>
+          <a:effectRef idx="2">
+            <a:schemeClr val="accent1"/>
+          </a:effectRef>
+          <a:fontRef idx="minor">
+            <a:schemeClr val="lt1"/>
+          </a:fontRef>
+        </p:style>
+        <p:txBody>
+          <a:bodyPr rtlCol="0" anchor="ctr"/>
+          <a:lstStyle/>
+          <a:p>
+            <a:pPr algn="ctr"/>
+          </a:p>
+        </p:txBody>
+      </p:sp>
+      <p:sp>
+        <p:nvSpPr>
+          <p:cNvPr id="4" name="TextBox 3"/>
+          <p:cNvSpPr txBox="1"/>
+          <p:nvPr/>
+        </p:nvSpPr>
+        <p:spPr>
+          <a:xfrm>
+            <a:off x="457200" y="164592"/>
+            <a:ext cx="11277295" cy="384048"/>
+          </a:xfrm>
+          <a:prstGeom prst="rect">
+            <a:avLst/>
+          </a:prstGeom>
+          <a:noFill/>
+        </p:spPr>
+        <p:txBody>
+          <a:bodyPr wrap="square">
+            <a:spAutoFit/>
+          </a:bodyPr>
+          <a:lstStyle/>
+          <a:p>
+            <a:r>
+              <a:rPr sz="2600" b="1" i="0">
+                <a:solidFill>
+                  <a:srgbClr val="FFFFFF"/>
+                </a:solidFill>
+                <a:latin typeface="Calibri"/>
+              </a:rPr>
+              <a:t>Cómo se expone en 3 minutos</a:t>
+            </a:r>
+          </a:p>
+        </p:txBody>
+      </p:sp>
+      <p:sp>
+        <p:nvSpPr>
+          <p:cNvPr id="5" name="TextBox 4"/>
+          <p:cNvSpPr txBox="1"/>
+          <p:nvPr/>
+        </p:nvSpPr>
+        <p:spPr>
+          <a:xfrm>
+            <a:off x="457200" y="566928"/>
+            <a:ext cx="11277295" cy="411480"/>
+          </a:xfrm>
+          <a:prstGeom prst="rect">
+            <a:avLst/>
+          </a:prstGeom>
+          <a:noFill/>
+        </p:spPr>
+        <p:txBody>
+          <a:bodyPr wrap="square">
+            <a:spAutoFit/>
+          </a:bodyPr>
+          <a:lstStyle/>
+          <a:p>
+            <a:r>
+              <a:rPr sz="1400" b="0" i="0">
+                <a:solidFill>
+                  <a:srgbClr val="B8D8EE"/>
+                </a:solidFill>
+                <a:latin typeface="Calibri"/>
+              </a:rPr>
+              <a:t>Habla el vocero con la pantalla ya compartida · cronómetro en pantalla · se corta al llegar a cero</a:t>
+            </a:r>
+          </a:p>
+        </p:txBody>
+      </p:sp>
+      <p:sp>
+        <p:nvSpPr>
+          <p:cNvPr id="6" name="Rounded Rectangle 5"/>
+          <p:cNvSpPr/>
+          <p:nvPr/>
+        </p:nvSpPr>
+        <p:spPr>
+          <a:xfrm>
+            <a:off x="457200" y="1444752"/>
+            <a:ext cx="11277295" cy="908913"/>
+          </a:xfrm>
+          <a:prstGeom prst="roundRect">
+            <a:avLst>
+              <a:gd name="adj" fmla="val 12000"/>
+            </a:avLst>
+          </a:prstGeom>
+          <a:solidFill>
+            <a:srgbClr val="F2F2F2"/>
+          </a:solidFill>
+          <a:ln>
+            <a:noFill/>
+          </a:ln>
+        </p:spPr>
+        <p:style>
+          <a:lnRef idx="1">
+            <a:schemeClr val="accent1"/>
+          </a:lnRef>
+          <a:fillRef idx="3">
+            <a:schemeClr val="accent1"/>
+          </a:fillRef>
+          <a:effectRef idx="2">
+            <a:schemeClr val="accent1"/>
+          </a:effectRef>
+          <a:fontRef idx="minor">
+            <a:schemeClr val="lt1"/>
+          </a:fontRef>
+        </p:style>
+        <p:txBody>
+          <a:bodyPr rtlCol="0" anchor="ctr"/>
+          <a:lstStyle/>
+          <a:p>
+            <a:pPr algn="ctr"/>
+          </a:p>
+        </p:txBody>
+      </p:sp>
+      <p:sp>
+        <p:nvSpPr>
+          <p:cNvPr id="7" name="Rounded Rectangle 6"/>
+          <p:cNvSpPr/>
+          <p:nvPr/>
+        </p:nvSpPr>
+        <p:spPr>
+          <a:xfrm>
+            <a:off x="594360" y="1679752"/>
+            <a:ext cx="438912" cy="438912"/>
+          </a:xfrm>
+          <a:prstGeom prst="roundRect">
+            <a:avLst>
+              <a:gd name="adj" fmla="val 12000"/>
+            </a:avLst>
+          </a:prstGeom>
+          <a:solidFill>
+            <a:srgbClr val="095292"/>
+          </a:solidFill>
+          <a:ln>
+            <a:noFill/>
+          </a:ln>
+        </p:spPr>
+        <p:style>
+          <a:lnRef idx="1">
+            <a:schemeClr val="accent1"/>
+          </a:lnRef>
+          <a:fillRef idx="3">
+            <a:schemeClr val="accent1"/>
+          </a:fillRef>
+          <a:effectRef idx="2">
+            <a:schemeClr val="accent1"/>
+          </a:effectRef>
+          <a:fontRef idx="minor">
+            <a:schemeClr val="lt1"/>
+          </a:fontRef>
+        </p:style>
+        <p:txBody>
+          <a:bodyPr rtlCol="0" anchor="ctr"/>
+          <a:lstStyle/>
+          <a:p>
+            <a:pPr algn="ctr"/>
+          </a:p>
+        </p:txBody>
+      </p:sp>
+      <p:sp>
+        <p:nvSpPr>
+          <p:cNvPr id="8" name="TextBox 7"/>
+          <p:cNvSpPr txBox="1"/>
+          <p:nvPr/>
+        </p:nvSpPr>
+        <p:spPr>
+          <a:xfrm>
+            <a:off x="594360" y="1679752"/>
+            <a:ext cx="438912" cy="438912"/>
+          </a:xfrm>
+          <a:prstGeom prst="rect">
+            <a:avLst/>
+          </a:prstGeom>
+          <a:noFill/>
+        </p:spPr>
+        <p:txBody>
+          <a:bodyPr wrap="square" anchor="ctr"/>
+          <a:lstStyle/>
+          <a:p>
+            <a:pPr algn="ctr"/>
+            <a:r>
+              <a:rPr sz="1600" b="1" i="0">
+                <a:solidFill>
+                  <a:srgbClr val="FFFFFF"/>
+                </a:solidFill>
+                <a:latin typeface="Calibri"/>
+              </a:rPr>
+              <a:t>1</a:t>
+            </a:r>
+          </a:p>
+        </p:txBody>
+      </p:sp>
+      <p:sp>
+        <p:nvSpPr>
+          <p:cNvPr id="9" name="TextBox 8"/>
+          <p:cNvSpPr txBox="1"/>
+          <p:nvPr/>
+        </p:nvSpPr>
+        <p:spPr>
+          <a:xfrm>
+            <a:off x="1188720" y="1536192"/>
+            <a:ext cx="10271455" cy="744321"/>
+          </a:xfrm>
+          <a:prstGeom prst="rect">
+            <a:avLst/>
+          </a:prstGeom>
+          <a:noFill/>
+        </p:spPr>
+        <p:txBody>
+          <a:bodyPr wrap="square" anchor="ctr"/>
+          <a:lstStyle/>
+          <a:p>
+            <a:r>
+              <a:rPr sz="1500" b="1" i="0">
+                <a:solidFill>
+                  <a:srgbClr val="095292"/>
+                </a:solidFill>
+                <a:latin typeface="Calibri"/>
+              </a:rPr>
+              <a:t>30 s · La fase</a:t>
+            </a:r>
+          </a:p>
+          <a:p>
+            <a:pPr>
+              <a:spcBef>
+                <a:spcPts val="200"/>
+              </a:spcBef>
+            </a:pPr>
+            <a:r>
+              <a:rPr sz="1300" b="0" i="0">
+                <a:solidFill>
+                  <a:srgbClr val="333333"/>
+                </a:solidFill>
+                <a:latin typeface="Calibri"/>
+              </a:rPr>
+              <a:t>En qué fase están y qué falta para cerrarla. Es el minuto obligatorio.</a:t>
+            </a:r>
+          </a:p>
+        </p:txBody>
+      </p:sp>
+      <p:sp>
+        <p:nvSpPr>
+          <p:cNvPr id="10" name="Rounded Rectangle 9"/>
+          <p:cNvSpPr/>
+          <p:nvPr/>
+        </p:nvSpPr>
+        <p:spPr>
+          <a:xfrm>
+            <a:off x="457200" y="2445105"/>
+            <a:ext cx="11277295" cy="908913"/>
+          </a:xfrm>
+          <a:prstGeom prst="roundRect">
+            <a:avLst>
+              <a:gd name="adj" fmla="val 12000"/>
+            </a:avLst>
+          </a:prstGeom>
+          <a:solidFill>
+            <a:srgbClr val="E8F4FA"/>
+          </a:solidFill>
+          <a:ln>
+            <a:noFill/>
+          </a:ln>
+        </p:spPr>
+        <p:style>
+          <a:lnRef idx="1">
+            <a:schemeClr val="accent1"/>
+          </a:lnRef>
+          <a:fillRef idx="3">
+            <a:schemeClr val="accent1"/>
+          </a:fillRef>
+          <a:effectRef idx="2">
+            <a:schemeClr val="accent1"/>
+          </a:effectRef>
+          <a:fontRef idx="minor">
+            <a:schemeClr val="lt1"/>
+          </a:fontRef>
+        </p:style>
+        <p:txBody>
+          <a:bodyPr rtlCol="0" anchor="ctr"/>
+          <a:lstStyle/>
+          <a:p>
+            <a:pPr algn="ctr"/>
+          </a:p>
+        </p:txBody>
+      </p:sp>
+      <p:sp>
+        <p:nvSpPr>
+          <p:cNvPr id="11" name="Rounded Rectangle 10"/>
+          <p:cNvSpPr/>
+          <p:nvPr/>
+        </p:nvSpPr>
+        <p:spPr>
+          <a:xfrm>
+            <a:off x="594360" y="2680106"/>
+            <a:ext cx="438912" cy="438912"/>
+          </a:xfrm>
+          <a:prstGeom prst="roundRect">
+            <a:avLst>
+              <a:gd name="adj" fmla="val 12000"/>
+            </a:avLst>
+          </a:prstGeom>
+          <a:solidFill>
+            <a:srgbClr val="095292"/>
+          </a:solidFill>
+          <a:ln>
+            <a:noFill/>
+          </a:ln>
+        </p:spPr>
+        <p:style>
+          <a:lnRef idx="1">
+            <a:schemeClr val="accent1"/>
+          </a:lnRef>
+          <a:fillRef idx="3">
+            <a:schemeClr val="accent1"/>
+          </a:fillRef>
+          <a:effectRef idx="2">
+            <a:schemeClr val="accent1"/>
+          </a:effectRef>
+          <a:fontRef idx="minor">
+            <a:schemeClr val="lt1"/>
+          </a:fontRef>
+        </p:style>
+        <p:txBody>
+          <a:bodyPr rtlCol="0" anchor="ctr"/>
+          <a:lstStyle/>
+          <a:p>
+            <a:pPr algn="ctr"/>
+          </a:p>
+        </p:txBody>
+      </p:sp>
+      <p:sp>
+        <p:nvSpPr>
+          <p:cNvPr id="12" name="TextBox 11"/>
+          <p:cNvSpPr txBox="1"/>
+          <p:nvPr/>
+        </p:nvSpPr>
+        <p:spPr>
+          <a:xfrm>
+            <a:off x="594360" y="2680106"/>
+            <a:ext cx="438912" cy="438912"/>
+          </a:xfrm>
+          <a:prstGeom prst="rect">
+            <a:avLst/>
+          </a:prstGeom>
+          <a:noFill/>
+        </p:spPr>
+        <p:txBody>
+          <a:bodyPr wrap="square" anchor="ctr"/>
+          <a:lstStyle/>
+          <a:p>
+            <a:pPr algn="ctr"/>
+            <a:r>
+              <a:rPr sz="1600" b="1" i="0">
+                <a:solidFill>
+                  <a:srgbClr val="FFFFFF"/>
+                </a:solidFill>
+                <a:latin typeface="Calibri"/>
+              </a:rPr>
+              <a:t>2</a:t>
+            </a:r>
+          </a:p>
+        </p:txBody>
+      </p:sp>
+      <p:sp>
+        <p:nvSpPr>
+          <p:cNvPr id="13" name="TextBox 12"/>
+          <p:cNvSpPr txBox="1"/>
+          <p:nvPr/>
+        </p:nvSpPr>
+        <p:spPr>
+          <a:xfrm>
+            <a:off x="1188720" y="2536545"/>
+            <a:ext cx="10271455" cy="744321"/>
+          </a:xfrm>
+          <a:prstGeom prst="rect">
+            <a:avLst/>
+          </a:prstGeom>
+          <a:noFill/>
+        </p:spPr>
+        <p:txBody>
+          <a:bodyPr wrap="square" anchor="ctr"/>
+          <a:lstStyle/>
+          <a:p>
+            <a:r>
+              <a:rPr sz="1500" b="1" i="0">
+                <a:solidFill>
+                  <a:srgbClr val="095292"/>
+                </a:solidFill>
+                <a:latin typeface="Calibri"/>
+              </a:rPr>
+              <a:t>50 s · Los requisitos</a:t>
+            </a:r>
+          </a:p>
+          <a:p>
+            <a:pPr>
+              <a:spcBef>
+                <a:spcPts val="200"/>
+              </a:spcBef>
+            </a:pPr>
+            <a:r>
+              <a:rPr sz="1300" b="0" i="0">
+                <a:solidFill>
+                  <a:srgbClr val="333333"/>
+                </a:solidFill>
+                <a:latin typeface="Calibri"/>
+              </a:rPr>
+              <a:t>Uno funcional y uno no funcional, leídos tal cual.</a:t>
+            </a:r>
+          </a:p>
+        </p:txBody>
+      </p:sp>
+      <p:sp>
+        <p:nvSpPr>
+          <p:cNvPr id="14" name="Rounded Rectangle 13"/>
+          <p:cNvSpPr/>
+          <p:nvPr/>
+        </p:nvSpPr>
+        <p:spPr>
+          <a:xfrm>
+            <a:off x="457200" y="3445459"/>
+            <a:ext cx="11277295" cy="908913"/>
+          </a:xfrm>
+          <a:prstGeom prst="roundRect">
+            <a:avLst>
+              <a:gd name="adj" fmla="val 12000"/>
+            </a:avLst>
+          </a:prstGeom>
+          <a:solidFill>
+            <a:srgbClr val="F2F2F2"/>
+          </a:solidFill>
+          <a:ln>
+            <a:noFill/>
+          </a:ln>
+        </p:spPr>
+        <p:style>
+          <a:lnRef idx="1">
+            <a:schemeClr val="accent1"/>
+          </a:lnRef>
+          <a:fillRef idx="3">
+            <a:schemeClr val="accent1"/>
+          </a:fillRef>
+          <a:effectRef idx="2">
+            <a:schemeClr val="accent1"/>
+          </a:effectRef>
+          <a:fontRef idx="minor">
+            <a:schemeClr val="lt1"/>
+          </a:fontRef>
+        </p:style>
+        <p:txBody>
+          <a:bodyPr rtlCol="0" anchor="ctr"/>
+          <a:lstStyle/>
+          <a:p>
+            <a:pPr algn="ctr"/>
+          </a:p>
+        </p:txBody>
+      </p:sp>
+      <p:sp>
+        <p:nvSpPr>
+          <p:cNvPr id="15" name="Rounded Rectangle 14"/>
+          <p:cNvSpPr/>
+          <p:nvPr/>
+        </p:nvSpPr>
+        <p:spPr>
+          <a:xfrm>
+            <a:off x="594360" y="3680460"/>
+            <a:ext cx="438912" cy="438912"/>
+          </a:xfrm>
+          <a:prstGeom prst="roundRect">
+            <a:avLst>
+              <a:gd name="adj" fmla="val 12000"/>
+            </a:avLst>
+          </a:prstGeom>
+          <a:solidFill>
+            <a:srgbClr val="095292"/>
+          </a:solidFill>
+          <a:ln>
+            <a:noFill/>
+          </a:ln>
+        </p:spPr>
+        <p:style>
+          <a:lnRef idx="1">
+            <a:schemeClr val="accent1"/>
+          </a:lnRef>
+          <a:fillRef idx="3">
+            <a:schemeClr val="accent1"/>
+          </a:fillRef>
+          <a:effectRef idx="2">
+            <a:schemeClr val="accent1"/>
+          </a:effectRef>
+          <a:fontRef idx="minor">
+            <a:schemeClr val="lt1"/>
+          </a:fontRef>
+        </p:style>
+        <p:txBody>
+          <a:bodyPr rtlCol="0" anchor="ctr"/>
+          <a:lstStyle/>
+          <a:p>
+            <a:pPr algn="ctr"/>
+          </a:p>
+        </p:txBody>
+      </p:sp>
+      <p:sp>
+        <p:nvSpPr>
+          <p:cNvPr id="16" name="TextBox 15"/>
+          <p:cNvSpPr txBox="1"/>
+          <p:nvPr/>
+        </p:nvSpPr>
+        <p:spPr>
+          <a:xfrm>
+            <a:off x="594360" y="3680460"/>
+            <a:ext cx="438912" cy="438912"/>
+          </a:xfrm>
+          <a:prstGeom prst="rect">
+            <a:avLst/>
+          </a:prstGeom>
+          <a:noFill/>
+        </p:spPr>
+        <p:txBody>
+          <a:bodyPr wrap="square" anchor="ctr"/>
+          <a:lstStyle/>
+          <a:p>
+            <a:pPr algn="ctr"/>
+            <a:r>
+              <a:rPr sz="1600" b="1" i="0">
+                <a:solidFill>
+                  <a:srgbClr val="FFFFFF"/>
+                </a:solidFill>
+                <a:latin typeface="Calibri"/>
+              </a:rPr>
+              <a:t>3</a:t>
+            </a:r>
+          </a:p>
+        </p:txBody>
+      </p:sp>
+      <p:sp>
+        <p:nvSpPr>
+          <p:cNvPr id="17" name="TextBox 16"/>
+          <p:cNvSpPr txBox="1"/>
+          <p:nvPr/>
+        </p:nvSpPr>
+        <p:spPr>
+          <a:xfrm>
+            <a:off x="1188720" y="3536899"/>
+            <a:ext cx="10271455" cy="744321"/>
+          </a:xfrm>
+          <a:prstGeom prst="rect">
+            <a:avLst/>
+          </a:prstGeom>
+          <a:noFill/>
+        </p:spPr>
+        <p:txBody>
+          <a:bodyPr wrap="square" anchor="ctr"/>
+          <a:lstStyle/>
+          <a:p>
+            <a:r>
+              <a:rPr sz="1500" b="1" i="0">
+                <a:solidFill>
+                  <a:srgbClr val="095292"/>
+                </a:solidFill>
+                <a:latin typeface="Calibri"/>
+              </a:rPr>
+              <a:t>50 s · El criterio de aceptación</a:t>
+            </a:r>
+          </a:p>
+          <a:p>
+            <a:pPr>
+              <a:spcBef>
+                <a:spcPts val="200"/>
+              </a:spcBef>
+            </a:pPr>
+            <a:r>
+              <a:rPr sz="1300" b="0" i="0">
+                <a:solidFill>
+                  <a:srgbClr val="333333"/>
+                </a:solidFill>
+                <a:latin typeface="Calibri"/>
+              </a:rPr>
+              <a:t>De ese requisito: cómo se comprueba y con qué umbral.</a:t>
+            </a:r>
+          </a:p>
+        </p:txBody>
+      </p:sp>
+      <p:sp>
+        <p:nvSpPr>
+          <p:cNvPr id="18" name="Rounded Rectangle 17"/>
+          <p:cNvSpPr/>
+          <p:nvPr/>
+        </p:nvSpPr>
+        <p:spPr>
+          <a:xfrm>
+            <a:off x="457200" y="4445812"/>
+            <a:ext cx="11277295" cy="908913"/>
+          </a:xfrm>
+          <a:prstGeom prst="roundRect">
+            <a:avLst>
+              <a:gd name="adj" fmla="val 12000"/>
+            </a:avLst>
+          </a:prstGeom>
+          <a:solidFill>
+            <a:srgbClr val="E8F4FA"/>
+          </a:solidFill>
+          <a:ln>
+            <a:noFill/>
+          </a:ln>
+        </p:spPr>
+        <p:style>
+          <a:lnRef idx="1">
+            <a:schemeClr val="accent1"/>
+          </a:lnRef>
+          <a:fillRef idx="3">
+            <a:schemeClr val="accent1"/>
+          </a:fillRef>
+          <a:effectRef idx="2">
+            <a:schemeClr val="accent1"/>
+          </a:effectRef>
+          <a:fontRef idx="minor">
+            <a:schemeClr val="lt1"/>
+          </a:fontRef>
+        </p:style>
+        <p:txBody>
+          <a:bodyPr rtlCol="0" anchor="ctr"/>
+          <a:lstStyle/>
+          <a:p>
+            <a:pPr algn="ctr"/>
+          </a:p>
+        </p:txBody>
+      </p:sp>
+      <p:sp>
+        <p:nvSpPr>
+          <p:cNvPr id="19" name="Rounded Rectangle 18"/>
+          <p:cNvSpPr/>
+          <p:nvPr/>
+        </p:nvSpPr>
+        <p:spPr>
+          <a:xfrm>
+            <a:off x="594360" y="4680813"/>
+            <a:ext cx="438912" cy="438912"/>
+          </a:xfrm>
+          <a:prstGeom prst="roundRect">
+            <a:avLst>
+              <a:gd name="adj" fmla="val 12000"/>
+            </a:avLst>
+          </a:prstGeom>
+          <a:solidFill>
+            <a:srgbClr val="095292"/>
+          </a:solidFill>
+          <a:ln>
+            <a:noFill/>
+          </a:ln>
+        </p:spPr>
+        <p:style>
+          <a:lnRef idx="1">
+            <a:schemeClr val="accent1"/>
+          </a:lnRef>
+          <a:fillRef idx="3">
+            <a:schemeClr val="accent1"/>
+          </a:fillRef>
+          <a:effectRef idx="2">
+            <a:schemeClr val="accent1"/>
+          </a:effectRef>
+          <a:fontRef idx="minor">
+            <a:schemeClr val="lt1"/>
+          </a:fontRef>
+        </p:style>
+        <p:txBody>
+          <a:bodyPr rtlCol="0" anchor="ctr"/>
+          <a:lstStyle/>
+          <a:p>
+            <a:pPr algn="ctr"/>
+          </a:p>
+        </p:txBody>
+      </p:sp>
+      <p:sp>
+        <p:nvSpPr>
+          <p:cNvPr id="20" name="TextBox 19"/>
+          <p:cNvSpPr txBox="1"/>
+          <p:nvPr/>
+        </p:nvSpPr>
+        <p:spPr>
+          <a:xfrm>
+            <a:off x="594360" y="4680813"/>
+            <a:ext cx="438912" cy="438912"/>
+          </a:xfrm>
+          <a:prstGeom prst="rect">
+            <a:avLst/>
+          </a:prstGeom>
+          <a:noFill/>
+        </p:spPr>
+        <p:txBody>
+          <a:bodyPr wrap="square" anchor="ctr"/>
+          <a:lstStyle/>
+          <a:p>
+            <a:pPr algn="ctr"/>
+            <a:r>
+              <a:rPr sz="1600" b="1" i="0">
+                <a:solidFill>
+                  <a:srgbClr val="FFFFFF"/>
+                </a:solidFill>
+                <a:latin typeface="Calibri"/>
+              </a:rPr>
+              <a:t>4</a:t>
+            </a:r>
+          </a:p>
+        </p:txBody>
+      </p:sp>
+      <p:sp>
+        <p:nvSpPr>
+          <p:cNvPr id="21" name="TextBox 20"/>
+          <p:cNvSpPr txBox="1"/>
+          <p:nvPr/>
+        </p:nvSpPr>
+        <p:spPr>
+          <a:xfrm>
+            <a:off x="1188720" y="4537252"/>
+            <a:ext cx="10271455" cy="744321"/>
+          </a:xfrm>
+          <a:prstGeom prst="rect">
+            <a:avLst/>
+          </a:prstGeom>
+          <a:noFill/>
+        </p:spPr>
+        <p:txBody>
+          <a:bodyPr wrap="square" anchor="ctr"/>
+          <a:lstStyle/>
+          <a:p>
+            <a:r>
+              <a:rPr sz="1500" b="1" i="0">
+                <a:solidFill>
+                  <a:srgbClr val="095292"/>
+                </a:solidFill>
+                <a:latin typeface="Calibri"/>
+              </a:rPr>
+              <a:t>40 s · El plan de hitos</a:t>
+            </a:r>
+          </a:p>
+          <a:p>
+            <a:pPr>
+              <a:spcBef>
+                <a:spcPts val="200"/>
+              </a:spcBef>
+            </a:pPr>
+            <a:r>
+              <a:rPr sz="1300" b="0" i="0">
+                <a:solidFill>
+                  <a:srgbClr val="333333"/>
+                </a:solidFill>
+                <a:latin typeface="Calibri"/>
+              </a:rPr>
+              <a:t>Qué queda listo en la Clase 10 y en la 12.</a:t>
+            </a:r>
+          </a:p>
+        </p:txBody>
+      </p:sp>
+      <p:sp>
+        <p:nvSpPr>
+          <p:cNvPr id="22" name="Rounded Rectangle 21"/>
+          <p:cNvSpPr/>
+          <p:nvPr/>
+        </p:nvSpPr>
+        <p:spPr>
+          <a:xfrm>
+            <a:off x="457200" y="5446166"/>
+            <a:ext cx="11277295" cy="908913"/>
+          </a:xfrm>
+          <a:prstGeom prst="roundRect">
+            <a:avLst>
+              <a:gd name="adj" fmla="val 12000"/>
+            </a:avLst>
+          </a:prstGeom>
+          <a:solidFill>
+            <a:srgbClr val="F2F2F2"/>
+          </a:solidFill>
+          <a:ln>
+            <a:noFill/>
+          </a:ln>
+        </p:spPr>
+        <p:style>
+          <a:lnRef idx="1">
+            <a:schemeClr val="accent1"/>
+          </a:lnRef>
+          <a:fillRef idx="3">
+            <a:schemeClr val="accent1"/>
+          </a:fillRef>
+          <a:effectRef idx="2">
+            <a:schemeClr val="accent1"/>
+          </a:effectRef>
+          <a:fontRef idx="minor">
+            <a:schemeClr val="lt1"/>
+          </a:fontRef>
+        </p:style>
+        <p:txBody>
+          <a:bodyPr rtlCol="0" anchor="ctr"/>
+          <a:lstStyle/>
+          <a:p>
+            <a:pPr algn="ctr"/>
+          </a:p>
+        </p:txBody>
+      </p:sp>
+      <p:sp>
+        <p:nvSpPr>
+          <p:cNvPr id="23" name="Rounded Rectangle 22"/>
+          <p:cNvSpPr/>
+          <p:nvPr/>
+        </p:nvSpPr>
+        <p:spPr>
+          <a:xfrm>
+            <a:off x="594360" y="5681167"/>
+            <a:ext cx="438912" cy="438912"/>
+          </a:xfrm>
+          <a:prstGeom prst="roundRect">
+            <a:avLst>
+              <a:gd name="adj" fmla="val 12000"/>
+            </a:avLst>
+          </a:prstGeom>
+          <a:solidFill>
+            <a:srgbClr val="095292"/>
+          </a:solidFill>
+          <a:ln>
+            <a:noFill/>
+          </a:ln>
+        </p:spPr>
+        <p:style>
+          <a:lnRef idx="1">
+            <a:schemeClr val="accent1"/>
+          </a:lnRef>
+          <a:fillRef idx="3">
+            <a:schemeClr val="accent1"/>
+          </a:fillRef>
+          <a:effectRef idx="2">
+            <a:schemeClr val="accent1"/>
+          </a:effectRef>
+          <a:fontRef idx="minor">
+            <a:schemeClr val="lt1"/>
+          </a:fontRef>
+        </p:style>
+        <p:txBody>
+          <a:bodyPr rtlCol="0" anchor="ctr"/>
+          <a:lstStyle/>
+          <a:p>
+            <a:pPr algn="ctr"/>
+          </a:p>
+        </p:txBody>
+      </p:sp>
+      <p:sp>
+        <p:nvSpPr>
+          <p:cNvPr id="24" name="TextBox 23"/>
+          <p:cNvSpPr txBox="1"/>
+          <p:nvPr/>
+        </p:nvSpPr>
+        <p:spPr>
+          <a:xfrm>
+            <a:off x="594360" y="5681167"/>
+            <a:ext cx="438912" cy="438912"/>
+          </a:xfrm>
+          <a:prstGeom prst="rect">
+            <a:avLst/>
+          </a:prstGeom>
+          <a:noFill/>
+        </p:spPr>
+        <p:txBody>
+          <a:bodyPr wrap="square" anchor="ctr"/>
+          <a:lstStyle/>
+          <a:p>
+            <a:pPr algn="ctr"/>
+            <a:r>
+              <a:rPr sz="1600" b="1" i="0">
+                <a:solidFill>
+                  <a:srgbClr val="FFFFFF"/>
+                </a:solidFill>
+                <a:latin typeface="Calibri"/>
+              </a:rPr>
+              <a:t>5</a:t>
+            </a:r>
+          </a:p>
+        </p:txBody>
+      </p:sp>
+      <p:sp>
+        <p:nvSpPr>
+          <p:cNvPr id="25" name="TextBox 24"/>
+          <p:cNvSpPr txBox="1"/>
+          <p:nvPr/>
+        </p:nvSpPr>
+        <p:spPr>
+          <a:xfrm>
+            <a:off x="1188720" y="5537606"/>
+            <a:ext cx="10271455" cy="744321"/>
+          </a:xfrm>
+          <a:prstGeom prst="rect">
+            <a:avLst/>
+          </a:prstGeom>
+          <a:noFill/>
+        </p:spPr>
+        <p:txBody>
+          <a:bodyPr wrap="square" anchor="ctr"/>
+          <a:lstStyle/>
+          <a:p>
+            <a:r>
+              <a:rPr sz="1500" b="1" i="0">
+                <a:solidFill>
+                  <a:srgbClr val="095292"/>
+                </a:solidFill>
+                <a:latin typeface="Calibri"/>
+              </a:rPr>
+              <a:t>10 s · La decisión costosa</a:t>
+            </a:r>
+          </a:p>
+          <a:p>
+            <a:pPr>
+              <a:spcBef>
+                <a:spcPts val="200"/>
+              </a:spcBef>
+            </a:pPr>
+            <a:r>
+              <a:rPr sz="1300" b="0" i="0">
+                <a:solidFill>
+                  <a:srgbClr val="333333"/>
+                </a:solidFill>
+                <a:latin typeface="Calibri"/>
+              </a:rPr>
+              <a:t>Qué sería carísimo cambiar después.</a:t>
+            </a:r>
+          </a:p>
+        </p:txBody>
+      </p:sp>
+      <p:sp>
+        <p:nvSpPr>
+          <p:cNvPr id="26" name="TextBox 25"/>
+          <p:cNvSpPr txBox="1"/>
+          <p:nvPr/>
+        </p:nvSpPr>
+        <p:spPr>
+          <a:xfrm>
+            <a:off x="11185855" y="6473952"/>
+            <a:ext cx="640080" cy="274320"/>
+          </a:xfrm>
+          <a:prstGeom prst="rect">
+            <a:avLst/>
+          </a:prstGeom>
+          <a:noFill/>
+        </p:spPr>
+        <p:txBody>
+          <a:bodyPr wrap="square">
+            <a:spAutoFit/>
+          </a:bodyPr>
+          <a:lstStyle/>
+          <a:p>
+            <a:pPr algn="r"/>
+            <a:r>
+              <a:rPr sz="1100" b="0" i="0">
+                <a:solidFill>
+                  <a:srgbClr val="666666"/>
+                </a:solidFill>
+                <a:latin typeface="Calibri"/>
+              </a:rPr>
+              <a:t>23</a:t>
+            </a:r>
+          </a:p>
+        </p:txBody>
+      </p:sp>
+    </p:spTree>
+  </p:cSld>
+  <p:clrMapOvr>
+    <a:masterClrMapping/>
+  </p:clrMapOvr>
+</p:sld>
+</file>
+
+<file path=ppt/slides/slide24.xml><?xml version="1.0" encoding="utf-8"?>
+<p:sld xmlns:a="http://schemas.openxmlformats.org/drawingml/2006/main" xmlns:p="http://schemas.openxmlformats.org/presentationml/2006/main" xmlns:r="http://schemas.openxmlformats.org/officeDocument/2006/relationships">
+  <p:cSld>
+    <p:bg>
+      <p:bgPr>
+        <a:solidFill>
+          <a:srgbClr val="FFFFFF"/>
+        </a:solidFill>
+        <a:effectLst/>
+      </p:bgPr>
+    </p:bg>
+    <p:spTree>
+      <p:nvGrpSpPr>
+        <p:cNvPr id="1" name=""/>
+        <p:cNvGrpSpPr/>
+        <p:nvPr/>
+      </p:nvGrpSpPr>
+      <p:grpSpPr/>
+      <p:sp>
+        <p:nvSpPr>
+          <p:cNvPr id="2" name="Rectangle 1"/>
+          <p:cNvSpPr/>
+          <p:nvPr/>
+        </p:nvSpPr>
+        <p:spPr>
+          <a:xfrm>
+            <a:off x="0" y="0"/>
+            <a:ext cx="12191695" cy="960120"/>
+          </a:xfrm>
+          <a:prstGeom prst="rect">
+            <a:avLst/>
+          </a:prstGeom>
+          <a:solidFill>
+            <a:srgbClr val="095292"/>
+          </a:solidFill>
+          <a:ln>
+            <a:noFill/>
+          </a:ln>
+        </p:spPr>
+        <p:style>
+          <a:lnRef idx="1">
+            <a:schemeClr val="accent1"/>
+          </a:lnRef>
+          <a:fillRef idx="3">
+            <a:schemeClr val="accent1"/>
+          </a:fillRef>
+          <a:effectRef idx="2">
+            <a:schemeClr val="accent1"/>
+          </a:effectRef>
+          <a:fontRef idx="minor">
+            <a:schemeClr val="lt1"/>
+          </a:fontRef>
+        </p:style>
+        <p:txBody>
+          <a:bodyPr rtlCol="0" anchor="ctr"/>
+          <a:lstStyle/>
+          <a:p>
+            <a:pPr algn="ctr"/>
+          </a:p>
+        </p:txBody>
+      </p:sp>
+      <p:sp>
+        <p:nvSpPr>
+          <p:cNvPr id="3" name="Rectangle 2"/>
+          <p:cNvSpPr/>
+          <p:nvPr/>
+        </p:nvSpPr>
+        <p:spPr>
+          <a:xfrm>
+            <a:off x="0" y="960120"/>
+            <a:ext cx="12191695" cy="41148"/>
+          </a:xfrm>
+          <a:prstGeom prst="rect">
+            <a:avLst/>
+          </a:prstGeom>
+          <a:solidFill>
+            <a:srgbClr val="FFD000"/>
+          </a:solidFill>
+          <a:ln>
+            <a:noFill/>
+          </a:ln>
+        </p:spPr>
+        <p:style>
+          <a:lnRef idx="1">
+            <a:schemeClr val="accent1"/>
+          </a:lnRef>
+          <a:fillRef idx="3">
+            <a:schemeClr val="accent1"/>
+          </a:fillRef>
+          <a:effectRef idx="2">
+            <a:schemeClr val="accent1"/>
+          </a:effectRef>
+          <a:fontRef idx="minor">
+            <a:schemeClr val="lt1"/>
+          </a:fontRef>
+        </p:style>
+        <p:txBody>
+          <a:bodyPr rtlCol="0" anchor="ctr"/>
+          <a:lstStyle/>
+          <a:p>
+            <a:pPr algn="ctr"/>
+          </a:p>
+        </p:txBody>
+      </p:sp>
+      <p:sp>
+        <p:nvSpPr>
+          <p:cNvPr id="4" name="TextBox 3"/>
+          <p:cNvSpPr txBox="1"/>
+          <p:nvPr/>
+        </p:nvSpPr>
+        <p:spPr>
+          <a:xfrm>
+            <a:off x="457200" y="164592"/>
+            <a:ext cx="11277295" cy="502920"/>
+          </a:xfrm>
+          <a:prstGeom prst="rect">
+            <a:avLst/>
+          </a:prstGeom>
+          <a:noFill/>
+        </p:spPr>
+        <p:txBody>
+          <a:bodyPr wrap="square">
+            <a:spAutoFit/>
+          </a:bodyPr>
+          <a:lstStyle/>
+          <a:p>
+            <a:r>
+              <a:rPr sz="2600" b="1" i="0">
+                <a:solidFill>
+                  <a:srgbClr val="FFFFFF"/>
+                </a:solidFill>
+                <a:latin typeface="Calibri"/>
+              </a:rPr>
+              <a:t>Para la Clase 8</a:t>
+            </a:r>
+          </a:p>
+        </p:txBody>
+      </p:sp>
+      <p:sp>
+        <p:nvSpPr>
+          <p:cNvPr id="5" name="TextBox 4"/>
+          <p:cNvSpPr txBox="1"/>
+          <p:nvPr/>
+        </p:nvSpPr>
+        <p:spPr>
+          <a:xfrm>
+            <a:off x="457200" y="1170432"/>
+            <a:ext cx="11277295" cy="5230368"/>
+          </a:xfrm>
+          <a:prstGeom prst="rect">
+            <a:avLst/>
+          </a:prstGeom>
+          <a:noFill/>
+        </p:spPr>
+        <p:txBody>
+          <a:bodyPr wrap="square">
+            <a:spAutoFit/>
+          </a:bodyPr>
+          <a:lstStyle/>
+          <a:p>
+            <a:pPr>
+              <a:spcAft>
+                <a:spcPts val="800"/>
+              </a:spcAft>
+            </a:pPr>
+            <a:r>
+              <a:rPr sz="2000" b="0" i="0">
+                <a:solidFill>
+                  <a:srgbClr val="333333"/>
+                </a:solidFill>
+                <a:latin typeface="Calibri"/>
+              </a:rPr>
+              <a:t>–   </a:t>
+            </a:r>
+            <a:r>
+              <a:rPr sz="2000" b="1" i="0">
+                <a:solidFill>
+                  <a:srgbClr val="333333"/>
+                </a:solidFill>
+                <a:latin typeface="Calibri"/>
+              </a:rPr>
+              <a:t>Trabajo dirigido:</a:t>
+            </a:r>
+            <a:r>
+              <a:rPr sz="2000" b="0" i="0">
+                <a:solidFill>
+                  <a:srgbClr val="333333"/>
+                </a:solidFill>
+                <a:latin typeface="Calibri"/>
+              </a:rPr>
+              <a:t> Estudio de fases del ciclo de vida — leer el material de las seis fases y traer </a:t>
+            </a:r>
+            <a:r>
+              <a:rPr sz="2000" b="1" i="0">
+                <a:solidFill>
+                  <a:srgbClr val="333333"/>
+                </a:solidFill>
+                <a:latin typeface="Calibri"/>
+              </a:rPr>
+              <a:t>un ejemplo propio</a:t>
+            </a:r>
+            <a:r>
+              <a:rPr sz="2000" b="0" i="0">
+                <a:solidFill>
+                  <a:srgbClr val="333333"/>
+                </a:solidFill>
+                <a:latin typeface="Calibri"/>
+              </a:rPr>
+              <a:t> de un proyecto conocido que se saltó una fase.</a:t>
+            </a:r>
+          </a:p>
+          <a:p>
+            <a:pPr>
+              <a:spcAft>
+                <a:spcPts val="800"/>
+              </a:spcAft>
+            </a:pPr>
+            <a:r>
+              <a:rPr sz="2000" b="0" i="0">
+                <a:solidFill>
+                  <a:srgbClr val="333333"/>
+                </a:solidFill>
+                <a:latin typeface="Calibri"/>
+              </a:rPr>
+              <a:t>–   </a:t>
+            </a:r>
+            <a:r>
+              <a:rPr sz="2000" b="1" i="0">
+                <a:solidFill>
+                  <a:srgbClr val="333333"/>
+                </a:solidFill>
+                <a:latin typeface="Calibri"/>
+              </a:rPr>
+              <a:t>Trabajo independiente:</a:t>
+            </a:r>
+            <a:r>
+              <a:rPr sz="2000" b="0" i="0">
+                <a:solidFill>
+                  <a:srgbClr val="333333"/>
+                </a:solidFill>
+                <a:latin typeface="Calibri"/>
+              </a:rPr>
+              <a:t> Infografía explicativa del ciclo de vida </a:t>
+            </a:r>
+            <a:r>
+              <a:rPr sz="2000" b="1" i="0">
+                <a:solidFill>
+                  <a:srgbClr val="333333"/>
+                </a:solidFill>
+                <a:latin typeface="Calibri"/>
+              </a:rPr>
+              <a:t>de su propio proyecto</a:t>
+            </a:r>
+            <a:r>
+              <a:rPr sz="2000" b="0" i="0">
+                <a:solidFill>
+                  <a:srgbClr val="333333"/>
+                </a:solidFill>
+                <a:latin typeface="Calibri"/>
+              </a:rPr>
+              <a:t>, en Canva o draw.io: las seis fases, en cuál están y qué entregan en cada una.</a:t>
+            </a:r>
+          </a:p>
+          <a:p>
+            <a:pPr>
+              <a:spcAft>
+                <a:spcPts val="800"/>
+              </a:spcAft>
+            </a:pPr>
+            <a:r>
+              <a:rPr sz="2000" b="0" i="0">
+                <a:solidFill>
+                  <a:srgbClr val="333333"/>
+                </a:solidFill>
+                <a:latin typeface="Calibri"/>
+              </a:rPr>
+              <a:t>–   </a:t>
+            </a:r>
+            <a:r>
+              <a:rPr sz="2000" b="1" i="0">
+                <a:solidFill>
+                  <a:srgbClr val="333333"/>
+                </a:solidFill>
+                <a:latin typeface="Calibri"/>
+              </a:rPr>
+              <a:t>Clase 8 · Taller de aplicación del ciclo de vida</a:t>
+            </a:r>
+            <a:r>
+              <a:rPr sz="2000" b="0" i="0">
+                <a:solidFill>
+                  <a:srgbClr val="333333"/>
+                </a:solidFill>
+                <a:latin typeface="Calibri"/>
+              </a:rPr>
+              <a:t> — casos reales de proyectos que se saltaron una fase, y la decisión entre sus dos alternativas de solución con una matriz de criterios.</a:t>
+            </a:r>
+          </a:p>
+          <a:p>
+            <a:pPr>
+              <a:spcAft>
+                <a:spcPts val="800"/>
+              </a:spcAft>
+            </a:pPr>
+            <a:r>
+              <a:rPr sz="2000" b="0" i="0">
+                <a:solidFill>
+                  <a:srgbClr val="333333"/>
+                </a:solidFill>
+                <a:latin typeface="Calibri"/>
+              </a:rPr>
+              <a:t>–   </a:t>
+            </a:r>
+            <a:r>
+              <a:rPr sz="2000" b="1" i="0">
+                <a:solidFill>
+                  <a:srgbClr val="333333"/>
+                </a:solidFill>
+                <a:latin typeface="Calibri"/>
+              </a:rPr>
+              <a:t>Aviso:</a:t>
+            </a:r>
+            <a:r>
+              <a:rPr sz="2000" b="0" i="0">
+                <a:solidFill>
+                  <a:srgbClr val="333333"/>
+                </a:solidFill>
+                <a:latin typeface="Calibri"/>
+              </a:rPr>
+              <a:t> Traigan la tabla de requisitos con los criterios de aceptación </a:t>
+            </a:r>
+            <a:r>
+              <a:rPr sz="2000" b="1" i="0">
+                <a:solidFill>
+                  <a:srgbClr val="333333"/>
+                </a:solidFill>
+                <a:latin typeface="Calibri"/>
+              </a:rPr>
+              <a:t>confirmados con la persona que vive el problema</a:t>
+            </a:r>
+            <a:r>
+              <a:rPr sz="2000" b="0" i="0">
+                <a:solidFill>
+                  <a:srgbClr val="333333"/>
+                </a:solidFill>
+                <a:latin typeface="Calibri"/>
+              </a:rPr>
+              <a:t>, y las dos alternativas de solución del trabajo independiente de la sesión 6. En la sesión 8 se decide una.</a:t>
+            </a:r>
+          </a:p>
+          <a:p>
+            <a:pPr>
+              <a:spcAft>
+                <a:spcPts val="800"/>
+              </a:spcAft>
+            </a:pPr>
+            <a:r>
+              <a:rPr sz="2000" b="0" i="0">
+                <a:solidFill>
+                  <a:srgbClr val="333333"/>
+                </a:solidFill>
+                <a:latin typeface="Calibri"/>
+              </a:rPr>
+              <a:t>–   </a:t>
+            </a:r>
+            <a:r>
+              <a:rPr sz="2000" b="1" i="0">
+                <a:solidFill>
+                  <a:srgbClr val="333333"/>
+                </a:solidFill>
+                <a:latin typeface="Calibri"/>
+              </a:rPr>
+              <a:t>Antes de salir:</a:t>
+            </a:r>
+            <a:r>
+              <a:rPr sz="2000" b="0" i="0">
+                <a:solidFill>
+                  <a:srgbClr val="333333"/>
+                </a:solidFill>
+                <a:latin typeface="Calibri"/>
+              </a:rPr>
+              <a:t> el enlace del documento del equipo en el chat, con permiso de lectura para el docente, y el nombre del vocero de hoy.</a:t>
+            </a:r>
+          </a:p>
+        </p:txBody>
+      </p:sp>
+      <p:sp>
+        <p:nvSpPr>
+          <p:cNvPr id="6" name="TextBox 5"/>
+          <p:cNvSpPr txBox="1"/>
+          <p:nvPr/>
+        </p:nvSpPr>
+        <p:spPr>
+          <a:xfrm>
+            <a:off x="11185855" y="6473952"/>
+            <a:ext cx="640080" cy="274320"/>
+          </a:xfrm>
+          <a:prstGeom prst="rect">
+            <a:avLst/>
+          </a:prstGeom>
+          <a:noFill/>
+        </p:spPr>
+        <p:txBody>
+          <a:bodyPr wrap="square">
+            <a:spAutoFit/>
+          </a:bodyPr>
+          <a:lstStyle/>
+          <a:p>
+            <a:pPr algn="r"/>
+            <a:r>
+              <a:rPr sz="1100" b="0" i="0">
+                <a:solidFill>
+                  <a:srgbClr val="666666"/>
+                </a:solidFill>
+                <a:latin typeface="Calibri"/>
+              </a:rPr>
+              <a:t>24</a:t>
+            </a:r>
+          </a:p>
+        </p:txBody>
+      </p:sp>
+    </p:spTree>
+  </p:cSld>
+  <p:clrMapOvr>
+    <a:masterClrMapping/>
+  </p:clrMapOvr>
+</p:sld>
+</file>
+
+<file path=ppt/slides/slide25.xml><?xml version="1.0" encoding="utf-8"?>
 <p:sld xmlns:a="http://schemas.openxmlformats.org/drawingml/2006/main" xmlns:p="http://schemas.openxmlformats.org/presentationml/2006/main" xmlns:r="http://schemas.openxmlformats.org/officeDocument/2006/relationships">
   <p:cSld>
     <p:bg>

--- a/Introduccion a la Ingenieria/Clases/Clase 7 - Ciclo de vida de los proyectos de ingenieria/Presentacion.pptx
+++ b/Introduccion a la Ingenieria/Clases/Clase 7 - Ciclo de vida de los proyectos de ingenieria/Presentacion.pptx
@@ -18,9 +18,6 @@
     <p:sldId id="266" r:id="rId18"/>
     <p:sldId id="267" r:id="rId19"/>
     <p:sldId id="268" r:id="rId20"/>
-    <p:sldId id="269" r:id="rId21"/>
-    <p:sldId id="270" r:id="rId22"/>
-    <p:sldId id="271" r:id="rId23"/>
   </p:sldIdLst>
   <p:sldSz cx="12191695" cy="6858000" type="screen4x3"/>
   <p:notesSz cx="6858000" cy="9144000"/>
@@ -6760,2661 +6757,6 @@
         <p:spPr>
           <a:xfrm>
             <a:off x="0" y="0"/>
-            <a:ext cx="12191695" cy="1170432"/>
-          </a:xfrm>
-          <a:prstGeom prst="rect">
-            <a:avLst/>
-          </a:prstGeom>
-          <a:solidFill>
-            <a:srgbClr val="095292"/>
-          </a:solidFill>
-          <a:ln>
-            <a:noFill/>
-          </a:ln>
-        </p:spPr>
-        <p:style>
-          <a:lnRef idx="1">
-            <a:schemeClr val="accent1"/>
-          </a:lnRef>
-          <a:fillRef idx="3">
-            <a:schemeClr val="accent1"/>
-          </a:fillRef>
-          <a:effectRef idx="2">
-            <a:schemeClr val="accent1"/>
-          </a:effectRef>
-          <a:fontRef idx="minor">
-            <a:schemeClr val="lt1"/>
-          </a:fontRef>
-        </p:style>
-        <p:txBody>
-          <a:bodyPr rtlCol="0" anchor="ctr"/>
-          <a:lstStyle/>
-          <a:p>
-            <a:pPr algn="ctr"/>
-          </a:p>
-        </p:txBody>
-      </p:sp>
-      <p:sp>
-        <p:nvSpPr>
-          <p:cNvPr id="3" name="Rectangle 2"/>
-          <p:cNvSpPr/>
-          <p:nvPr/>
-        </p:nvSpPr>
-        <p:spPr>
-          <a:xfrm>
-            <a:off x="0" y="1170432"/>
-            <a:ext cx="12191695" cy="41148"/>
-          </a:xfrm>
-          <a:prstGeom prst="rect">
-            <a:avLst/>
-          </a:prstGeom>
-          <a:solidFill>
-            <a:srgbClr val="FFD000"/>
-          </a:solidFill>
-          <a:ln>
-            <a:noFill/>
-          </a:ln>
-        </p:spPr>
-        <p:style>
-          <a:lnRef idx="1">
-            <a:schemeClr val="accent1"/>
-          </a:lnRef>
-          <a:fillRef idx="3">
-            <a:schemeClr val="accent1"/>
-          </a:fillRef>
-          <a:effectRef idx="2">
-            <a:schemeClr val="accent1"/>
-          </a:effectRef>
-          <a:fontRef idx="minor">
-            <a:schemeClr val="lt1"/>
-          </a:fontRef>
-        </p:style>
-        <p:txBody>
-          <a:bodyPr rtlCol="0" anchor="ctr"/>
-          <a:lstStyle/>
-          <a:p>
-            <a:pPr algn="ctr"/>
-          </a:p>
-        </p:txBody>
-      </p:sp>
-      <p:sp>
-        <p:nvSpPr>
-          <p:cNvPr id="4" name="TextBox 3"/>
-          <p:cNvSpPr txBox="1"/>
-          <p:nvPr/>
-        </p:nvSpPr>
-        <p:spPr>
-          <a:xfrm>
-            <a:off x="457200" y="164592"/>
-            <a:ext cx="11277295" cy="384048"/>
-          </a:xfrm>
-          <a:prstGeom prst="rect">
-            <a:avLst/>
-          </a:prstGeom>
-          <a:noFill/>
-        </p:spPr>
-        <p:txBody>
-          <a:bodyPr wrap="square">
-            <a:spAutoFit/>
-          </a:bodyPr>
-          <a:lstStyle/>
-          <a:p>
-            <a:r>
-              <a:rPr sz="2600" b="1" i="0">
-                <a:solidFill>
-                  <a:srgbClr val="FFFFFF"/>
-                </a:solidFill>
-                <a:latin typeface="Calibri"/>
-              </a:rPr>
-              <a:t>Taller de hoy: Ciclo de vida del proyecto</a:t>
-            </a:r>
-          </a:p>
-        </p:txBody>
-      </p:sp>
-      <p:sp>
-        <p:nvSpPr>
-          <p:cNvPr id="5" name="TextBox 4"/>
-          <p:cNvSpPr txBox="1"/>
-          <p:nvPr/>
-        </p:nvSpPr>
-        <p:spPr>
-          <a:xfrm>
-            <a:off x="457200" y="566928"/>
-            <a:ext cx="11277295" cy="411480"/>
-          </a:xfrm>
-          <a:prstGeom prst="rect">
-            <a:avLst/>
-          </a:prstGeom>
-          <a:noFill/>
-        </p:spPr>
-        <p:txBody>
-          <a:bodyPr wrap="square">
-            <a:spAutoFit/>
-          </a:bodyPr>
-          <a:lstStyle/>
-          <a:p>
-            <a:r>
-              <a:rPr sz="1400" b="0" i="0">
-                <a:solidFill>
-                  <a:srgbClr val="B8D8EE"/>
-                </a:solidFill>
-                <a:latin typeface="Calibri"/>
-              </a:rPr>
-              <a:t>17 min en equipos · cada equipo, su propio proyecto · mapa del ciclo de vida + tabla de requisitos + plan de hitos</a:t>
-            </a:r>
-          </a:p>
-        </p:txBody>
-      </p:sp>
-      <p:sp>
-        <p:nvSpPr>
-          <p:cNvPr id="6" name="Rounded Rectangle 5"/>
-          <p:cNvSpPr/>
-          <p:nvPr/>
-        </p:nvSpPr>
-        <p:spPr>
-          <a:xfrm>
-            <a:off x="457200" y="1472184"/>
-            <a:ext cx="11277295" cy="566928"/>
-          </a:xfrm>
-          <a:prstGeom prst="roundRect">
-            <a:avLst>
-              <a:gd name="adj" fmla="val 12000"/>
-            </a:avLst>
-          </a:prstGeom>
-          <a:solidFill>
-            <a:srgbClr val="F2F2F2"/>
-          </a:solidFill>
-          <a:ln>
-            <a:noFill/>
-          </a:ln>
-        </p:spPr>
-        <p:style>
-          <a:lnRef idx="1">
-            <a:schemeClr val="accent1"/>
-          </a:lnRef>
-          <a:fillRef idx="3">
-            <a:schemeClr val="accent1"/>
-          </a:fillRef>
-          <a:effectRef idx="2">
-            <a:schemeClr val="accent1"/>
-          </a:effectRef>
-          <a:fontRef idx="minor">
-            <a:schemeClr val="lt1"/>
-          </a:fontRef>
-        </p:style>
-        <p:txBody>
-          <a:bodyPr rtlCol="0" anchor="ctr"/>
-          <a:lstStyle/>
-          <a:p>
-            <a:pPr algn="ctr"/>
-          </a:p>
-        </p:txBody>
-      </p:sp>
-      <p:sp>
-        <p:nvSpPr>
-          <p:cNvPr id="7" name="Rectangle 6"/>
-          <p:cNvSpPr/>
-          <p:nvPr/>
-        </p:nvSpPr>
-        <p:spPr>
-          <a:xfrm>
-            <a:off x="640080" y="1618487"/>
-            <a:ext cx="274320" cy="274320"/>
-          </a:xfrm>
-          <a:prstGeom prst="rect">
-            <a:avLst/>
-          </a:prstGeom>
-          <a:solidFill>
-            <a:srgbClr val="FFFFFF"/>
-          </a:solidFill>
-          <a:ln>
-            <a:solidFill>
-              <a:srgbClr val="333333"/>
-            </a:solidFill>
-          </a:ln>
-        </p:spPr>
-        <p:style>
-          <a:lnRef idx="1">
-            <a:schemeClr val="accent1"/>
-          </a:lnRef>
-          <a:fillRef idx="3">
-            <a:schemeClr val="accent1"/>
-          </a:fillRef>
-          <a:effectRef idx="2">
-            <a:schemeClr val="accent1"/>
-          </a:effectRef>
-          <a:fontRef idx="minor">
-            <a:schemeClr val="lt1"/>
-          </a:fontRef>
-        </p:style>
-        <p:txBody>
-          <a:bodyPr rtlCol="0" anchor="ctr"/>
-          <a:lstStyle/>
-          <a:p>
-            <a:pPr algn="ctr"/>
-          </a:p>
-        </p:txBody>
-      </p:sp>
-      <p:sp>
-        <p:nvSpPr>
-          <p:cNvPr id="8" name="Rectangle 7"/>
-          <p:cNvSpPr/>
-          <p:nvPr/>
-        </p:nvSpPr>
-        <p:spPr>
-          <a:xfrm>
-            <a:off x="640080" y="1618487"/>
-            <a:ext cx="73152" cy="274320"/>
-          </a:xfrm>
-          <a:prstGeom prst="rect">
-            <a:avLst/>
-          </a:prstGeom>
-          <a:solidFill>
-            <a:srgbClr val="269CCB"/>
-          </a:solidFill>
-          <a:ln>
-            <a:noFill/>
-          </a:ln>
-        </p:spPr>
-        <p:style>
-          <a:lnRef idx="1">
-            <a:schemeClr val="accent1"/>
-          </a:lnRef>
-          <a:fillRef idx="3">
-            <a:schemeClr val="accent1"/>
-          </a:fillRef>
-          <a:effectRef idx="2">
-            <a:schemeClr val="accent1"/>
-          </a:effectRef>
-          <a:fontRef idx="minor">
-            <a:schemeClr val="lt1"/>
-          </a:fontRef>
-        </p:style>
-        <p:txBody>
-          <a:bodyPr rtlCol="0" anchor="ctr"/>
-          <a:lstStyle/>
-          <a:p>
-            <a:pPr algn="ctr"/>
-          </a:p>
-        </p:txBody>
-      </p:sp>
-      <p:sp>
-        <p:nvSpPr>
-          <p:cNvPr id="9" name="TextBox 8"/>
-          <p:cNvSpPr txBox="1"/>
-          <p:nvPr/>
-        </p:nvSpPr>
-        <p:spPr>
-          <a:xfrm>
-            <a:off x="1097280" y="1563624"/>
-            <a:ext cx="10362895" cy="402336"/>
-          </a:xfrm>
-          <a:prstGeom prst="rect">
-            <a:avLst/>
-          </a:prstGeom>
-          <a:noFill/>
-        </p:spPr>
-        <p:txBody>
-          <a:bodyPr wrap="square" anchor="ctr"/>
-          <a:lstStyle/>
-          <a:p>
-            <a:r>
-              <a:rPr sz="1500" b="1" i="0">
-                <a:solidFill>
-                  <a:srgbClr val="333333"/>
-                </a:solidFill>
-                <a:latin typeface="Calibri"/>
-              </a:rPr>
-              <a:t>EN QUÉ FASE ESTAMOS</a:t>
-            </a:r>
-            <a:r>
-              <a:rPr sz="1500" b="0" i="0">
-                <a:solidFill>
-                  <a:srgbClr val="333333"/>
-                </a:solidFill>
-                <a:latin typeface="Calibri"/>
-              </a:rPr>
-              <a:t> — La fase donde está el proyecto hoy, y </a:t>
-            </a:r>
-            <a:r>
-              <a:rPr sz="1500" b="1" i="0">
-                <a:solidFill>
-                  <a:srgbClr val="333333"/>
-                </a:solidFill>
-                <a:latin typeface="Calibri"/>
-              </a:rPr>
-              <a:t>qué falta exactamente para cerrarla</a:t>
-            </a:r>
-            <a:r>
-              <a:rPr sz="1500" b="0" i="0">
-                <a:solidFill>
-                  <a:srgbClr val="333333"/>
-                </a:solidFill>
-                <a:latin typeface="Calibri"/>
-              </a:rPr>
-              <a:t>. Una fase se cierra con un entregable, no con una sensación.</a:t>
-            </a:r>
-          </a:p>
-        </p:txBody>
-      </p:sp>
-      <p:sp>
-        <p:nvSpPr>
-          <p:cNvPr id="10" name="Rounded Rectangle 9"/>
-          <p:cNvSpPr/>
-          <p:nvPr/>
-        </p:nvSpPr>
-        <p:spPr>
-          <a:xfrm>
-            <a:off x="457200" y="2148839"/>
-            <a:ext cx="11277295" cy="566928"/>
-          </a:xfrm>
-          <a:prstGeom prst="roundRect">
-            <a:avLst>
-              <a:gd name="adj" fmla="val 12000"/>
-            </a:avLst>
-          </a:prstGeom>
-          <a:solidFill>
-            <a:srgbClr val="F2F2F2"/>
-          </a:solidFill>
-          <a:ln>
-            <a:noFill/>
-          </a:ln>
-        </p:spPr>
-        <p:style>
-          <a:lnRef idx="1">
-            <a:schemeClr val="accent1"/>
-          </a:lnRef>
-          <a:fillRef idx="3">
-            <a:schemeClr val="accent1"/>
-          </a:fillRef>
-          <a:effectRef idx="2">
-            <a:schemeClr val="accent1"/>
-          </a:effectRef>
-          <a:fontRef idx="minor">
-            <a:schemeClr val="lt1"/>
-          </a:fontRef>
-        </p:style>
-        <p:txBody>
-          <a:bodyPr rtlCol="0" anchor="ctr"/>
-          <a:lstStyle/>
-          <a:p>
-            <a:pPr algn="ctr"/>
-          </a:p>
-        </p:txBody>
-      </p:sp>
-      <p:sp>
-        <p:nvSpPr>
-          <p:cNvPr id="11" name="Rectangle 10"/>
-          <p:cNvSpPr/>
-          <p:nvPr/>
-        </p:nvSpPr>
-        <p:spPr>
-          <a:xfrm>
-            <a:off x="640080" y="2295144"/>
-            <a:ext cx="274320" cy="274320"/>
-          </a:xfrm>
-          <a:prstGeom prst="rect">
-            <a:avLst/>
-          </a:prstGeom>
-          <a:solidFill>
-            <a:srgbClr val="FFFFFF"/>
-          </a:solidFill>
-          <a:ln>
-            <a:solidFill>
-              <a:srgbClr val="333333"/>
-            </a:solidFill>
-          </a:ln>
-        </p:spPr>
-        <p:style>
-          <a:lnRef idx="1">
-            <a:schemeClr val="accent1"/>
-          </a:lnRef>
-          <a:fillRef idx="3">
-            <a:schemeClr val="accent1"/>
-          </a:fillRef>
-          <a:effectRef idx="2">
-            <a:schemeClr val="accent1"/>
-          </a:effectRef>
-          <a:fontRef idx="minor">
-            <a:schemeClr val="lt1"/>
-          </a:fontRef>
-        </p:style>
-        <p:txBody>
-          <a:bodyPr rtlCol="0" anchor="ctr"/>
-          <a:lstStyle/>
-          <a:p>
-            <a:pPr algn="ctr"/>
-          </a:p>
-        </p:txBody>
-      </p:sp>
-      <p:sp>
-        <p:nvSpPr>
-          <p:cNvPr id="12" name="Rectangle 11"/>
-          <p:cNvSpPr/>
-          <p:nvPr/>
-        </p:nvSpPr>
-        <p:spPr>
-          <a:xfrm>
-            <a:off x="640080" y="2295144"/>
-            <a:ext cx="73152" cy="274320"/>
-          </a:xfrm>
-          <a:prstGeom prst="rect">
-            <a:avLst/>
-          </a:prstGeom>
-          <a:solidFill>
-            <a:srgbClr val="269CCB"/>
-          </a:solidFill>
-          <a:ln>
-            <a:noFill/>
-          </a:ln>
-        </p:spPr>
-        <p:style>
-          <a:lnRef idx="1">
-            <a:schemeClr val="accent1"/>
-          </a:lnRef>
-          <a:fillRef idx="3">
-            <a:schemeClr val="accent1"/>
-          </a:fillRef>
-          <a:effectRef idx="2">
-            <a:schemeClr val="accent1"/>
-          </a:effectRef>
-          <a:fontRef idx="minor">
-            <a:schemeClr val="lt1"/>
-          </a:fontRef>
-        </p:style>
-        <p:txBody>
-          <a:bodyPr rtlCol="0" anchor="ctr"/>
-          <a:lstStyle/>
-          <a:p>
-            <a:pPr algn="ctr"/>
-          </a:p>
-        </p:txBody>
-      </p:sp>
-      <p:sp>
-        <p:nvSpPr>
-          <p:cNvPr id="13" name="TextBox 12"/>
-          <p:cNvSpPr txBox="1"/>
-          <p:nvPr/>
-        </p:nvSpPr>
-        <p:spPr>
-          <a:xfrm>
-            <a:off x="1097280" y="2240279"/>
-            <a:ext cx="10362895" cy="402336"/>
-          </a:xfrm>
-          <a:prstGeom prst="rect">
-            <a:avLst/>
-          </a:prstGeom>
-          <a:noFill/>
-        </p:spPr>
-        <p:txBody>
-          <a:bodyPr wrap="square" anchor="ctr"/>
-          <a:lstStyle/>
-          <a:p>
-            <a:r>
-              <a:rPr sz="1500" b="1" i="0">
-                <a:solidFill>
-                  <a:srgbClr val="333333"/>
-                </a:solidFill>
-                <a:latin typeface="Calibri"/>
-              </a:rPr>
-              <a:t>TRES REQUISITOS FUNCIONALES</a:t>
-            </a:r>
-            <a:r>
-              <a:rPr sz="1500" b="0" i="0">
-                <a:solidFill>
-                  <a:srgbClr val="333333"/>
-                </a:solidFill>
-                <a:latin typeface="Calibri"/>
-              </a:rPr>
-              <a:t> — Tres cosas que la solución </a:t>
-            </a:r>
-            <a:r>
-              <a:rPr sz="1500" b="1" i="0">
-                <a:solidFill>
-                  <a:srgbClr val="333333"/>
-                </a:solidFill>
-                <a:latin typeface="Calibri"/>
-              </a:rPr>
-              <a:t>hace</a:t>
-            </a:r>
-            <a:r>
-              <a:rPr sz="1500" b="0" i="0">
-                <a:solidFill>
-                  <a:srgbClr val="333333"/>
-                </a:solidFill>
-                <a:latin typeface="Calibri"/>
-              </a:rPr>
-              <a:t>, escritas desde el usuario: «el usuario puede…». Sin mencionar tecnología.</a:t>
-            </a:r>
-          </a:p>
-        </p:txBody>
-      </p:sp>
-      <p:sp>
-        <p:nvSpPr>
-          <p:cNvPr id="14" name="Rounded Rectangle 13"/>
-          <p:cNvSpPr/>
-          <p:nvPr/>
-        </p:nvSpPr>
-        <p:spPr>
-          <a:xfrm>
-            <a:off x="457200" y="2825496"/>
-            <a:ext cx="11277295" cy="566928"/>
-          </a:xfrm>
-          <a:prstGeom prst="roundRect">
-            <a:avLst>
-              <a:gd name="adj" fmla="val 12000"/>
-            </a:avLst>
-          </a:prstGeom>
-          <a:solidFill>
-            <a:srgbClr val="F2F2F2"/>
-          </a:solidFill>
-          <a:ln>
-            <a:noFill/>
-          </a:ln>
-        </p:spPr>
-        <p:style>
-          <a:lnRef idx="1">
-            <a:schemeClr val="accent1"/>
-          </a:lnRef>
-          <a:fillRef idx="3">
-            <a:schemeClr val="accent1"/>
-          </a:fillRef>
-          <a:effectRef idx="2">
-            <a:schemeClr val="accent1"/>
-          </a:effectRef>
-          <a:fontRef idx="minor">
-            <a:schemeClr val="lt1"/>
-          </a:fontRef>
-        </p:style>
-        <p:txBody>
-          <a:bodyPr rtlCol="0" anchor="ctr"/>
-          <a:lstStyle/>
-          <a:p>
-            <a:pPr algn="ctr"/>
-          </a:p>
-        </p:txBody>
-      </p:sp>
-      <p:sp>
-        <p:nvSpPr>
-          <p:cNvPr id="15" name="Rectangle 14"/>
-          <p:cNvSpPr/>
-          <p:nvPr/>
-        </p:nvSpPr>
-        <p:spPr>
-          <a:xfrm>
-            <a:off x="640080" y="2971800"/>
-            <a:ext cx="274320" cy="274320"/>
-          </a:xfrm>
-          <a:prstGeom prst="rect">
-            <a:avLst/>
-          </a:prstGeom>
-          <a:solidFill>
-            <a:srgbClr val="FFFFFF"/>
-          </a:solidFill>
-          <a:ln>
-            <a:solidFill>
-              <a:srgbClr val="333333"/>
-            </a:solidFill>
-          </a:ln>
-        </p:spPr>
-        <p:style>
-          <a:lnRef idx="1">
-            <a:schemeClr val="accent1"/>
-          </a:lnRef>
-          <a:fillRef idx="3">
-            <a:schemeClr val="accent1"/>
-          </a:fillRef>
-          <a:effectRef idx="2">
-            <a:schemeClr val="accent1"/>
-          </a:effectRef>
-          <a:fontRef idx="minor">
-            <a:schemeClr val="lt1"/>
-          </a:fontRef>
-        </p:style>
-        <p:txBody>
-          <a:bodyPr rtlCol="0" anchor="ctr"/>
-          <a:lstStyle/>
-          <a:p>
-            <a:pPr algn="ctr"/>
-          </a:p>
-        </p:txBody>
-      </p:sp>
-      <p:sp>
-        <p:nvSpPr>
-          <p:cNvPr id="16" name="Rectangle 15"/>
-          <p:cNvSpPr/>
-          <p:nvPr/>
-        </p:nvSpPr>
-        <p:spPr>
-          <a:xfrm>
-            <a:off x="640080" y="2971800"/>
-            <a:ext cx="73152" cy="274320"/>
-          </a:xfrm>
-          <a:prstGeom prst="rect">
-            <a:avLst/>
-          </a:prstGeom>
-          <a:solidFill>
-            <a:srgbClr val="269CCB"/>
-          </a:solidFill>
-          <a:ln>
-            <a:noFill/>
-          </a:ln>
-        </p:spPr>
-        <p:style>
-          <a:lnRef idx="1">
-            <a:schemeClr val="accent1"/>
-          </a:lnRef>
-          <a:fillRef idx="3">
-            <a:schemeClr val="accent1"/>
-          </a:fillRef>
-          <a:effectRef idx="2">
-            <a:schemeClr val="accent1"/>
-          </a:effectRef>
-          <a:fontRef idx="minor">
-            <a:schemeClr val="lt1"/>
-          </a:fontRef>
-        </p:style>
-        <p:txBody>
-          <a:bodyPr rtlCol="0" anchor="ctr"/>
-          <a:lstStyle/>
-          <a:p>
-            <a:pPr algn="ctr"/>
-          </a:p>
-        </p:txBody>
-      </p:sp>
-      <p:sp>
-        <p:nvSpPr>
-          <p:cNvPr id="17" name="TextBox 16"/>
-          <p:cNvSpPr txBox="1"/>
-          <p:nvPr/>
-        </p:nvSpPr>
-        <p:spPr>
-          <a:xfrm>
-            <a:off x="1097280" y="2916936"/>
-            <a:ext cx="10362895" cy="402336"/>
-          </a:xfrm>
-          <a:prstGeom prst="rect">
-            <a:avLst/>
-          </a:prstGeom>
-          <a:noFill/>
-        </p:spPr>
-        <p:txBody>
-          <a:bodyPr wrap="square" anchor="ctr"/>
-          <a:lstStyle/>
-          <a:p>
-            <a:r>
-              <a:rPr sz="1500" b="1" i="0">
-                <a:solidFill>
-                  <a:srgbClr val="333333"/>
-                </a:solidFill>
-                <a:latin typeface="Calibri"/>
-              </a:rPr>
-              <a:t>DOS REQUISITOS NO FUNCIONALES</a:t>
-            </a:r>
-            <a:r>
-              <a:rPr sz="1500" b="0" i="0">
-                <a:solidFill>
-                  <a:srgbClr val="333333"/>
-                </a:solidFill>
-                <a:latin typeface="Calibri"/>
-              </a:rPr>
-              <a:t> — Dos condiciones que la solución debe cumplir, </a:t>
-            </a:r>
-            <a:r>
-              <a:rPr sz="1500" b="1" i="0">
-                <a:solidFill>
-                  <a:srgbClr val="333333"/>
-                </a:solidFill>
-                <a:latin typeface="Calibri"/>
-              </a:rPr>
-              <a:t>derivadas de las restricciones del árbol de la sesión 6</a:t>
-            </a:r>
-            <a:r>
-              <a:rPr sz="1500" b="0" i="0">
-                <a:solidFill>
-                  <a:srgbClr val="333333"/>
-                </a:solidFill>
-                <a:latin typeface="Calibri"/>
-              </a:rPr>
-              <a:t>. Uno de los dos tiene que ser el indicador ambiental de la sesión 5.</a:t>
-            </a:r>
-          </a:p>
-        </p:txBody>
-      </p:sp>
-      <p:sp>
-        <p:nvSpPr>
-          <p:cNvPr id="18" name="Rounded Rectangle 17"/>
-          <p:cNvSpPr/>
-          <p:nvPr/>
-        </p:nvSpPr>
-        <p:spPr>
-          <a:xfrm>
-            <a:off x="457200" y="3502152"/>
-            <a:ext cx="11277295" cy="566928"/>
-          </a:xfrm>
-          <a:prstGeom prst="roundRect">
-            <a:avLst>
-              <a:gd name="adj" fmla="val 12000"/>
-            </a:avLst>
-          </a:prstGeom>
-          <a:solidFill>
-            <a:srgbClr val="F2F2F2"/>
-          </a:solidFill>
-          <a:ln>
-            <a:noFill/>
-          </a:ln>
-        </p:spPr>
-        <p:style>
-          <a:lnRef idx="1">
-            <a:schemeClr val="accent1"/>
-          </a:lnRef>
-          <a:fillRef idx="3">
-            <a:schemeClr val="accent1"/>
-          </a:fillRef>
-          <a:effectRef idx="2">
-            <a:schemeClr val="accent1"/>
-          </a:effectRef>
-          <a:fontRef idx="minor">
-            <a:schemeClr val="lt1"/>
-          </a:fontRef>
-        </p:style>
-        <p:txBody>
-          <a:bodyPr rtlCol="0" anchor="ctr"/>
-          <a:lstStyle/>
-          <a:p>
-            <a:pPr algn="ctr"/>
-          </a:p>
-        </p:txBody>
-      </p:sp>
-      <p:sp>
-        <p:nvSpPr>
-          <p:cNvPr id="19" name="Rectangle 18"/>
-          <p:cNvSpPr/>
-          <p:nvPr/>
-        </p:nvSpPr>
-        <p:spPr>
-          <a:xfrm>
-            <a:off x="640080" y="3648456"/>
-            <a:ext cx="274320" cy="274320"/>
-          </a:xfrm>
-          <a:prstGeom prst="rect">
-            <a:avLst/>
-          </a:prstGeom>
-          <a:solidFill>
-            <a:srgbClr val="FFFFFF"/>
-          </a:solidFill>
-          <a:ln>
-            <a:solidFill>
-              <a:srgbClr val="333333"/>
-            </a:solidFill>
-          </a:ln>
-        </p:spPr>
-        <p:style>
-          <a:lnRef idx="1">
-            <a:schemeClr val="accent1"/>
-          </a:lnRef>
-          <a:fillRef idx="3">
-            <a:schemeClr val="accent1"/>
-          </a:fillRef>
-          <a:effectRef idx="2">
-            <a:schemeClr val="accent1"/>
-          </a:effectRef>
-          <a:fontRef idx="minor">
-            <a:schemeClr val="lt1"/>
-          </a:fontRef>
-        </p:style>
-        <p:txBody>
-          <a:bodyPr rtlCol="0" anchor="ctr"/>
-          <a:lstStyle/>
-          <a:p>
-            <a:pPr algn="ctr"/>
-          </a:p>
-        </p:txBody>
-      </p:sp>
-      <p:sp>
-        <p:nvSpPr>
-          <p:cNvPr id="20" name="Rectangle 19"/>
-          <p:cNvSpPr/>
-          <p:nvPr/>
-        </p:nvSpPr>
-        <p:spPr>
-          <a:xfrm>
-            <a:off x="640080" y="3648456"/>
-            <a:ext cx="73152" cy="274320"/>
-          </a:xfrm>
-          <a:prstGeom prst="rect">
-            <a:avLst/>
-          </a:prstGeom>
-          <a:solidFill>
-            <a:srgbClr val="269CCB"/>
-          </a:solidFill>
-          <a:ln>
-            <a:noFill/>
-          </a:ln>
-        </p:spPr>
-        <p:style>
-          <a:lnRef idx="1">
-            <a:schemeClr val="accent1"/>
-          </a:lnRef>
-          <a:fillRef idx="3">
-            <a:schemeClr val="accent1"/>
-          </a:fillRef>
-          <a:effectRef idx="2">
-            <a:schemeClr val="accent1"/>
-          </a:effectRef>
-          <a:fontRef idx="minor">
-            <a:schemeClr val="lt1"/>
-          </a:fontRef>
-        </p:style>
-        <p:txBody>
-          <a:bodyPr rtlCol="0" anchor="ctr"/>
-          <a:lstStyle/>
-          <a:p>
-            <a:pPr algn="ctr"/>
-          </a:p>
-        </p:txBody>
-      </p:sp>
-      <p:sp>
-        <p:nvSpPr>
-          <p:cNvPr id="21" name="TextBox 20"/>
-          <p:cNvSpPr txBox="1"/>
-          <p:nvPr/>
-        </p:nvSpPr>
-        <p:spPr>
-          <a:xfrm>
-            <a:off x="1097280" y="3593592"/>
-            <a:ext cx="10362895" cy="402336"/>
-          </a:xfrm>
-          <a:prstGeom prst="rect">
-            <a:avLst/>
-          </a:prstGeom>
-          <a:noFill/>
-        </p:spPr>
-        <p:txBody>
-          <a:bodyPr wrap="square" anchor="ctr"/>
-          <a:lstStyle/>
-          <a:p>
-            <a:r>
-              <a:rPr sz="1500" b="1" i="0">
-                <a:solidFill>
-                  <a:srgbClr val="333333"/>
-                </a:solidFill>
-                <a:latin typeface="Calibri"/>
-              </a:rPr>
-              <a:t>LOS CRITERIOS DE ACEPTACIÓN</a:t>
-            </a:r>
-            <a:r>
-              <a:rPr sz="1500" b="0" i="0">
-                <a:solidFill>
-                  <a:srgbClr val="333333"/>
-                </a:solidFill>
-                <a:latin typeface="Calibri"/>
-              </a:rPr>
-              <a:t> — Para cada uno de los cinco requisitos: cómo se comprueba, con un caso concreto y un umbral. Tiene que poder ejecutarlo otra persona.</a:t>
-            </a:r>
-          </a:p>
-        </p:txBody>
-      </p:sp>
-      <p:sp>
-        <p:nvSpPr>
-          <p:cNvPr id="22" name="Rounded Rectangle 21"/>
-          <p:cNvSpPr/>
-          <p:nvPr/>
-        </p:nvSpPr>
-        <p:spPr>
-          <a:xfrm>
-            <a:off x="457200" y="4178808"/>
-            <a:ext cx="11277295" cy="566928"/>
-          </a:xfrm>
-          <a:prstGeom prst="roundRect">
-            <a:avLst>
-              <a:gd name="adj" fmla="val 12000"/>
-            </a:avLst>
-          </a:prstGeom>
-          <a:solidFill>
-            <a:srgbClr val="F2F2F2"/>
-          </a:solidFill>
-          <a:ln>
-            <a:noFill/>
-          </a:ln>
-        </p:spPr>
-        <p:style>
-          <a:lnRef idx="1">
-            <a:schemeClr val="accent1"/>
-          </a:lnRef>
-          <a:fillRef idx="3">
-            <a:schemeClr val="accent1"/>
-          </a:fillRef>
-          <a:effectRef idx="2">
-            <a:schemeClr val="accent1"/>
-          </a:effectRef>
-          <a:fontRef idx="minor">
-            <a:schemeClr val="lt1"/>
-          </a:fontRef>
-        </p:style>
-        <p:txBody>
-          <a:bodyPr rtlCol="0" anchor="ctr"/>
-          <a:lstStyle/>
-          <a:p>
-            <a:pPr algn="ctr"/>
-          </a:p>
-        </p:txBody>
-      </p:sp>
-      <p:sp>
-        <p:nvSpPr>
-          <p:cNvPr id="23" name="Rectangle 22"/>
-          <p:cNvSpPr/>
-          <p:nvPr/>
-        </p:nvSpPr>
-        <p:spPr>
-          <a:xfrm>
-            <a:off x="640080" y="4325112"/>
-            <a:ext cx="274320" cy="274320"/>
-          </a:xfrm>
-          <a:prstGeom prst="rect">
-            <a:avLst/>
-          </a:prstGeom>
-          <a:solidFill>
-            <a:srgbClr val="FFFFFF"/>
-          </a:solidFill>
-          <a:ln>
-            <a:solidFill>
-              <a:srgbClr val="333333"/>
-            </a:solidFill>
-          </a:ln>
-        </p:spPr>
-        <p:style>
-          <a:lnRef idx="1">
-            <a:schemeClr val="accent1"/>
-          </a:lnRef>
-          <a:fillRef idx="3">
-            <a:schemeClr val="accent1"/>
-          </a:fillRef>
-          <a:effectRef idx="2">
-            <a:schemeClr val="accent1"/>
-          </a:effectRef>
-          <a:fontRef idx="minor">
-            <a:schemeClr val="lt1"/>
-          </a:fontRef>
-        </p:style>
-        <p:txBody>
-          <a:bodyPr rtlCol="0" anchor="ctr"/>
-          <a:lstStyle/>
-          <a:p>
-            <a:pPr algn="ctr"/>
-          </a:p>
-        </p:txBody>
-      </p:sp>
-      <p:sp>
-        <p:nvSpPr>
-          <p:cNvPr id="24" name="Rectangle 23"/>
-          <p:cNvSpPr/>
-          <p:nvPr/>
-        </p:nvSpPr>
-        <p:spPr>
-          <a:xfrm>
-            <a:off x="640080" y="4325112"/>
-            <a:ext cx="73152" cy="274320"/>
-          </a:xfrm>
-          <a:prstGeom prst="rect">
-            <a:avLst/>
-          </a:prstGeom>
-          <a:solidFill>
-            <a:srgbClr val="269CCB"/>
-          </a:solidFill>
-          <a:ln>
-            <a:noFill/>
-          </a:ln>
-        </p:spPr>
-        <p:style>
-          <a:lnRef idx="1">
-            <a:schemeClr val="accent1"/>
-          </a:lnRef>
-          <a:fillRef idx="3">
-            <a:schemeClr val="accent1"/>
-          </a:fillRef>
-          <a:effectRef idx="2">
-            <a:schemeClr val="accent1"/>
-          </a:effectRef>
-          <a:fontRef idx="minor">
-            <a:schemeClr val="lt1"/>
-          </a:fontRef>
-        </p:style>
-        <p:txBody>
-          <a:bodyPr rtlCol="0" anchor="ctr"/>
-          <a:lstStyle/>
-          <a:p>
-            <a:pPr algn="ctr"/>
-          </a:p>
-        </p:txBody>
-      </p:sp>
-      <p:sp>
-        <p:nvSpPr>
-          <p:cNvPr id="25" name="TextBox 24"/>
-          <p:cNvSpPr txBox="1"/>
-          <p:nvPr/>
-        </p:nvSpPr>
-        <p:spPr>
-          <a:xfrm>
-            <a:off x="1097280" y="4270248"/>
-            <a:ext cx="10362895" cy="402336"/>
-          </a:xfrm>
-          <a:prstGeom prst="rect">
-            <a:avLst/>
-          </a:prstGeom>
-          <a:noFill/>
-        </p:spPr>
-        <p:txBody>
-          <a:bodyPr wrap="square" anchor="ctr"/>
-          <a:lstStyle/>
-          <a:p>
-            <a:r>
-              <a:rPr sz="1500" b="1" i="0">
-                <a:solidFill>
-                  <a:srgbClr val="333333"/>
-                </a:solidFill>
-                <a:latin typeface="Calibri"/>
-              </a:rPr>
-              <a:t>EL PLAN DE HITOS</a:t>
-            </a:r>
-            <a:r>
-              <a:rPr sz="1500" b="0" i="0">
-                <a:solidFill>
-                  <a:srgbClr val="333333"/>
-                </a:solidFill>
-                <a:latin typeface="Calibri"/>
-              </a:rPr>
-              <a:t> — Qué queda </a:t>
-            </a:r>
-            <a:r>
-              <a:rPr sz="1500" b="1" i="0">
-                <a:solidFill>
-                  <a:srgbClr val="333333"/>
-                </a:solidFill>
-                <a:latin typeface="Calibri"/>
-              </a:rPr>
-              <a:t>terminado y verificable</a:t>
-            </a:r>
-            <a:r>
-              <a:rPr sz="1500" b="0" i="0">
-                <a:solidFill>
-                  <a:srgbClr val="333333"/>
-                </a:solidFill>
-                <a:latin typeface="Calibri"/>
-              </a:rPr>
-              <a:t> en cada una de las sesiones 8, 9, 10, 11, 12 y 14. Y la decisión de hoy que sería carísima cambiar en la Clase 14.</a:t>
-            </a:r>
-          </a:p>
-        </p:txBody>
-      </p:sp>
-      <p:sp>
-        <p:nvSpPr>
-          <p:cNvPr id="26" name="TextBox 25"/>
-          <p:cNvSpPr txBox="1"/>
-          <p:nvPr/>
-        </p:nvSpPr>
-        <p:spPr>
-          <a:xfrm>
-            <a:off x="11185855" y="6473952"/>
-            <a:ext cx="640080" cy="274320"/>
-          </a:xfrm>
-          <a:prstGeom prst="rect">
-            <a:avLst/>
-          </a:prstGeom>
-          <a:noFill/>
-        </p:spPr>
-        <p:txBody>
-          <a:bodyPr wrap="square">
-            <a:spAutoFit/>
-          </a:bodyPr>
-          <a:lstStyle/>
-          <a:p>
-            <a:pPr algn="r"/>
-            <a:r>
-              <a:rPr sz="1100" b="0" i="0">
-                <a:solidFill>
-                  <a:srgbClr val="666666"/>
-                </a:solidFill>
-                <a:latin typeface="Calibri"/>
-              </a:rPr>
-              <a:t>13</a:t>
-            </a:r>
-          </a:p>
-        </p:txBody>
-      </p:sp>
-    </p:spTree>
-  </p:cSld>
-  <p:clrMapOvr>
-    <a:masterClrMapping/>
-  </p:clrMapOvr>
-</p:sld>
-</file>
-
-<file path=ppt/slides/slide14.xml><?xml version="1.0" encoding="utf-8"?>
-<p:sld xmlns:a="http://schemas.openxmlformats.org/drawingml/2006/main" xmlns:p="http://schemas.openxmlformats.org/presentationml/2006/main" xmlns:r="http://schemas.openxmlformats.org/officeDocument/2006/relationships">
-  <p:cSld>
-    <p:bg>
-      <p:bgPr>
-        <a:solidFill>
-          <a:srgbClr val="FFFFFF"/>
-        </a:solidFill>
-        <a:effectLst/>
-      </p:bgPr>
-    </p:bg>
-    <p:spTree>
-      <p:nvGrpSpPr>
-        <p:cNvPr id="1" name=""/>
-        <p:cNvGrpSpPr/>
-        <p:nvPr/>
-      </p:nvGrpSpPr>
-      <p:grpSpPr/>
-      <p:sp>
-        <p:nvSpPr>
-          <p:cNvPr id="2" name="Rectangle 1"/>
-          <p:cNvSpPr/>
-          <p:nvPr/>
-        </p:nvSpPr>
-        <p:spPr>
-          <a:xfrm>
-            <a:off x="0" y="0"/>
-            <a:ext cx="12191695" cy="1170432"/>
-          </a:xfrm>
-          <a:prstGeom prst="rect">
-            <a:avLst/>
-          </a:prstGeom>
-          <a:solidFill>
-            <a:srgbClr val="095292"/>
-          </a:solidFill>
-          <a:ln>
-            <a:noFill/>
-          </a:ln>
-        </p:spPr>
-        <p:style>
-          <a:lnRef idx="1">
-            <a:schemeClr val="accent1"/>
-          </a:lnRef>
-          <a:fillRef idx="3">
-            <a:schemeClr val="accent1"/>
-          </a:fillRef>
-          <a:effectRef idx="2">
-            <a:schemeClr val="accent1"/>
-          </a:effectRef>
-          <a:fontRef idx="minor">
-            <a:schemeClr val="lt1"/>
-          </a:fontRef>
-        </p:style>
-        <p:txBody>
-          <a:bodyPr rtlCol="0" anchor="ctr"/>
-          <a:lstStyle/>
-          <a:p>
-            <a:pPr algn="ctr"/>
-          </a:p>
-        </p:txBody>
-      </p:sp>
-      <p:sp>
-        <p:nvSpPr>
-          <p:cNvPr id="3" name="Rectangle 2"/>
-          <p:cNvSpPr/>
-          <p:nvPr/>
-        </p:nvSpPr>
-        <p:spPr>
-          <a:xfrm>
-            <a:off x="0" y="1170432"/>
-            <a:ext cx="12191695" cy="41148"/>
-          </a:xfrm>
-          <a:prstGeom prst="rect">
-            <a:avLst/>
-          </a:prstGeom>
-          <a:solidFill>
-            <a:srgbClr val="FFD000"/>
-          </a:solidFill>
-          <a:ln>
-            <a:noFill/>
-          </a:ln>
-        </p:spPr>
-        <p:style>
-          <a:lnRef idx="1">
-            <a:schemeClr val="accent1"/>
-          </a:lnRef>
-          <a:fillRef idx="3">
-            <a:schemeClr val="accent1"/>
-          </a:fillRef>
-          <a:effectRef idx="2">
-            <a:schemeClr val="accent1"/>
-          </a:effectRef>
-          <a:fontRef idx="minor">
-            <a:schemeClr val="lt1"/>
-          </a:fontRef>
-        </p:style>
-        <p:txBody>
-          <a:bodyPr rtlCol="0" anchor="ctr"/>
-          <a:lstStyle/>
-          <a:p>
-            <a:pPr algn="ctr"/>
-          </a:p>
-        </p:txBody>
-      </p:sp>
-      <p:sp>
-        <p:nvSpPr>
-          <p:cNvPr id="4" name="TextBox 3"/>
-          <p:cNvSpPr txBox="1"/>
-          <p:nvPr/>
-        </p:nvSpPr>
-        <p:spPr>
-          <a:xfrm>
-            <a:off x="457200" y="164592"/>
-            <a:ext cx="11277295" cy="384048"/>
-          </a:xfrm>
-          <a:prstGeom prst="rect">
-            <a:avLst/>
-          </a:prstGeom>
-          <a:noFill/>
-        </p:spPr>
-        <p:txBody>
-          <a:bodyPr wrap="square">
-            <a:spAutoFit/>
-          </a:bodyPr>
-          <a:lstStyle/>
-          <a:p>
-            <a:r>
-              <a:rPr sz="2600" b="1" i="0">
-                <a:solidFill>
-                  <a:srgbClr val="FFFFFF"/>
-                </a:solidFill>
-                <a:latin typeface="Calibri"/>
-              </a:rPr>
-              <a:t>Cómo se expone en 3 minutos</a:t>
-            </a:r>
-          </a:p>
-        </p:txBody>
-      </p:sp>
-      <p:sp>
-        <p:nvSpPr>
-          <p:cNvPr id="5" name="TextBox 4"/>
-          <p:cNvSpPr txBox="1"/>
-          <p:nvPr/>
-        </p:nvSpPr>
-        <p:spPr>
-          <a:xfrm>
-            <a:off x="457200" y="566928"/>
-            <a:ext cx="11277295" cy="411480"/>
-          </a:xfrm>
-          <a:prstGeom prst="rect">
-            <a:avLst/>
-          </a:prstGeom>
-          <a:noFill/>
-        </p:spPr>
-        <p:txBody>
-          <a:bodyPr wrap="square">
-            <a:spAutoFit/>
-          </a:bodyPr>
-          <a:lstStyle/>
-          <a:p>
-            <a:r>
-              <a:rPr sz="1400" b="0" i="0">
-                <a:solidFill>
-                  <a:srgbClr val="B8D8EE"/>
-                </a:solidFill>
-                <a:latin typeface="Calibri"/>
-              </a:rPr>
-              <a:t>Habla el vocero con la pantalla ya compartida · cronómetro en pantalla · se corta al llegar a cero</a:t>
-            </a:r>
-          </a:p>
-        </p:txBody>
-      </p:sp>
-      <p:sp>
-        <p:nvSpPr>
-          <p:cNvPr id="6" name="Rounded Rectangle 5"/>
-          <p:cNvSpPr/>
-          <p:nvPr/>
-        </p:nvSpPr>
-        <p:spPr>
-          <a:xfrm>
-            <a:off x="457200" y="1444752"/>
-            <a:ext cx="11277295" cy="908913"/>
-          </a:xfrm>
-          <a:prstGeom prst="roundRect">
-            <a:avLst>
-              <a:gd name="adj" fmla="val 12000"/>
-            </a:avLst>
-          </a:prstGeom>
-          <a:solidFill>
-            <a:srgbClr val="F2F2F2"/>
-          </a:solidFill>
-          <a:ln>
-            <a:noFill/>
-          </a:ln>
-        </p:spPr>
-        <p:style>
-          <a:lnRef idx="1">
-            <a:schemeClr val="accent1"/>
-          </a:lnRef>
-          <a:fillRef idx="3">
-            <a:schemeClr val="accent1"/>
-          </a:fillRef>
-          <a:effectRef idx="2">
-            <a:schemeClr val="accent1"/>
-          </a:effectRef>
-          <a:fontRef idx="minor">
-            <a:schemeClr val="lt1"/>
-          </a:fontRef>
-        </p:style>
-        <p:txBody>
-          <a:bodyPr rtlCol="0" anchor="ctr"/>
-          <a:lstStyle/>
-          <a:p>
-            <a:pPr algn="ctr"/>
-          </a:p>
-        </p:txBody>
-      </p:sp>
-      <p:sp>
-        <p:nvSpPr>
-          <p:cNvPr id="7" name="Rounded Rectangle 6"/>
-          <p:cNvSpPr/>
-          <p:nvPr/>
-        </p:nvSpPr>
-        <p:spPr>
-          <a:xfrm>
-            <a:off x="594360" y="1679752"/>
-            <a:ext cx="438912" cy="438912"/>
-          </a:xfrm>
-          <a:prstGeom prst="roundRect">
-            <a:avLst>
-              <a:gd name="adj" fmla="val 12000"/>
-            </a:avLst>
-          </a:prstGeom>
-          <a:solidFill>
-            <a:srgbClr val="095292"/>
-          </a:solidFill>
-          <a:ln>
-            <a:noFill/>
-          </a:ln>
-        </p:spPr>
-        <p:style>
-          <a:lnRef idx="1">
-            <a:schemeClr val="accent1"/>
-          </a:lnRef>
-          <a:fillRef idx="3">
-            <a:schemeClr val="accent1"/>
-          </a:fillRef>
-          <a:effectRef idx="2">
-            <a:schemeClr val="accent1"/>
-          </a:effectRef>
-          <a:fontRef idx="minor">
-            <a:schemeClr val="lt1"/>
-          </a:fontRef>
-        </p:style>
-        <p:txBody>
-          <a:bodyPr rtlCol="0" anchor="ctr"/>
-          <a:lstStyle/>
-          <a:p>
-            <a:pPr algn="ctr"/>
-          </a:p>
-        </p:txBody>
-      </p:sp>
-      <p:sp>
-        <p:nvSpPr>
-          <p:cNvPr id="8" name="TextBox 7"/>
-          <p:cNvSpPr txBox="1"/>
-          <p:nvPr/>
-        </p:nvSpPr>
-        <p:spPr>
-          <a:xfrm>
-            <a:off x="594360" y="1679752"/>
-            <a:ext cx="438912" cy="438912"/>
-          </a:xfrm>
-          <a:prstGeom prst="rect">
-            <a:avLst/>
-          </a:prstGeom>
-          <a:noFill/>
-        </p:spPr>
-        <p:txBody>
-          <a:bodyPr wrap="square" anchor="ctr"/>
-          <a:lstStyle/>
-          <a:p>
-            <a:pPr algn="ctr"/>
-            <a:r>
-              <a:rPr sz="1600" b="1" i="0">
-                <a:solidFill>
-                  <a:srgbClr val="FFFFFF"/>
-                </a:solidFill>
-                <a:latin typeface="Calibri"/>
-              </a:rPr>
-              <a:t>1</a:t>
-            </a:r>
-          </a:p>
-        </p:txBody>
-      </p:sp>
-      <p:sp>
-        <p:nvSpPr>
-          <p:cNvPr id="9" name="TextBox 8"/>
-          <p:cNvSpPr txBox="1"/>
-          <p:nvPr/>
-        </p:nvSpPr>
-        <p:spPr>
-          <a:xfrm>
-            <a:off x="1188720" y="1536192"/>
-            <a:ext cx="10271455" cy="744321"/>
-          </a:xfrm>
-          <a:prstGeom prst="rect">
-            <a:avLst/>
-          </a:prstGeom>
-          <a:noFill/>
-        </p:spPr>
-        <p:txBody>
-          <a:bodyPr wrap="square" anchor="ctr"/>
-          <a:lstStyle/>
-          <a:p>
-            <a:r>
-              <a:rPr sz="1500" b="1" i="0">
-                <a:solidFill>
-                  <a:srgbClr val="095292"/>
-                </a:solidFill>
-                <a:latin typeface="Calibri"/>
-              </a:rPr>
-              <a:t>30 s · La fase</a:t>
-            </a:r>
-          </a:p>
-          <a:p>
-            <a:pPr>
-              <a:spcBef>
-                <a:spcPts val="200"/>
-              </a:spcBef>
-            </a:pPr>
-            <a:r>
-              <a:rPr sz="1300" b="0" i="0">
-                <a:solidFill>
-                  <a:srgbClr val="333333"/>
-                </a:solidFill>
-                <a:latin typeface="Calibri"/>
-              </a:rPr>
-              <a:t>En qué fase están y qué falta para cerrarla. Es el minuto obligatorio.</a:t>
-            </a:r>
-          </a:p>
-        </p:txBody>
-      </p:sp>
-      <p:sp>
-        <p:nvSpPr>
-          <p:cNvPr id="10" name="Rounded Rectangle 9"/>
-          <p:cNvSpPr/>
-          <p:nvPr/>
-        </p:nvSpPr>
-        <p:spPr>
-          <a:xfrm>
-            <a:off x="457200" y="2445105"/>
-            <a:ext cx="11277295" cy="908913"/>
-          </a:xfrm>
-          <a:prstGeom prst="roundRect">
-            <a:avLst>
-              <a:gd name="adj" fmla="val 12000"/>
-            </a:avLst>
-          </a:prstGeom>
-          <a:solidFill>
-            <a:srgbClr val="E8F4FA"/>
-          </a:solidFill>
-          <a:ln>
-            <a:noFill/>
-          </a:ln>
-        </p:spPr>
-        <p:style>
-          <a:lnRef idx="1">
-            <a:schemeClr val="accent1"/>
-          </a:lnRef>
-          <a:fillRef idx="3">
-            <a:schemeClr val="accent1"/>
-          </a:fillRef>
-          <a:effectRef idx="2">
-            <a:schemeClr val="accent1"/>
-          </a:effectRef>
-          <a:fontRef idx="minor">
-            <a:schemeClr val="lt1"/>
-          </a:fontRef>
-        </p:style>
-        <p:txBody>
-          <a:bodyPr rtlCol="0" anchor="ctr"/>
-          <a:lstStyle/>
-          <a:p>
-            <a:pPr algn="ctr"/>
-          </a:p>
-        </p:txBody>
-      </p:sp>
-      <p:sp>
-        <p:nvSpPr>
-          <p:cNvPr id="11" name="Rounded Rectangle 10"/>
-          <p:cNvSpPr/>
-          <p:nvPr/>
-        </p:nvSpPr>
-        <p:spPr>
-          <a:xfrm>
-            <a:off x="594360" y="2680106"/>
-            <a:ext cx="438912" cy="438912"/>
-          </a:xfrm>
-          <a:prstGeom prst="roundRect">
-            <a:avLst>
-              <a:gd name="adj" fmla="val 12000"/>
-            </a:avLst>
-          </a:prstGeom>
-          <a:solidFill>
-            <a:srgbClr val="095292"/>
-          </a:solidFill>
-          <a:ln>
-            <a:noFill/>
-          </a:ln>
-        </p:spPr>
-        <p:style>
-          <a:lnRef idx="1">
-            <a:schemeClr val="accent1"/>
-          </a:lnRef>
-          <a:fillRef idx="3">
-            <a:schemeClr val="accent1"/>
-          </a:fillRef>
-          <a:effectRef idx="2">
-            <a:schemeClr val="accent1"/>
-          </a:effectRef>
-          <a:fontRef idx="minor">
-            <a:schemeClr val="lt1"/>
-          </a:fontRef>
-        </p:style>
-        <p:txBody>
-          <a:bodyPr rtlCol="0" anchor="ctr"/>
-          <a:lstStyle/>
-          <a:p>
-            <a:pPr algn="ctr"/>
-          </a:p>
-        </p:txBody>
-      </p:sp>
-      <p:sp>
-        <p:nvSpPr>
-          <p:cNvPr id="12" name="TextBox 11"/>
-          <p:cNvSpPr txBox="1"/>
-          <p:nvPr/>
-        </p:nvSpPr>
-        <p:spPr>
-          <a:xfrm>
-            <a:off x="594360" y="2680106"/>
-            <a:ext cx="438912" cy="438912"/>
-          </a:xfrm>
-          <a:prstGeom prst="rect">
-            <a:avLst/>
-          </a:prstGeom>
-          <a:noFill/>
-        </p:spPr>
-        <p:txBody>
-          <a:bodyPr wrap="square" anchor="ctr"/>
-          <a:lstStyle/>
-          <a:p>
-            <a:pPr algn="ctr"/>
-            <a:r>
-              <a:rPr sz="1600" b="1" i="0">
-                <a:solidFill>
-                  <a:srgbClr val="FFFFFF"/>
-                </a:solidFill>
-                <a:latin typeface="Calibri"/>
-              </a:rPr>
-              <a:t>2</a:t>
-            </a:r>
-          </a:p>
-        </p:txBody>
-      </p:sp>
-      <p:sp>
-        <p:nvSpPr>
-          <p:cNvPr id="13" name="TextBox 12"/>
-          <p:cNvSpPr txBox="1"/>
-          <p:nvPr/>
-        </p:nvSpPr>
-        <p:spPr>
-          <a:xfrm>
-            <a:off x="1188720" y="2536545"/>
-            <a:ext cx="10271455" cy="744321"/>
-          </a:xfrm>
-          <a:prstGeom prst="rect">
-            <a:avLst/>
-          </a:prstGeom>
-          <a:noFill/>
-        </p:spPr>
-        <p:txBody>
-          <a:bodyPr wrap="square" anchor="ctr"/>
-          <a:lstStyle/>
-          <a:p>
-            <a:r>
-              <a:rPr sz="1500" b="1" i="0">
-                <a:solidFill>
-                  <a:srgbClr val="095292"/>
-                </a:solidFill>
-                <a:latin typeface="Calibri"/>
-              </a:rPr>
-              <a:t>50 s · Los requisitos</a:t>
-            </a:r>
-          </a:p>
-          <a:p>
-            <a:pPr>
-              <a:spcBef>
-                <a:spcPts val="200"/>
-              </a:spcBef>
-            </a:pPr>
-            <a:r>
-              <a:rPr sz="1300" b="0" i="0">
-                <a:solidFill>
-                  <a:srgbClr val="333333"/>
-                </a:solidFill>
-                <a:latin typeface="Calibri"/>
-              </a:rPr>
-              <a:t>Uno funcional y uno no funcional, leídos tal cual.</a:t>
-            </a:r>
-          </a:p>
-        </p:txBody>
-      </p:sp>
-      <p:sp>
-        <p:nvSpPr>
-          <p:cNvPr id="14" name="Rounded Rectangle 13"/>
-          <p:cNvSpPr/>
-          <p:nvPr/>
-        </p:nvSpPr>
-        <p:spPr>
-          <a:xfrm>
-            <a:off x="457200" y="3445459"/>
-            <a:ext cx="11277295" cy="908913"/>
-          </a:xfrm>
-          <a:prstGeom prst="roundRect">
-            <a:avLst>
-              <a:gd name="adj" fmla="val 12000"/>
-            </a:avLst>
-          </a:prstGeom>
-          <a:solidFill>
-            <a:srgbClr val="F2F2F2"/>
-          </a:solidFill>
-          <a:ln>
-            <a:noFill/>
-          </a:ln>
-        </p:spPr>
-        <p:style>
-          <a:lnRef idx="1">
-            <a:schemeClr val="accent1"/>
-          </a:lnRef>
-          <a:fillRef idx="3">
-            <a:schemeClr val="accent1"/>
-          </a:fillRef>
-          <a:effectRef idx="2">
-            <a:schemeClr val="accent1"/>
-          </a:effectRef>
-          <a:fontRef idx="minor">
-            <a:schemeClr val="lt1"/>
-          </a:fontRef>
-        </p:style>
-        <p:txBody>
-          <a:bodyPr rtlCol="0" anchor="ctr"/>
-          <a:lstStyle/>
-          <a:p>
-            <a:pPr algn="ctr"/>
-          </a:p>
-        </p:txBody>
-      </p:sp>
-      <p:sp>
-        <p:nvSpPr>
-          <p:cNvPr id="15" name="Rounded Rectangle 14"/>
-          <p:cNvSpPr/>
-          <p:nvPr/>
-        </p:nvSpPr>
-        <p:spPr>
-          <a:xfrm>
-            <a:off x="594360" y="3680460"/>
-            <a:ext cx="438912" cy="438912"/>
-          </a:xfrm>
-          <a:prstGeom prst="roundRect">
-            <a:avLst>
-              <a:gd name="adj" fmla="val 12000"/>
-            </a:avLst>
-          </a:prstGeom>
-          <a:solidFill>
-            <a:srgbClr val="095292"/>
-          </a:solidFill>
-          <a:ln>
-            <a:noFill/>
-          </a:ln>
-        </p:spPr>
-        <p:style>
-          <a:lnRef idx="1">
-            <a:schemeClr val="accent1"/>
-          </a:lnRef>
-          <a:fillRef idx="3">
-            <a:schemeClr val="accent1"/>
-          </a:fillRef>
-          <a:effectRef idx="2">
-            <a:schemeClr val="accent1"/>
-          </a:effectRef>
-          <a:fontRef idx="minor">
-            <a:schemeClr val="lt1"/>
-          </a:fontRef>
-        </p:style>
-        <p:txBody>
-          <a:bodyPr rtlCol="0" anchor="ctr"/>
-          <a:lstStyle/>
-          <a:p>
-            <a:pPr algn="ctr"/>
-          </a:p>
-        </p:txBody>
-      </p:sp>
-      <p:sp>
-        <p:nvSpPr>
-          <p:cNvPr id="16" name="TextBox 15"/>
-          <p:cNvSpPr txBox="1"/>
-          <p:nvPr/>
-        </p:nvSpPr>
-        <p:spPr>
-          <a:xfrm>
-            <a:off x="594360" y="3680460"/>
-            <a:ext cx="438912" cy="438912"/>
-          </a:xfrm>
-          <a:prstGeom prst="rect">
-            <a:avLst/>
-          </a:prstGeom>
-          <a:noFill/>
-        </p:spPr>
-        <p:txBody>
-          <a:bodyPr wrap="square" anchor="ctr"/>
-          <a:lstStyle/>
-          <a:p>
-            <a:pPr algn="ctr"/>
-            <a:r>
-              <a:rPr sz="1600" b="1" i="0">
-                <a:solidFill>
-                  <a:srgbClr val="FFFFFF"/>
-                </a:solidFill>
-                <a:latin typeface="Calibri"/>
-              </a:rPr>
-              <a:t>3</a:t>
-            </a:r>
-          </a:p>
-        </p:txBody>
-      </p:sp>
-      <p:sp>
-        <p:nvSpPr>
-          <p:cNvPr id="17" name="TextBox 16"/>
-          <p:cNvSpPr txBox="1"/>
-          <p:nvPr/>
-        </p:nvSpPr>
-        <p:spPr>
-          <a:xfrm>
-            <a:off x="1188720" y="3536899"/>
-            <a:ext cx="10271455" cy="744321"/>
-          </a:xfrm>
-          <a:prstGeom prst="rect">
-            <a:avLst/>
-          </a:prstGeom>
-          <a:noFill/>
-        </p:spPr>
-        <p:txBody>
-          <a:bodyPr wrap="square" anchor="ctr"/>
-          <a:lstStyle/>
-          <a:p>
-            <a:r>
-              <a:rPr sz="1500" b="1" i="0">
-                <a:solidFill>
-                  <a:srgbClr val="095292"/>
-                </a:solidFill>
-                <a:latin typeface="Calibri"/>
-              </a:rPr>
-              <a:t>50 s · El criterio de aceptación</a:t>
-            </a:r>
-          </a:p>
-          <a:p>
-            <a:pPr>
-              <a:spcBef>
-                <a:spcPts val="200"/>
-              </a:spcBef>
-            </a:pPr>
-            <a:r>
-              <a:rPr sz="1300" b="0" i="0">
-                <a:solidFill>
-                  <a:srgbClr val="333333"/>
-                </a:solidFill>
-                <a:latin typeface="Calibri"/>
-              </a:rPr>
-              <a:t>De ese requisito: cómo se comprueba y con qué umbral.</a:t>
-            </a:r>
-          </a:p>
-        </p:txBody>
-      </p:sp>
-      <p:sp>
-        <p:nvSpPr>
-          <p:cNvPr id="18" name="Rounded Rectangle 17"/>
-          <p:cNvSpPr/>
-          <p:nvPr/>
-        </p:nvSpPr>
-        <p:spPr>
-          <a:xfrm>
-            <a:off x="457200" y="4445812"/>
-            <a:ext cx="11277295" cy="908913"/>
-          </a:xfrm>
-          <a:prstGeom prst="roundRect">
-            <a:avLst>
-              <a:gd name="adj" fmla="val 12000"/>
-            </a:avLst>
-          </a:prstGeom>
-          <a:solidFill>
-            <a:srgbClr val="E8F4FA"/>
-          </a:solidFill>
-          <a:ln>
-            <a:noFill/>
-          </a:ln>
-        </p:spPr>
-        <p:style>
-          <a:lnRef idx="1">
-            <a:schemeClr val="accent1"/>
-          </a:lnRef>
-          <a:fillRef idx="3">
-            <a:schemeClr val="accent1"/>
-          </a:fillRef>
-          <a:effectRef idx="2">
-            <a:schemeClr val="accent1"/>
-          </a:effectRef>
-          <a:fontRef idx="minor">
-            <a:schemeClr val="lt1"/>
-          </a:fontRef>
-        </p:style>
-        <p:txBody>
-          <a:bodyPr rtlCol="0" anchor="ctr"/>
-          <a:lstStyle/>
-          <a:p>
-            <a:pPr algn="ctr"/>
-          </a:p>
-        </p:txBody>
-      </p:sp>
-      <p:sp>
-        <p:nvSpPr>
-          <p:cNvPr id="19" name="Rounded Rectangle 18"/>
-          <p:cNvSpPr/>
-          <p:nvPr/>
-        </p:nvSpPr>
-        <p:spPr>
-          <a:xfrm>
-            <a:off x="594360" y="4680813"/>
-            <a:ext cx="438912" cy="438912"/>
-          </a:xfrm>
-          <a:prstGeom prst="roundRect">
-            <a:avLst>
-              <a:gd name="adj" fmla="val 12000"/>
-            </a:avLst>
-          </a:prstGeom>
-          <a:solidFill>
-            <a:srgbClr val="095292"/>
-          </a:solidFill>
-          <a:ln>
-            <a:noFill/>
-          </a:ln>
-        </p:spPr>
-        <p:style>
-          <a:lnRef idx="1">
-            <a:schemeClr val="accent1"/>
-          </a:lnRef>
-          <a:fillRef idx="3">
-            <a:schemeClr val="accent1"/>
-          </a:fillRef>
-          <a:effectRef idx="2">
-            <a:schemeClr val="accent1"/>
-          </a:effectRef>
-          <a:fontRef idx="minor">
-            <a:schemeClr val="lt1"/>
-          </a:fontRef>
-        </p:style>
-        <p:txBody>
-          <a:bodyPr rtlCol="0" anchor="ctr"/>
-          <a:lstStyle/>
-          <a:p>
-            <a:pPr algn="ctr"/>
-          </a:p>
-        </p:txBody>
-      </p:sp>
-      <p:sp>
-        <p:nvSpPr>
-          <p:cNvPr id="20" name="TextBox 19"/>
-          <p:cNvSpPr txBox="1"/>
-          <p:nvPr/>
-        </p:nvSpPr>
-        <p:spPr>
-          <a:xfrm>
-            <a:off x="594360" y="4680813"/>
-            <a:ext cx="438912" cy="438912"/>
-          </a:xfrm>
-          <a:prstGeom prst="rect">
-            <a:avLst/>
-          </a:prstGeom>
-          <a:noFill/>
-        </p:spPr>
-        <p:txBody>
-          <a:bodyPr wrap="square" anchor="ctr"/>
-          <a:lstStyle/>
-          <a:p>
-            <a:pPr algn="ctr"/>
-            <a:r>
-              <a:rPr sz="1600" b="1" i="0">
-                <a:solidFill>
-                  <a:srgbClr val="FFFFFF"/>
-                </a:solidFill>
-                <a:latin typeface="Calibri"/>
-              </a:rPr>
-              <a:t>4</a:t>
-            </a:r>
-          </a:p>
-        </p:txBody>
-      </p:sp>
-      <p:sp>
-        <p:nvSpPr>
-          <p:cNvPr id="21" name="TextBox 20"/>
-          <p:cNvSpPr txBox="1"/>
-          <p:nvPr/>
-        </p:nvSpPr>
-        <p:spPr>
-          <a:xfrm>
-            <a:off x="1188720" y="4537252"/>
-            <a:ext cx="10271455" cy="744321"/>
-          </a:xfrm>
-          <a:prstGeom prst="rect">
-            <a:avLst/>
-          </a:prstGeom>
-          <a:noFill/>
-        </p:spPr>
-        <p:txBody>
-          <a:bodyPr wrap="square" anchor="ctr"/>
-          <a:lstStyle/>
-          <a:p>
-            <a:r>
-              <a:rPr sz="1500" b="1" i="0">
-                <a:solidFill>
-                  <a:srgbClr val="095292"/>
-                </a:solidFill>
-                <a:latin typeface="Calibri"/>
-              </a:rPr>
-              <a:t>40 s · El plan de hitos</a:t>
-            </a:r>
-          </a:p>
-          <a:p>
-            <a:pPr>
-              <a:spcBef>
-                <a:spcPts val="200"/>
-              </a:spcBef>
-            </a:pPr>
-            <a:r>
-              <a:rPr sz="1300" b="0" i="0">
-                <a:solidFill>
-                  <a:srgbClr val="333333"/>
-                </a:solidFill>
-                <a:latin typeface="Calibri"/>
-              </a:rPr>
-              <a:t>Qué queda listo en la Clase 10 y en la 12.</a:t>
-            </a:r>
-          </a:p>
-        </p:txBody>
-      </p:sp>
-      <p:sp>
-        <p:nvSpPr>
-          <p:cNvPr id="22" name="Rounded Rectangle 21"/>
-          <p:cNvSpPr/>
-          <p:nvPr/>
-        </p:nvSpPr>
-        <p:spPr>
-          <a:xfrm>
-            <a:off x="457200" y="5446166"/>
-            <a:ext cx="11277295" cy="908913"/>
-          </a:xfrm>
-          <a:prstGeom prst="roundRect">
-            <a:avLst>
-              <a:gd name="adj" fmla="val 12000"/>
-            </a:avLst>
-          </a:prstGeom>
-          <a:solidFill>
-            <a:srgbClr val="F2F2F2"/>
-          </a:solidFill>
-          <a:ln>
-            <a:noFill/>
-          </a:ln>
-        </p:spPr>
-        <p:style>
-          <a:lnRef idx="1">
-            <a:schemeClr val="accent1"/>
-          </a:lnRef>
-          <a:fillRef idx="3">
-            <a:schemeClr val="accent1"/>
-          </a:fillRef>
-          <a:effectRef idx="2">
-            <a:schemeClr val="accent1"/>
-          </a:effectRef>
-          <a:fontRef idx="minor">
-            <a:schemeClr val="lt1"/>
-          </a:fontRef>
-        </p:style>
-        <p:txBody>
-          <a:bodyPr rtlCol="0" anchor="ctr"/>
-          <a:lstStyle/>
-          <a:p>
-            <a:pPr algn="ctr"/>
-          </a:p>
-        </p:txBody>
-      </p:sp>
-      <p:sp>
-        <p:nvSpPr>
-          <p:cNvPr id="23" name="Rounded Rectangle 22"/>
-          <p:cNvSpPr/>
-          <p:nvPr/>
-        </p:nvSpPr>
-        <p:spPr>
-          <a:xfrm>
-            <a:off x="594360" y="5681167"/>
-            <a:ext cx="438912" cy="438912"/>
-          </a:xfrm>
-          <a:prstGeom prst="roundRect">
-            <a:avLst>
-              <a:gd name="adj" fmla="val 12000"/>
-            </a:avLst>
-          </a:prstGeom>
-          <a:solidFill>
-            <a:srgbClr val="095292"/>
-          </a:solidFill>
-          <a:ln>
-            <a:noFill/>
-          </a:ln>
-        </p:spPr>
-        <p:style>
-          <a:lnRef idx="1">
-            <a:schemeClr val="accent1"/>
-          </a:lnRef>
-          <a:fillRef idx="3">
-            <a:schemeClr val="accent1"/>
-          </a:fillRef>
-          <a:effectRef idx="2">
-            <a:schemeClr val="accent1"/>
-          </a:effectRef>
-          <a:fontRef idx="minor">
-            <a:schemeClr val="lt1"/>
-          </a:fontRef>
-        </p:style>
-        <p:txBody>
-          <a:bodyPr rtlCol="0" anchor="ctr"/>
-          <a:lstStyle/>
-          <a:p>
-            <a:pPr algn="ctr"/>
-          </a:p>
-        </p:txBody>
-      </p:sp>
-      <p:sp>
-        <p:nvSpPr>
-          <p:cNvPr id="24" name="TextBox 23"/>
-          <p:cNvSpPr txBox="1"/>
-          <p:nvPr/>
-        </p:nvSpPr>
-        <p:spPr>
-          <a:xfrm>
-            <a:off x="594360" y="5681167"/>
-            <a:ext cx="438912" cy="438912"/>
-          </a:xfrm>
-          <a:prstGeom prst="rect">
-            <a:avLst/>
-          </a:prstGeom>
-          <a:noFill/>
-        </p:spPr>
-        <p:txBody>
-          <a:bodyPr wrap="square" anchor="ctr"/>
-          <a:lstStyle/>
-          <a:p>
-            <a:pPr algn="ctr"/>
-            <a:r>
-              <a:rPr sz="1600" b="1" i="0">
-                <a:solidFill>
-                  <a:srgbClr val="FFFFFF"/>
-                </a:solidFill>
-                <a:latin typeface="Calibri"/>
-              </a:rPr>
-              <a:t>5</a:t>
-            </a:r>
-          </a:p>
-        </p:txBody>
-      </p:sp>
-      <p:sp>
-        <p:nvSpPr>
-          <p:cNvPr id="25" name="TextBox 24"/>
-          <p:cNvSpPr txBox="1"/>
-          <p:nvPr/>
-        </p:nvSpPr>
-        <p:spPr>
-          <a:xfrm>
-            <a:off x="1188720" y="5537606"/>
-            <a:ext cx="10271455" cy="744321"/>
-          </a:xfrm>
-          <a:prstGeom prst="rect">
-            <a:avLst/>
-          </a:prstGeom>
-          <a:noFill/>
-        </p:spPr>
-        <p:txBody>
-          <a:bodyPr wrap="square" anchor="ctr"/>
-          <a:lstStyle/>
-          <a:p>
-            <a:r>
-              <a:rPr sz="1500" b="1" i="0">
-                <a:solidFill>
-                  <a:srgbClr val="095292"/>
-                </a:solidFill>
-                <a:latin typeface="Calibri"/>
-              </a:rPr>
-              <a:t>10 s · La decisión costosa</a:t>
-            </a:r>
-          </a:p>
-          <a:p>
-            <a:pPr>
-              <a:spcBef>
-                <a:spcPts val="200"/>
-              </a:spcBef>
-            </a:pPr>
-            <a:r>
-              <a:rPr sz="1300" b="0" i="0">
-                <a:solidFill>
-                  <a:srgbClr val="333333"/>
-                </a:solidFill>
-                <a:latin typeface="Calibri"/>
-              </a:rPr>
-              <a:t>Qué sería carísimo cambiar después.</a:t>
-            </a:r>
-          </a:p>
-        </p:txBody>
-      </p:sp>
-      <p:sp>
-        <p:nvSpPr>
-          <p:cNvPr id="26" name="TextBox 25"/>
-          <p:cNvSpPr txBox="1"/>
-          <p:nvPr/>
-        </p:nvSpPr>
-        <p:spPr>
-          <a:xfrm>
-            <a:off x="11185855" y="6473952"/>
-            <a:ext cx="640080" cy="274320"/>
-          </a:xfrm>
-          <a:prstGeom prst="rect">
-            <a:avLst/>
-          </a:prstGeom>
-          <a:noFill/>
-        </p:spPr>
-        <p:txBody>
-          <a:bodyPr wrap="square">
-            <a:spAutoFit/>
-          </a:bodyPr>
-          <a:lstStyle/>
-          <a:p>
-            <a:pPr algn="r"/>
-            <a:r>
-              <a:rPr sz="1100" b="0" i="0">
-                <a:solidFill>
-                  <a:srgbClr val="666666"/>
-                </a:solidFill>
-                <a:latin typeface="Calibri"/>
-              </a:rPr>
-              <a:t>14</a:t>
-            </a:r>
-          </a:p>
-        </p:txBody>
-      </p:sp>
-    </p:spTree>
-  </p:cSld>
-  <p:clrMapOvr>
-    <a:masterClrMapping/>
-  </p:clrMapOvr>
-</p:sld>
-</file>
-
-<file path=ppt/slides/slide15.xml><?xml version="1.0" encoding="utf-8"?>
-<p:sld xmlns:a="http://schemas.openxmlformats.org/drawingml/2006/main" xmlns:p="http://schemas.openxmlformats.org/presentationml/2006/main" xmlns:r="http://schemas.openxmlformats.org/officeDocument/2006/relationships">
-  <p:cSld>
-    <p:bg>
-      <p:bgPr>
-        <a:solidFill>
-          <a:srgbClr val="FFFFFF"/>
-        </a:solidFill>
-        <a:effectLst/>
-      </p:bgPr>
-    </p:bg>
-    <p:spTree>
-      <p:nvGrpSpPr>
-        <p:cNvPr id="1" name=""/>
-        <p:cNvGrpSpPr/>
-        <p:nvPr/>
-      </p:nvGrpSpPr>
-      <p:grpSpPr/>
-      <p:sp>
-        <p:nvSpPr>
-          <p:cNvPr id="2" name="Rectangle 1"/>
-          <p:cNvSpPr/>
-          <p:nvPr/>
-        </p:nvSpPr>
-        <p:spPr>
-          <a:xfrm>
-            <a:off x="0" y="0"/>
-            <a:ext cx="12191695" cy="960120"/>
-          </a:xfrm>
-          <a:prstGeom prst="rect">
-            <a:avLst/>
-          </a:prstGeom>
-          <a:solidFill>
-            <a:srgbClr val="095292"/>
-          </a:solidFill>
-          <a:ln>
-            <a:noFill/>
-          </a:ln>
-        </p:spPr>
-        <p:style>
-          <a:lnRef idx="1">
-            <a:schemeClr val="accent1"/>
-          </a:lnRef>
-          <a:fillRef idx="3">
-            <a:schemeClr val="accent1"/>
-          </a:fillRef>
-          <a:effectRef idx="2">
-            <a:schemeClr val="accent1"/>
-          </a:effectRef>
-          <a:fontRef idx="minor">
-            <a:schemeClr val="lt1"/>
-          </a:fontRef>
-        </p:style>
-        <p:txBody>
-          <a:bodyPr rtlCol="0" anchor="ctr"/>
-          <a:lstStyle/>
-          <a:p>
-            <a:pPr algn="ctr"/>
-          </a:p>
-        </p:txBody>
-      </p:sp>
-      <p:sp>
-        <p:nvSpPr>
-          <p:cNvPr id="3" name="Rectangle 2"/>
-          <p:cNvSpPr/>
-          <p:nvPr/>
-        </p:nvSpPr>
-        <p:spPr>
-          <a:xfrm>
-            <a:off x="0" y="960120"/>
-            <a:ext cx="12191695" cy="41148"/>
-          </a:xfrm>
-          <a:prstGeom prst="rect">
-            <a:avLst/>
-          </a:prstGeom>
-          <a:solidFill>
-            <a:srgbClr val="FFD000"/>
-          </a:solidFill>
-          <a:ln>
-            <a:noFill/>
-          </a:ln>
-        </p:spPr>
-        <p:style>
-          <a:lnRef idx="1">
-            <a:schemeClr val="accent1"/>
-          </a:lnRef>
-          <a:fillRef idx="3">
-            <a:schemeClr val="accent1"/>
-          </a:fillRef>
-          <a:effectRef idx="2">
-            <a:schemeClr val="accent1"/>
-          </a:effectRef>
-          <a:fontRef idx="minor">
-            <a:schemeClr val="lt1"/>
-          </a:fontRef>
-        </p:style>
-        <p:txBody>
-          <a:bodyPr rtlCol="0" anchor="ctr"/>
-          <a:lstStyle/>
-          <a:p>
-            <a:pPr algn="ctr"/>
-          </a:p>
-        </p:txBody>
-      </p:sp>
-      <p:sp>
-        <p:nvSpPr>
-          <p:cNvPr id="4" name="TextBox 3"/>
-          <p:cNvSpPr txBox="1"/>
-          <p:nvPr/>
-        </p:nvSpPr>
-        <p:spPr>
-          <a:xfrm>
-            <a:off x="457200" y="164592"/>
-            <a:ext cx="11277295" cy="502920"/>
-          </a:xfrm>
-          <a:prstGeom prst="rect">
-            <a:avLst/>
-          </a:prstGeom>
-          <a:noFill/>
-        </p:spPr>
-        <p:txBody>
-          <a:bodyPr wrap="square">
-            <a:spAutoFit/>
-          </a:bodyPr>
-          <a:lstStyle/>
-          <a:p>
-            <a:r>
-              <a:rPr sz="2600" b="1" i="0">
-                <a:solidFill>
-                  <a:srgbClr val="FFFFFF"/>
-                </a:solidFill>
-                <a:latin typeface="Calibri"/>
-              </a:rPr>
-              <a:t>Para la Clase 8</a:t>
-            </a:r>
-          </a:p>
-        </p:txBody>
-      </p:sp>
-      <p:sp>
-        <p:nvSpPr>
-          <p:cNvPr id="5" name="TextBox 4"/>
-          <p:cNvSpPr txBox="1"/>
-          <p:nvPr/>
-        </p:nvSpPr>
-        <p:spPr>
-          <a:xfrm>
-            <a:off x="457200" y="1170432"/>
-            <a:ext cx="11277295" cy="5230368"/>
-          </a:xfrm>
-          <a:prstGeom prst="rect">
-            <a:avLst/>
-          </a:prstGeom>
-          <a:noFill/>
-        </p:spPr>
-        <p:txBody>
-          <a:bodyPr wrap="square">
-            <a:spAutoFit/>
-          </a:bodyPr>
-          <a:lstStyle/>
-          <a:p>
-            <a:pPr>
-              <a:spcAft>
-                <a:spcPts val="800"/>
-              </a:spcAft>
-            </a:pPr>
-            <a:r>
-              <a:rPr sz="2000" b="0" i="0">
-                <a:solidFill>
-                  <a:srgbClr val="333333"/>
-                </a:solidFill>
-                <a:latin typeface="Calibri"/>
-              </a:rPr>
-              <a:t>–   </a:t>
-            </a:r>
-            <a:r>
-              <a:rPr sz="2000" b="1" i="0">
-                <a:solidFill>
-                  <a:srgbClr val="333333"/>
-                </a:solidFill>
-                <a:latin typeface="Calibri"/>
-              </a:rPr>
-              <a:t>Trabajo dirigido:</a:t>
-            </a:r>
-            <a:r>
-              <a:rPr sz="2000" b="0" i="0">
-                <a:solidFill>
-                  <a:srgbClr val="333333"/>
-                </a:solidFill>
-                <a:latin typeface="Calibri"/>
-              </a:rPr>
-              <a:t> Estudio de fases del ciclo de vida — leer el material de las seis fases y traer </a:t>
-            </a:r>
-            <a:r>
-              <a:rPr sz="2000" b="1" i="0">
-                <a:solidFill>
-                  <a:srgbClr val="333333"/>
-                </a:solidFill>
-                <a:latin typeface="Calibri"/>
-              </a:rPr>
-              <a:t>un ejemplo propio</a:t>
-            </a:r>
-            <a:r>
-              <a:rPr sz="2000" b="0" i="0">
-                <a:solidFill>
-                  <a:srgbClr val="333333"/>
-                </a:solidFill>
-                <a:latin typeface="Calibri"/>
-              </a:rPr>
-              <a:t> de un proyecto conocido que se saltó una fase.</a:t>
-            </a:r>
-          </a:p>
-          <a:p>
-            <a:pPr>
-              <a:spcAft>
-                <a:spcPts val="800"/>
-              </a:spcAft>
-            </a:pPr>
-            <a:r>
-              <a:rPr sz="2000" b="0" i="0">
-                <a:solidFill>
-                  <a:srgbClr val="333333"/>
-                </a:solidFill>
-                <a:latin typeface="Calibri"/>
-              </a:rPr>
-              <a:t>–   </a:t>
-            </a:r>
-            <a:r>
-              <a:rPr sz="2000" b="1" i="0">
-                <a:solidFill>
-                  <a:srgbClr val="333333"/>
-                </a:solidFill>
-                <a:latin typeface="Calibri"/>
-              </a:rPr>
-              <a:t>Trabajo independiente:</a:t>
-            </a:r>
-            <a:r>
-              <a:rPr sz="2000" b="0" i="0">
-                <a:solidFill>
-                  <a:srgbClr val="333333"/>
-                </a:solidFill>
-                <a:latin typeface="Calibri"/>
-              </a:rPr>
-              <a:t> Infografía explicativa del ciclo de vida </a:t>
-            </a:r>
-            <a:r>
-              <a:rPr sz="2000" b="1" i="0">
-                <a:solidFill>
-                  <a:srgbClr val="333333"/>
-                </a:solidFill>
-                <a:latin typeface="Calibri"/>
-              </a:rPr>
-              <a:t>de su propio proyecto</a:t>
-            </a:r>
-            <a:r>
-              <a:rPr sz="2000" b="0" i="0">
-                <a:solidFill>
-                  <a:srgbClr val="333333"/>
-                </a:solidFill>
-                <a:latin typeface="Calibri"/>
-              </a:rPr>
-              <a:t>, en Canva o draw.io: las seis fases, en cuál están y qué entregan en cada una.</a:t>
-            </a:r>
-          </a:p>
-          <a:p>
-            <a:pPr>
-              <a:spcAft>
-                <a:spcPts val="800"/>
-              </a:spcAft>
-            </a:pPr>
-            <a:r>
-              <a:rPr sz="2000" b="0" i="0">
-                <a:solidFill>
-                  <a:srgbClr val="333333"/>
-                </a:solidFill>
-                <a:latin typeface="Calibri"/>
-              </a:rPr>
-              <a:t>–   </a:t>
-            </a:r>
-            <a:r>
-              <a:rPr sz="2000" b="1" i="0">
-                <a:solidFill>
-                  <a:srgbClr val="333333"/>
-                </a:solidFill>
-                <a:latin typeface="Calibri"/>
-              </a:rPr>
-              <a:t>Clase 8 · Taller de aplicación del ciclo de vida</a:t>
-            </a:r>
-            <a:r>
-              <a:rPr sz="2000" b="0" i="0">
-                <a:solidFill>
-                  <a:srgbClr val="333333"/>
-                </a:solidFill>
-                <a:latin typeface="Calibri"/>
-              </a:rPr>
-              <a:t> — casos reales de proyectos que se saltaron una fase, y la decisión entre sus dos alternativas de solución con una matriz de criterios.</a:t>
-            </a:r>
-          </a:p>
-          <a:p>
-            <a:pPr>
-              <a:spcAft>
-                <a:spcPts val="800"/>
-              </a:spcAft>
-            </a:pPr>
-            <a:r>
-              <a:rPr sz="2000" b="0" i="0">
-                <a:solidFill>
-                  <a:srgbClr val="333333"/>
-                </a:solidFill>
-                <a:latin typeface="Calibri"/>
-              </a:rPr>
-              <a:t>–   </a:t>
-            </a:r>
-            <a:r>
-              <a:rPr sz="2000" b="1" i="0">
-                <a:solidFill>
-                  <a:srgbClr val="333333"/>
-                </a:solidFill>
-                <a:latin typeface="Calibri"/>
-              </a:rPr>
-              <a:t>Aviso:</a:t>
-            </a:r>
-            <a:r>
-              <a:rPr sz="2000" b="0" i="0">
-                <a:solidFill>
-                  <a:srgbClr val="333333"/>
-                </a:solidFill>
-                <a:latin typeface="Calibri"/>
-              </a:rPr>
-              <a:t> Traigan la tabla de requisitos con los criterios de aceptación </a:t>
-            </a:r>
-            <a:r>
-              <a:rPr sz="2000" b="1" i="0">
-                <a:solidFill>
-                  <a:srgbClr val="333333"/>
-                </a:solidFill>
-                <a:latin typeface="Calibri"/>
-              </a:rPr>
-              <a:t>confirmados con la persona que vive el problema</a:t>
-            </a:r>
-            <a:r>
-              <a:rPr sz="2000" b="0" i="0">
-                <a:solidFill>
-                  <a:srgbClr val="333333"/>
-                </a:solidFill>
-                <a:latin typeface="Calibri"/>
-              </a:rPr>
-              <a:t>, y las dos alternativas de solución del trabajo independiente de la sesión 6. En la sesión 8 se decide una.</a:t>
-            </a:r>
-          </a:p>
-          <a:p>
-            <a:pPr>
-              <a:spcAft>
-                <a:spcPts val="800"/>
-              </a:spcAft>
-            </a:pPr>
-            <a:r>
-              <a:rPr sz="2000" b="0" i="0">
-                <a:solidFill>
-                  <a:srgbClr val="333333"/>
-                </a:solidFill>
-                <a:latin typeface="Calibri"/>
-              </a:rPr>
-              <a:t>–   </a:t>
-            </a:r>
-            <a:r>
-              <a:rPr sz="2000" b="1" i="0">
-                <a:solidFill>
-                  <a:srgbClr val="333333"/>
-                </a:solidFill>
-                <a:latin typeface="Calibri"/>
-              </a:rPr>
-              <a:t>Antes de salir:</a:t>
-            </a:r>
-            <a:r>
-              <a:rPr sz="2000" b="0" i="0">
-                <a:solidFill>
-                  <a:srgbClr val="333333"/>
-                </a:solidFill>
-                <a:latin typeface="Calibri"/>
-              </a:rPr>
-              <a:t> el enlace del documento del equipo en el chat, con permiso de lectura para el docente, y el nombre del vocero de hoy.</a:t>
-            </a:r>
-          </a:p>
-        </p:txBody>
-      </p:sp>
-      <p:sp>
-        <p:nvSpPr>
-          <p:cNvPr id="6" name="TextBox 5"/>
-          <p:cNvSpPr txBox="1"/>
-          <p:nvPr/>
-        </p:nvSpPr>
-        <p:spPr>
-          <a:xfrm>
-            <a:off x="11185855" y="6473952"/>
-            <a:ext cx="640080" cy="274320"/>
-          </a:xfrm>
-          <a:prstGeom prst="rect">
-            <a:avLst/>
-          </a:prstGeom>
-          <a:noFill/>
-        </p:spPr>
-        <p:txBody>
-          <a:bodyPr wrap="square">
-            <a:spAutoFit/>
-          </a:bodyPr>
-          <a:lstStyle/>
-          <a:p>
-            <a:pPr algn="r"/>
-            <a:r>
-              <a:rPr sz="1100" b="0" i="0">
-                <a:solidFill>
-                  <a:srgbClr val="666666"/>
-                </a:solidFill>
-                <a:latin typeface="Calibri"/>
-              </a:rPr>
-              <a:t>15</a:t>
-            </a:r>
-          </a:p>
-        </p:txBody>
-      </p:sp>
-    </p:spTree>
-  </p:cSld>
-  <p:clrMapOvr>
-    <a:masterClrMapping/>
-  </p:clrMapOvr>
-</p:sld>
-</file>
-
-<file path=ppt/slides/slide16.xml><?xml version="1.0" encoding="utf-8"?>
-<p:sld xmlns:a="http://schemas.openxmlformats.org/drawingml/2006/main" xmlns:p="http://schemas.openxmlformats.org/presentationml/2006/main" xmlns:r="http://schemas.openxmlformats.org/officeDocument/2006/relationships">
-  <p:cSld>
-    <p:bg>
-      <p:bgPr>
-        <a:solidFill>
-          <a:srgbClr val="FFFFFF"/>
-        </a:solidFill>
-        <a:effectLst/>
-      </p:bgPr>
-    </p:bg>
-    <p:spTree>
-      <p:nvGrpSpPr>
-        <p:cNvPr id="1" name=""/>
-        <p:cNvGrpSpPr/>
-        <p:nvPr/>
-      </p:nvGrpSpPr>
-      <p:grpSpPr/>
-      <p:sp>
-        <p:nvSpPr>
-          <p:cNvPr id="2" name="Rectangle 1"/>
-          <p:cNvSpPr/>
-          <p:nvPr/>
-        </p:nvSpPr>
-        <p:spPr>
-          <a:xfrm>
-            <a:off x="0" y="0"/>
             <a:ext cx="12191695" cy="164592"/>
           </a:xfrm>
           <a:prstGeom prst="rect">
@@ -10159,7 +7501,7 @@
                 </a:solidFill>
                 <a:latin typeface="Calibri"/>
               </a:rPr>
-              <a:t>Taller — el ciclo de vida del proyecto, en draw.io</a:t>
+              <a:t>Práctica en equipos (opcional · la guía está en la carpeta de la clase)</a:t>
             </a:r>
           </a:p>
         </p:txBody>
@@ -10274,7 +7616,7 @@
                 </a:solidFill>
                 <a:latin typeface="Calibri"/>
               </a:rPr>
-              <a:t>5 equipos × 3 min — en qué fase están y qué falta para cerrarla</a:t>
+              <a:t>Socialización de la práctica, si se hizo</a:t>
             </a:r>
           </a:p>
         </p:txBody>

--- a/Introduccion a la Ingenieria/Clases/Clase 7 - Ciclo de vida de los proyectos de ingenieria/Presentacion.pptx
+++ b/Introduccion a la Ingenieria/Clases/Clase 7 - Ciclo de vida de los proyectos de ingenieria/Presentacion.pptx
@@ -10,7 +10,7 @@
     <p:sldId id="258" r:id="rId9"/>
     <p:sldId id="259" r:id="rId10"/>
     <p:sldId id="260" r:id="rId11"/>
-    <p:sldId id="261" r:id="rId12"/>
+    <p:sldId id="261" r:id="rId13"/>
     <p:sldId id="262" r:id="rId14"/>
     <p:sldId id="263" r:id="rId15"/>
     <p:sldId id="264" r:id="rId16"/>
@@ -514,7 +514,43 @@
           <a:lstStyle/>
           <a:p>
             <a:r>
-              <a:t>Pida al grupo que diga en qué fase está hoy su propio proyecto. La respuesta correcta es: terminando la primera (la ficha de la Clase 6) y entrando en requisitos.</a:t>
+              <a:t>El orden no es burocracia: cada fase produce lo que la siguiente necesita para no adivinar</a:t>
+            </a:r>
+          </a:p>
+          <a:p/>
+          <a:p>
+            <a:r>
+              <a:t>LAS SEIS FASES, Y POR QUÉ EL ORDEN IMPORTA</a:t>
+            </a:r>
+          </a:p>
+          <a:p/>
+          <a:p>
+            <a:r>
+              <a:t>Conviene presentar las fases como una cadena de preguntas, no como una lista de etapas administrativas. Cada fase responde una pregunta y produce lo que la siguiente necesita para no adivinar.</a:t>
+            </a:r>
+          </a:p>
+          <a:p/>
+          <a:p>
+            <a:r>
+              <a:t>Definición del problema responde *qué se va a resolver y para quién*, y hay que decir en voz alta que esa fase ya la hicieron en la sesión 6: la ficha del problema es el entregable de la primera fase del ciclo de vida de su propio proyecto. Eso reordena la percepción del curso: no estaban haciendo un ejercicio, estaban cerrando una fase.</a:t>
+            </a:r>
+          </a:p>
+          <a:p/>
+          <a:p>
+            <a:r>
+              <a:t>Requisitos responde *qué tiene que hacer la solución para resolver eso, y cómo sabremos que lo hace*. Es la fase de hoy y la que más se salta la gente.</a:t>
+            </a:r>
+          </a:p>
+          <a:p/>
+          <a:p>
+            <a:r>
+              <a:t>Diseño responde *cómo va a estar construido*: las partes, el flujo, las pantallas o los pasos. Construcción es la única fase que el estudiante reconoce como «el proyecto», y vale la pena decirle que es una de seis, y no la más determinante. Validación responde *funciona contra los criterios y con el usuario real*; la trampa clásica es probar con el propio equipo, que ya sabe cómo se usa. Y operación y retiro es la fase que nadie enseña en primer semestre y que conviene nombrar por dos razones: la mayor parte de la vida de un sistema ocurre ahí, y el retiro —qué pasa con los datos cuando el sistema se apaga— es un asunto ético y legal que ya vieron en la sesión 4 con la Ley 1581.</a:t>
+            </a:r>
+          </a:p>
+          <a:p/>
+          <a:p>
+            <a:r>
+              <a:t>El punto que amarra todo: el orden no es burocracia, es economía. Cada fase existe porque descubrir un error en ella cuesta menos que descubrirlo en la siguiente. Quien se salta requisitos no ahorra tiempo: mueve el costo hacia adelante y lo multiplica.</a:t>
             </a:r>
           </a:p>
         </p:txBody>
@@ -584,7 +620,7 @@
           <a:lstStyle/>
           <a:p>
             <a:r>
-              <a:t>Es la curva del costo del cambio con un caso que cualquiera entiende. Subraye que el error es el mismo; lo único que cambia es cuándo se encuentra.</a:t>
+              <a:t>Pida al grupo que diga en qué fase está hoy su propio proyecto. La respuesta correcta es: terminando la primera (la ficha de la Clase 6) y entrando en requisitos.</a:t>
             </a:r>
           </a:p>
         </p:txBody>
@@ -654,7 +690,7 @@
           <a:lstStyle/>
           <a:p>
             <a:r>
-              <a:t>El primero de la izquierda no es un requisito: es una decisión de diseño disfrazada. El segundo no se puede comprobar. El tercero no tiene fecha ni resultado. La derecha se puede verificar con un sí o un no.</a:t>
+              <a:t>Es la curva del costo del cambio con un caso que cualquiera entiende. Subraye que el error es el mismo; lo único que cambia es cuándo se encuentra.</a:t>
             </a:r>
           </a:p>
         </p:txBody>
@@ -724,25 +760,7 @@
           <a:lstStyle/>
           <a:p>
             <a:r>
-              <a:t>LA PREGUNTA DE ENTRADA: LA CURVA DEL COSTO DEL CAMBIO</a:t>
-            </a:r>
-          </a:p>
-          <a:p/>
-          <a:p>
-            <a:r>
-              <a:t>La analogía de la pared es la más eficiente que existe para esta clase porque nadie necesita saber de software para responderla. Mover una pared en el plano cuesta un borrador; en el ladrillo cuesta tumbar y volver a levantar; en la casa entregada cuesta la obra, la mudanza y el enojo del dueño. Todo el mundo lo intuye, y esa intuición es exactamente la curva del costo del cambio.</a:t>
-            </a:r>
-          </a:p>
-          <a:p/>
-          <a:p>
-            <a:r>
-              <a:t>Lo que hay que hacer explícito en el minuto 12 es que en software la curva es igual pero se ve menos, y ahí está el problema. En una casa, una pared mal puesta se ve; en un sistema, un requisito mal entendido no se ve hasta que alguien lo usa. Por eso en ingeniería de software hubo que inventar fases, revisiones y criterios de aceptación: son el equivalente a mirar el plano antes de pedir el cemento.</a:t>
-            </a:r>
-          </a:p>
-          <a:p/>
-          <a:p>
-            <a:r>
-              <a:t>Recoja las respuestas en el muro. Van a salir cifras espontáneas —«mil veces más caro»— y conviene no corregirlas ahí, sino usarlas cuando llegue la tabla: la dirección de la curva es correcta y los múltiplos exactos son discutibles, lo cual es una buena lección sobre cómo se citan los datos.</a:t>
+              <a:t>El primero de la izquierda no es un requisito: es una decisión de diseño disfrazada. El segundo no se puede comprobar. El tercero no tiene fecha ni resultado. La derecha se puede verificar con un sí o un no.</a:t>
             </a:r>
           </a:p>
         </p:txBody>
@@ -812,37 +830,25 @@
           <a:lstStyle/>
           <a:p>
             <a:r>
-              <a:t>LAS SEIS FASES, Y POR QUÉ EL ORDEN IMPORTA</a:t>
+              <a:t>LA PREGUNTA DE ENTRADA: LA CURVA DEL COSTO DEL CAMBIO</a:t>
             </a:r>
           </a:p>
           <a:p/>
           <a:p>
             <a:r>
-              <a:t>Conviene presentar las fases como una cadena de preguntas, no como una lista de etapas administrativas. Cada fase responde una pregunta y produce lo que la siguiente necesita para no adivinar.</a:t>
+              <a:t>La analogía de la pared es la más eficiente que existe para esta clase porque nadie necesita saber de software para responderla. Mover una pared en el plano cuesta un borrador; en el ladrillo cuesta tumbar y volver a levantar; en la casa entregada cuesta la obra, la mudanza y el enojo del dueño. Todo el mundo lo intuye, y esa intuición es exactamente la curva del costo del cambio.</a:t>
             </a:r>
           </a:p>
           <a:p/>
           <a:p>
             <a:r>
-              <a:t>Definición del problema responde *qué se va a resolver y para quién*, y hay que decir en voz alta que esa fase ya la hicieron en la sesión 6: la ficha del problema es el entregable de la primera fase del ciclo de vida de su propio proyecto. Eso reordena la percepción del curso: no estaban haciendo un ejercicio, estaban cerrando una fase.</a:t>
+              <a:t>Lo que hay que hacer explícito en el minuto 12 es que en software la curva es igual pero se ve menos, y ahí está el problema. En una casa, una pared mal puesta se ve; en un sistema, un requisito mal entendido no se ve hasta que alguien lo usa. Por eso en ingeniería de software hubo que inventar fases, revisiones y criterios de aceptación: son el equivalente a mirar el plano antes de pedir el cemento.</a:t>
             </a:r>
           </a:p>
           <a:p/>
           <a:p>
             <a:r>
-              <a:t>Requisitos responde *qué tiene que hacer la solución para resolver eso, y cómo sabremos que lo hace*. Es la fase de hoy y la que más se salta la gente.</a:t>
-            </a:r>
-          </a:p>
-          <a:p/>
-          <a:p>
-            <a:r>
-              <a:t>Diseño responde *cómo va a estar construido*: las partes, el flujo, las pantallas o los pasos. Construcción es la única fase que el estudiante reconoce como «el proyecto», y vale la pena decirle que es una de seis, y no la más determinante. Validación responde *funciona contra los criterios y con el usuario real*; la trampa clásica es probar con el propio equipo, que ya sabe cómo se usa. Y operación y retiro es la fase que nadie enseña en primer semestre y que conviene nombrar por dos razones: la mayor parte de la vida de un sistema ocurre ahí, y el retiro —qué pasa con los datos cuando el sistema se apaga— es un asunto ético y legal que ya vieron en la sesión 4 con la Ley 1581.</a:t>
-            </a:r>
-          </a:p>
-          <a:p/>
-          <a:p>
-            <a:r>
-              <a:t>El punto que amarra todo: el orden no es burocracia, es economía. Cada fase existe porque descubrir un error en ella cuesta menos que descubrirlo en la siguiente. Quien se salta requisitos no ahorra tiempo: mueve el costo hacia adelante y lo multiplica.</a:t>
+              <a:t>Recoja las respuestas en el muro. Van a salir cifras espontáneas —«mil veces más caro»— y conviene no corregirlas ahí, sino usarlas cuando llegue la tabla: la dirección de la curva es correcta y los múltiplos exactos son discutibles, lo cual es una buena lección sobre cómo se citan los datos.</a:t>
             </a:r>
           </a:p>
         </p:txBody>
@@ -6065,9 +6071,57 @@
           </a:p>
         </p:txBody>
       </p:sp>
-      <p:sp>
-        <p:nvSpPr>
-          <p:cNvPr id="13" name="TextBox 12"/>
+      <p:pic>
+        <p:nvPicPr>
+          <p:cNvPr id="13" name="Picture 12" descr="sello_mal.png"/>
+          <p:cNvPicPr>
+            <a:picLocks noChangeAspect="1"/>
+          </p:cNvPicPr>
+          <p:nvPr/>
+        </p:nvPicPr>
+        <p:blipFill>
+          <a:blip r:embed="rId2"/>
+          <a:stretch>
+            <a:fillRect/>
+          </a:stretch>
+        </p:blipFill>
+        <p:spPr>
+          <a:xfrm>
+            <a:off x="566928" y="1316736"/>
+            <a:ext cx="393192" cy="393192"/>
+          </a:xfrm>
+          <a:prstGeom prst="rect">
+            <a:avLst/>
+          </a:prstGeom>
+        </p:spPr>
+      </p:pic>
+      <p:pic>
+        <p:nvPicPr>
+          <p:cNvPr id="14" name="Picture 13" descr="sello_bien.png"/>
+          <p:cNvPicPr>
+            <a:picLocks noChangeAspect="1"/>
+          </p:cNvPicPr>
+          <p:nvPr/>
+        </p:nvPicPr>
+        <p:blipFill>
+          <a:blip r:embed="rId3"/>
+          <a:stretch>
+            <a:fillRect/>
+          </a:stretch>
+        </p:blipFill>
+        <p:spPr>
+          <a:xfrm>
+            <a:off x="6365595" y="1316736"/>
+            <a:ext cx="393192" cy="393192"/>
+          </a:xfrm>
+          <a:prstGeom prst="rect">
+            <a:avLst/>
+          </a:prstGeom>
+        </p:spPr>
+      </p:pic>
+      <p:sp>
+        <p:nvSpPr>
+          <p:cNvPr id="15" name="TextBox 14"/>
           <p:cNvSpPr txBox="1"/>
           <p:nvPr/>
         </p:nvSpPr>
@@ -7972,14 +8026,118 @@
       </p:sp>
       <p:sp>
         <p:nvSpPr>
-          <p:cNvPr id="5" name="TextBox 4"/>
+          <p:cNvPr id="5" name="Rounded Rectangle 4"/>
+          <p:cNvSpPr/>
+          <p:nvPr/>
+        </p:nvSpPr>
+        <p:spPr>
+          <a:xfrm>
+            <a:off x="5797149" y="1573813"/>
+            <a:ext cx="6010497" cy="4057845"/>
+          </a:xfrm>
+          <a:prstGeom prst="roundRect">
+            <a:avLst>
+              <a:gd name="adj" fmla="val 4000"/>
+            </a:avLst>
+          </a:prstGeom>
+          <a:solidFill>
+            <a:srgbClr val="E8EEF4"/>
+          </a:solidFill>
+          <a:ln>
+            <a:noFill/>
+          </a:ln>
+        </p:spPr>
+        <p:style>
+          <a:lnRef idx="1">
+            <a:schemeClr val="accent1"/>
+          </a:lnRef>
+          <a:fillRef idx="3">
+            <a:schemeClr val="accent1"/>
+          </a:fillRef>
+          <a:effectRef idx="2">
+            <a:schemeClr val="accent1"/>
+          </a:effectRef>
+          <a:fontRef idx="minor">
+            <a:schemeClr val="lt1"/>
+          </a:fontRef>
+        </p:style>
+        <p:txBody>
+          <a:bodyPr rtlCol="0" anchor="ctr"/>
+          <a:lstStyle/>
+          <a:p>
+            <a:pPr algn="ctr"/>
+          </a:p>
+        </p:txBody>
+      </p:sp>
+      <p:pic>
+        <p:nvPicPr>
+          <p:cNvPr id="6" name="Picture 5" descr="students-learning-laptops-classroom.jpg"/>
+          <p:cNvPicPr>
+            <a:picLocks noChangeAspect="1"/>
+          </p:cNvPicPr>
+          <p:nvPr/>
+        </p:nvPicPr>
+        <p:blipFill>
+          <a:blip r:embed="rId2"/>
+          <a:stretch>
+            <a:fillRect/>
+          </a:stretch>
+        </p:blipFill>
+        <p:spPr>
+          <a:xfrm>
+            <a:off x="5870301" y="1646965"/>
+            <a:ext cx="5864193" cy="3911541"/>
+          </a:xfrm>
+          <a:prstGeom prst="rect">
+            <a:avLst/>
+          </a:prstGeom>
+        </p:spPr>
+      </p:pic>
+      <p:sp>
+        <p:nvSpPr>
+          <p:cNvPr id="7" name="TextBox 6"/>
           <p:cNvSpPr txBox="1"/>
           <p:nvPr/>
         </p:nvSpPr>
         <p:spPr>
           <a:xfrm>
-            <a:off x="457200" y="1170432"/>
-            <a:ext cx="11277295" cy="5230368"/>
+            <a:off x="5870301" y="5961888"/>
+            <a:ext cx="5864193" cy="320040"/>
+          </a:xfrm>
+          <a:prstGeom prst="rect">
+            <a:avLst/>
+          </a:prstGeom>
+          <a:noFill/>
+        </p:spPr>
+        <p:txBody>
+          <a:bodyPr wrap="square">
+            <a:spAutoFit/>
+          </a:bodyPr>
+          <a:lstStyle/>
+          <a:p>
+            <a:pPr algn="ctr"/>
+            <a:r>
+              <a:rPr sz="1100" b="0" i="1">
+                <a:solidFill>
+                  <a:srgbClr val="666666"/>
+                </a:solidFill>
+                <a:latin typeface="Calibri"/>
+              </a:rPr>
+              <a:t>Foto: Mikhail Nilov · Pexels</a:t>
+            </a:r>
+          </a:p>
+        </p:txBody>
+      </p:sp>
+      <p:sp>
+        <p:nvSpPr>
+          <p:cNvPr id="8" name="TextBox 7"/>
+          <p:cNvSpPr txBox="1"/>
+          <p:nvPr/>
+        </p:nvSpPr>
+        <p:spPr>
+          <a:xfrm>
+            <a:off x="457200" y="1353312"/>
+            <a:ext cx="5093061" cy="5047488"/>
           </a:xfrm>
           <a:prstGeom prst="rect">
             <a:avLst/>
@@ -8149,7 +8307,7 @@
       </p:sp>
       <p:sp>
         <p:nvSpPr>
-          <p:cNvPr id="6" name="TextBox 5"/>
+          <p:cNvPr id="9" name="TextBox 8"/>
           <p:cNvSpPr txBox="1"/>
           <p:nvPr/>
         </p:nvSpPr>
@@ -8511,7 +8669,7 @@
         <p:spPr>
           <a:xfrm>
             <a:off x="0" y="0"/>
-            <a:ext cx="12191695" cy="1170432"/>
+            <a:ext cx="12191695" cy="960120"/>
           </a:xfrm>
           <a:prstGeom prst="rect">
             <a:avLst/>
@@ -8553,7 +8711,7 @@
         </p:nvSpPr>
         <p:spPr>
           <a:xfrm>
-            <a:off x="0" y="1170432"/>
+            <a:off x="0" y="960120"/>
             <a:ext cx="12191695" cy="41148"/>
           </a:xfrm>
           <a:prstGeom prst="rect">
@@ -8597,7 +8755,7 @@
         <p:spPr>
           <a:xfrm>
             <a:off x="457200" y="164592"/>
-            <a:ext cx="11277295" cy="384048"/>
+            <a:ext cx="11277295" cy="502920"/>
           </a:xfrm>
           <a:prstGeom prst="rect">
             <a:avLst/>
@@ -8624,56 +8782,22 @@
       </p:sp>
       <p:sp>
         <p:nvSpPr>
-          <p:cNvPr id="5" name="TextBox 4"/>
-          <p:cNvSpPr txBox="1"/>
-          <p:nvPr/>
-        </p:nvSpPr>
-        <p:spPr>
-          <a:xfrm>
-            <a:off x="457200" y="566928"/>
-            <a:ext cx="11277295" cy="411480"/>
-          </a:xfrm>
-          <a:prstGeom prst="rect">
-            <a:avLst/>
-          </a:prstGeom>
-          <a:noFill/>
-        </p:spPr>
-        <p:txBody>
-          <a:bodyPr wrap="square">
-            <a:spAutoFit/>
-          </a:bodyPr>
-          <a:lstStyle/>
-          <a:p>
-            <a:r>
-              <a:rPr sz="1400" b="0" i="0">
-                <a:solidFill>
-                  <a:srgbClr val="B8D8EE"/>
-                </a:solidFill>
-                <a:latin typeface="Calibri"/>
-              </a:rPr>
-              <a:t>El orden no es burocracia: cada fase produce lo que la siguiente necesita para no adivinar</a:t>
-            </a:r>
-          </a:p>
-        </p:txBody>
-      </p:sp>
-      <p:sp>
-        <p:nvSpPr>
-          <p:cNvPr id="6" name="Rounded Rectangle 5"/>
+          <p:cNvPr id="5" name="Rounded Rectangle 4"/>
           <p:cNvSpPr/>
           <p:nvPr/>
         </p:nvSpPr>
         <p:spPr>
           <a:xfrm>
-            <a:off x="457200" y="1444752"/>
-            <a:ext cx="11277295" cy="745236"/>
+            <a:off x="5803166" y="1188719"/>
+            <a:ext cx="5998464" cy="4828032"/>
           </a:xfrm>
           <a:prstGeom prst="roundRect">
             <a:avLst>
-              <a:gd name="adj" fmla="val 12000"/>
+              <a:gd name="adj" fmla="val 4000"/>
             </a:avLst>
           </a:prstGeom>
           <a:solidFill>
-            <a:srgbClr val="F2F2F2"/>
+            <a:srgbClr val="E8EEF4"/>
           </a:solidFill>
           <a:ln>
             <a:noFill/>
@@ -8701,61 +8825,147 @@
           </a:p>
         </p:txBody>
       </p:sp>
-      <p:sp>
-        <p:nvSpPr>
-          <p:cNvPr id="7" name="Rounded Rectangle 6"/>
-          <p:cNvSpPr/>
-          <p:nvPr/>
-        </p:nvSpPr>
-        <p:spPr>
-          <a:xfrm>
-            <a:off x="594360" y="1597914"/>
-            <a:ext cx="438912" cy="438912"/>
-          </a:xfrm>
-          <a:prstGeom prst="roundRect">
-            <a:avLst>
-              <a:gd name="adj" fmla="val 12000"/>
-            </a:avLst>
-          </a:prstGeom>
-          <a:solidFill>
-            <a:srgbClr val="095292"/>
-          </a:solidFill>
-          <a:ln>
-            <a:noFill/>
-          </a:ln>
-        </p:spPr>
-        <p:style>
-          <a:lnRef idx="1">
-            <a:schemeClr val="accent1"/>
-          </a:lnRef>
-          <a:fillRef idx="3">
-            <a:schemeClr val="accent1"/>
-          </a:fillRef>
-          <a:effectRef idx="2">
-            <a:schemeClr val="accent1"/>
-          </a:effectRef>
-          <a:fontRef idx="minor">
-            <a:schemeClr val="lt1"/>
-          </a:fontRef>
-        </p:style>
-        <p:txBody>
-          <a:bodyPr rtlCol="0" anchor="ctr"/>
+      <p:pic>
+        <p:nvPicPr>
+          <p:cNvPr id="6" name="Picture 5" descr="seis-fases-paso1.png"/>
+          <p:cNvPicPr>
+            <a:picLocks noChangeAspect="1"/>
+          </p:cNvPicPr>
+          <p:nvPr/>
+        </p:nvPicPr>
+        <p:blipFill>
+          <a:blip r:embed="rId2"/>
+          <a:stretch>
+            <a:fillRect/>
+          </a:stretch>
+        </p:blipFill>
+        <p:spPr>
+          <a:xfrm>
+            <a:off x="5876318" y="1261872"/>
+            <a:ext cx="5852160" cy="4681728"/>
+          </a:xfrm>
+          <a:prstGeom prst="rect">
+            <a:avLst/>
+          </a:prstGeom>
+        </p:spPr>
+      </p:pic>
+      <p:pic>
+        <p:nvPicPr>
+          <p:cNvPr id="7" name="Picture 6" descr="seis-fases-paso2.png"/>
+          <p:cNvPicPr>
+            <a:picLocks noChangeAspect="1"/>
+          </p:cNvPicPr>
+          <p:nvPr/>
+        </p:nvPicPr>
+        <p:blipFill>
+          <a:blip r:embed="rId3"/>
+          <a:stretch>
+            <a:fillRect/>
+          </a:stretch>
+        </p:blipFill>
+        <p:spPr>
+          <a:xfrm>
+            <a:off x="5876318" y="1261872"/>
+            <a:ext cx="5852160" cy="4681728"/>
+          </a:xfrm>
+          <a:prstGeom prst="rect">
+            <a:avLst/>
+          </a:prstGeom>
+        </p:spPr>
+      </p:pic>
+      <p:pic>
+        <p:nvPicPr>
+          <p:cNvPr id="8" name="Picture 7" descr="seis-fases-paso3.png"/>
+          <p:cNvPicPr>
+            <a:picLocks noChangeAspect="1"/>
+          </p:cNvPicPr>
+          <p:nvPr/>
+        </p:nvPicPr>
+        <p:blipFill>
+          <a:blip r:embed="rId4"/>
+          <a:stretch>
+            <a:fillRect/>
+          </a:stretch>
+        </p:blipFill>
+        <p:spPr>
+          <a:xfrm>
+            <a:off x="5876318" y="1261872"/>
+            <a:ext cx="5852160" cy="4681728"/>
+          </a:xfrm>
+          <a:prstGeom prst="rect">
+            <a:avLst/>
+          </a:prstGeom>
+        </p:spPr>
+      </p:pic>
+      <p:pic>
+        <p:nvPicPr>
+          <p:cNvPr id="9" name="Picture 8" descr="seis-fases-paso4.png"/>
+          <p:cNvPicPr>
+            <a:picLocks noChangeAspect="1"/>
+          </p:cNvPicPr>
+          <p:nvPr/>
+        </p:nvPicPr>
+        <p:blipFill>
+          <a:blip r:embed="rId5"/>
+          <a:stretch>
+            <a:fillRect/>
+          </a:stretch>
+        </p:blipFill>
+        <p:spPr>
+          <a:xfrm>
+            <a:off x="5876318" y="1261872"/>
+            <a:ext cx="5852160" cy="4681728"/>
+          </a:xfrm>
+          <a:prstGeom prst="rect">
+            <a:avLst/>
+          </a:prstGeom>
+        </p:spPr>
+      </p:pic>
+      <p:sp>
+        <p:nvSpPr>
+          <p:cNvPr id="18" name="TextBox 17"/>
+          <p:cNvSpPr txBox="1"/>
+          <p:nvPr/>
+        </p:nvSpPr>
+        <p:spPr>
+          <a:xfrm>
+            <a:off x="5870301" y="5961888"/>
+            <a:ext cx="5864193" cy="320040"/>
+          </a:xfrm>
+          <a:prstGeom prst="rect">
+            <a:avLst/>
+          </a:prstGeom>
+          <a:noFill/>
+        </p:spPr>
+        <p:txBody>
+          <a:bodyPr wrap="square">
+            <a:spAutoFit/>
+          </a:bodyPr>
           <a:lstStyle/>
           <a:p>
             <a:pPr algn="ctr"/>
-          </a:p>
-        </p:txBody>
-      </p:sp>
-      <p:sp>
-        <p:nvSpPr>
-          <p:cNvPr id="8" name="TextBox 7"/>
+            <a:r>
+              <a:rPr sz="1100" b="0" i="1">
+                <a:solidFill>
+                  <a:srgbClr val="666666"/>
+                </a:solidFill>
+                <a:latin typeface="Calibri"/>
+              </a:rPr>
+              <a:t>Clic para avanzar la animación</a:t>
+            </a:r>
+          </a:p>
+        </p:txBody>
+      </p:sp>
+      <p:sp>
+        <p:nvSpPr>
+          <p:cNvPr id="19" name="TextBox 18"/>
           <p:cNvSpPr txBox="1"/>
           <p:nvPr/>
         </p:nvSpPr>
         <p:spPr>
           <a:xfrm>
-            <a:off x="594360" y="1597914"/>
-            <a:ext cx="438912" cy="438912"/>
+            <a:off x="457200" y="1353312"/>
+            <a:ext cx="5093061" cy="5047488"/>
           </a:xfrm>
           <a:prstGeom prst="rect">
             <a:avLst/>
@@ -8763,964 +8973,160 @@
           <a:noFill/>
         </p:spPr>
         <p:txBody>
-          <a:bodyPr wrap="square" anchor="ctr"/>
-          <a:lstStyle/>
-          <a:p>
-            <a:pPr algn="ctr"/>
-            <a:r>
-              <a:rPr sz="1600" b="1" i="0">
-                <a:solidFill>
-                  <a:srgbClr val="FFFFFF"/>
-                </a:solidFill>
-                <a:latin typeface="Calibri"/>
-              </a:rPr>
-              <a:t>1</a:t>
-            </a:r>
-          </a:p>
-        </p:txBody>
-      </p:sp>
-      <p:sp>
-        <p:nvSpPr>
-          <p:cNvPr id="9" name="TextBox 8"/>
-          <p:cNvSpPr txBox="1"/>
-          <p:nvPr/>
-        </p:nvSpPr>
-        <p:spPr>
-          <a:xfrm>
-            <a:off x="1188720" y="1536192"/>
-            <a:ext cx="10271455" cy="580644"/>
-          </a:xfrm>
-          <a:prstGeom prst="rect">
-            <a:avLst/>
-          </a:prstGeom>
-          <a:noFill/>
-        </p:spPr>
-        <p:txBody>
-          <a:bodyPr wrap="square" anchor="ctr"/>
-          <a:lstStyle/>
-          <a:p>
-            <a:r>
-              <a:rPr sz="1500" b="1" i="0">
-                <a:solidFill>
-                  <a:srgbClr val="095292"/>
-                </a:solidFill>
-                <a:latin typeface="Calibri"/>
-              </a:rPr>
-              <a:t>DEFINICIÓN DEL PROBLEMA</a:t>
-            </a:r>
-          </a:p>
+          <a:bodyPr wrap="square">
+            <a:spAutoFit/>
+          </a:bodyPr>
+          <a:lstStyle/>
           <a:p>
             <a:pPr>
-              <a:spcBef>
-                <a:spcPts val="200"/>
-              </a:spcBef>
+              <a:spcAft>
+                <a:spcPts val="800"/>
+              </a:spcAft>
             </a:pPr>
             <a:r>
-              <a:rPr sz="1300" b="0" i="0">
+              <a:rPr sz="2000" b="0" i="0">
                 <a:solidFill>
                   <a:srgbClr val="333333"/>
                 </a:solidFill>
                 <a:latin typeface="Calibri"/>
               </a:rPr>
-              <a:t>Qué se va a resolver y para quién. </a:t>
-            </a:r>
-            <a:r>
-              <a:rPr sz="1300" b="1" i="0">
+              <a:t>–   </a:t>
+            </a:r>
+            <a:r>
+              <a:rPr sz="2000" b="1" i="0">
                 <a:solidFill>
                   <a:srgbClr val="333333"/>
                 </a:solidFill>
                 <a:latin typeface="Calibri"/>
               </a:rPr>
-              <a:t>Esto ya lo hicieron en la sesión 6</a:t>
-            </a:r>
-            <a:r>
-              <a:rPr sz="1300" b="0" i="0">
+              <a:t>DEFINICIÓN DEL PROBLEMA:</a:t>
+            </a:r>
+            <a:r>
+              <a:rPr sz="2000" b="0" i="0">
                 <a:solidFill>
                   <a:srgbClr val="333333"/>
                 </a:solidFill>
                 <a:latin typeface="Calibri"/>
               </a:rPr>
-              <a:t>: es la ficha del problema</a:t>
-            </a:r>
-          </a:p>
-        </p:txBody>
-      </p:sp>
-      <p:sp>
-        <p:nvSpPr>
-          <p:cNvPr id="10" name="Rounded Rectangle 9"/>
-          <p:cNvSpPr/>
-          <p:nvPr/>
-        </p:nvSpPr>
-        <p:spPr>
-          <a:xfrm>
-            <a:off x="457200" y="2281428"/>
-            <a:ext cx="11277295" cy="745236"/>
-          </a:xfrm>
-          <a:prstGeom prst="roundRect">
-            <a:avLst>
-              <a:gd name="adj" fmla="val 12000"/>
-            </a:avLst>
-          </a:prstGeom>
-          <a:solidFill>
-            <a:srgbClr val="E8F4FA"/>
-          </a:solidFill>
-          <a:ln>
-            <a:noFill/>
-          </a:ln>
-        </p:spPr>
-        <p:style>
-          <a:lnRef idx="1">
-            <a:schemeClr val="accent1"/>
-          </a:lnRef>
-          <a:fillRef idx="3">
-            <a:schemeClr val="accent1"/>
-          </a:fillRef>
-          <a:effectRef idx="2">
-            <a:schemeClr val="accent1"/>
-          </a:effectRef>
-          <a:fontRef idx="minor">
-            <a:schemeClr val="lt1"/>
-          </a:fontRef>
-        </p:style>
-        <p:txBody>
-          <a:bodyPr rtlCol="0" anchor="ctr"/>
-          <a:lstStyle/>
-          <a:p>
-            <a:pPr algn="ctr"/>
-          </a:p>
-        </p:txBody>
-      </p:sp>
-      <p:sp>
-        <p:nvSpPr>
-          <p:cNvPr id="11" name="Rounded Rectangle 10"/>
-          <p:cNvSpPr/>
-          <p:nvPr/>
-        </p:nvSpPr>
-        <p:spPr>
-          <a:xfrm>
-            <a:off x="594360" y="2434590"/>
-            <a:ext cx="438912" cy="438912"/>
-          </a:xfrm>
-          <a:prstGeom prst="roundRect">
-            <a:avLst>
-              <a:gd name="adj" fmla="val 12000"/>
-            </a:avLst>
-          </a:prstGeom>
-          <a:solidFill>
-            <a:srgbClr val="095292"/>
-          </a:solidFill>
-          <a:ln>
-            <a:noFill/>
-          </a:ln>
-        </p:spPr>
-        <p:style>
-          <a:lnRef idx="1">
-            <a:schemeClr val="accent1"/>
-          </a:lnRef>
-          <a:fillRef idx="3">
-            <a:schemeClr val="accent1"/>
-          </a:fillRef>
-          <a:effectRef idx="2">
-            <a:schemeClr val="accent1"/>
-          </a:effectRef>
-          <a:fontRef idx="minor">
-            <a:schemeClr val="lt1"/>
-          </a:fontRef>
-        </p:style>
-        <p:txBody>
-          <a:bodyPr rtlCol="0" anchor="ctr"/>
-          <a:lstStyle/>
-          <a:p>
-            <a:pPr algn="ctr"/>
-          </a:p>
-        </p:txBody>
-      </p:sp>
-      <p:sp>
-        <p:nvSpPr>
-          <p:cNvPr id="12" name="TextBox 11"/>
-          <p:cNvSpPr txBox="1"/>
-          <p:nvPr/>
-        </p:nvSpPr>
-        <p:spPr>
-          <a:xfrm>
-            <a:off x="594360" y="2434590"/>
-            <a:ext cx="438912" cy="438912"/>
-          </a:xfrm>
-          <a:prstGeom prst="rect">
-            <a:avLst/>
-          </a:prstGeom>
-          <a:noFill/>
-        </p:spPr>
-        <p:txBody>
-          <a:bodyPr wrap="square" anchor="ctr"/>
-          <a:lstStyle/>
-          <a:p>
-            <a:pPr algn="ctr"/>
-            <a:r>
-              <a:rPr sz="1600" b="1" i="0">
-                <a:solidFill>
-                  <a:srgbClr val="FFFFFF"/>
-                </a:solidFill>
-                <a:latin typeface="Calibri"/>
-              </a:rPr>
-              <a:t>2</a:t>
-            </a:r>
-          </a:p>
-        </p:txBody>
-      </p:sp>
-      <p:sp>
-        <p:nvSpPr>
-          <p:cNvPr id="13" name="TextBox 12"/>
-          <p:cNvSpPr txBox="1"/>
-          <p:nvPr/>
-        </p:nvSpPr>
-        <p:spPr>
-          <a:xfrm>
-            <a:off x="1188720" y="2372868"/>
-            <a:ext cx="10271455" cy="580644"/>
-          </a:xfrm>
-          <a:prstGeom prst="rect">
-            <a:avLst/>
-          </a:prstGeom>
-          <a:noFill/>
-        </p:spPr>
-        <p:txBody>
-          <a:bodyPr wrap="square" anchor="ctr"/>
-          <a:lstStyle/>
-          <a:p>
-            <a:r>
-              <a:rPr sz="1500" b="1" i="0">
-                <a:solidFill>
-                  <a:srgbClr val="095292"/>
-                </a:solidFill>
-                <a:latin typeface="Calibri"/>
-              </a:rPr>
-              <a:t>REQUISITOS</a:t>
+              <a:t> Qué se resuelve y para quién: </a:t>
+            </a:r>
+            <a:r>
+              <a:rPr sz="2000" b="1" i="0">
+                <a:solidFill>
+                  <a:srgbClr val="333333"/>
+                </a:solidFill>
+                <a:latin typeface="Calibri"/>
+              </a:rPr>
+              <a:t>la ficha del problema de la sesión 6</a:t>
             </a:r>
           </a:p>
           <a:p>
             <a:pPr>
-              <a:spcBef>
-                <a:spcPts val="200"/>
-              </a:spcBef>
+              <a:spcAft>
+                <a:spcPts val="800"/>
+              </a:spcAft>
             </a:pPr>
             <a:r>
-              <a:rPr sz="1300" b="0" i="0">
+              <a:rPr sz="2000" b="0" i="0">
                 <a:solidFill>
                   <a:srgbClr val="333333"/>
                 </a:solidFill>
                 <a:latin typeface="Calibri"/>
               </a:rPr>
-              <a:t>Qué tiene que hacer la solución para resolverlo, y cómo se sabrá que lo hace</a:t>
-            </a:r>
-          </a:p>
-        </p:txBody>
-      </p:sp>
-      <p:sp>
-        <p:nvSpPr>
-          <p:cNvPr id="14" name="Rounded Rectangle 13"/>
-          <p:cNvSpPr/>
-          <p:nvPr/>
-        </p:nvSpPr>
-        <p:spPr>
-          <a:xfrm>
-            <a:off x="457200" y="3118104"/>
-            <a:ext cx="11277295" cy="745236"/>
-          </a:xfrm>
-          <a:prstGeom prst="roundRect">
-            <a:avLst>
-              <a:gd name="adj" fmla="val 12000"/>
-            </a:avLst>
-          </a:prstGeom>
-          <a:solidFill>
-            <a:srgbClr val="F2F2F2"/>
-          </a:solidFill>
-          <a:ln>
-            <a:noFill/>
-          </a:ln>
-        </p:spPr>
-        <p:style>
-          <a:lnRef idx="1">
-            <a:schemeClr val="accent1"/>
-          </a:lnRef>
-          <a:fillRef idx="3">
-            <a:schemeClr val="accent1"/>
-          </a:fillRef>
-          <a:effectRef idx="2">
-            <a:schemeClr val="accent1"/>
-          </a:effectRef>
-          <a:fontRef idx="minor">
-            <a:schemeClr val="lt1"/>
-          </a:fontRef>
-        </p:style>
-        <p:txBody>
-          <a:bodyPr rtlCol="0" anchor="ctr"/>
-          <a:lstStyle/>
-          <a:p>
-            <a:pPr algn="ctr"/>
-          </a:p>
-        </p:txBody>
-      </p:sp>
-      <p:sp>
-        <p:nvSpPr>
-          <p:cNvPr id="15" name="Rounded Rectangle 14"/>
-          <p:cNvSpPr/>
-          <p:nvPr/>
-        </p:nvSpPr>
-        <p:spPr>
-          <a:xfrm>
-            <a:off x="594360" y="3271266"/>
-            <a:ext cx="438912" cy="438912"/>
-          </a:xfrm>
-          <a:prstGeom prst="roundRect">
-            <a:avLst>
-              <a:gd name="adj" fmla="val 12000"/>
-            </a:avLst>
-          </a:prstGeom>
-          <a:solidFill>
-            <a:srgbClr val="095292"/>
-          </a:solidFill>
-          <a:ln>
-            <a:noFill/>
-          </a:ln>
-        </p:spPr>
-        <p:style>
-          <a:lnRef idx="1">
-            <a:schemeClr val="accent1"/>
-          </a:lnRef>
-          <a:fillRef idx="3">
-            <a:schemeClr val="accent1"/>
-          </a:fillRef>
-          <a:effectRef idx="2">
-            <a:schemeClr val="accent1"/>
-          </a:effectRef>
-          <a:fontRef idx="minor">
-            <a:schemeClr val="lt1"/>
-          </a:fontRef>
-        </p:style>
-        <p:txBody>
-          <a:bodyPr rtlCol="0" anchor="ctr"/>
-          <a:lstStyle/>
-          <a:p>
-            <a:pPr algn="ctr"/>
-          </a:p>
-        </p:txBody>
-      </p:sp>
-      <p:sp>
-        <p:nvSpPr>
-          <p:cNvPr id="16" name="TextBox 15"/>
-          <p:cNvSpPr txBox="1"/>
-          <p:nvPr/>
-        </p:nvSpPr>
-        <p:spPr>
-          <a:xfrm>
-            <a:off x="594360" y="3271266"/>
-            <a:ext cx="438912" cy="438912"/>
-          </a:xfrm>
-          <a:prstGeom prst="rect">
-            <a:avLst/>
-          </a:prstGeom>
-          <a:noFill/>
-        </p:spPr>
-        <p:txBody>
-          <a:bodyPr wrap="square" anchor="ctr"/>
-          <a:lstStyle/>
-          <a:p>
-            <a:pPr algn="ctr"/>
-            <a:r>
-              <a:rPr sz="1600" b="1" i="0">
-                <a:solidFill>
-                  <a:srgbClr val="FFFFFF"/>
-                </a:solidFill>
-                <a:latin typeface="Calibri"/>
-              </a:rPr>
-              <a:t>3</a:t>
-            </a:r>
-          </a:p>
-        </p:txBody>
-      </p:sp>
-      <p:sp>
-        <p:nvSpPr>
-          <p:cNvPr id="17" name="TextBox 16"/>
-          <p:cNvSpPr txBox="1"/>
-          <p:nvPr/>
-        </p:nvSpPr>
-        <p:spPr>
-          <a:xfrm>
-            <a:off x="1188720" y="3209544"/>
-            <a:ext cx="10271455" cy="580644"/>
-          </a:xfrm>
-          <a:prstGeom prst="rect">
-            <a:avLst/>
-          </a:prstGeom>
-          <a:noFill/>
-        </p:spPr>
-        <p:txBody>
-          <a:bodyPr wrap="square" anchor="ctr"/>
-          <a:lstStyle/>
-          <a:p>
-            <a:r>
-              <a:rPr sz="1500" b="1" i="0">
-                <a:solidFill>
-                  <a:srgbClr val="095292"/>
-                </a:solidFill>
-                <a:latin typeface="Calibri"/>
-              </a:rPr>
-              <a:t>DISEÑO</a:t>
+              <a:t>–   </a:t>
+            </a:r>
+            <a:r>
+              <a:rPr sz="2000" b="1" i="0">
+                <a:solidFill>
+                  <a:srgbClr val="333333"/>
+                </a:solidFill>
+                <a:latin typeface="Calibri"/>
+              </a:rPr>
+              <a:t>REQUISITOS:</a:t>
+            </a:r>
+            <a:r>
+              <a:rPr sz="2000" b="0" i="0">
+                <a:solidFill>
+                  <a:srgbClr val="333333"/>
+                </a:solidFill>
+                <a:latin typeface="Calibri"/>
+              </a:rPr>
+              <a:t> Qué debe hacer la solución, y cómo se sabrá que lo hace</a:t>
             </a:r>
           </a:p>
           <a:p>
             <a:pPr>
-              <a:spcBef>
-                <a:spcPts val="200"/>
-              </a:spcBef>
+              <a:spcAft>
+                <a:spcPts val="800"/>
+              </a:spcAft>
             </a:pPr>
             <a:r>
-              <a:rPr sz="1300" b="0" i="0">
+              <a:rPr sz="2000" b="0" i="0">
                 <a:solidFill>
                   <a:srgbClr val="333333"/>
                 </a:solidFill>
                 <a:latin typeface="Calibri"/>
               </a:rPr>
-              <a:t>Cómo va a estar construida: las partes, el flujo, las pantallas o los pasos</a:t>
-            </a:r>
-          </a:p>
-        </p:txBody>
-      </p:sp>
-      <p:sp>
-        <p:nvSpPr>
-          <p:cNvPr id="18" name="Rounded Rectangle 17"/>
-          <p:cNvSpPr/>
-          <p:nvPr/>
-        </p:nvSpPr>
-        <p:spPr>
-          <a:xfrm>
-            <a:off x="457200" y="3954780"/>
-            <a:ext cx="11277295" cy="745236"/>
-          </a:xfrm>
-          <a:prstGeom prst="roundRect">
-            <a:avLst>
-              <a:gd name="adj" fmla="val 12000"/>
-            </a:avLst>
-          </a:prstGeom>
-          <a:solidFill>
-            <a:srgbClr val="E8F4FA"/>
-          </a:solidFill>
-          <a:ln>
-            <a:noFill/>
-          </a:ln>
-        </p:spPr>
-        <p:style>
-          <a:lnRef idx="1">
-            <a:schemeClr val="accent1"/>
-          </a:lnRef>
-          <a:fillRef idx="3">
-            <a:schemeClr val="accent1"/>
-          </a:fillRef>
-          <a:effectRef idx="2">
-            <a:schemeClr val="accent1"/>
-          </a:effectRef>
-          <a:fontRef idx="minor">
-            <a:schemeClr val="lt1"/>
-          </a:fontRef>
-        </p:style>
-        <p:txBody>
-          <a:bodyPr rtlCol="0" anchor="ctr"/>
-          <a:lstStyle/>
-          <a:p>
-            <a:pPr algn="ctr"/>
-          </a:p>
-        </p:txBody>
-      </p:sp>
-      <p:sp>
-        <p:nvSpPr>
-          <p:cNvPr id="19" name="Rounded Rectangle 18"/>
-          <p:cNvSpPr/>
-          <p:nvPr/>
-        </p:nvSpPr>
-        <p:spPr>
-          <a:xfrm>
-            <a:off x="594360" y="4107942"/>
-            <a:ext cx="438912" cy="438912"/>
-          </a:xfrm>
-          <a:prstGeom prst="roundRect">
-            <a:avLst>
-              <a:gd name="adj" fmla="val 12000"/>
-            </a:avLst>
-          </a:prstGeom>
-          <a:solidFill>
-            <a:srgbClr val="095292"/>
-          </a:solidFill>
-          <a:ln>
-            <a:noFill/>
-          </a:ln>
-        </p:spPr>
-        <p:style>
-          <a:lnRef idx="1">
-            <a:schemeClr val="accent1"/>
-          </a:lnRef>
-          <a:fillRef idx="3">
-            <a:schemeClr val="accent1"/>
-          </a:fillRef>
-          <a:effectRef idx="2">
-            <a:schemeClr val="accent1"/>
-          </a:effectRef>
-          <a:fontRef idx="minor">
-            <a:schemeClr val="lt1"/>
-          </a:fontRef>
-        </p:style>
-        <p:txBody>
-          <a:bodyPr rtlCol="0" anchor="ctr"/>
-          <a:lstStyle/>
-          <a:p>
-            <a:pPr algn="ctr"/>
+              <a:t>–   </a:t>
+            </a:r>
+            <a:r>
+              <a:rPr sz="2000" b="1" i="0">
+                <a:solidFill>
+                  <a:srgbClr val="333333"/>
+                </a:solidFill>
+                <a:latin typeface="Calibri"/>
+              </a:rPr>
+              <a:t>DISEÑO:</a:t>
+            </a:r>
+            <a:r>
+              <a:rPr sz="2000" b="0" i="0">
+                <a:solidFill>
+                  <a:srgbClr val="333333"/>
+                </a:solidFill>
+                <a:latin typeface="Calibri"/>
+              </a:rPr>
+              <a:t> Cómo va a estar construida: partes, flujo, pantallas o pasos</a:t>
+            </a:r>
+          </a:p>
+          <a:p>
+            <a:pPr>
+              <a:spcAft>
+                <a:spcPts val="800"/>
+              </a:spcAft>
+            </a:pPr>
+            <a:r>
+              <a:rPr sz="2000" b="0" i="0">
+                <a:solidFill>
+                  <a:srgbClr val="333333"/>
+                </a:solidFill>
+                <a:latin typeface="Calibri"/>
+              </a:rPr>
+              <a:t>–   </a:t>
+            </a:r>
+            <a:r>
+              <a:rPr sz="2000" b="1" i="0">
+                <a:solidFill>
+                  <a:srgbClr val="333333"/>
+                </a:solidFill>
+                <a:latin typeface="Calibri"/>
+              </a:rPr>
+              <a:t>CONSTRUCCIÓN:</a:t>
+            </a:r>
+            <a:r>
+              <a:rPr sz="2000" b="0" i="0">
+                <a:solidFill>
+                  <a:srgbClr val="333333"/>
+                </a:solidFill>
+                <a:latin typeface="Calibri"/>
+              </a:rPr>
+              <a:t> Se construye. Todos creen que es «el proyecto», y es una de seis</a:t>
+            </a:r>
           </a:p>
         </p:txBody>
       </p:sp>
       <p:sp>
         <p:nvSpPr>
           <p:cNvPr id="20" name="TextBox 19"/>
-          <p:cNvSpPr txBox="1"/>
-          <p:nvPr/>
-        </p:nvSpPr>
-        <p:spPr>
-          <a:xfrm>
-            <a:off x="594360" y="4107942"/>
-            <a:ext cx="438912" cy="438912"/>
-          </a:xfrm>
-          <a:prstGeom prst="rect">
-            <a:avLst/>
-          </a:prstGeom>
-          <a:noFill/>
-        </p:spPr>
-        <p:txBody>
-          <a:bodyPr wrap="square" anchor="ctr"/>
-          <a:lstStyle/>
-          <a:p>
-            <a:pPr algn="ctr"/>
-            <a:r>
-              <a:rPr sz="1600" b="1" i="0">
-                <a:solidFill>
-                  <a:srgbClr val="FFFFFF"/>
-                </a:solidFill>
-                <a:latin typeface="Calibri"/>
-              </a:rPr>
-              <a:t>4</a:t>
-            </a:r>
-          </a:p>
-        </p:txBody>
-      </p:sp>
-      <p:sp>
-        <p:nvSpPr>
-          <p:cNvPr id="21" name="TextBox 20"/>
-          <p:cNvSpPr txBox="1"/>
-          <p:nvPr/>
-        </p:nvSpPr>
-        <p:spPr>
-          <a:xfrm>
-            <a:off x="1188720" y="4046220"/>
-            <a:ext cx="10271455" cy="580644"/>
-          </a:xfrm>
-          <a:prstGeom prst="rect">
-            <a:avLst/>
-          </a:prstGeom>
-          <a:noFill/>
-        </p:spPr>
-        <p:txBody>
-          <a:bodyPr wrap="square" anchor="ctr"/>
-          <a:lstStyle/>
-          <a:p>
-            <a:r>
-              <a:rPr sz="1500" b="1" i="0">
-                <a:solidFill>
-                  <a:srgbClr val="095292"/>
-                </a:solidFill>
-                <a:latin typeface="Calibri"/>
-              </a:rPr>
-              <a:t>CONSTRUCCIÓN</a:t>
-            </a:r>
-          </a:p>
-          <a:p>
-            <a:pPr>
-              <a:spcBef>
-                <a:spcPts val="200"/>
-              </a:spcBef>
-            </a:pPr>
-            <a:r>
-              <a:rPr sz="1300" b="0" i="0">
-                <a:solidFill>
-                  <a:srgbClr val="333333"/>
-                </a:solidFill>
-                <a:latin typeface="Calibri"/>
-              </a:rPr>
-              <a:t>Se construye. Es la fase que todo el mundo cree que es «el proyecto», y es una de seis</a:t>
-            </a:r>
-          </a:p>
-        </p:txBody>
-      </p:sp>
-      <p:sp>
-        <p:nvSpPr>
-          <p:cNvPr id="22" name="Rounded Rectangle 21"/>
-          <p:cNvSpPr/>
-          <p:nvPr/>
-        </p:nvSpPr>
-        <p:spPr>
-          <a:xfrm>
-            <a:off x="457200" y="4791456"/>
-            <a:ext cx="11277295" cy="745236"/>
-          </a:xfrm>
-          <a:prstGeom prst="roundRect">
-            <a:avLst>
-              <a:gd name="adj" fmla="val 12000"/>
-            </a:avLst>
-          </a:prstGeom>
-          <a:solidFill>
-            <a:srgbClr val="F2F2F2"/>
-          </a:solidFill>
-          <a:ln>
-            <a:noFill/>
-          </a:ln>
-        </p:spPr>
-        <p:style>
-          <a:lnRef idx="1">
-            <a:schemeClr val="accent1"/>
-          </a:lnRef>
-          <a:fillRef idx="3">
-            <a:schemeClr val="accent1"/>
-          </a:fillRef>
-          <a:effectRef idx="2">
-            <a:schemeClr val="accent1"/>
-          </a:effectRef>
-          <a:fontRef idx="minor">
-            <a:schemeClr val="lt1"/>
-          </a:fontRef>
-        </p:style>
-        <p:txBody>
-          <a:bodyPr rtlCol="0" anchor="ctr"/>
-          <a:lstStyle/>
-          <a:p>
-            <a:pPr algn="ctr"/>
-          </a:p>
-        </p:txBody>
-      </p:sp>
-      <p:sp>
-        <p:nvSpPr>
-          <p:cNvPr id="23" name="Rounded Rectangle 22"/>
-          <p:cNvSpPr/>
-          <p:nvPr/>
-        </p:nvSpPr>
-        <p:spPr>
-          <a:xfrm>
-            <a:off x="594360" y="4944618"/>
-            <a:ext cx="438912" cy="438912"/>
-          </a:xfrm>
-          <a:prstGeom prst="roundRect">
-            <a:avLst>
-              <a:gd name="adj" fmla="val 12000"/>
-            </a:avLst>
-          </a:prstGeom>
-          <a:solidFill>
-            <a:srgbClr val="095292"/>
-          </a:solidFill>
-          <a:ln>
-            <a:noFill/>
-          </a:ln>
-        </p:spPr>
-        <p:style>
-          <a:lnRef idx="1">
-            <a:schemeClr val="accent1"/>
-          </a:lnRef>
-          <a:fillRef idx="3">
-            <a:schemeClr val="accent1"/>
-          </a:fillRef>
-          <a:effectRef idx="2">
-            <a:schemeClr val="accent1"/>
-          </a:effectRef>
-          <a:fontRef idx="minor">
-            <a:schemeClr val="lt1"/>
-          </a:fontRef>
-        </p:style>
-        <p:txBody>
-          <a:bodyPr rtlCol="0" anchor="ctr"/>
-          <a:lstStyle/>
-          <a:p>
-            <a:pPr algn="ctr"/>
-          </a:p>
-        </p:txBody>
-      </p:sp>
-      <p:sp>
-        <p:nvSpPr>
-          <p:cNvPr id="24" name="TextBox 23"/>
-          <p:cNvSpPr txBox="1"/>
-          <p:nvPr/>
-        </p:nvSpPr>
-        <p:spPr>
-          <a:xfrm>
-            <a:off x="594360" y="4944618"/>
-            <a:ext cx="438912" cy="438912"/>
-          </a:xfrm>
-          <a:prstGeom prst="rect">
-            <a:avLst/>
-          </a:prstGeom>
-          <a:noFill/>
-        </p:spPr>
-        <p:txBody>
-          <a:bodyPr wrap="square" anchor="ctr"/>
-          <a:lstStyle/>
-          <a:p>
-            <a:pPr algn="ctr"/>
-            <a:r>
-              <a:rPr sz="1600" b="1" i="0">
-                <a:solidFill>
-                  <a:srgbClr val="FFFFFF"/>
-                </a:solidFill>
-                <a:latin typeface="Calibri"/>
-              </a:rPr>
-              <a:t>5</a:t>
-            </a:r>
-          </a:p>
-        </p:txBody>
-      </p:sp>
-      <p:sp>
-        <p:nvSpPr>
-          <p:cNvPr id="25" name="TextBox 24"/>
-          <p:cNvSpPr txBox="1"/>
-          <p:nvPr/>
-        </p:nvSpPr>
-        <p:spPr>
-          <a:xfrm>
-            <a:off x="1188720" y="4882896"/>
-            <a:ext cx="10271455" cy="580644"/>
-          </a:xfrm>
-          <a:prstGeom prst="rect">
-            <a:avLst/>
-          </a:prstGeom>
-          <a:noFill/>
-        </p:spPr>
-        <p:txBody>
-          <a:bodyPr wrap="square" anchor="ctr"/>
-          <a:lstStyle/>
-          <a:p>
-            <a:r>
-              <a:rPr sz="1500" b="1" i="0">
-                <a:solidFill>
-                  <a:srgbClr val="095292"/>
-                </a:solidFill>
-                <a:latin typeface="Calibri"/>
-              </a:rPr>
-              <a:t>VALIDACIÓN</a:t>
-            </a:r>
-          </a:p>
-          <a:p>
-            <a:pPr>
-              <a:spcBef>
-                <a:spcPts val="200"/>
-              </a:spcBef>
-            </a:pPr>
-            <a:r>
-              <a:rPr sz="1300" b="0" i="0">
-                <a:solidFill>
-                  <a:srgbClr val="333333"/>
-                </a:solidFill>
-                <a:latin typeface="Calibri"/>
-              </a:rPr>
-              <a:t>Se prueba contra los criterios de aceptación </a:t>
-            </a:r>
-            <a:r>
-              <a:rPr sz="1300" b="1" i="0">
-                <a:solidFill>
-                  <a:srgbClr val="333333"/>
-                </a:solidFill>
-                <a:latin typeface="Calibri"/>
-              </a:rPr>
-              <a:t>y con el usuario real</a:t>
-            </a:r>
-            <a:r>
-              <a:rPr sz="1300" b="0" i="0">
-                <a:solidFill>
-                  <a:srgbClr val="333333"/>
-                </a:solidFill>
-                <a:latin typeface="Calibri"/>
-              </a:rPr>
-              <a:t>, no solo con el equipo</a:t>
-            </a:r>
-          </a:p>
-        </p:txBody>
-      </p:sp>
-      <p:sp>
-        <p:nvSpPr>
-          <p:cNvPr id="26" name="Rounded Rectangle 25"/>
-          <p:cNvSpPr/>
-          <p:nvPr/>
-        </p:nvSpPr>
-        <p:spPr>
-          <a:xfrm>
-            <a:off x="457200" y="5628132"/>
-            <a:ext cx="11277295" cy="745236"/>
-          </a:xfrm>
-          <a:prstGeom prst="roundRect">
-            <a:avLst>
-              <a:gd name="adj" fmla="val 12000"/>
-            </a:avLst>
-          </a:prstGeom>
-          <a:solidFill>
-            <a:srgbClr val="E8F4FA"/>
-          </a:solidFill>
-          <a:ln>
-            <a:noFill/>
-          </a:ln>
-        </p:spPr>
-        <p:style>
-          <a:lnRef idx="1">
-            <a:schemeClr val="accent1"/>
-          </a:lnRef>
-          <a:fillRef idx="3">
-            <a:schemeClr val="accent1"/>
-          </a:fillRef>
-          <a:effectRef idx="2">
-            <a:schemeClr val="accent1"/>
-          </a:effectRef>
-          <a:fontRef idx="minor">
-            <a:schemeClr val="lt1"/>
-          </a:fontRef>
-        </p:style>
-        <p:txBody>
-          <a:bodyPr rtlCol="0" anchor="ctr"/>
-          <a:lstStyle/>
-          <a:p>
-            <a:pPr algn="ctr"/>
-          </a:p>
-        </p:txBody>
-      </p:sp>
-      <p:sp>
-        <p:nvSpPr>
-          <p:cNvPr id="27" name="Rounded Rectangle 26"/>
-          <p:cNvSpPr/>
-          <p:nvPr/>
-        </p:nvSpPr>
-        <p:spPr>
-          <a:xfrm>
-            <a:off x="594360" y="5781294"/>
-            <a:ext cx="438912" cy="438912"/>
-          </a:xfrm>
-          <a:prstGeom prst="roundRect">
-            <a:avLst>
-              <a:gd name="adj" fmla="val 12000"/>
-            </a:avLst>
-          </a:prstGeom>
-          <a:solidFill>
-            <a:srgbClr val="095292"/>
-          </a:solidFill>
-          <a:ln>
-            <a:noFill/>
-          </a:ln>
-        </p:spPr>
-        <p:style>
-          <a:lnRef idx="1">
-            <a:schemeClr val="accent1"/>
-          </a:lnRef>
-          <a:fillRef idx="3">
-            <a:schemeClr val="accent1"/>
-          </a:fillRef>
-          <a:effectRef idx="2">
-            <a:schemeClr val="accent1"/>
-          </a:effectRef>
-          <a:fontRef idx="minor">
-            <a:schemeClr val="lt1"/>
-          </a:fontRef>
-        </p:style>
-        <p:txBody>
-          <a:bodyPr rtlCol="0" anchor="ctr"/>
-          <a:lstStyle/>
-          <a:p>
-            <a:pPr algn="ctr"/>
-          </a:p>
-        </p:txBody>
-      </p:sp>
-      <p:sp>
-        <p:nvSpPr>
-          <p:cNvPr id="28" name="TextBox 27"/>
-          <p:cNvSpPr txBox="1"/>
-          <p:nvPr/>
-        </p:nvSpPr>
-        <p:spPr>
-          <a:xfrm>
-            <a:off x="594360" y="5781294"/>
-            <a:ext cx="438912" cy="438912"/>
-          </a:xfrm>
-          <a:prstGeom prst="rect">
-            <a:avLst/>
-          </a:prstGeom>
-          <a:noFill/>
-        </p:spPr>
-        <p:txBody>
-          <a:bodyPr wrap="square" anchor="ctr"/>
-          <a:lstStyle/>
-          <a:p>
-            <a:pPr algn="ctr"/>
-            <a:r>
-              <a:rPr sz="1600" b="1" i="0">
-                <a:solidFill>
-                  <a:srgbClr val="FFFFFF"/>
-                </a:solidFill>
-                <a:latin typeface="Calibri"/>
-              </a:rPr>
-              <a:t>6</a:t>
-            </a:r>
-          </a:p>
-        </p:txBody>
-      </p:sp>
-      <p:sp>
-        <p:nvSpPr>
-          <p:cNvPr id="29" name="TextBox 28"/>
-          <p:cNvSpPr txBox="1"/>
-          <p:nvPr/>
-        </p:nvSpPr>
-        <p:spPr>
-          <a:xfrm>
-            <a:off x="1188720" y="5719572"/>
-            <a:ext cx="10271455" cy="580644"/>
-          </a:xfrm>
-          <a:prstGeom prst="rect">
-            <a:avLst/>
-          </a:prstGeom>
-          <a:noFill/>
-        </p:spPr>
-        <p:txBody>
-          <a:bodyPr wrap="square" anchor="ctr"/>
-          <a:lstStyle/>
-          <a:p>
-            <a:r>
-              <a:rPr sz="1500" b="1" i="0">
-                <a:solidFill>
-                  <a:srgbClr val="095292"/>
-                </a:solidFill>
-                <a:latin typeface="Calibri"/>
-              </a:rPr>
-              <a:t>OPERACIÓN Y RETIRO</a:t>
-            </a:r>
-          </a:p>
-          <a:p>
-            <a:pPr>
-              <a:spcBef>
-                <a:spcPts val="200"/>
-              </a:spcBef>
-            </a:pPr>
-            <a:r>
-              <a:rPr sz="1300" b="0" i="0">
-                <a:solidFill>
-                  <a:srgbClr val="333333"/>
-                </a:solidFill>
-                <a:latin typeface="Calibri"/>
-              </a:rPr>
-              <a:t>Funcionando en la vida real, con mantenimiento. Y al final, cómo se apaga y qué pasa con los datos</a:t>
-            </a:r>
-          </a:p>
-        </p:txBody>
-      </p:sp>
-      <p:sp>
-        <p:nvSpPr>
-          <p:cNvPr id="30" name="TextBox 29"/>
           <p:cNvSpPr txBox="1"/>
           <p:nvPr/>
         </p:nvSpPr>
@@ -9758,6 +9164,195 @@
   <p:clrMapOvr>
     <a:masterClrMapping/>
   </p:clrMapOvr>
+  <p:timing>
+    <p:tnLst>
+      <p:par>
+        <p:cTn id="1" dur="indefinite" restart="never" nodeType="tmRoot">
+          <p:childTnLst>
+            <p:seq concurrent="1" nextAc="seek">
+              <p:cTn id="2" dur="indefinite" nodeType="mainSeq">
+                <p:childTnLst>
+                  <p:par>
+                    <p:cTn id="3" fill="hold">
+                      <p:stCondLst>
+                        <p:cond delay="indefinite"/>
+                      </p:stCondLst>
+                      <p:childTnLst>
+                        <p:par>
+                          <p:cTn id="4" fill="hold">
+                            <p:stCondLst>
+                              <p:cond delay="0"/>
+                            </p:stCondLst>
+                            <p:childTnLst>
+                              <p:par>
+                                <p:cTn id="5" presetID="10" presetClass="entr" presetSubtype="0" fill="hold" nodeType="clickEffect">
+                                  <p:stCondLst>
+                                    <p:cond delay="0"/>
+                                  </p:stCondLst>
+                                  <p:childTnLst>
+                                    <p:set>
+                                      <p:cBhvr>
+                                        <p:cTn id="6" dur="1" fill="hold">
+                                          <p:stCondLst>
+                                            <p:cond delay="0"/>
+                                          </p:stCondLst>
+                                        </p:cTn>
+                                        <p:tgtEl>
+                                          <p:spTgt spid="7"/>
+                                        </p:tgtEl>
+                                        <p:attrNameLst>
+                                          <p:attrName>style.visibility</p:attrName>
+                                        </p:attrNameLst>
+                                      </p:cBhvr>
+                                      <p:to>
+                                        <p:strVal val="visible"/>
+                                      </p:to>
+                                    </p:set>
+                                    <p:animEffect transition="in" filter="fade">
+                                      <p:cBhvr>
+                                        <p:cTn id="7" dur="450"/>
+                                        <p:tgtEl>
+                                          <p:spTgt spid="7"/>
+                                        </p:tgtEl>
+                                      </p:cBhvr>
+                                    </p:animEffect>
+                                  </p:childTnLst>
+                                </p:cTn>
+                              </p:par>
+                            </p:childTnLst>
+                          </p:cTn>
+                        </p:par>
+                      </p:childTnLst>
+                    </p:cTn>
+                  </p:par>
+                  <p:par>
+                    <p:cTn id="8" fill="hold">
+                      <p:stCondLst>
+                        <p:cond delay="indefinite"/>
+                      </p:stCondLst>
+                      <p:childTnLst>
+                        <p:par>
+                          <p:cTn id="9" fill="hold">
+                            <p:stCondLst>
+                              <p:cond delay="0"/>
+                            </p:stCondLst>
+                            <p:childTnLst>
+                              <p:par>
+                                <p:cTn id="10" presetID="10" presetClass="entr" presetSubtype="0" fill="hold" nodeType="clickEffect">
+                                  <p:stCondLst>
+                                    <p:cond delay="0"/>
+                                  </p:stCondLst>
+                                  <p:childTnLst>
+                                    <p:set>
+                                      <p:cBhvr>
+                                        <p:cTn id="11" dur="1" fill="hold">
+                                          <p:stCondLst>
+                                            <p:cond delay="0"/>
+                                          </p:stCondLst>
+                                        </p:cTn>
+                                        <p:tgtEl>
+                                          <p:spTgt spid="8"/>
+                                        </p:tgtEl>
+                                        <p:attrNameLst>
+                                          <p:attrName>style.visibility</p:attrName>
+                                        </p:attrNameLst>
+                                      </p:cBhvr>
+                                      <p:to>
+                                        <p:strVal val="visible"/>
+                                      </p:to>
+                                    </p:set>
+                                    <p:animEffect transition="in" filter="fade">
+                                      <p:cBhvr>
+                                        <p:cTn id="12" dur="450"/>
+                                        <p:tgtEl>
+                                          <p:spTgt spid="8"/>
+                                        </p:tgtEl>
+                                      </p:cBhvr>
+                                    </p:animEffect>
+                                  </p:childTnLst>
+                                </p:cTn>
+                              </p:par>
+                            </p:childTnLst>
+                          </p:cTn>
+                        </p:par>
+                      </p:childTnLst>
+                    </p:cTn>
+                  </p:par>
+                  <p:par>
+                    <p:cTn id="13" fill="hold">
+                      <p:stCondLst>
+                        <p:cond delay="indefinite"/>
+                      </p:stCondLst>
+                      <p:childTnLst>
+                        <p:par>
+                          <p:cTn id="14" fill="hold">
+                            <p:stCondLst>
+                              <p:cond delay="0"/>
+                            </p:stCondLst>
+                            <p:childTnLst>
+                              <p:par>
+                                <p:cTn id="15" presetID="10" presetClass="entr" presetSubtype="0" fill="hold" nodeType="clickEffect">
+                                  <p:stCondLst>
+                                    <p:cond delay="0"/>
+                                  </p:stCondLst>
+                                  <p:childTnLst>
+                                    <p:set>
+                                      <p:cBhvr>
+                                        <p:cTn id="16" dur="1" fill="hold">
+                                          <p:stCondLst>
+                                            <p:cond delay="0"/>
+                                          </p:stCondLst>
+                                        </p:cTn>
+                                        <p:tgtEl>
+                                          <p:spTgt spid="9"/>
+                                        </p:tgtEl>
+                                        <p:attrNameLst>
+                                          <p:attrName>style.visibility</p:attrName>
+                                        </p:attrNameLst>
+                                      </p:cBhvr>
+                                      <p:to>
+                                        <p:strVal val="visible"/>
+                                      </p:to>
+                                    </p:set>
+                                    <p:animEffect transition="in" filter="fade">
+                                      <p:cBhvr>
+                                        <p:cTn id="17" dur="450"/>
+                                        <p:tgtEl>
+                                          <p:spTgt spid="9"/>
+                                        </p:tgtEl>
+                                      </p:cBhvr>
+                                    </p:animEffect>
+                                  </p:childTnLst>
+                                </p:cTn>
+                              </p:par>
+                            </p:childTnLst>
+                          </p:cTn>
+                        </p:par>
+                      </p:childTnLst>
+                    </p:cTn>
+                  </p:par>
+                </p:childTnLst>
+              </p:cTn>
+              <p:prevCondLst>
+                <p:cond evt="onPrev" delay="0">
+                  <p:tgtEl>
+                    <p:sldTgt/>
+                  </p:tgtEl>
+                </p:cond>
+              </p:prevCondLst>
+              <p:nextCondLst>
+                <p:cond evt="onNext" delay="0">
+                  <p:tgtEl>
+                    <p:sldTgt/>
+                  </p:tgtEl>
+                </p:cond>
+              </p:nextCondLst>
+            </p:seq>
+          </p:childTnLst>
+        </p:cTn>
+      </p:par>
+    </p:tnLst>
+  </p:timing>
 </p:sld>
 </file>
 
@@ -9941,16 +9536,16 @@
         </p:nvSpPr>
         <p:spPr>
           <a:xfrm>
-            <a:off x="457200" y="1444752"/>
-            <a:ext cx="11277295" cy="745236"/>
+            <a:off x="5797149" y="1678969"/>
+            <a:ext cx="6010497" cy="4057845"/>
           </a:xfrm>
           <a:prstGeom prst="roundRect">
             <a:avLst>
-              <a:gd name="adj" fmla="val 12000"/>
+              <a:gd name="adj" fmla="val 4000"/>
             </a:avLst>
           </a:prstGeom>
           <a:solidFill>
-            <a:srgbClr val="F2F2F2"/>
+            <a:srgbClr val="E8EEF4"/>
           </a:solidFill>
           <a:ln>
             <a:noFill/>
@@ -9978,51 +9573,30 @@
           </a:p>
         </p:txBody>
       </p:sp>
-      <p:sp>
-        <p:nvSpPr>
-          <p:cNvPr id="7" name="Rounded Rectangle 6"/>
-          <p:cNvSpPr/>
-          <p:nvPr/>
-        </p:nvSpPr>
-        <p:spPr>
-          <a:xfrm>
-            <a:off x="594360" y="1597914"/>
-            <a:ext cx="438912" cy="438912"/>
-          </a:xfrm>
-          <a:prstGeom prst="roundRect">
-            <a:avLst>
-              <a:gd name="adj" fmla="val 12000"/>
-            </a:avLst>
-          </a:prstGeom>
-          <a:solidFill>
-            <a:srgbClr val="095292"/>
-          </a:solidFill>
-          <a:ln>
-            <a:noFill/>
-          </a:ln>
-        </p:spPr>
-        <p:style>
-          <a:lnRef idx="1">
-            <a:schemeClr val="accent1"/>
-          </a:lnRef>
-          <a:fillRef idx="3">
-            <a:schemeClr val="accent1"/>
-          </a:fillRef>
-          <a:effectRef idx="2">
-            <a:schemeClr val="accent1"/>
-          </a:effectRef>
-          <a:fontRef idx="minor">
-            <a:schemeClr val="lt1"/>
-          </a:fontRef>
-        </p:style>
-        <p:txBody>
-          <a:bodyPr rtlCol="0" anchor="ctr"/>
-          <a:lstStyle/>
-          <a:p>
-            <a:pPr algn="ctr"/>
-          </a:p>
-        </p:txBody>
-      </p:sp>
+      <p:pic>
+        <p:nvPicPr>
+          <p:cNvPr id="7" name="Picture 6" descr="small-neighborhood-grocery-store.jpg"/>
+          <p:cNvPicPr>
+            <a:picLocks noChangeAspect="1"/>
+          </p:cNvPicPr>
+          <p:nvPr/>
+        </p:nvPicPr>
+        <p:blipFill>
+          <a:blip r:embed="rId2"/>
+          <a:stretch>
+            <a:fillRect/>
+          </a:stretch>
+        </p:blipFill>
+        <p:spPr>
+          <a:xfrm>
+            <a:off x="5870301" y="1752121"/>
+            <a:ext cx="5864193" cy="3911541"/>
+          </a:xfrm>
+          <a:prstGeom prst="rect">
+            <a:avLst/>
+          </a:prstGeom>
+        </p:spPr>
+      </p:pic>
       <p:sp>
         <p:nvSpPr>
           <p:cNvPr id="8" name="TextBox 7"/>
@@ -10031,8 +9605,8 @@
         </p:nvSpPr>
         <p:spPr>
           <a:xfrm>
-            <a:off x="594360" y="1597914"/>
-            <a:ext cx="438912" cy="438912"/>
+            <a:off x="5870301" y="5961888"/>
+            <a:ext cx="5864193" cy="320040"/>
           </a:xfrm>
           <a:prstGeom prst="rect">
             <a:avLst/>
@@ -10040,18 +9614,20 @@
           <a:noFill/>
         </p:spPr>
         <p:txBody>
-          <a:bodyPr wrap="square" anchor="ctr"/>
+          <a:bodyPr wrap="square">
+            <a:spAutoFit/>
+          </a:bodyPr>
           <a:lstStyle/>
           <a:p>
             <a:pPr algn="ctr"/>
             <a:r>
-              <a:rPr sz="1600" b="1" i="0">
-                <a:solidFill>
-                  <a:srgbClr val="FFFFFF"/>
-                </a:solidFill>
-                <a:latin typeface="Calibri"/>
-              </a:rPr>
-              <a:t>1</a:t>
+              <a:rPr sz="1100" b="0" i="1">
+                <a:solidFill>
+                  <a:srgbClr val="666666"/>
+                </a:solidFill>
+                <a:latin typeface="Calibri"/>
+              </a:rPr>
+              <a:t>Foto: Joaquin Carfagna · Pexels</a:t>
             </a:r>
           </a:p>
         </p:txBody>
@@ -10064,8 +9640,8 @@
         </p:nvSpPr>
         <p:spPr>
           <a:xfrm>
-            <a:off x="1188720" y="1536192"/>
-            <a:ext cx="10271455" cy="580644"/>
+            <a:off x="457200" y="1563624"/>
+            <a:ext cx="5093061" cy="4837176"/>
           </a:xfrm>
           <a:prstGeom prst="rect">
             <a:avLst/>
@@ -10073,895 +9649,151 @@
           <a:noFill/>
         </p:spPr>
         <p:txBody>
-          <a:bodyPr wrap="square" anchor="ctr"/>
-          <a:lstStyle/>
-          <a:p>
-            <a:r>
-              <a:rPr sz="1500" b="1" i="0">
-                <a:solidFill>
-                  <a:srgbClr val="095292"/>
-                </a:solidFill>
-                <a:latin typeface="Calibri"/>
-              </a:rPr>
-              <a:t>DEFINICIÓN</a:t>
-            </a:r>
-          </a:p>
+          <a:bodyPr wrap="square">
+            <a:spAutoFit/>
+          </a:bodyPr>
+          <a:lstStyle/>
           <a:p>
             <a:pPr>
-              <a:spcBef>
-                <a:spcPts val="200"/>
-              </a:spcBef>
+              <a:spcAft>
+                <a:spcPts val="800"/>
+              </a:spcAft>
             </a:pPr>
             <a:r>
-              <a:rPr sz="1300" b="0" i="0">
+              <a:rPr sz="2000" b="0" i="0">
                 <a:solidFill>
                   <a:srgbClr val="333333"/>
                 </a:solidFill>
                 <a:latin typeface="Calibri"/>
               </a:rPr>
-              <a:t>Los clientes esperan de pie 25 minutos sin saber cuántos van antes.</a:t>
-            </a:r>
-          </a:p>
-        </p:txBody>
-      </p:sp>
-      <p:sp>
-        <p:nvSpPr>
-          <p:cNvPr id="10" name="Rounded Rectangle 9"/>
-          <p:cNvSpPr/>
-          <p:nvPr/>
-        </p:nvSpPr>
-        <p:spPr>
-          <a:xfrm>
-            <a:off x="457200" y="2281428"/>
-            <a:ext cx="11277295" cy="745236"/>
-          </a:xfrm>
-          <a:prstGeom prst="roundRect">
-            <a:avLst>
-              <a:gd name="adj" fmla="val 12000"/>
-            </a:avLst>
-          </a:prstGeom>
-          <a:solidFill>
-            <a:srgbClr val="E8F4FA"/>
-          </a:solidFill>
-          <a:ln>
-            <a:noFill/>
-          </a:ln>
-        </p:spPr>
-        <p:style>
-          <a:lnRef idx="1">
-            <a:schemeClr val="accent1"/>
-          </a:lnRef>
-          <a:fillRef idx="3">
-            <a:schemeClr val="accent1"/>
-          </a:fillRef>
-          <a:effectRef idx="2">
-            <a:schemeClr val="accent1"/>
-          </a:effectRef>
-          <a:fontRef idx="minor">
-            <a:schemeClr val="lt1"/>
-          </a:fontRef>
-        </p:style>
-        <p:txBody>
-          <a:bodyPr rtlCol="0" anchor="ctr"/>
-          <a:lstStyle/>
-          <a:p>
-            <a:pPr algn="ctr"/>
-          </a:p>
-        </p:txBody>
-      </p:sp>
-      <p:sp>
-        <p:nvSpPr>
-          <p:cNvPr id="11" name="Rounded Rectangle 10"/>
-          <p:cNvSpPr/>
-          <p:nvPr/>
-        </p:nvSpPr>
-        <p:spPr>
-          <a:xfrm>
-            <a:off x="594360" y="2434590"/>
-            <a:ext cx="438912" cy="438912"/>
-          </a:xfrm>
-          <a:prstGeom prst="roundRect">
-            <a:avLst>
-              <a:gd name="adj" fmla="val 12000"/>
-            </a:avLst>
-          </a:prstGeom>
-          <a:solidFill>
-            <a:srgbClr val="095292"/>
-          </a:solidFill>
-          <a:ln>
-            <a:noFill/>
-          </a:ln>
-        </p:spPr>
-        <p:style>
-          <a:lnRef idx="1">
-            <a:schemeClr val="accent1"/>
-          </a:lnRef>
-          <a:fillRef idx="3">
-            <a:schemeClr val="accent1"/>
-          </a:fillRef>
-          <a:effectRef idx="2">
-            <a:schemeClr val="accent1"/>
-          </a:effectRef>
-          <a:fontRef idx="minor">
-            <a:schemeClr val="lt1"/>
-          </a:fontRef>
-        </p:style>
-        <p:txBody>
-          <a:bodyPr rtlCol="0" anchor="ctr"/>
-          <a:lstStyle/>
-          <a:p>
-            <a:pPr algn="ctr"/>
-          </a:p>
-        </p:txBody>
-      </p:sp>
-      <p:sp>
-        <p:nvSpPr>
-          <p:cNvPr id="12" name="TextBox 11"/>
-          <p:cNvSpPr txBox="1"/>
-          <p:nvPr/>
-        </p:nvSpPr>
-        <p:spPr>
-          <a:xfrm>
-            <a:off x="594360" y="2434590"/>
-            <a:ext cx="438912" cy="438912"/>
-          </a:xfrm>
-          <a:prstGeom prst="rect">
-            <a:avLst/>
-          </a:prstGeom>
-          <a:noFill/>
-        </p:spPr>
-        <p:txBody>
-          <a:bodyPr wrap="square" anchor="ctr"/>
-          <a:lstStyle/>
-          <a:p>
-            <a:pPr algn="ctr"/>
-            <a:r>
-              <a:rPr sz="1600" b="1" i="0">
-                <a:solidFill>
-                  <a:srgbClr val="FFFFFF"/>
-                </a:solidFill>
-                <a:latin typeface="Calibri"/>
-              </a:rPr>
-              <a:t>2</a:t>
-            </a:r>
-          </a:p>
-        </p:txBody>
-      </p:sp>
-      <p:sp>
-        <p:nvSpPr>
-          <p:cNvPr id="13" name="TextBox 12"/>
-          <p:cNvSpPr txBox="1"/>
-          <p:nvPr/>
-        </p:nvSpPr>
-        <p:spPr>
-          <a:xfrm>
-            <a:off x="1188720" y="2372868"/>
-            <a:ext cx="10271455" cy="580644"/>
-          </a:xfrm>
-          <a:prstGeom prst="rect">
-            <a:avLst/>
-          </a:prstGeom>
-          <a:noFill/>
-        </p:spPr>
-        <p:txBody>
-          <a:bodyPr wrap="square" anchor="ctr"/>
-          <a:lstStyle/>
-          <a:p>
-            <a:r>
-              <a:rPr sz="1500" b="1" i="0">
-                <a:solidFill>
-                  <a:srgbClr val="095292"/>
-                </a:solidFill>
-                <a:latin typeface="Calibri"/>
-              </a:rPr>
-              <a:t>REQUISITOS</a:t>
+              <a:t>–   </a:t>
+            </a:r>
+            <a:r>
+              <a:rPr sz="2000" b="1" i="0">
+                <a:solidFill>
+                  <a:srgbClr val="333333"/>
+                </a:solidFill>
+                <a:latin typeface="Calibri"/>
+              </a:rPr>
+              <a:t>DEFINICIÓN:</a:t>
+            </a:r>
+            <a:r>
+              <a:rPr sz="2000" b="0" i="0">
+                <a:solidFill>
+                  <a:srgbClr val="333333"/>
+                </a:solidFill>
+                <a:latin typeface="Calibri"/>
+              </a:rPr>
+              <a:t> Los clientes esperan de pie 25 minutos sin saber cuántos van antes.</a:t>
             </a:r>
           </a:p>
           <a:p>
             <a:pPr>
-              <a:spcBef>
-                <a:spcPts val="200"/>
-              </a:spcBef>
+              <a:spcAft>
+                <a:spcPts val="800"/>
+              </a:spcAft>
             </a:pPr>
             <a:r>
-              <a:rPr sz="1300" b="0" i="0">
+              <a:rPr sz="2000" b="0" i="0">
                 <a:solidFill>
                   <a:srgbClr val="333333"/>
                 </a:solidFill>
                 <a:latin typeface="Calibri"/>
               </a:rPr>
-              <a:t>El cliente ve su turno en el celular. Criterio: lo encuentra en menos de 1 minuto.</a:t>
-            </a:r>
-          </a:p>
-        </p:txBody>
-      </p:sp>
-      <p:sp>
-        <p:nvSpPr>
-          <p:cNvPr id="14" name="Rounded Rectangle 13"/>
-          <p:cNvSpPr/>
-          <p:nvPr/>
-        </p:nvSpPr>
-        <p:spPr>
-          <a:xfrm>
-            <a:off x="457200" y="3118104"/>
-            <a:ext cx="11277295" cy="745236"/>
-          </a:xfrm>
-          <a:prstGeom prst="roundRect">
-            <a:avLst>
-              <a:gd name="adj" fmla="val 12000"/>
-            </a:avLst>
-          </a:prstGeom>
-          <a:solidFill>
-            <a:srgbClr val="F2F2F2"/>
-          </a:solidFill>
-          <a:ln>
-            <a:noFill/>
-          </a:ln>
-        </p:spPr>
-        <p:style>
-          <a:lnRef idx="1">
-            <a:schemeClr val="accent1"/>
-          </a:lnRef>
-          <a:fillRef idx="3">
-            <a:schemeClr val="accent1"/>
-          </a:fillRef>
-          <a:effectRef idx="2">
-            <a:schemeClr val="accent1"/>
-          </a:effectRef>
-          <a:fontRef idx="minor">
-            <a:schemeClr val="lt1"/>
-          </a:fontRef>
-        </p:style>
-        <p:txBody>
-          <a:bodyPr rtlCol="0" anchor="ctr"/>
-          <a:lstStyle/>
-          <a:p>
-            <a:pPr algn="ctr"/>
-          </a:p>
-        </p:txBody>
-      </p:sp>
-      <p:sp>
-        <p:nvSpPr>
-          <p:cNvPr id="15" name="Rounded Rectangle 14"/>
-          <p:cNvSpPr/>
-          <p:nvPr/>
-        </p:nvSpPr>
-        <p:spPr>
-          <a:xfrm>
-            <a:off x="594360" y="3271266"/>
-            <a:ext cx="438912" cy="438912"/>
-          </a:xfrm>
-          <a:prstGeom prst="roundRect">
-            <a:avLst>
-              <a:gd name="adj" fmla="val 12000"/>
-            </a:avLst>
-          </a:prstGeom>
-          <a:solidFill>
-            <a:srgbClr val="095292"/>
-          </a:solidFill>
-          <a:ln>
-            <a:noFill/>
-          </a:ln>
-        </p:spPr>
-        <p:style>
-          <a:lnRef idx="1">
-            <a:schemeClr val="accent1"/>
-          </a:lnRef>
-          <a:fillRef idx="3">
-            <a:schemeClr val="accent1"/>
-          </a:fillRef>
-          <a:effectRef idx="2">
-            <a:schemeClr val="accent1"/>
-          </a:effectRef>
-          <a:fontRef idx="minor">
-            <a:schemeClr val="lt1"/>
-          </a:fontRef>
-        </p:style>
-        <p:txBody>
-          <a:bodyPr rtlCol="0" anchor="ctr"/>
-          <a:lstStyle/>
-          <a:p>
-            <a:pPr algn="ctr"/>
-          </a:p>
-        </p:txBody>
-      </p:sp>
-      <p:sp>
-        <p:nvSpPr>
-          <p:cNvPr id="16" name="TextBox 15"/>
-          <p:cNvSpPr txBox="1"/>
-          <p:nvPr/>
-        </p:nvSpPr>
-        <p:spPr>
-          <a:xfrm>
-            <a:off x="594360" y="3271266"/>
-            <a:ext cx="438912" cy="438912"/>
-          </a:xfrm>
-          <a:prstGeom prst="rect">
-            <a:avLst/>
-          </a:prstGeom>
-          <a:noFill/>
-        </p:spPr>
-        <p:txBody>
-          <a:bodyPr wrap="square" anchor="ctr"/>
-          <a:lstStyle/>
-          <a:p>
-            <a:pPr algn="ctr"/>
-            <a:r>
-              <a:rPr sz="1600" b="1" i="0">
-                <a:solidFill>
-                  <a:srgbClr val="FFFFFF"/>
-                </a:solidFill>
-                <a:latin typeface="Calibri"/>
-              </a:rPr>
-              <a:t>3</a:t>
-            </a:r>
-          </a:p>
-        </p:txBody>
-      </p:sp>
-      <p:sp>
-        <p:nvSpPr>
-          <p:cNvPr id="17" name="TextBox 16"/>
-          <p:cNvSpPr txBox="1"/>
-          <p:nvPr/>
-        </p:nvSpPr>
-        <p:spPr>
-          <a:xfrm>
-            <a:off x="1188720" y="3209544"/>
-            <a:ext cx="10271455" cy="580644"/>
-          </a:xfrm>
-          <a:prstGeom prst="rect">
-            <a:avLst/>
-          </a:prstGeom>
-          <a:noFill/>
-        </p:spPr>
-        <p:txBody>
-          <a:bodyPr wrap="square" anchor="ctr"/>
-          <a:lstStyle/>
-          <a:p>
-            <a:r>
-              <a:rPr sz="1500" b="1" i="0">
-                <a:solidFill>
-                  <a:srgbClr val="095292"/>
-                </a:solidFill>
-                <a:latin typeface="Calibri"/>
-              </a:rPr>
-              <a:t>DISEÑO</a:t>
+              <a:t>–   </a:t>
+            </a:r>
+            <a:r>
+              <a:rPr sz="2000" b="1" i="0">
+                <a:solidFill>
+                  <a:srgbClr val="333333"/>
+                </a:solidFill>
+                <a:latin typeface="Calibri"/>
+              </a:rPr>
+              <a:t>REQUISITOS:</a:t>
+            </a:r>
+            <a:r>
+              <a:rPr sz="2000" b="0" i="0">
+                <a:solidFill>
+                  <a:srgbClr val="333333"/>
+                </a:solidFill>
+                <a:latin typeface="Calibri"/>
+              </a:rPr>
+              <a:t> El cliente ve su turno en el celular. Criterio: lo encuentra en menos de 1 minuto.</a:t>
             </a:r>
           </a:p>
           <a:p>
             <a:pPr>
-              <a:spcBef>
-                <a:spcPts val="200"/>
-              </a:spcBef>
+              <a:spcAft>
+                <a:spcPts val="800"/>
+              </a:spcAft>
             </a:pPr>
             <a:r>
-              <a:rPr sz="1300" b="0" i="0">
+              <a:rPr sz="2000" b="0" i="0">
                 <a:solidFill>
                   <a:srgbClr val="333333"/>
                 </a:solidFill>
                 <a:latin typeface="Calibri"/>
               </a:rPr>
-              <a:t>Tres pantallas: pedir turno, ver turno, aviso de «ya casi».</a:t>
-            </a:r>
-          </a:p>
-        </p:txBody>
-      </p:sp>
-      <p:sp>
-        <p:nvSpPr>
-          <p:cNvPr id="18" name="Rounded Rectangle 17"/>
-          <p:cNvSpPr/>
-          <p:nvPr/>
-        </p:nvSpPr>
-        <p:spPr>
-          <a:xfrm>
-            <a:off x="457200" y="3954780"/>
-            <a:ext cx="11277295" cy="745236"/>
-          </a:xfrm>
-          <a:prstGeom prst="roundRect">
-            <a:avLst>
-              <a:gd name="adj" fmla="val 12000"/>
-            </a:avLst>
-          </a:prstGeom>
-          <a:solidFill>
-            <a:srgbClr val="E8F4FA"/>
-          </a:solidFill>
-          <a:ln>
-            <a:noFill/>
-          </a:ln>
-        </p:spPr>
-        <p:style>
-          <a:lnRef idx="1">
-            <a:schemeClr val="accent1"/>
-          </a:lnRef>
-          <a:fillRef idx="3">
-            <a:schemeClr val="accent1"/>
-          </a:fillRef>
-          <a:effectRef idx="2">
-            <a:schemeClr val="accent1"/>
-          </a:effectRef>
-          <a:fontRef idx="minor">
-            <a:schemeClr val="lt1"/>
-          </a:fontRef>
-        </p:style>
-        <p:txBody>
-          <a:bodyPr rtlCol="0" anchor="ctr"/>
-          <a:lstStyle/>
-          <a:p>
-            <a:pPr algn="ctr"/>
-          </a:p>
-        </p:txBody>
-      </p:sp>
-      <p:sp>
-        <p:nvSpPr>
-          <p:cNvPr id="19" name="Rounded Rectangle 18"/>
-          <p:cNvSpPr/>
-          <p:nvPr/>
-        </p:nvSpPr>
-        <p:spPr>
-          <a:xfrm>
-            <a:off x="594360" y="4107942"/>
-            <a:ext cx="438912" cy="438912"/>
-          </a:xfrm>
-          <a:prstGeom prst="roundRect">
-            <a:avLst>
-              <a:gd name="adj" fmla="val 12000"/>
-            </a:avLst>
-          </a:prstGeom>
-          <a:solidFill>
-            <a:srgbClr val="095292"/>
-          </a:solidFill>
-          <a:ln>
-            <a:noFill/>
-          </a:ln>
-        </p:spPr>
-        <p:style>
-          <a:lnRef idx="1">
-            <a:schemeClr val="accent1"/>
-          </a:lnRef>
-          <a:fillRef idx="3">
-            <a:schemeClr val="accent1"/>
-          </a:fillRef>
-          <a:effectRef idx="2">
-            <a:schemeClr val="accent1"/>
-          </a:effectRef>
-          <a:fontRef idx="minor">
-            <a:schemeClr val="lt1"/>
-          </a:fontRef>
-        </p:style>
-        <p:txBody>
-          <a:bodyPr rtlCol="0" anchor="ctr"/>
-          <a:lstStyle/>
-          <a:p>
-            <a:pPr algn="ctr"/>
-          </a:p>
-        </p:txBody>
-      </p:sp>
-      <p:sp>
-        <p:nvSpPr>
-          <p:cNvPr id="20" name="TextBox 19"/>
-          <p:cNvSpPr txBox="1"/>
-          <p:nvPr/>
-        </p:nvSpPr>
-        <p:spPr>
-          <a:xfrm>
-            <a:off x="594360" y="4107942"/>
-            <a:ext cx="438912" cy="438912"/>
-          </a:xfrm>
-          <a:prstGeom prst="rect">
-            <a:avLst/>
-          </a:prstGeom>
-          <a:noFill/>
-        </p:spPr>
-        <p:txBody>
-          <a:bodyPr wrap="square" anchor="ctr"/>
-          <a:lstStyle/>
-          <a:p>
-            <a:pPr algn="ctr"/>
-            <a:r>
-              <a:rPr sz="1600" b="1" i="0">
-                <a:solidFill>
-                  <a:srgbClr val="FFFFFF"/>
-                </a:solidFill>
-                <a:latin typeface="Calibri"/>
-              </a:rPr>
-              <a:t>4</a:t>
-            </a:r>
-          </a:p>
-        </p:txBody>
-      </p:sp>
-      <p:sp>
-        <p:nvSpPr>
-          <p:cNvPr id="21" name="TextBox 20"/>
-          <p:cNvSpPr txBox="1"/>
-          <p:nvPr/>
-        </p:nvSpPr>
-        <p:spPr>
-          <a:xfrm>
-            <a:off x="1188720" y="4046220"/>
-            <a:ext cx="10271455" cy="580644"/>
-          </a:xfrm>
-          <a:prstGeom prst="rect">
-            <a:avLst/>
-          </a:prstGeom>
-          <a:noFill/>
-        </p:spPr>
-        <p:txBody>
-          <a:bodyPr wrap="square" anchor="ctr"/>
-          <a:lstStyle/>
-          <a:p>
-            <a:r>
-              <a:rPr sz="1500" b="1" i="0">
-                <a:solidFill>
-                  <a:srgbClr val="095292"/>
-                </a:solidFill>
-                <a:latin typeface="Calibri"/>
-              </a:rPr>
-              <a:t>CONSTRUCCIÓN</a:t>
+              <a:t>–   </a:t>
+            </a:r>
+            <a:r>
+              <a:rPr sz="2000" b="1" i="0">
+                <a:solidFill>
+                  <a:srgbClr val="333333"/>
+                </a:solidFill>
+                <a:latin typeface="Calibri"/>
+              </a:rPr>
+              <a:t>DISEÑO:</a:t>
+            </a:r>
+            <a:r>
+              <a:rPr sz="2000" b="0" i="0">
+                <a:solidFill>
+                  <a:srgbClr val="333333"/>
+                </a:solidFill>
+                <a:latin typeface="Calibri"/>
+              </a:rPr>
+              <a:t> Tres pantallas: pedir turno, ver turno, aviso de «ya casi».</a:t>
             </a:r>
           </a:p>
           <a:p>
             <a:pPr>
-              <a:spcBef>
-                <a:spcPts val="200"/>
-              </a:spcBef>
+              <a:spcAft>
+                <a:spcPts val="800"/>
+              </a:spcAft>
             </a:pPr>
             <a:r>
-              <a:rPr sz="1300" b="0" i="0">
+              <a:rPr sz="2000" b="0" i="0">
                 <a:solidFill>
                   <a:srgbClr val="333333"/>
                 </a:solidFill>
                 <a:latin typeface="Calibri"/>
               </a:rPr>
-              <a:t>Se arma la versión mínima con un formulario y una hoja de cálculo.</a:t>
-            </a:r>
-          </a:p>
-        </p:txBody>
-      </p:sp>
-      <p:sp>
-        <p:nvSpPr>
-          <p:cNvPr id="22" name="Rounded Rectangle 21"/>
-          <p:cNvSpPr/>
-          <p:nvPr/>
-        </p:nvSpPr>
-        <p:spPr>
-          <a:xfrm>
-            <a:off x="457200" y="4791456"/>
-            <a:ext cx="11277295" cy="745236"/>
-          </a:xfrm>
-          <a:prstGeom prst="roundRect">
-            <a:avLst>
-              <a:gd name="adj" fmla="val 12000"/>
-            </a:avLst>
-          </a:prstGeom>
-          <a:solidFill>
-            <a:srgbClr val="F2F2F2"/>
-          </a:solidFill>
-          <a:ln>
-            <a:noFill/>
-          </a:ln>
-        </p:spPr>
-        <p:style>
-          <a:lnRef idx="1">
-            <a:schemeClr val="accent1"/>
-          </a:lnRef>
-          <a:fillRef idx="3">
-            <a:schemeClr val="accent1"/>
-          </a:fillRef>
-          <a:effectRef idx="2">
-            <a:schemeClr val="accent1"/>
-          </a:effectRef>
-          <a:fontRef idx="minor">
-            <a:schemeClr val="lt1"/>
-          </a:fontRef>
-        </p:style>
-        <p:txBody>
-          <a:bodyPr rtlCol="0" anchor="ctr"/>
-          <a:lstStyle/>
-          <a:p>
-            <a:pPr algn="ctr"/>
-          </a:p>
-        </p:txBody>
-      </p:sp>
-      <p:sp>
-        <p:nvSpPr>
-          <p:cNvPr id="23" name="Rounded Rectangle 22"/>
-          <p:cNvSpPr/>
-          <p:nvPr/>
-        </p:nvSpPr>
-        <p:spPr>
-          <a:xfrm>
-            <a:off x="594360" y="4944618"/>
-            <a:ext cx="438912" cy="438912"/>
-          </a:xfrm>
-          <a:prstGeom prst="roundRect">
-            <a:avLst>
-              <a:gd name="adj" fmla="val 12000"/>
-            </a:avLst>
-          </a:prstGeom>
-          <a:solidFill>
-            <a:srgbClr val="095292"/>
-          </a:solidFill>
-          <a:ln>
-            <a:noFill/>
-          </a:ln>
-        </p:spPr>
-        <p:style>
-          <a:lnRef idx="1">
-            <a:schemeClr val="accent1"/>
-          </a:lnRef>
-          <a:fillRef idx="3">
-            <a:schemeClr val="accent1"/>
-          </a:fillRef>
-          <a:effectRef idx="2">
-            <a:schemeClr val="accent1"/>
-          </a:effectRef>
-          <a:fontRef idx="minor">
-            <a:schemeClr val="lt1"/>
-          </a:fontRef>
-        </p:style>
-        <p:txBody>
-          <a:bodyPr rtlCol="0" anchor="ctr"/>
-          <a:lstStyle/>
-          <a:p>
-            <a:pPr algn="ctr"/>
-          </a:p>
-        </p:txBody>
-      </p:sp>
-      <p:sp>
-        <p:nvSpPr>
-          <p:cNvPr id="24" name="TextBox 23"/>
-          <p:cNvSpPr txBox="1"/>
-          <p:nvPr/>
-        </p:nvSpPr>
-        <p:spPr>
-          <a:xfrm>
-            <a:off x="594360" y="4944618"/>
-            <a:ext cx="438912" cy="438912"/>
-          </a:xfrm>
-          <a:prstGeom prst="rect">
-            <a:avLst/>
-          </a:prstGeom>
-          <a:noFill/>
-        </p:spPr>
-        <p:txBody>
-          <a:bodyPr wrap="square" anchor="ctr"/>
-          <a:lstStyle/>
-          <a:p>
-            <a:pPr algn="ctr"/>
-            <a:r>
-              <a:rPr sz="1600" b="1" i="0">
-                <a:solidFill>
-                  <a:srgbClr val="FFFFFF"/>
-                </a:solidFill>
-                <a:latin typeface="Calibri"/>
-              </a:rPr>
-              <a:t>5</a:t>
-            </a:r>
-          </a:p>
-        </p:txBody>
-      </p:sp>
-      <p:sp>
-        <p:nvSpPr>
-          <p:cNvPr id="25" name="TextBox 24"/>
-          <p:cNvSpPr txBox="1"/>
-          <p:nvPr/>
-        </p:nvSpPr>
-        <p:spPr>
-          <a:xfrm>
-            <a:off x="1188720" y="4882896"/>
-            <a:ext cx="10271455" cy="580644"/>
-          </a:xfrm>
-          <a:prstGeom prst="rect">
-            <a:avLst/>
-          </a:prstGeom>
-          <a:noFill/>
-        </p:spPr>
-        <p:txBody>
-          <a:bodyPr wrap="square" anchor="ctr"/>
-          <a:lstStyle/>
-          <a:p>
-            <a:r>
-              <a:rPr sz="1500" b="1" i="0">
-                <a:solidFill>
-                  <a:srgbClr val="095292"/>
-                </a:solidFill>
-                <a:latin typeface="Calibri"/>
-              </a:rPr>
-              <a:t>VALIDACIÓN</a:t>
-            </a:r>
-          </a:p>
-          <a:p>
-            <a:pPr>
-              <a:spcBef>
-                <a:spcPts val="200"/>
-              </a:spcBef>
-            </a:pPr>
-            <a:r>
-              <a:rPr sz="1300" b="0" i="0">
+              <a:t>–   </a:t>
+            </a:r>
+            <a:r>
+              <a:rPr sz="2000" b="1" i="0">
                 <a:solidFill>
                   <a:srgbClr val="333333"/>
                 </a:solidFill>
                 <a:latin typeface="Calibri"/>
               </a:rPr>
-              <a:t>Cinco clientes reales la prueban un sábado; se mide el tiempo.</a:t>
-            </a:r>
-          </a:p>
-        </p:txBody>
-      </p:sp>
-      <p:sp>
-        <p:nvSpPr>
-          <p:cNvPr id="26" name="Rounded Rectangle 25"/>
-          <p:cNvSpPr/>
-          <p:nvPr/>
-        </p:nvSpPr>
-        <p:spPr>
-          <a:xfrm>
-            <a:off x="457200" y="5628132"/>
-            <a:ext cx="11277295" cy="745236"/>
-          </a:xfrm>
-          <a:prstGeom prst="roundRect">
-            <a:avLst>
-              <a:gd name="adj" fmla="val 12000"/>
-            </a:avLst>
-          </a:prstGeom>
-          <a:solidFill>
-            <a:srgbClr val="E8F4FA"/>
-          </a:solidFill>
-          <a:ln>
-            <a:noFill/>
-          </a:ln>
-        </p:spPr>
-        <p:style>
-          <a:lnRef idx="1">
-            <a:schemeClr val="accent1"/>
-          </a:lnRef>
-          <a:fillRef idx="3">
-            <a:schemeClr val="accent1"/>
-          </a:fillRef>
-          <a:effectRef idx="2">
-            <a:schemeClr val="accent1"/>
-          </a:effectRef>
-          <a:fontRef idx="minor">
-            <a:schemeClr val="lt1"/>
-          </a:fontRef>
-        </p:style>
-        <p:txBody>
-          <a:bodyPr rtlCol="0" anchor="ctr"/>
-          <a:lstStyle/>
-          <a:p>
-            <a:pPr algn="ctr"/>
-          </a:p>
-        </p:txBody>
-      </p:sp>
-      <p:sp>
-        <p:nvSpPr>
-          <p:cNvPr id="27" name="Rounded Rectangle 26"/>
-          <p:cNvSpPr/>
-          <p:nvPr/>
-        </p:nvSpPr>
-        <p:spPr>
-          <a:xfrm>
-            <a:off x="594360" y="5781294"/>
-            <a:ext cx="438912" cy="438912"/>
-          </a:xfrm>
-          <a:prstGeom prst="roundRect">
-            <a:avLst>
-              <a:gd name="adj" fmla="val 12000"/>
-            </a:avLst>
-          </a:prstGeom>
-          <a:solidFill>
-            <a:srgbClr val="095292"/>
-          </a:solidFill>
-          <a:ln>
-            <a:noFill/>
-          </a:ln>
-        </p:spPr>
-        <p:style>
-          <a:lnRef idx="1">
-            <a:schemeClr val="accent1"/>
-          </a:lnRef>
-          <a:fillRef idx="3">
-            <a:schemeClr val="accent1"/>
-          </a:fillRef>
-          <a:effectRef idx="2">
-            <a:schemeClr val="accent1"/>
-          </a:effectRef>
-          <a:fontRef idx="minor">
-            <a:schemeClr val="lt1"/>
-          </a:fontRef>
-        </p:style>
-        <p:txBody>
-          <a:bodyPr rtlCol="0" anchor="ctr"/>
-          <a:lstStyle/>
-          <a:p>
-            <a:pPr algn="ctr"/>
-          </a:p>
-        </p:txBody>
-      </p:sp>
-      <p:sp>
-        <p:nvSpPr>
-          <p:cNvPr id="28" name="TextBox 27"/>
-          <p:cNvSpPr txBox="1"/>
-          <p:nvPr/>
-        </p:nvSpPr>
-        <p:spPr>
-          <a:xfrm>
-            <a:off x="594360" y="5781294"/>
-            <a:ext cx="438912" cy="438912"/>
-          </a:xfrm>
-          <a:prstGeom prst="rect">
-            <a:avLst/>
-          </a:prstGeom>
-          <a:noFill/>
-        </p:spPr>
-        <p:txBody>
-          <a:bodyPr wrap="square" anchor="ctr"/>
-          <a:lstStyle/>
-          <a:p>
-            <a:pPr algn="ctr"/>
-            <a:r>
-              <a:rPr sz="1600" b="1" i="0">
-                <a:solidFill>
-                  <a:srgbClr val="FFFFFF"/>
-                </a:solidFill>
-                <a:latin typeface="Calibri"/>
-              </a:rPr>
-              <a:t>6</a:t>
-            </a:r>
-          </a:p>
-        </p:txBody>
-      </p:sp>
-      <p:sp>
-        <p:nvSpPr>
-          <p:cNvPr id="29" name="TextBox 28"/>
-          <p:cNvSpPr txBox="1"/>
-          <p:nvPr/>
-        </p:nvSpPr>
-        <p:spPr>
-          <a:xfrm>
-            <a:off x="1188720" y="5719572"/>
-            <a:ext cx="10271455" cy="580644"/>
-          </a:xfrm>
-          <a:prstGeom prst="rect">
-            <a:avLst/>
-          </a:prstGeom>
-          <a:noFill/>
-        </p:spPr>
-        <p:txBody>
-          <a:bodyPr wrap="square" anchor="ctr"/>
-          <a:lstStyle/>
-          <a:p>
-            <a:r>
-              <a:rPr sz="1500" b="1" i="0">
-                <a:solidFill>
-                  <a:srgbClr val="095292"/>
-                </a:solidFill>
-                <a:latin typeface="Calibri"/>
-              </a:rPr>
-              <a:t>OPERACIÓN Y RETIRO</a:t>
-            </a:r>
-          </a:p>
-          <a:p>
-            <a:pPr>
-              <a:spcBef>
-                <a:spcPts val="200"/>
-              </a:spcBef>
-            </a:pPr>
-            <a:r>
-              <a:rPr sz="1300" b="0" i="0">
+              <a:t>CONSTRUCCIÓN:</a:t>
+            </a:r>
+            <a:r>
+              <a:rPr sz="2000" b="0" i="0">
                 <a:solidFill>
                   <a:srgbClr val="333333"/>
                 </a:solidFill>
                 <a:latin typeface="Calibri"/>
               </a:rPr>
-              <a:t>La tienda la usa; si se apaga, se borran los celulares guardados.</a:t>
-            </a:r>
-          </a:p>
-        </p:txBody>
-      </p:sp>
-      <p:sp>
-        <p:nvSpPr>
-          <p:cNvPr id="30" name="TextBox 29"/>
+              <a:t> Se arma la versión mínima con un formulario y una hoja de cálculo.</a:t>
+            </a:r>
+          </a:p>
+        </p:txBody>
+      </p:sp>
+      <p:sp>
+        <p:nvSpPr>
+          <p:cNvPr id="10" name="TextBox 9"/>
           <p:cNvSpPr txBox="1"/>
           <p:nvPr/>
         </p:nvSpPr>
@@ -12896,9 +11728,57 @@
           </a:p>
         </p:txBody>
       </p:sp>
-      <p:sp>
-        <p:nvSpPr>
-          <p:cNvPr id="14" name="TextBox 13"/>
+      <p:pic>
+        <p:nvPicPr>
+          <p:cNvPr id="14" name="Picture 13" descr="sello_mal.png"/>
+          <p:cNvPicPr>
+            <a:picLocks noChangeAspect="1"/>
+          </p:cNvPicPr>
+          <p:nvPr/>
+        </p:nvPicPr>
+        <p:blipFill>
+          <a:blip r:embed="rId2"/>
+          <a:stretch>
+            <a:fillRect/>
+          </a:stretch>
+        </p:blipFill>
+        <p:spPr>
+          <a:xfrm>
+            <a:off x="566928" y="1527048"/>
+            <a:ext cx="393192" cy="393192"/>
+          </a:xfrm>
+          <a:prstGeom prst="rect">
+            <a:avLst/>
+          </a:prstGeom>
+        </p:spPr>
+      </p:pic>
+      <p:pic>
+        <p:nvPicPr>
+          <p:cNvPr id="15" name="Picture 14" descr="sello_bien.png"/>
+          <p:cNvPicPr>
+            <a:picLocks noChangeAspect="1"/>
+          </p:cNvPicPr>
+          <p:nvPr/>
+        </p:nvPicPr>
+        <p:blipFill>
+          <a:blip r:embed="rId3"/>
+          <a:stretch>
+            <a:fillRect/>
+          </a:stretch>
+        </p:blipFill>
+        <p:spPr>
+          <a:xfrm>
+            <a:off x="6365595" y="1527048"/>
+            <a:ext cx="393192" cy="393192"/>
+          </a:xfrm>
+          <a:prstGeom prst="rect">
+            <a:avLst/>
+          </a:prstGeom>
+        </p:spPr>
+      </p:pic>
+      <p:sp>
+        <p:nvSpPr>
+          <p:cNvPr id="16" name="TextBox 15"/>
           <p:cNvSpPr txBox="1"/>
           <p:nvPr/>
         </p:nvSpPr>

--- a/Introduccion a la Ingenieria/Clases/Clase 7 - Ciclo de vida de los proyectos de ingenieria/Presentacion.pptx
+++ b/Introduccion a la Ingenieria/Clases/Clase 7 - Ciclo de vida de los proyectos de ingenieria/Presentacion.pptx
@@ -8026,118 +8026,14 @@
       </p:sp>
       <p:sp>
         <p:nvSpPr>
-          <p:cNvPr id="5" name="Rounded Rectangle 4"/>
-          <p:cNvSpPr/>
-          <p:nvPr/>
-        </p:nvSpPr>
-        <p:spPr>
-          <a:xfrm>
-            <a:off x="5797149" y="1573813"/>
-            <a:ext cx="6010497" cy="4057845"/>
-          </a:xfrm>
-          <a:prstGeom prst="roundRect">
-            <a:avLst>
-              <a:gd name="adj" fmla="val 4000"/>
-            </a:avLst>
-          </a:prstGeom>
-          <a:solidFill>
-            <a:srgbClr val="E8EEF4"/>
-          </a:solidFill>
-          <a:ln>
-            <a:noFill/>
-          </a:ln>
-        </p:spPr>
-        <p:style>
-          <a:lnRef idx="1">
-            <a:schemeClr val="accent1"/>
-          </a:lnRef>
-          <a:fillRef idx="3">
-            <a:schemeClr val="accent1"/>
-          </a:fillRef>
-          <a:effectRef idx="2">
-            <a:schemeClr val="accent1"/>
-          </a:effectRef>
-          <a:fontRef idx="minor">
-            <a:schemeClr val="lt1"/>
-          </a:fontRef>
-        </p:style>
-        <p:txBody>
-          <a:bodyPr rtlCol="0" anchor="ctr"/>
-          <a:lstStyle/>
-          <a:p>
-            <a:pPr algn="ctr"/>
-          </a:p>
-        </p:txBody>
-      </p:sp>
-      <p:pic>
-        <p:nvPicPr>
-          <p:cNvPr id="6" name="Picture 5" descr="students-learning-laptops-classroom.jpg"/>
-          <p:cNvPicPr>
-            <a:picLocks noChangeAspect="1"/>
-          </p:cNvPicPr>
-          <p:nvPr/>
-        </p:nvPicPr>
-        <p:blipFill>
-          <a:blip r:embed="rId2"/>
-          <a:stretch>
-            <a:fillRect/>
-          </a:stretch>
-        </p:blipFill>
-        <p:spPr>
-          <a:xfrm>
-            <a:off x="5870301" y="1646965"/>
-            <a:ext cx="5864193" cy="3911541"/>
-          </a:xfrm>
-          <a:prstGeom prst="rect">
-            <a:avLst/>
-          </a:prstGeom>
-        </p:spPr>
-      </p:pic>
-      <p:sp>
-        <p:nvSpPr>
-          <p:cNvPr id="7" name="TextBox 6"/>
+          <p:cNvPr id="5" name="TextBox 4"/>
           <p:cNvSpPr txBox="1"/>
           <p:nvPr/>
         </p:nvSpPr>
         <p:spPr>
           <a:xfrm>
-            <a:off x="5870301" y="5961888"/>
-            <a:ext cx="5864193" cy="320040"/>
-          </a:xfrm>
-          <a:prstGeom prst="rect">
-            <a:avLst/>
-          </a:prstGeom>
-          <a:noFill/>
-        </p:spPr>
-        <p:txBody>
-          <a:bodyPr wrap="square">
-            <a:spAutoFit/>
-          </a:bodyPr>
-          <a:lstStyle/>
-          <a:p>
-            <a:pPr algn="ctr"/>
-            <a:r>
-              <a:rPr sz="1100" b="0" i="1">
-                <a:solidFill>
-                  <a:srgbClr val="666666"/>
-                </a:solidFill>
-                <a:latin typeface="Calibri"/>
-              </a:rPr>
-              <a:t>Foto: Mikhail Nilov · Pexels</a:t>
-            </a:r>
-          </a:p>
-        </p:txBody>
-      </p:sp>
-      <p:sp>
-        <p:nvSpPr>
-          <p:cNvPr id="8" name="TextBox 7"/>
-          <p:cNvSpPr txBox="1"/>
-          <p:nvPr/>
-        </p:nvSpPr>
-        <p:spPr>
-          <a:xfrm>
-            <a:off x="457200" y="1353312"/>
-            <a:ext cx="5093061" cy="5047488"/>
+            <a:off x="457200" y="1170432"/>
+            <a:ext cx="11277295" cy="5230368"/>
           </a:xfrm>
           <a:prstGeom prst="rect">
             <a:avLst/>
@@ -8307,7 +8203,7 @@
       </p:sp>
       <p:sp>
         <p:nvSpPr>
-          <p:cNvPr id="9" name="TextBox 8"/>
+          <p:cNvPr id="6" name="TextBox 5"/>
           <p:cNvSpPr txBox="1"/>
           <p:nvPr/>
         </p:nvSpPr>
@@ -9536,16 +9432,16 @@
         </p:nvSpPr>
         <p:spPr>
           <a:xfrm>
-            <a:off x="5797149" y="1678969"/>
-            <a:ext cx="6010497" cy="4057845"/>
+            <a:off x="457200" y="1444752"/>
+            <a:ext cx="11277295" cy="745236"/>
           </a:xfrm>
           <a:prstGeom prst="roundRect">
             <a:avLst>
-              <a:gd name="adj" fmla="val 4000"/>
+              <a:gd name="adj" fmla="val 12000"/>
             </a:avLst>
           </a:prstGeom>
           <a:solidFill>
-            <a:srgbClr val="E8EEF4"/>
+            <a:srgbClr val="F2F2F2"/>
           </a:solidFill>
           <a:ln>
             <a:noFill/>
@@ -9573,30 +9469,51 @@
           </a:p>
         </p:txBody>
       </p:sp>
-      <p:pic>
-        <p:nvPicPr>
-          <p:cNvPr id="7" name="Picture 6" descr="small-neighborhood-grocery-store.jpg"/>
-          <p:cNvPicPr>
-            <a:picLocks noChangeAspect="1"/>
-          </p:cNvPicPr>
-          <p:nvPr/>
-        </p:nvPicPr>
-        <p:blipFill>
-          <a:blip r:embed="rId2"/>
-          <a:stretch>
-            <a:fillRect/>
-          </a:stretch>
-        </p:blipFill>
-        <p:spPr>
-          <a:xfrm>
-            <a:off x="5870301" y="1752121"/>
-            <a:ext cx="5864193" cy="3911541"/>
-          </a:xfrm>
-          <a:prstGeom prst="rect">
-            <a:avLst/>
-          </a:prstGeom>
-        </p:spPr>
-      </p:pic>
+      <p:sp>
+        <p:nvSpPr>
+          <p:cNvPr id="7" name="Rounded Rectangle 6"/>
+          <p:cNvSpPr/>
+          <p:nvPr/>
+        </p:nvSpPr>
+        <p:spPr>
+          <a:xfrm>
+            <a:off x="594360" y="1597914"/>
+            <a:ext cx="438912" cy="438912"/>
+          </a:xfrm>
+          <a:prstGeom prst="roundRect">
+            <a:avLst>
+              <a:gd name="adj" fmla="val 12000"/>
+            </a:avLst>
+          </a:prstGeom>
+          <a:solidFill>
+            <a:srgbClr val="095292"/>
+          </a:solidFill>
+          <a:ln>
+            <a:noFill/>
+          </a:ln>
+        </p:spPr>
+        <p:style>
+          <a:lnRef idx="1">
+            <a:schemeClr val="accent1"/>
+          </a:lnRef>
+          <a:fillRef idx="3">
+            <a:schemeClr val="accent1"/>
+          </a:fillRef>
+          <a:effectRef idx="2">
+            <a:schemeClr val="accent1"/>
+          </a:effectRef>
+          <a:fontRef idx="minor">
+            <a:schemeClr val="lt1"/>
+          </a:fontRef>
+        </p:style>
+        <p:txBody>
+          <a:bodyPr rtlCol="0" anchor="ctr"/>
+          <a:lstStyle/>
+          <a:p>
+            <a:pPr algn="ctr"/>
+          </a:p>
+        </p:txBody>
+      </p:sp>
       <p:sp>
         <p:nvSpPr>
           <p:cNvPr id="8" name="TextBox 7"/>
@@ -9605,8 +9522,8 @@
         </p:nvSpPr>
         <p:spPr>
           <a:xfrm>
-            <a:off x="5870301" y="5961888"/>
-            <a:ext cx="5864193" cy="320040"/>
+            <a:off x="594360" y="1597914"/>
+            <a:ext cx="438912" cy="438912"/>
           </a:xfrm>
           <a:prstGeom prst="rect">
             <a:avLst/>
@@ -9614,20 +9531,18 @@
           <a:noFill/>
         </p:spPr>
         <p:txBody>
-          <a:bodyPr wrap="square">
-            <a:spAutoFit/>
-          </a:bodyPr>
+          <a:bodyPr wrap="square" anchor="ctr"/>
           <a:lstStyle/>
           <a:p>
             <a:pPr algn="ctr"/>
             <a:r>
-              <a:rPr sz="1100" b="0" i="1">
-                <a:solidFill>
-                  <a:srgbClr val="666666"/>
-                </a:solidFill>
-                <a:latin typeface="Calibri"/>
-              </a:rPr>
-              <a:t>Foto: Joaquin Carfagna · Pexels</a:t>
+              <a:rPr sz="1600" b="1" i="0">
+                <a:solidFill>
+                  <a:srgbClr val="FFFFFF"/>
+                </a:solidFill>
+                <a:latin typeface="Calibri"/>
+              </a:rPr>
+              <a:t>1</a:t>
             </a:r>
           </a:p>
         </p:txBody>
@@ -9640,8 +9555,8 @@
         </p:nvSpPr>
         <p:spPr>
           <a:xfrm>
-            <a:off x="457200" y="1563624"/>
-            <a:ext cx="5093061" cy="4837176"/>
+            <a:off x="1188720" y="1536192"/>
+            <a:ext cx="10271455" cy="580644"/>
           </a:xfrm>
           <a:prstGeom prst="rect">
             <a:avLst/>
@@ -9649,151 +9564,895 @@
           <a:noFill/>
         </p:spPr>
         <p:txBody>
-          <a:bodyPr wrap="square">
-            <a:spAutoFit/>
-          </a:bodyPr>
-          <a:lstStyle/>
+          <a:bodyPr wrap="square" anchor="ctr"/>
+          <a:lstStyle/>
+          <a:p>
+            <a:r>
+              <a:rPr sz="1500" b="1" i="0">
+                <a:solidFill>
+                  <a:srgbClr val="095292"/>
+                </a:solidFill>
+                <a:latin typeface="Calibri"/>
+              </a:rPr>
+              <a:t>DEFINICIÓN</a:t>
+            </a:r>
+          </a:p>
           <a:p>
             <a:pPr>
-              <a:spcAft>
-                <a:spcPts val="800"/>
-              </a:spcAft>
+              <a:spcBef>
+                <a:spcPts val="200"/>
+              </a:spcBef>
             </a:pPr>
             <a:r>
-              <a:rPr sz="2000" b="0" i="0">
+              <a:rPr sz="1300" b="0" i="0">
                 <a:solidFill>
                   <a:srgbClr val="333333"/>
                 </a:solidFill>
                 <a:latin typeface="Calibri"/>
               </a:rPr>
-              <a:t>–   </a:t>
-            </a:r>
-            <a:r>
-              <a:rPr sz="2000" b="1" i="0">
+              <a:t>Los clientes esperan de pie 25 minutos sin saber cuántos van antes.</a:t>
+            </a:r>
+          </a:p>
+        </p:txBody>
+      </p:sp>
+      <p:sp>
+        <p:nvSpPr>
+          <p:cNvPr id="10" name="Rounded Rectangle 9"/>
+          <p:cNvSpPr/>
+          <p:nvPr/>
+        </p:nvSpPr>
+        <p:spPr>
+          <a:xfrm>
+            <a:off x="457200" y="2281428"/>
+            <a:ext cx="11277295" cy="745236"/>
+          </a:xfrm>
+          <a:prstGeom prst="roundRect">
+            <a:avLst>
+              <a:gd name="adj" fmla="val 12000"/>
+            </a:avLst>
+          </a:prstGeom>
+          <a:solidFill>
+            <a:srgbClr val="E8F4FA"/>
+          </a:solidFill>
+          <a:ln>
+            <a:noFill/>
+          </a:ln>
+        </p:spPr>
+        <p:style>
+          <a:lnRef idx="1">
+            <a:schemeClr val="accent1"/>
+          </a:lnRef>
+          <a:fillRef idx="3">
+            <a:schemeClr val="accent1"/>
+          </a:fillRef>
+          <a:effectRef idx="2">
+            <a:schemeClr val="accent1"/>
+          </a:effectRef>
+          <a:fontRef idx="minor">
+            <a:schemeClr val="lt1"/>
+          </a:fontRef>
+        </p:style>
+        <p:txBody>
+          <a:bodyPr rtlCol="0" anchor="ctr"/>
+          <a:lstStyle/>
+          <a:p>
+            <a:pPr algn="ctr"/>
+          </a:p>
+        </p:txBody>
+      </p:sp>
+      <p:sp>
+        <p:nvSpPr>
+          <p:cNvPr id="11" name="Rounded Rectangle 10"/>
+          <p:cNvSpPr/>
+          <p:nvPr/>
+        </p:nvSpPr>
+        <p:spPr>
+          <a:xfrm>
+            <a:off x="594360" y="2434590"/>
+            <a:ext cx="438912" cy="438912"/>
+          </a:xfrm>
+          <a:prstGeom prst="roundRect">
+            <a:avLst>
+              <a:gd name="adj" fmla="val 12000"/>
+            </a:avLst>
+          </a:prstGeom>
+          <a:solidFill>
+            <a:srgbClr val="095292"/>
+          </a:solidFill>
+          <a:ln>
+            <a:noFill/>
+          </a:ln>
+        </p:spPr>
+        <p:style>
+          <a:lnRef idx="1">
+            <a:schemeClr val="accent1"/>
+          </a:lnRef>
+          <a:fillRef idx="3">
+            <a:schemeClr val="accent1"/>
+          </a:fillRef>
+          <a:effectRef idx="2">
+            <a:schemeClr val="accent1"/>
+          </a:effectRef>
+          <a:fontRef idx="minor">
+            <a:schemeClr val="lt1"/>
+          </a:fontRef>
+        </p:style>
+        <p:txBody>
+          <a:bodyPr rtlCol="0" anchor="ctr"/>
+          <a:lstStyle/>
+          <a:p>
+            <a:pPr algn="ctr"/>
+          </a:p>
+        </p:txBody>
+      </p:sp>
+      <p:sp>
+        <p:nvSpPr>
+          <p:cNvPr id="12" name="TextBox 11"/>
+          <p:cNvSpPr txBox="1"/>
+          <p:nvPr/>
+        </p:nvSpPr>
+        <p:spPr>
+          <a:xfrm>
+            <a:off x="594360" y="2434590"/>
+            <a:ext cx="438912" cy="438912"/>
+          </a:xfrm>
+          <a:prstGeom prst="rect">
+            <a:avLst/>
+          </a:prstGeom>
+          <a:noFill/>
+        </p:spPr>
+        <p:txBody>
+          <a:bodyPr wrap="square" anchor="ctr"/>
+          <a:lstStyle/>
+          <a:p>
+            <a:pPr algn="ctr"/>
+            <a:r>
+              <a:rPr sz="1600" b="1" i="0">
+                <a:solidFill>
+                  <a:srgbClr val="FFFFFF"/>
+                </a:solidFill>
+                <a:latin typeface="Calibri"/>
+              </a:rPr>
+              <a:t>2</a:t>
+            </a:r>
+          </a:p>
+        </p:txBody>
+      </p:sp>
+      <p:sp>
+        <p:nvSpPr>
+          <p:cNvPr id="13" name="TextBox 12"/>
+          <p:cNvSpPr txBox="1"/>
+          <p:nvPr/>
+        </p:nvSpPr>
+        <p:spPr>
+          <a:xfrm>
+            <a:off x="1188720" y="2372868"/>
+            <a:ext cx="10271455" cy="580644"/>
+          </a:xfrm>
+          <a:prstGeom prst="rect">
+            <a:avLst/>
+          </a:prstGeom>
+          <a:noFill/>
+        </p:spPr>
+        <p:txBody>
+          <a:bodyPr wrap="square" anchor="ctr"/>
+          <a:lstStyle/>
+          <a:p>
+            <a:r>
+              <a:rPr sz="1500" b="1" i="0">
+                <a:solidFill>
+                  <a:srgbClr val="095292"/>
+                </a:solidFill>
+                <a:latin typeface="Calibri"/>
+              </a:rPr>
+              <a:t>REQUISITOS</a:t>
+            </a:r>
+          </a:p>
+          <a:p>
+            <a:pPr>
+              <a:spcBef>
+                <a:spcPts val="200"/>
+              </a:spcBef>
+            </a:pPr>
+            <a:r>
+              <a:rPr sz="1300" b="0" i="0">
                 <a:solidFill>
                   <a:srgbClr val="333333"/>
                 </a:solidFill>
                 <a:latin typeface="Calibri"/>
               </a:rPr>
-              <a:t>DEFINICIÓN:</a:t>
-            </a:r>
-            <a:r>
-              <a:rPr sz="2000" b="0" i="0">
+              <a:t>El cliente ve su turno en el celular. Criterio: lo encuentra en menos de 1 minuto.</a:t>
+            </a:r>
+          </a:p>
+        </p:txBody>
+      </p:sp>
+      <p:sp>
+        <p:nvSpPr>
+          <p:cNvPr id="14" name="Rounded Rectangle 13"/>
+          <p:cNvSpPr/>
+          <p:nvPr/>
+        </p:nvSpPr>
+        <p:spPr>
+          <a:xfrm>
+            <a:off x="457200" y="3118104"/>
+            <a:ext cx="11277295" cy="745236"/>
+          </a:xfrm>
+          <a:prstGeom prst="roundRect">
+            <a:avLst>
+              <a:gd name="adj" fmla="val 12000"/>
+            </a:avLst>
+          </a:prstGeom>
+          <a:solidFill>
+            <a:srgbClr val="F2F2F2"/>
+          </a:solidFill>
+          <a:ln>
+            <a:noFill/>
+          </a:ln>
+        </p:spPr>
+        <p:style>
+          <a:lnRef idx="1">
+            <a:schemeClr val="accent1"/>
+          </a:lnRef>
+          <a:fillRef idx="3">
+            <a:schemeClr val="accent1"/>
+          </a:fillRef>
+          <a:effectRef idx="2">
+            <a:schemeClr val="accent1"/>
+          </a:effectRef>
+          <a:fontRef idx="minor">
+            <a:schemeClr val="lt1"/>
+          </a:fontRef>
+        </p:style>
+        <p:txBody>
+          <a:bodyPr rtlCol="0" anchor="ctr"/>
+          <a:lstStyle/>
+          <a:p>
+            <a:pPr algn="ctr"/>
+          </a:p>
+        </p:txBody>
+      </p:sp>
+      <p:sp>
+        <p:nvSpPr>
+          <p:cNvPr id="15" name="Rounded Rectangle 14"/>
+          <p:cNvSpPr/>
+          <p:nvPr/>
+        </p:nvSpPr>
+        <p:spPr>
+          <a:xfrm>
+            <a:off x="594360" y="3271266"/>
+            <a:ext cx="438912" cy="438912"/>
+          </a:xfrm>
+          <a:prstGeom prst="roundRect">
+            <a:avLst>
+              <a:gd name="adj" fmla="val 12000"/>
+            </a:avLst>
+          </a:prstGeom>
+          <a:solidFill>
+            <a:srgbClr val="095292"/>
+          </a:solidFill>
+          <a:ln>
+            <a:noFill/>
+          </a:ln>
+        </p:spPr>
+        <p:style>
+          <a:lnRef idx="1">
+            <a:schemeClr val="accent1"/>
+          </a:lnRef>
+          <a:fillRef idx="3">
+            <a:schemeClr val="accent1"/>
+          </a:fillRef>
+          <a:effectRef idx="2">
+            <a:schemeClr val="accent1"/>
+          </a:effectRef>
+          <a:fontRef idx="minor">
+            <a:schemeClr val="lt1"/>
+          </a:fontRef>
+        </p:style>
+        <p:txBody>
+          <a:bodyPr rtlCol="0" anchor="ctr"/>
+          <a:lstStyle/>
+          <a:p>
+            <a:pPr algn="ctr"/>
+          </a:p>
+        </p:txBody>
+      </p:sp>
+      <p:sp>
+        <p:nvSpPr>
+          <p:cNvPr id="16" name="TextBox 15"/>
+          <p:cNvSpPr txBox="1"/>
+          <p:nvPr/>
+        </p:nvSpPr>
+        <p:spPr>
+          <a:xfrm>
+            <a:off x="594360" y="3271266"/>
+            <a:ext cx="438912" cy="438912"/>
+          </a:xfrm>
+          <a:prstGeom prst="rect">
+            <a:avLst/>
+          </a:prstGeom>
+          <a:noFill/>
+        </p:spPr>
+        <p:txBody>
+          <a:bodyPr wrap="square" anchor="ctr"/>
+          <a:lstStyle/>
+          <a:p>
+            <a:pPr algn="ctr"/>
+            <a:r>
+              <a:rPr sz="1600" b="1" i="0">
+                <a:solidFill>
+                  <a:srgbClr val="FFFFFF"/>
+                </a:solidFill>
+                <a:latin typeface="Calibri"/>
+              </a:rPr>
+              <a:t>3</a:t>
+            </a:r>
+          </a:p>
+        </p:txBody>
+      </p:sp>
+      <p:sp>
+        <p:nvSpPr>
+          <p:cNvPr id="17" name="TextBox 16"/>
+          <p:cNvSpPr txBox="1"/>
+          <p:nvPr/>
+        </p:nvSpPr>
+        <p:spPr>
+          <a:xfrm>
+            <a:off x="1188720" y="3209544"/>
+            <a:ext cx="10271455" cy="580644"/>
+          </a:xfrm>
+          <a:prstGeom prst="rect">
+            <a:avLst/>
+          </a:prstGeom>
+          <a:noFill/>
+        </p:spPr>
+        <p:txBody>
+          <a:bodyPr wrap="square" anchor="ctr"/>
+          <a:lstStyle/>
+          <a:p>
+            <a:r>
+              <a:rPr sz="1500" b="1" i="0">
+                <a:solidFill>
+                  <a:srgbClr val="095292"/>
+                </a:solidFill>
+                <a:latin typeface="Calibri"/>
+              </a:rPr>
+              <a:t>DISEÑO</a:t>
+            </a:r>
+          </a:p>
+          <a:p>
+            <a:pPr>
+              <a:spcBef>
+                <a:spcPts val="200"/>
+              </a:spcBef>
+            </a:pPr>
+            <a:r>
+              <a:rPr sz="1300" b="0" i="0">
                 <a:solidFill>
                   <a:srgbClr val="333333"/>
                 </a:solidFill>
                 <a:latin typeface="Calibri"/>
               </a:rPr>
-              <a:t> Los clientes esperan de pie 25 minutos sin saber cuántos van antes.</a:t>
+              <a:t>Tres pantallas: pedir turno, ver turno, aviso de «ya casi».</a:t>
+            </a:r>
+          </a:p>
+        </p:txBody>
+      </p:sp>
+      <p:sp>
+        <p:nvSpPr>
+          <p:cNvPr id="18" name="Rounded Rectangle 17"/>
+          <p:cNvSpPr/>
+          <p:nvPr/>
+        </p:nvSpPr>
+        <p:spPr>
+          <a:xfrm>
+            <a:off x="457200" y="3954780"/>
+            <a:ext cx="11277295" cy="745236"/>
+          </a:xfrm>
+          <a:prstGeom prst="roundRect">
+            <a:avLst>
+              <a:gd name="adj" fmla="val 12000"/>
+            </a:avLst>
+          </a:prstGeom>
+          <a:solidFill>
+            <a:srgbClr val="E8F4FA"/>
+          </a:solidFill>
+          <a:ln>
+            <a:noFill/>
+          </a:ln>
+        </p:spPr>
+        <p:style>
+          <a:lnRef idx="1">
+            <a:schemeClr val="accent1"/>
+          </a:lnRef>
+          <a:fillRef idx="3">
+            <a:schemeClr val="accent1"/>
+          </a:fillRef>
+          <a:effectRef idx="2">
+            <a:schemeClr val="accent1"/>
+          </a:effectRef>
+          <a:fontRef idx="minor">
+            <a:schemeClr val="lt1"/>
+          </a:fontRef>
+        </p:style>
+        <p:txBody>
+          <a:bodyPr rtlCol="0" anchor="ctr"/>
+          <a:lstStyle/>
+          <a:p>
+            <a:pPr algn="ctr"/>
+          </a:p>
+        </p:txBody>
+      </p:sp>
+      <p:sp>
+        <p:nvSpPr>
+          <p:cNvPr id="19" name="Rounded Rectangle 18"/>
+          <p:cNvSpPr/>
+          <p:nvPr/>
+        </p:nvSpPr>
+        <p:spPr>
+          <a:xfrm>
+            <a:off x="594360" y="4107942"/>
+            <a:ext cx="438912" cy="438912"/>
+          </a:xfrm>
+          <a:prstGeom prst="roundRect">
+            <a:avLst>
+              <a:gd name="adj" fmla="val 12000"/>
+            </a:avLst>
+          </a:prstGeom>
+          <a:solidFill>
+            <a:srgbClr val="095292"/>
+          </a:solidFill>
+          <a:ln>
+            <a:noFill/>
+          </a:ln>
+        </p:spPr>
+        <p:style>
+          <a:lnRef idx="1">
+            <a:schemeClr val="accent1"/>
+          </a:lnRef>
+          <a:fillRef idx="3">
+            <a:schemeClr val="accent1"/>
+          </a:fillRef>
+          <a:effectRef idx="2">
+            <a:schemeClr val="accent1"/>
+          </a:effectRef>
+          <a:fontRef idx="minor">
+            <a:schemeClr val="lt1"/>
+          </a:fontRef>
+        </p:style>
+        <p:txBody>
+          <a:bodyPr rtlCol="0" anchor="ctr"/>
+          <a:lstStyle/>
+          <a:p>
+            <a:pPr algn="ctr"/>
+          </a:p>
+        </p:txBody>
+      </p:sp>
+      <p:sp>
+        <p:nvSpPr>
+          <p:cNvPr id="20" name="TextBox 19"/>
+          <p:cNvSpPr txBox="1"/>
+          <p:nvPr/>
+        </p:nvSpPr>
+        <p:spPr>
+          <a:xfrm>
+            <a:off x="594360" y="4107942"/>
+            <a:ext cx="438912" cy="438912"/>
+          </a:xfrm>
+          <a:prstGeom prst="rect">
+            <a:avLst/>
+          </a:prstGeom>
+          <a:noFill/>
+        </p:spPr>
+        <p:txBody>
+          <a:bodyPr wrap="square" anchor="ctr"/>
+          <a:lstStyle/>
+          <a:p>
+            <a:pPr algn="ctr"/>
+            <a:r>
+              <a:rPr sz="1600" b="1" i="0">
+                <a:solidFill>
+                  <a:srgbClr val="FFFFFF"/>
+                </a:solidFill>
+                <a:latin typeface="Calibri"/>
+              </a:rPr>
+              <a:t>4</a:t>
+            </a:r>
+          </a:p>
+        </p:txBody>
+      </p:sp>
+      <p:sp>
+        <p:nvSpPr>
+          <p:cNvPr id="21" name="TextBox 20"/>
+          <p:cNvSpPr txBox="1"/>
+          <p:nvPr/>
+        </p:nvSpPr>
+        <p:spPr>
+          <a:xfrm>
+            <a:off x="1188720" y="4046220"/>
+            <a:ext cx="10271455" cy="580644"/>
+          </a:xfrm>
+          <a:prstGeom prst="rect">
+            <a:avLst/>
+          </a:prstGeom>
+          <a:noFill/>
+        </p:spPr>
+        <p:txBody>
+          <a:bodyPr wrap="square" anchor="ctr"/>
+          <a:lstStyle/>
+          <a:p>
+            <a:r>
+              <a:rPr sz="1500" b="1" i="0">
+                <a:solidFill>
+                  <a:srgbClr val="095292"/>
+                </a:solidFill>
+                <a:latin typeface="Calibri"/>
+              </a:rPr>
+              <a:t>CONSTRUCCIÓN</a:t>
             </a:r>
           </a:p>
           <a:p>
             <a:pPr>
-              <a:spcAft>
-                <a:spcPts val="800"/>
-              </a:spcAft>
+              <a:spcBef>
+                <a:spcPts val="200"/>
+              </a:spcBef>
             </a:pPr>
             <a:r>
-              <a:rPr sz="2000" b="0" i="0">
+              <a:rPr sz="1300" b="0" i="0">
                 <a:solidFill>
                   <a:srgbClr val="333333"/>
                 </a:solidFill>
                 <a:latin typeface="Calibri"/>
               </a:rPr>
-              <a:t>–   </a:t>
-            </a:r>
-            <a:r>
-              <a:rPr sz="2000" b="1" i="0">
+              <a:t>Se arma la versión mínima con un formulario y una hoja de cálculo.</a:t>
+            </a:r>
+          </a:p>
+        </p:txBody>
+      </p:sp>
+      <p:sp>
+        <p:nvSpPr>
+          <p:cNvPr id="22" name="Rounded Rectangle 21"/>
+          <p:cNvSpPr/>
+          <p:nvPr/>
+        </p:nvSpPr>
+        <p:spPr>
+          <a:xfrm>
+            <a:off x="457200" y="4791456"/>
+            <a:ext cx="11277295" cy="745236"/>
+          </a:xfrm>
+          <a:prstGeom prst="roundRect">
+            <a:avLst>
+              <a:gd name="adj" fmla="val 12000"/>
+            </a:avLst>
+          </a:prstGeom>
+          <a:solidFill>
+            <a:srgbClr val="F2F2F2"/>
+          </a:solidFill>
+          <a:ln>
+            <a:noFill/>
+          </a:ln>
+        </p:spPr>
+        <p:style>
+          <a:lnRef idx="1">
+            <a:schemeClr val="accent1"/>
+          </a:lnRef>
+          <a:fillRef idx="3">
+            <a:schemeClr val="accent1"/>
+          </a:fillRef>
+          <a:effectRef idx="2">
+            <a:schemeClr val="accent1"/>
+          </a:effectRef>
+          <a:fontRef idx="minor">
+            <a:schemeClr val="lt1"/>
+          </a:fontRef>
+        </p:style>
+        <p:txBody>
+          <a:bodyPr rtlCol="0" anchor="ctr"/>
+          <a:lstStyle/>
+          <a:p>
+            <a:pPr algn="ctr"/>
+          </a:p>
+        </p:txBody>
+      </p:sp>
+      <p:sp>
+        <p:nvSpPr>
+          <p:cNvPr id="23" name="Rounded Rectangle 22"/>
+          <p:cNvSpPr/>
+          <p:nvPr/>
+        </p:nvSpPr>
+        <p:spPr>
+          <a:xfrm>
+            <a:off x="594360" y="4944618"/>
+            <a:ext cx="438912" cy="438912"/>
+          </a:xfrm>
+          <a:prstGeom prst="roundRect">
+            <a:avLst>
+              <a:gd name="adj" fmla="val 12000"/>
+            </a:avLst>
+          </a:prstGeom>
+          <a:solidFill>
+            <a:srgbClr val="095292"/>
+          </a:solidFill>
+          <a:ln>
+            <a:noFill/>
+          </a:ln>
+        </p:spPr>
+        <p:style>
+          <a:lnRef idx="1">
+            <a:schemeClr val="accent1"/>
+          </a:lnRef>
+          <a:fillRef idx="3">
+            <a:schemeClr val="accent1"/>
+          </a:fillRef>
+          <a:effectRef idx="2">
+            <a:schemeClr val="accent1"/>
+          </a:effectRef>
+          <a:fontRef idx="minor">
+            <a:schemeClr val="lt1"/>
+          </a:fontRef>
+        </p:style>
+        <p:txBody>
+          <a:bodyPr rtlCol="0" anchor="ctr"/>
+          <a:lstStyle/>
+          <a:p>
+            <a:pPr algn="ctr"/>
+          </a:p>
+        </p:txBody>
+      </p:sp>
+      <p:sp>
+        <p:nvSpPr>
+          <p:cNvPr id="24" name="TextBox 23"/>
+          <p:cNvSpPr txBox="1"/>
+          <p:nvPr/>
+        </p:nvSpPr>
+        <p:spPr>
+          <a:xfrm>
+            <a:off x="594360" y="4944618"/>
+            <a:ext cx="438912" cy="438912"/>
+          </a:xfrm>
+          <a:prstGeom prst="rect">
+            <a:avLst/>
+          </a:prstGeom>
+          <a:noFill/>
+        </p:spPr>
+        <p:txBody>
+          <a:bodyPr wrap="square" anchor="ctr"/>
+          <a:lstStyle/>
+          <a:p>
+            <a:pPr algn="ctr"/>
+            <a:r>
+              <a:rPr sz="1600" b="1" i="0">
+                <a:solidFill>
+                  <a:srgbClr val="FFFFFF"/>
+                </a:solidFill>
+                <a:latin typeface="Calibri"/>
+              </a:rPr>
+              <a:t>5</a:t>
+            </a:r>
+          </a:p>
+        </p:txBody>
+      </p:sp>
+      <p:sp>
+        <p:nvSpPr>
+          <p:cNvPr id="25" name="TextBox 24"/>
+          <p:cNvSpPr txBox="1"/>
+          <p:nvPr/>
+        </p:nvSpPr>
+        <p:spPr>
+          <a:xfrm>
+            <a:off x="1188720" y="4882896"/>
+            <a:ext cx="10271455" cy="580644"/>
+          </a:xfrm>
+          <a:prstGeom prst="rect">
+            <a:avLst/>
+          </a:prstGeom>
+          <a:noFill/>
+        </p:spPr>
+        <p:txBody>
+          <a:bodyPr wrap="square" anchor="ctr"/>
+          <a:lstStyle/>
+          <a:p>
+            <a:r>
+              <a:rPr sz="1500" b="1" i="0">
+                <a:solidFill>
+                  <a:srgbClr val="095292"/>
+                </a:solidFill>
+                <a:latin typeface="Calibri"/>
+              </a:rPr>
+              <a:t>VALIDACIÓN</a:t>
+            </a:r>
+          </a:p>
+          <a:p>
+            <a:pPr>
+              <a:spcBef>
+                <a:spcPts val="200"/>
+              </a:spcBef>
+            </a:pPr>
+            <a:r>
+              <a:rPr sz="1300" b="0" i="0">
                 <a:solidFill>
                   <a:srgbClr val="333333"/>
                 </a:solidFill>
                 <a:latin typeface="Calibri"/>
               </a:rPr>
-              <a:t>REQUISITOS:</a:t>
-            </a:r>
-            <a:r>
-              <a:rPr sz="2000" b="0" i="0">
+              <a:t>Cinco clientes reales la prueban un sábado; se mide el tiempo.</a:t>
+            </a:r>
+          </a:p>
+        </p:txBody>
+      </p:sp>
+      <p:sp>
+        <p:nvSpPr>
+          <p:cNvPr id="26" name="Rounded Rectangle 25"/>
+          <p:cNvSpPr/>
+          <p:nvPr/>
+        </p:nvSpPr>
+        <p:spPr>
+          <a:xfrm>
+            <a:off x="457200" y="5628132"/>
+            <a:ext cx="11277295" cy="745236"/>
+          </a:xfrm>
+          <a:prstGeom prst="roundRect">
+            <a:avLst>
+              <a:gd name="adj" fmla="val 12000"/>
+            </a:avLst>
+          </a:prstGeom>
+          <a:solidFill>
+            <a:srgbClr val="E8F4FA"/>
+          </a:solidFill>
+          <a:ln>
+            <a:noFill/>
+          </a:ln>
+        </p:spPr>
+        <p:style>
+          <a:lnRef idx="1">
+            <a:schemeClr val="accent1"/>
+          </a:lnRef>
+          <a:fillRef idx="3">
+            <a:schemeClr val="accent1"/>
+          </a:fillRef>
+          <a:effectRef idx="2">
+            <a:schemeClr val="accent1"/>
+          </a:effectRef>
+          <a:fontRef idx="minor">
+            <a:schemeClr val="lt1"/>
+          </a:fontRef>
+        </p:style>
+        <p:txBody>
+          <a:bodyPr rtlCol="0" anchor="ctr"/>
+          <a:lstStyle/>
+          <a:p>
+            <a:pPr algn="ctr"/>
+          </a:p>
+        </p:txBody>
+      </p:sp>
+      <p:sp>
+        <p:nvSpPr>
+          <p:cNvPr id="27" name="Rounded Rectangle 26"/>
+          <p:cNvSpPr/>
+          <p:nvPr/>
+        </p:nvSpPr>
+        <p:spPr>
+          <a:xfrm>
+            <a:off x="594360" y="5781294"/>
+            <a:ext cx="438912" cy="438912"/>
+          </a:xfrm>
+          <a:prstGeom prst="roundRect">
+            <a:avLst>
+              <a:gd name="adj" fmla="val 12000"/>
+            </a:avLst>
+          </a:prstGeom>
+          <a:solidFill>
+            <a:srgbClr val="095292"/>
+          </a:solidFill>
+          <a:ln>
+            <a:noFill/>
+          </a:ln>
+        </p:spPr>
+        <p:style>
+          <a:lnRef idx="1">
+            <a:schemeClr val="accent1"/>
+          </a:lnRef>
+          <a:fillRef idx="3">
+            <a:schemeClr val="accent1"/>
+          </a:fillRef>
+          <a:effectRef idx="2">
+            <a:schemeClr val="accent1"/>
+          </a:effectRef>
+          <a:fontRef idx="minor">
+            <a:schemeClr val="lt1"/>
+          </a:fontRef>
+        </p:style>
+        <p:txBody>
+          <a:bodyPr rtlCol="0" anchor="ctr"/>
+          <a:lstStyle/>
+          <a:p>
+            <a:pPr algn="ctr"/>
+          </a:p>
+        </p:txBody>
+      </p:sp>
+      <p:sp>
+        <p:nvSpPr>
+          <p:cNvPr id="28" name="TextBox 27"/>
+          <p:cNvSpPr txBox="1"/>
+          <p:nvPr/>
+        </p:nvSpPr>
+        <p:spPr>
+          <a:xfrm>
+            <a:off x="594360" y="5781294"/>
+            <a:ext cx="438912" cy="438912"/>
+          </a:xfrm>
+          <a:prstGeom prst="rect">
+            <a:avLst/>
+          </a:prstGeom>
+          <a:noFill/>
+        </p:spPr>
+        <p:txBody>
+          <a:bodyPr wrap="square" anchor="ctr"/>
+          <a:lstStyle/>
+          <a:p>
+            <a:pPr algn="ctr"/>
+            <a:r>
+              <a:rPr sz="1600" b="1" i="0">
+                <a:solidFill>
+                  <a:srgbClr val="FFFFFF"/>
+                </a:solidFill>
+                <a:latin typeface="Calibri"/>
+              </a:rPr>
+              <a:t>6</a:t>
+            </a:r>
+          </a:p>
+        </p:txBody>
+      </p:sp>
+      <p:sp>
+        <p:nvSpPr>
+          <p:cNvPr id="29" name="TextBox 28"/>
+          <p:cNvSpPr txBox="1"/>
+          <p:nvPr/>
+        </p:nvSpPr>
+        <p:spPr>
+          <a:xfrm>
+            <a:off x="1188720" y="5719572"/>
+            <a:ext cx="10271455" cy="580644"/>
+          </a:xfrm>
+          <a:prstGeom prst="rect">
+            <a:avLst/>
+          </a:prstGeom>
+          <a:noFill/>
+        </p:spPr>
+        <p:txBody>
+          <a:bodyPr wrap="square" anchor="ctr"/>
+          <a:lstStyle/>
+          <a:p>
+            <a:r>
+              <a:rPr sz="1500" b="1" i="0">
+                <a:solidFill>
+                  <a:srgbClr val="095292"/>
+                </a:solidFill>
+                <a:latin typeface="Calibri"/>
+              </a:rPr>
+              <a:t>OPERACIÓN Y RETIRO</a:t>
+            </a:r>
+          </a:p>
+          <a:p>
+            <a:pPr>
+              <a:spcBef>
+                <a:spcPts val="200"/>
+              </a:spcBef>
+            </a:pPr>
+            <a:r>
+              <a:rPr sz="1300" b="0" i="0">
                 <a:solidFill>
                   <a:srgbClr val="333333"/>
                 </a:solidFill>
                 <a:latin typeface="Calibri"/>
               </a:rPr>
-              <a:t> El cliente ve su turno en el celular. Criterio: lo encuentra en menos de 1 minuto.</a:t>
-            </a:r>
-          </a:p>
-          <a:p>
-            <a:pPr>
-              <a:spcAft>
-                <a:spcPts val="800"/>
-              </a:spcAft>
-            </a:pPr>
-            <a:r>
-              <a:rPr sz="2000" b="0" i="0">
-                <a:solidFill>
-                  <a:srgbClr val="333333"/>
-                </a:solidFill>
-                <a:latin typeface="Calibri"/>
-              </a:rPr>
-              <a:t>–   </a:t>
-            </a:r>
-            <a:r>
-              <a:rPr sz="2000" b="1" i="0">
-                <a:solidFill>
-                  <a:srgbClr val="333333"/>
-                </a:solidFill>
-                <a:latin typeface="Calibri"/>
-              </a:rPr>
-              <a:t>DISEÑO:</a:t>
-            </a:r>
-            <a:r>
-              <a:rPr sz="2000" b="0" i="0">
-                <a:solidFill>
-                  <a:srgbClr val="333333"/>
-                </a:solidFill>
-                <a:latin typeface="Calibri"/>
-              </a:rPr>
-              <a:t> Tres pantallas: pedir turno, ver turno, aviso de «ya casi».</a:t>
-            </a:r>
-          </a:p>
-          <a:p>
-            <a:pPr>
-              <a:spcAft>
-                <a:spcPts val="800"/>
-              </a:spcAft>
-            </a:pPr>
-            <a:r>
-              <a:rPr sz="2000" b="0" i="0">
-                <a:solidFill>
-                  <a:srgbClr val="333333"/>
-                </a:solidFill>
-                <a:latin typeface="Calibri"/>
-              </a:rPr>
-              <a:t>–   </a:t>
-            </a:r>
-            <a:r>
-              <a:rPr sz="2000" b="1" i="0">
-                <a:solidFill>
-                  <a:srgbClr val="333333"/>
-                </a:solidFill>
-                <a:latin typeface="Calibri"/>
-              </a:rPr>
-              <a:t>CONSTRUCCIÓN:</a:t>
-            </a:r>
-            <a:r>
-              <a:rPr sz="2000" b="0" i="0">
-                <a:solidFill>
-                  <a:srgbClr val="333333"/>
-                </a:solidFill>
-                <a:latin typeface="Calibri"/>
-              </a:rPr>
-              <a:t> Se arma la versión mínima con un formulario y una hoja de cálculo.</a:t>
-            </a:r>
-          </a:p>
-        </p:txBody>
-      </p:sp>
-      <p:sp>
-        <p:nvSpPr>
-          <p:cNvPr id="10" name="TextBox 9"/>
+              <a:t>La tienda la usa; si se apaga, se borran los celulares guardados.</a:t>
+            </a:r>
+          </a:p>
+        </p:txBody>
+      </p:sp>
+      <p:sp>
+        <p:nvSpPr>
+          <p:cNvPr id="30" name="TextBox 29"/>
           <p:cNvSpPr txBox="1"/>
           <p:nvPr/>
         </p:nvSpPr>
